--- a/src/a2-nlp/poster/final/board-model-factory_v2.pptx
+++ b/src/a2-nlp/poster/final/board-model-factory_v2.pptx
@@ -8157,8 +8157,8 @@
         </p:nvSpPr>
         <p:spPr>
           <a:xfrm>
-            <a:off x="1399032" y="5925312"/>
-            <a:ext cx="17373600" cy="384048"/>
+            <a:off x="1399032" y="6510528"/>
+            <a:ext cx="17373600" cy="548640"/>
           </a:xfrm>
           <a:prstGeom prst="rect">
             <a:avLst/>
@@ -8166,7 +8166,7 @@
           <a:noFill/>
         </p:spPr>
         <p:txBody>
-          <a:bodyPr wrap="square" lIns="27432" tIns="27432" rIns="27432" bIns="27432" anchor="t">
+          <a:bodyPr wrap="square" lIns="27432" tIns="27432" rIns="27432" bIns="27432" anchor="ctr">
             <a:noAutofit/>
           </a:bodyPr>
           <a:lstStyle/>
@@ -8180,11 +8180,11 @@
               </a:spcAft>
             </a:pPr>
             <a:r>
-              <a:rPr sz="1400" b="0" i="0">
+              <a:rPr sz="1900" b="0" i="0">
                 <a:solidFill>
                   <a:srgbClr val="E8D3A2"/>
                 </a:solidFill>
-                <a:latin typeface="Open Sans"/>
+                <a:latin typeface="Uni Sans Book"/>
               </a:rPr>
               <a:t>Jeffrey Stall · Patrick Kwok · Leon Wan — CSED 504. This board is the machinery; the upper board is the experiment it served.</a:t>
             </a:r>
@@ -8199,8 +8199,8 @@
         </p:nvSpPr>
         <p:spPr>
           <a:xfrm>
-            <a:off x="1371600" y="8046720"/>
-            <a:ext cx="5806440" cy="1024128"/>
+            <a:off x="1371600" y="8001000"/>
+            <a:ext cx="5806440" cy="896112"/>
           </a:xfrm>
           <a:prstGeom prst="rect">
             <a:avLst/>
@@ -8222,7 +8222,7 @@
               </a:spcAft>
             </a:pPr>
             <a:r>
-              <a:rPr sz="3200" b="1" i="0">
+              <a:rPr sz="2800" b="1" i="0">
                 <a:solidFill>
                   <a:srgbClr val="32006E"/>
                 </a:solidFill>
@@ -8241,7 +8241,7 @@
         </p:nvCxnSpPr>
         <p:spPr>
           <a:xfrm>
-            <a:off x="1371600" y="9107424"/>
+            <a:off x="1371600" y="8933688"/>
             <a:ext cx="5806440" cy="0"/>
           </a:xfrm>
           <a:prstGeom prst="line">
@@ -8276,7 +8276,7 @@
         </p:nvSpPr>
         <p:spPr>
           <a:xfrm>
-            <a:off x="1371600" y="11804904"/>
+            <a:off x="1371600" y="11896343"/>
             <a:ext cx="5806440" cy="1417320"/>
           </a:xfrm>
           <a:prstGeom prst="rect">
@@ -8408,8 +8408,8 @@
         </p:nvSpPr>
         <p:spPr>
           <a:xfrm>
-            <a:off x="8001000" y="8046720"/>
-            <a:ext cx="5806440" cy="1024128"/>
+            <a:off x="8001000" y="8001000"/>
+            <a:ext cx="5806440" cy="896112"/>
           </a:xfrm>
           <a:prstGeom prst="rect">
             <a:avLst/>
@@ -8431,7 +8431,7 @@
               </a:spcAft>
             </a:pPr>
             <a:r>
-              <a:rPr sz="3200" b="1" i="0">
+              <a:rPr sz="2800" b="1" i="0">
                 <a:solidFill>
                   <a:srgbClr val="32006E"/>
                 </a:solidFill>
@@ -8450,7 +8450,7 @@
         </p:nvCxnSpPr>
         <p:spPr>
           <a:xfrm>
-            <a:off x="8001000" y="9107424"/>
+            <a:off x="8001000" y="8933688"/>
             <a:ext cx="5806440" cy="0"/>
           </a:xfrm>
           <a:prstGeom prst="line">
@@ -8479,14 +8479,14 @@
       </p:cxnSp>
       <p:sp>
         <p:nvSpPr>
-          <p:cNvPr id="11" name="Cell8_Lead"/>
+          <p:cNvPr id="11" name="Cell8_List"/>
           <p:cNvSpPr txBox="1"/>
           <p:nvPr/>
         </p:nvSpPr>
         <p:spPr>
           <a:xfrm>
-            <a:off x="8001000" y="9235440"/>
-            <a:ext cx="5806440" cy="621792"/>
+            <a:off x="8001000" y="9134856"/>
+            <a:ext cx="5806440" cy="4251959"/>
           </a:xfrm>
           <a:prstGeom prst="rect">
             <a:avLst/>
@@ -8501,92 +8501,32 @@
           <a:p>
             <a:pPr algn="l">
               <a:lnSpc>
-                <a:spcPct val="108000"/>
-              </a:lnSpc>
-              <a:spcAft>
-                <a:spcPts val="0"/>
-              </a:spcAft>
-            </a:pPr>
-            <a:r>
-              <a:rPr sz="1700" b="0" i="0">
-                <a:solidFill>
-                  <a:srgbClr val="1F1F24"/>
-                </a:solidFill>
-                <a:latin typeface="Open Sans"/>
-              </a:rPr>
-              <a:t>What has to </a:t>
-            </a:r>
-            <a:r>
-              <a:rPr sz="1700" b="1" i="0">
-                <a:solidFill>
-                  <a:srgbClr val="1F1F24"/>
-                </a:solidFill>
-                <a:latin typeface="Open Sans"/>
-              </a:rPr>
-              <a:t>fit</a:t>
-            </a:r>
-            <a:r>
-              <a:rPr sz="1700" b="0" i="0">
-                <a:solidFill>
-                  <a:srgbClr val="1F1F24"/>
-                </a:solidFill>
-                <a:latin typeface="Open Sans"/>
-              </a:rPr>
-              <a:t> is the model. Everything above that is a choice.</a:t>
-            </a:r>
-          </a:p>
-        </p:txBody>
-      </p:sp>
-      <p:sp>
-        <p:nvSpPr>
-          <p:cNvPr id="12" name="Cell8_List"/>
-          <p:cNvSpPr txBox="1"/>
-          <p:nvPr/>
-        </p:nvSpPr>
-        <p:spPr>
-          <a:xfrm>
-            <a:off x="8001000" y="9930384"/>
-            <a:ext cx="5806440" cy="3364991"/>
-          </a:xfrm>
-          <a:prstGeom prst="rect">
-            <a:avLst/>
-          </a:prstGeom>
-          <a:noFill/>
-        </p:spPr>
-        <p:txBody>
-          <a:bodyPr wrap="square" lIns="36576" tIns="36576" rIns="36576" bIns="36576" anchor="t">
-            <a:noAutofit/>
-          </a:bodyPr>
-          <a:lstStyle/>
-          <a:p>
-            <a:pPr algn="l">
-              <a:lnSpc>
-                <a:spcPct val="108000"/>
+                <a:spcPct val="102000"/>
               </a:lnSpc>
               <a:spcAft>
                 <a:spcPts val="500"/>
               </a:spcAft>
             </a:pPr>
             <a:r>
-              <a:rPr sz="1300" b="1" i="0">
-                <a:solidFill>
-                  <a:srgbClr val="1F1F24"/>
-                </a:solidFill>
-                <a:latin typeface="Open Sans"/>
-              </a:rPr>
-              <a:t>The floor is the model</a:t>
-            </a:r>
-            <a:r>
-              <a:rPr sz="1300" b="0" i="0">
-                <a:solidFill>
-                  <a:srgbClr val="1F1F24"/>
-                </a:solidFill>
-                <a:latin typeface="Open Sans"/>
-              </a:rPr>
-              <a:t> — weights, gradients, optimizer state: 12–16 bytes a parameter. Our 98M: </a:t>
-            </a:r>
-            <a:r>
-              <a:rPr sz="1300" b="1" i="0">
+              <a:rPr sz="1700" b="1" i="0">
+                <a:solidFill>
+                  <a:srgbClr val="1F1F24"/>
+                </a:solidFill>
+                <a:latin typeface="Open Sans"/>
+              </a:rPr>
+              <a:t>What has to fit is the model</a:t>
+            </a:r>
+            <a:r>
+              <a:rPr sz="1700" b="0" i="0">
+                <a:solidFill>
+                  <a:srgbClr val="1F1F24"/>
+                </a:solidFill>
+                <a:latin typeface="Open Sans"/>
+              </a:rPr>
+              <a:t> — 12–16 bytes a parameter. Our 98M: </a:t>
+            </a:r>
+            <a:r>
+              <a:rPr sz="1700" b="1" i="0">
                 <a:solidFill>
                   <a:srgbClr val="1F1F24"/>
                 </a:solidFill>
@@ -8595,16 +8535,16 @@
               <a:t>1.6 GB</a:t>
             </a:r>
             <a:r>
-              <a:rPr sz="1300" b="0" i="0">
-                <a:solidFill>
-                  <a:srgbClr val="1F1F24"/>
-                </a:solidFill>
-                <a:latin typeface="Open Sans"/>
-              </a:rPr>
-              <a:t>. A 7B model: </a:t>
-            </a:r>
-            <a:r>
-              <a:rPr sz="1300" b="1" i="0">
+              <a:rPr sz="1700" b="0" i="0">
+                <a:solidFill>
+                  <a:srgbClr val="1F1F24"/>
+                </a:solidFill>
+                <a:latin typeface="Open Sans"/>
+              </a:rPr>
+              <a:t>. A 7B: </a:t>
+            </a:r>
+            <a:r>
+              <a:rPr sz="1700" b="1" i="0">
                 <a:solidFill>
                   <a:srgbClr val="1F1F24"/>
                 </a:solidFill>
@@ -8613,53 +8553,44 @@
               <a:t>84–112 GB</a:t>
             </a:r>
             <a:r>
-              <a:rPr sz="1300" b="0" i="0">
-                <a:solidFill>
-                  <a:srgbClr val="1F1F24"/>
-                </a:solidFill>
-                <a:latin typeface="Open Sans"/>
-              </a:rPr>
-              <a:t>, which no consumer card has. </a:t>
-            </a:r>
-            <a:r>
-              <a:rPr sz="1300" b="0" i="1">
-                <a:solidFill>
-                  <a:srgbClr val="1F1F24"/>
-                </a:solidFill>
-                <a:latin typeface="Open Sans"/>
-              </a:rPr>
-              <a:t>(arithmetic)</a:t>
+              <a:rPr sz="1700" b="0" i="0">
+                <a:solidFill>
+                  <a:srgbClr val="1F1F24"/>
+                </a:solidFill>
+                <a:latin typeface="Open Sans"/>
+              </a:rPr>
+              <a:t> — no consumer card.</a:t>
             </a:r>
           </a:p>
           <a:p>
             <a:pPr algn="l">
               <a:lnSpc>
-                <a:spcPct val="108000"/>
+                <a:spcPct val="102000"/>
               </a:lnSpc>
               <a:spcAft>
                 <a:spcPts val="500"/>
               </a:spcAft>
             </a:pPr>
             <a:r>
-              <a:rPr sz="1300" b="1" i="0">
-                <a:solidFill>
-                  <a:srgbClr val="1F1F24"/>
-                </a:solidFill>
-                <a:latin typeface="Open Sans"/>
-              </a:rPr>
-              <a:t>Everything above it is batch, and batch is optional.</a:t>
-            </a:r>
-            <a:r>
-              <a:rPr sz="1300" b="0" i="0">
-                <a:solidFill>
-                  <a:srgbClr val="1F1F24"/>
-                </a:solidFill>
-                <a:latin typeface="Open Sans"/>
-              </a:rPr>
-              <a:t> Accumulation runs a 16,384-token step as smaller passes — same update, </a:t>
-            </a:r>
-            <a:r>
-              <a:rPr sz="1300" b="1" i="0">
+              <a:rPr sz="1700" b="1" i="0">
+                <a:solidFill>
+                  <a:srgbClr val="1F1F24"/>
+                </a:solidFill>
+                <a:latin typeface="Open Sans"/>
+              </a:rPr>
+              <a:t>Everything above the floor is batch, and batch is optional.</a:t>
+            </a:r>
+            <a:r>
+              <a:rPr sz="1700" b="0" i="0">
+                <a:solidFill>
+                  <a:srgbClr val="1F1F24"/>
+                </a:solidFill>
+                <a:latin typeface="Open Sans"/>
+              </a:rPr>
+              <a:t> Accumulation runs a big step as smaller passes — same update, </a:t>
+            </a:r>
+            <a:r>
+              <a:rPr sz="1700" b="1" i="0">
                 <a:solidFill>
                   <a:srgbClr val="1F1F24"/>
                 </a:solidFill>
@@ -8668,26 +8599,26 @@
               <a:t>within 2%</a:t>
             </a:r>
             <a:r>
-              <a:rPr sz="1300" b="0" i="0">
-                <a:solidFill>
-                  <a:srgbClr val="1F1F24"/>
-                </a:solidFill>
-                <a:latin typeface="Open Sans"/>
-              </a:rPr>
-              <a:t> of the cost.</a:t>
+              <a:rPr sz="1700" b="0" i="0">
+                <a:solidFill>
+                  <a:srgbClr val="1F1F24"/>
+                </a:solidFill>
+                <a:latin typeface="Open Sans"/>
+              </a:rPr>
+              <a:t>.</a:t>
             </a:r>
           </a:p>
           <a:p>
             <a:pPr algn="l">
               <a:lnSpc>
-                <a:spcPct val="108000"/>
+                <a:spcPct val="102000"/>
               </a:lnSpc>
               <a:spcAft>
                 <a:spcPts val="500"/>
               </a:spcAft>
             </a:pPr>
             <a:r>
-              <a:rPr sz="1300" b="1" i="0">
+              <a:rPr sz="1700" b="1" i="0">
                 <a:solidFill>
                   <a:srgbClr val="1F1F24"/>
                 </a:solidFill>
@@ -8696,7 +8627,7 @@
               <a:t>So an 8 GB laptop trains the step a 96 GB card trains.</a:t>
             </a:r>
             <a:r>
-              <a:rPr sz="1300" b="0" i="0">
+              <a:rPr sz="1700" b="0" i="0">
                 <a:solidFill>
                   <a:srgbClr val="1F1F24"/>
                 </a:solidFill>
@@ -8705,7 +8636,7 @@
               <a:t> A 10 GB run folds into </a:t>
             </a:r>
             <a:r>
-              <a:rPr sz="1300" b="1" i="0">
+              <a:rPr sz="1700" b="1" i="0">
                 <a:solidFill>
                   <a:srgbClr val="1F1F24"/>
                 </a:solidFill>
@@ -8714,7 +8645,7 @@
               <a:t>6.1 GB at 28,027 tok/s</a:t>
             </a:r>
             <a:r>
-              <a:rPr sz="1300" b="0" i="0">
+              <a:rPr sz="1700" b="0" i="0">
                 <a:solidFill>
                   <a:srgbClr val="1F1F24"/>
                 </a:solidFill>
@@ -8726,14 +8657,14 @@
           <a:p>
             <a:pPr algn="l">
               <a:lnSpc>
-                <a:spcPct val="108000"/>
+                <a:spcPct val="102000"/>
               </a:lnSpc>
               <a:spcAft>
                 <a:spcPts val="500"/>
               </a:spcAft>
             </a:pPr>
             <a:r>
-              <a:rPr sz="1300" b="1" i="0">
+              <a:rPr sz="1700" b="1" i="0">
                 <a:solidFill>
                   <a:srgbClr val="1F1F24"/>
                 </a:solidFill>
@@ -8742,16 +8673,16 @@
               <a:t>Nobody on the chart beside this needed 80 GB.</a:t>
             </a:r>
             <a:r>
-              <a:rPr sz="1300" b="0" i="0">
-                <a:solidFill>
-                  <a:srgbClr val="1F1F24"/>
-                </a:solidFill>
-                <a:latin typeface="Open Sans"/>
-              </a:rPr>
-              <a:t> 96, 80, 24, 16, 8 GB — all ran the same step. The A100's price buys its </a:t>
-            </a:r>
-            <a:r>
-              <a:rPr sz="1300" b="1" i="0">
+              <a:rPr sz="1700" b="0" i="0">
+                <a:solidFill>
+                  <a:srgbClr val="1F1F24"/>
+                </a:solidFill>
+                <a:latin typeface="Open Sans"/>
+              </a:rPr>
+              <a:t> 96, 80, 24, 16, 8 GB — all ran the same step. The A100 sells </a:t>
+            </a:r>
+            <a:r>
+              <a:rPr sz="1700" b="1" i="0">
                 <a:solidFill>
                   <a:srgbClr val="1F1F24"/>
                 </a:solidFill>
@@ -8760,90 +8691,26 @@
               <a:t>speed</a:t>
             </a:r>
             <a:r>
-              <a:rPr sz="1300" b="0" i="0">
-                <a:solidFill>
-                  <a:srgbClr val="1F1F24"/>
-                </a:solidFill>
-                <a:latin typeface="Open Sans"/>
-              </a:rPr>
-              <a:t>, not capacity.</a:t>
+              <a:rPr sz="1700" b="0" i="0">
+                <a:solidFill>
+                  <a:srgbClr val="1F1F24"/>
+                </a:solidFill>
+                <a:latin typeface="Open Sans"/>
+              </a:rPr>
+              <a:t>, not room.</a:t>
             </a:r>
           </a:p>
           <a:p>
             <a:pPr algn="l">
               <a:lnSpc>
-                <a:spcPct val="108000"/>
+                <a:spcPct val="102000"/>
               </a:lnSpc>
               <a:spcAft>
                 <a:spcPts val="500"/>
               </a:spcAft>
             </a:pPr>
             <a:r>
-              <a:rPr sz="1300" b="1" i="0">
-                <a:solidFill>
-                  <a:srgbClr val="1F1F24"/>
-                </a:solidFill>
-                <a:latin typeface="Open Sans"/>
-              </a:rPr>
-              <a:t>More memory does not buy speed.</a:t>
-            </a:r>
-            <a:r>
-              <a:rPr sz="1300" b="0" i="0">
-                <a:solidFill>
-                  <a:srgbClr val="1F1F24"/>
-                </a:solidFill>
-                <a:latin typeface="Open Sans"/>
-              </a:rPr>
-              <a:t> Batch 2048 uses </a:t>
-            </a:r>
-            <a:r>
-              <a:rPr sz="1300" b="1" i="0">
-                <a:solidFill>
-                  <a:srgbClr val="1F1F24"/>
-                </a:solidFill>
-                <a:latin typeface="Open Sans"/>
-              </a:rPr>
-              <a:t>89.7 GB</a:t>
-            </a:r>
-            <a:r>
-              <a:rPr sz="1300" b="0" i="0">
-                <a:solidFill>
-                  <a:srgbClr val="1F1F24"/>
-                </a:solidFill>
-                <a:latin typeface="Open Sans"/>
-              </a:rPr>
-              <a:t> and is </a:t>
-            </a:r>
-            <a:r>
-              <a:rPr sz="1300" b="0" i="1">
-                <a:solidFill>
-                  <a:srgbClr val="1F1F24"/>
-                </a:solidFill>
-                <a:latin typeface="Open Sans"/>
-              </a:rPr>
-              <a:t>slower</a:t>
-            </a:r>
-            <a:r>
-              <a:rPr sz="1300" b="0" i="0">
-                <a:solidFill>
-                  <a:srgbClr val="1F1F24"/>
-                </a:solidFill>
-                <a:latin typeface="Open Sans"/>
-              </a:rPr>
-              <a:t> than 128.</a:t>
-            </a:r>
-          </a:p>
-          <a:p>
-            <a:pPr algn="l">
-              <a:lnSpc>
-                <a:spcPct val="108000"/>
-              </a:lnSpc>
-              <a:spcAft>
-                <a:spcPts val="500"/>
-              </a:spcAft>
-            </a:pPr>
-            <a:r>
-              <a:rPr sz="1300" b="1" i="0">
+              <a:rPr sz="1700" b="1" i="0">
                 <a:solidFill>
                   <a:srgbClr val="1F1F24"/>
                 </a:solidFill>
@@ -8852,7 +8719,7 @@
               <a:t>And Windows does not warn you.</a:t>
             </a:r>
             <a:r>
-              <a:rPr sz="1300" b="0" i="0">
+              <a:rPr sz="1700" b="0" i="0">
                 <a:solidFill>
                   <a:srgbClr val="1F1F24"/>
                 </a:solidFill>
@@ -8861,36 +8728,36 @@
               <a:t> An oversized batch spills to system RAM: </a:t>
             </a:r>
             <a:r>
-              <a:rPr sz="1300" b="1" i="0">
-                <a:solidFill>
-                  <a:srgbClr val="1F1F24"/>
-                </a:solidFill>
-                <a:latin typeface="Open Sans"/>
-              </a:rPr>
-              <a:t>5,075 tok/s, no error</a:t>
-            </a:r>
-            <a:r>
-              <a:rPr sz="1300" b="0" i="0">
-                <a:solidFill>
-                  <a:srgbClr val="1F1F24"/>
-                </a:solidFill>
-                <a:latin typeface="Open Sans"/>
-              </a:rPr>
-              <a:t>.</a:t>
-            </a:r>
-          </a:p>
-        </p:txBody>
-      </p:sp>
-      <p:sp>
-        <p:nvSpPr>
-          <p:cNvPr id="13" name="Cell3_Box"/>
+              <a:rPr sz="1700" b="1" i="0">
+                <a:solidFill>
+                  <a:srgbClr val="1F1F24"/>
+                </a:solidFill>
+                <a:latin typeface="Open Sans"/>
+              </a:rPr>
+              <a:t>28,027 → 5,075 tok/s</a:t>
+            </a:r>
+            <a:r>
+              <a:rPr sz="1700" b="0" i="0">
+                <a:solidFill>
+                  <a:srgbClr val="1F1F24"/>
+                </a:solidFill>
+                <a:latin typeface="Open Sans"/>
+              </a:rPr>
+              <a:t>, no error.</a:t>
+            </a:r>
+          </a:p>
+        </p:txBody>
+      </p:sp>
+      <p:sp>
+        <p:nvSpPr>
+          <p:cNvPr id="12" name="Cell3_Box"/>
           <p:cNvSpPr/>
           <p:nvPr/>
         </p:nvSpPr>
         <p:spPr>
           <a:xfrm>
-            <a:off x="14749272" y="8046720"/>
-            <a:ext cx="5806440" cy="5303520"/>
+            <a:off x="14749272" y="8001000"/>
+            <a:ext cx="5806440" cy="5440680"/>
           </a:xfrm>
           <a:prstGeom prst="rect">
             <a:avLst/>
@@ -8927,13 +8794,13 @@
       </p:sp>
       <p:sp>
         <p:nvSpPr>
-          <p:cNvPr id="14" name="Cell3_Heading"/>
+          <p:cNvPr id="13" name="Cell3_Heading"/>
           <p:cNvSpPr txBox="1"/>
           <p:nvPr/>
         </p:nvSpPr>
         <p:spPr>
           <a:xfrm>
-            <a:off x="15023592" y="8266176"/>
+            <a:off x="15023592" y="8220456"/>
             <a:ext cx="5257800" cy="548640"/>
           </a:xfrm>
           <a:prstGeom prst="rect">
@@ -8969,14 +8836,14 @@
       </p:sp>
       <p:sp>
         <p:nvSpPr>
-          <p:cNvPr id="15" name="Cell3_Value1"/>
+          <p:cNvPr id="14" name="Cell3_Value1"/>
           <p:cNvSpPr txBox="1"/>
           <p:nvPr/>
         </p:nvSpPr>
         <p:spPr>
           <a:xfrm>
-            <a:off x="15005304" y="8942832"/>
-            <a:ext cx="1572768" cy="697992"/>
+            <a:off x="15005304" y="8897112"/>
+            <a:ext cx="1572768" cy="720852"/>
           </a:xfrm>
           <a:prstGeom prst="rect">
             <a:avLst/>
@@ -9011,14 +8878,14 @@
       </p:sp>
       <p:sp>
         <p:nvSpPr>
-          <p:cNvPr id="16" name="Cell3_Label1"/>
+          <p:cNvPr id="15" name="Cell3_Label1"/>
           <p:cNvSpPr txBox="1"/>
           <p:nvPr/>
         </p:nvSpPr>
         <p:spPr>
           <a:xfrm>
-            <a:off x="16706088" y="8942832"/>
-            <a:ext cx="3575303" cy="697992"/>
+            <a:off x="16706088" y="8897112"/>
+            <a:ext cx="3575303" cy="720852"/>
           </a:xfrm>
           <a:prstGeom prst="rect">
             <a:avLst/>
@@ -9053,14 +8920,14 @@
       </p:sp>
       <p:sp>
         <p:nvSpPr>
-          <p:cNvPr id="17" name="Cell3_Value2"/>
+          <p:cNvPr id="16" name="Cell3_Value2"/>
           <p:cNvSpPr txBox="1"/>
           <p:nvPr/>
         </p:nvSpPr>
         <p:spPr>
           <a:xfrm>
-            <a:off x="15005304" y="9640824"/>
-            <a:ext cx="1572768" cy="697992"/>
+            <a:off x="15005304" y="9617964"/>
+            <a:ext cx="1572768" cy="720852"/>
           </a:xfrm>
           <a:prstGeom prst="rect">
             <a:avLst/>
@@ -9095,14 +8962,14 @@
       </p:sp>
       <p:sp>
         <p:nvSpPr>
-          <p:cNvPr id="18" name="Cell3_Label2"/>
+          <p:cNvPr id="17" name="Cell3_Label2"/>
           <p:cNvSpPr txBox="1"/>
           <p:nvPr/>
         </p:nvSpPr>
         <p:spPr>
           <a:xfrm>
-            <a:off x="16706088" y="9640824"/>
-            <a:ext cx="3575303" cy="697992"/>
+            <a:off x="16706088" y="9617964"/>
+            <a:ext cx="3575303" cy="720852"/>
           </a:xfrm>
           <a:prstGeom prst="rect">
             <a:avLst/>
@@ -9137,14 +9004,14 @@
       </p:sp>
       <p:sp>
         <p:nvSpPr>
-          <p:cNvPr id="19" name="Cell3_Value3"/>
+          <p:cNvPr id="18" name="Cell3_Value3"/>
           <p:cNvSpPr txBox="1"/>
           <p:nvPr/>
         </p:nvSpPr>
         <p:spPr>
           <a:xfrm>
             <a:off x="15005304" y="10338816"/>
-            <a:ext cx="1572768" cy="697992"/>
+            <a:ext cx="1572768" cy="720852"/>
           </a:xfrm>
           <a:prstGeom prst="rect">
             <a:avLst/>
@@ -9179,14 +9046,14 @@
       </p:sp>
       <p:sp>
         <p:nvSpPr>
-          <p:cNvPr id="20" name="Cell3_Label3"/>
+          <p:cNvPr id="19" name="Cell3_Label3"/>
           <p:cNvSpPr txBox="1"/>
           <p:nvPr/>
         </p:nvSpPr>
         <p:spPr>
           <a:xfrm>
             <a:off x="16706088" y="10338816"/>
-            <a:ext cx="3575303" cy="697992"/>
+            <a:ext cx="3575303" cy="720852"/>
           </a:xfrm>
           <a:prstGeom prst="rect">
             <a:avLst/>
@@ -9221,14 +9088,14 @@
       </p:sp>
       <p:sp>
         <p:nvSpPr>
-          <p:cNvPr id="21" name="Cell3_Value4"/>
+          <p:cNvPr id="20" name="Cell3_Value4"/>
           <p:cNvSpPr txBox="1"/>
           <p:nvPr/>
         </p:nvSpPr>
         <p:spPr>
           <a:xfrm>
-            <a:off x="15005304" y="11036808"/>
-            <a:ext cx="1572768" cy="697992"/>
+            <a:off x="15005304" y="11059668"/>
+            <a:ext cx="1572768" cy="720852"/>
           </a:xfrm>
           <a:prstGeom prst="rect">
             <a:avLst/>
@@ -9263,14 +9130,14 @@
       </p:sp>
       <p:sp>
         <p:nvSpPr>
-          <p:cNvPr id="22" name="Cell3_Label4"/>
+          <p:cNvPr id="21" name="Cell3_Label4"/>
           <p:cNvSpPr txBox="1"/>
           <p:nvPr/>
         </p:nvSpPr>
         <p:spPr>
           <a:xfrm>
-            <a:off x="16706088" y="11036808"/>
-            <a:ext cx="3575303" cy="697992"/>
+            <a:off x="16706088" y="11059668"/>
+            <a:ext cx="3575303" cy="720852"/>
           </a:xfrm>
           <a:prstGeom prst="rect">
             <a:avLst/>
@@ -9305,14 +9172,14 @@
       </p:sp>
       <p:sp>
         <p:nvSpPr>
-          <p:cNvPr id="23" name="Cell3_Value5"/>
+          <p:cNvPr id="22" name="Cell3_Value5"/>
           <p:cNvSpPr txBox="1"/>
           <p:nvPr/>
         </p:nvSpPr>
         <p:spPr>
           <a:xfrm>
-            <a:off x="15005304" y="11734800"/>
-            <a:ext cx="1572768" cy="697992"/>
+            <a:off x="15005304" y="11780520"/>
+            <a:ext cx="1572768" cy="720852"/>
           </a:xfrm>
           <a:prstGeom prst="rect">
             <a:avLst/>
@@ -9347,14 +9214,14 @@
       </p:sp>
       <p:sp>
         <p:nvSpPr>
-          <p:cNvPr id="24" name="Cell3_Label5"/>
+          <p:cNvPr id="23" name="Cell3_Label5"/>
           <p:cNvSpPr txBox="1"/>
           <p:nvPr/>
         </p:nvSpPr>
         <p:spPr>
           <a:xfrm>
-            <a:off x="16706088" y="11734800"/>
-            <a:ext cx="3575303" cy="697992"/>
+            <a:off x="16706088" y="11780520"/>
+            <a:ext cx="3575303" cy="720852"/>
           </a:xfrm>
           <a:prstGeom prst="rect">
             <a:avLst/>
@@ -9389,14 +9256,14 @@
       </p:sp>
       <p:sp>
         <p:nvSpPr>
-          <p:cNvPr id="25" name="Cell3_Value6"/>
+          <p:cNvPr id="24" name="Cell3_Value6"/>
           <p:cNvSpPr txBox="1"/>
           <p:nvPr/>
         </p:nvSpPr>
         <p:spPr>
           <a:xfrm>
-            <a:off x="15005304" y="12432792"/>
-            <a:ext cx="1572768" cy="697992"/>
+            <a:off x="15005304" y="12501372"/>
+            <a:ext cx="1572768" cy="720852"/>
           </a:xfrm>
           <a:prstGeom prst="rect">
             <a:avLst/>
@@ -9431,14 +9298,14 @@
       </p:sp>
       <p:sp>
         <p:nvSpPr>
-          <p:cNvPr id="26" name="Cell3_Label6"/>
+          <p:cNvPr id="25" name="Cell3_Label6"/>
           <p:cNvSpPr txBox="1"/>
           <p:nvPr/>
         </p:nvSpPr>
         <p:spPr>
           <a:xfrm>
-            <a:off x="16706088" y="12432792"/>
-            <a:ext cx="3575303" cy="697992"/>
+            <a:off x="16706088" y="12501372"/>
+            <a:ext cx="3575303" cy="720852"/>
           </a:xfrm>
           <a:prstGeom prst="rect">
             <a:avLst/>
@@ -9473,14 +9340,14 @@
       </p:sp>
       <p:sp>
         <p:nvSpPr>
-          <p:cNvPr id="27" name="Cell4_Heading"/>
+          <p:cNvPr id="26" name="Cell2_Heading"/>
           <p:cNvSpPr txBox="1"/>
           <p:nvPr/>
         </p:nvSpPr>
         <p:spPr>
           <a:xfrm>
-            <a:off x="1371600" y="13533120"/>
-            <a:ext cx="12435840" cy="1024128"/>
+            <a:off x="1371600" y="13606272"/>
+            <a:ext cx="5806440" cy="896112"/>
           </a:xfrm>
           <a:prstGeom prst="rect">
             <a:avLst/>
@@ -9502,27 +9369,27 @@
               </a:spcAft>
             </a:pPr>
             <a:r>
-              <a:rPr sz="3200" b="1" i="0">
+              <a:rPr sz="2800" b="1" i="0">
                 <a:solidFill>
                   <a:srgbClr val="32006E"/>
                 </a:solidFill>
                 <a:latin typeface="Encode Sans Normal"/>
               </a:rPr>
-              <a:t>What we made faster</a:t>
+              <a:t>Budget in tokens, not epochs</a:t>
             </a:r>
           </a:p>
         </p:txBody>
       </p:sp>
       <p:cxnSp>
         <p:nvCxnSpPr>
-          <p:cNvPr id="28" name="Connector 27"/>
+          <p:cNvPr id="27" name="Connector 26"/>
           <p:cNvCxnSpPr/>
           <p:nvPr/>
         </p:nvCxnSpPr>
         <p:spPr>
           <a:xfrm>
-            <a:off x="1371600" y="14593824"/>
-            <a:ext cx="12435840" cy="0"/>
+            <a:off x="1371600" y="14538960"/>
+            <a:ext cx="5806440" cy="0"/>
           </a:xfrm>
           <a:prstGeom prst="line">
             <a:avLst/>
@@ -9550,14 +9417,14 @@
       </p:cxnSp>
       <p:sp>
         <p:nvSpPr>
-          <p:cNvPr id="29" name="Cell4_Lead"/>
+          <p:cNvPr id="28" name="Cell2_List"/>
           <p:cNvSpPr txBox="1"/>
           <p:nvPr/>
         </p:nvSpPr>
         <p:spPr>
           <a:xfrm>
-            <a:off x="1371600" y="14721840"/>
-            <a:ext cx="12435840" cy="859536"/>
+            <a:off x="1371600" y="14740128"/>
+            <a:ext cx="5806440" cy="4069080"/>
           </a:xfrm>
           <a:prstGeom prst="rect">
             <a:avLst/>
@@ -9572,10 +9439,10 @@
           <a:p>
             <a:pPr algn="l">
               <a:lnSpc>
-                <a:spcPct val="108000"/>
+                <a:spcPct val="102000"/>
               </a:lnSpc>
               <a:spcAft>
-                <a:spcPts val="0"/>
+                <a:spcPts val="500"/>
               </a:spcAft>
             </a:pPr>
             <a:r>
@@ -9585,7 +9452,7 @@
                 </a:solidFill>
                 <a:latin typeface="Open Sans"/>
               </a:rPr>
-              <a:t>2.07× on the four-cell benchmark</a:t>
+              <a:t>Epochs were right in 502–504: the dataset was fixed.</a:t>
             </a:r>
             <a:r>
               <a:rPr sz="1700" b="0" i="0">
@@ -9594,7 +9461,25 @@
                 </a:solidFill>
                 <a:latin typeface="Open Sans"/>
               </a:rPr>
-              <a:t> — only </a:t>
+              <a:t> Here it </a:t>
+            </a:r>
+            <a:r>
+              <a:rPr sz="1700" b="0" i="1">
+                <a:solidFill>
+                  <a:srgbClr val="1F1F24"/>
+                </a:solidFill>
+                <a:latin typeface="Open Sans"/>
+              </a:rPr>
+              <a:t>is</a:t>
+            </a:r>
+            <a:r>
+              <a:rPr sz="1700" b="0" i="0">
+                <a:solidFill>
+                  <a:srgbClr val="1F1F24"/>
+                </a:solidFill>
+                <a:latin typeface="Open Sans"/>
+              </a:rPr>
+              <a:t> the experiment — "40 epochs" gives one arm </a:t>
             </a:r>
             <a:r>
               <a:rPr sz="1700" b="1" i="0">
@@ -9603,7 +9488,7 @@
                 </a:solidFill>
                 <a:latin typeface="Open Sans"/>
               </a:rPr>
-              <a:t>1.32×</a:t>
+              <a:t>256×</a:t>
             </a:r>
             <a:r>
               <a:rPr sz="1700" b="0" i="0">
@@ -9612,8 +9497,18 @@
                 </a:solidFill>
                 <a:latin typeface="Open Sans"/>
               </a:rPr>
-              <a:t> of it efficiency; the rest is a second card nobody had used. </a:t>
-            </a:r>
+              <a:t>.</a:t>
+            </a:r>
+          </a:p>
+          <a:p>
+            <a:pPr algn="l">
+              <a:lnSpc>
+                <a:spcPct val="102000"/>
+              </a:lnSpc>
+              <a:spcAft>
+                <a:spcPts val="500"/>
+              </a:spcAft>
+            </a:pPr>
             <a:r>
               <a:rPr sz="1700" b="1" i="0">
                 <a:solidFill>
@@ -9621,7 +9516,7 @@
                 </a:solidFill>
                 <a:latin typeface="Open Sans"/>
               </a:rPr>
-              <a:t>A third of the twenty were rejected</a:t>
+              <a:t>So fix tokens, and let epochs fall out.</a:t>
             </a:r>
             <a:r>
               <a:rPr sz="1700" b="0" i="0">
@@ -9630,7 +9525,135 @@
                 </a:solidFill>
                 <a:latin typeface="Open Sans"/>
               </a:rPr>
-              <a:t>, and a list of only the wins would be marketing rather than a log. Every row had to make the </a:t>
+              <a:t> Every run is </a:t>
+            </a:r>
+            <a:r>
+              <a:rPr sz="1700" b="1" i="0">
+                <a:solidFill>
+                  <a:srgbClr val="1F1F24"/>
+                </a:solidFill>
+                <a:latin typeface="Open Sans"/>
+              </a:rPr>
+              <a:t>1.024B tokens</a:t>
+            </a:r>
+            <a:r>
+              <a:rPr sz="1700" b="0" i="0">
+                <a:solidFill>
+                  <a:srgbClr val="1F1F24"/>
+                </a:solidFill>
+                <a:latin typeface="Open Sans"/>
+              </a:rPr>
+              <a:t>: the 4M corpus seen </a:t>
+            </a:r>
+            <a:r>
+              <a:rPr sz="1700" b="1" i="0">
+                <a:solidFill>
+                  <a:srgbClr val="1F1F24"/>
+                </a:solidFill>
+                <a:latin typeface="Open Sans"/>
+              </a:rPr>
+              <a:t>256×</a:t>
+            </a:r>
+            <a:r>
+              <a:rPr sz="1700" b="0" i="0">
+                <a:solidFill>
+                  <a:srgbClr val="1F1F24"/>
+                </a:solidFill>
+                <a:latin typeface="Open Sans"/>
+              </a:rPr>
+              <a:t>, the 1,024M </a:t>
+            </a:r>
+            <a:r>
+              <a:rPr sz="1700" b="1" i="0">
+                <a:solidFill>
+                  <a:srgbClr val="1F1F24"/>
+                </a:solidFill>
+                <a:latin typeface="Open Sans"/>
+              </a:rPr>
+              <a:t>once</a:t>
+            </a:r>
+            <a:r>
+              <a:rPr sz="1700" b="0" i="0">
+                <a:solidFill>
+                  <a:srgbClr val="1F1F24"/>
+                </a:solidFill>
+                <a:latin typeface="Open Sans"/>
+              </a:rPr>
+              <a:t>.</a:t>
+            </a:r>
+          </a:p>
+          <a:p>
+            <a:pPr algn="l">
+              <a:lnSpc>
+                <a:spcPct val="102000"/>
+              </a:lnSpc>
+              <a:spcAft>
+                <a:spcPts val="500"/>
+              </a:spcAft>
+            </a:pPr>
+            <a:r>
+              <a:rPr sz="1700" b="1" i="0">
+                <a:solidFill>
+                  <a:srgbClr val="1F1F24"/>
+                </a:solidFill>
+                <a:latin typeface="Open Sans"/>
+              </a:rPr>
+              <a:t>Tokens ÷ tok/s = the wall clock.</a:t>
+            </a:r>
+            <a:r>
+              <a:rPr sz="1700" b="0" i="0">
+                <a:solidFill>
+                  <a:srgbClr val="1F1F24"/>
+                </a:solidFill>
+                <a:latin typeface="Open Sans"/>
+              </a:rPr>
+              <a:t> 1.024B ÷ 443k ≈ </a:t>
+            </a:r>
+            <a:r>
+              <a:rPr sz="1700" b="1" i="0">
+                <a:solidFill>
+                  <a:srgbClr val="1F1F24"/>
+                </a:solidFill>
+                <a:latin typeface="Open Sans"/>
+              </a:rPr>
+              <a:t>38 min</a:t>
+            </a:r>
+            <a:r>
+              <a:rPr sz="1700" b="0" i="0">
+                <a:solidFill>
+                  <a:srgbClr val="1F1F24"/>
+                </a:solidFill>
+                <a:latin typeface="Open Sans"/>
+              </a:rPr>
+              <a:t> — the chart's top bar.</a:t>
+            </a:r>
+          </a:p>
+          <a:p>
+            <a:pPr algn="l">
+              <a:lnSpc>
+                <a:spcPct val="102000"/>
+              </a:lnSpc>
+              <a:spcAft>
+                <a:spcPts val="500"/>
+              </a:spcAft>
+            </a:pPr>
+            <a:r>
+              <a:rPr sz="1700" b="1" i="0">
+                <a:solidFill>
+                  <a:srgbClr val="1F1F24"/>
+                </a:solidFill>
+                <a:latin typeface="Open Sans"/>
+              </a:rPr>
+              <a:t>A truncated run is a different experiment.</a:t>
+            </a:r>
+            <a:r>
+              <a:rPr sz="1700" b="0" i="0">
+                <a:solidFill>
+                  <a:srgbClr val="1F1F24"/>
+                </a:solidFill>
+                <a:latin typeface="Open Sans"/>
+              </a:rPr>
+              <a:t> The schedule anneals to zero at the </a:t>
             </a:r>
             <a:r>
               <a:rPr sz="1700" b="0" i="1">
@@ -9639,7 +9662,7 @@
                 </a:solidFill>
                 <a:latin typeface="Open Sans"/>
               </a:rPr>
-              <a:t>same</a:t>
+              <a:t>planned</a:t>
             </a:r>
             <a:r>
               <a:rPr sz="1700" b="0" i="0">
@@ -9648,21 +9671,85 @@
                 </a:solidFill>
                 <a:latin typeface="Open Sans"/>
               </a:rPr>
-              <a:t> experiment faster.</a:t>
-            </a:r>
-          </a:p>
-        </p:txBody>
-      </p:sp>
-      <p:sp>
-        <p:nvSpPr>
-          <p:cNvPr id="30" name="Cell4_H00"/>
+              <a:t> end — halfway is mid-schedule.</a:t>
+            </a:r>
+          </a:p>
+          <a:p>
+            <a:pPr algn="l">
+              <a:lnSpc>
+                <a:spcPct val="102000"/>
+              </a:lnSpc>
+              <a:spcAft>
+                <a:spcPts val="500"/>
+              </a:spcAft>
+            </a:pPr>
+            <a:r>
+              <a:rPr sz="1700" b="1" i="0">
+                <a:solidFill>
+                  <a:srgbClr val="1F1F24"/>
+                </a:solidFill>
+                <a:latin typeface="Open Sans"/>
+              </a:rPr>
+              <a:t>Our own records carried the bug.</a:t>
+            </a:r>
+            <a:r>
+              <a:rPr sz="1700" b="0" i="0">
+                <a:solidFill>
+                  <a:srgbClr val="1F1F24"/>
+                </a:solidFill>
+                <a:latin typeface="Open Sans"/>
+              </a:rPr>
+              <a:t> The epoch field reads </a:t>
+            </a:r>
+            <a:r>
+              <a:rPr sz="1700" b="1" i="0">
+                <a:solidFill>
+                  <a:srgbClr val="1F1F24"/>
+                </a:solidFill>
+                <a:latin typeface="Open Sans"/>
+              </a:rPr>
+              <a:t>125</a:t>
+            </a:r>
+            <a:r>
+              <a:rPr sz="1700" b="0" i="0">
+                <a:solidFill>
+                  <a:srgbClr val="1F1F24"/>
+                </a:solidFill>
+                <a:latin typeface="Open Sans"/>
+              </a:rPr>
+              <a:t>; the truth: </a:t>
+            </a:r>
+            <a:r>
+              <a:rPr sz="1700" b="1" i="0">
+                <a:solidFill>
+                  <a:srgbClr val="1F1F24"/>
+                </a:solidFill>
+                <a:latin typeface="Open Sans"/>
+              </a:rPr>
+              <a:t>16 passes</a:t>
+            </a:r>
+            <a:r>
+              <a:rPr sz="1700" b="0" i="0">
+                <a:solidFill>
+                  <a:srgbClr val="1F1F24"/>
+                </a:solidFill>
+                <a:latin typeface="Open Sans"/>
+              </a:rPr>
+              <a:t>.</a:t>
+            </a:r>
+          </a:p>
+        </p:txBody>
+      </p:sp>
+      <p:sp>
+        <p:nvSpPr>
+          <p:cNvPr id="29" name="Cell4_Heading"/>
           <p:cNvSpPr txBox="1"/>
           <p:nvPr/>
         </p:nvSpPr>
         <p:spPr>
           <a:xfrm>
-            <a:off x="1371600" y="15617952"/>
-            <a:ext cx="1783080" cy="201168"/>
+            <a:off x="8001000" y="13606272"/>
+            <a:ext cx="12435840" cy="896112"/>
           </a:xfrm>
           <a:prstGeom prst="rect">
             <a:avLst/>
@@ -9670,7 +9757,7 @@
           <a:noFill/>
         </p:spPr>
         <p:txBody>
-          <a:bodyPr wrap="square" lIns="27432" tIns="27432" rIns="27432" bIns="27432" anchor="t">
+          <a:bodyPr wrap="square" lIns="27432" tIns="27432" rIns="27432" bIns="27432" anchor="b">
             <a:noAutofit/>
           </a:bodyPr>
           <a:lstStyle/>
@@ -9684,160 +9771,34 @@
               </a:spcAft>
             </a:pPr>
             <a:r>
-              <a:rPr sz="1000" b="1" i="0">
-                <a:solidFill>
-                  <a:srgbClr val="5E5A66"/>
-                </a:solidFill>
-                <a:latin typeface="Uni Sans Book"/>
-              </a:rPr>
-              <a:t>WHAT CHANGED</a:t>
-            </a:r>
-          </a:p>
-        </p:txBody>
-      </p:sp>
-      <p:sp>
-        <p:nvSpPr>
-          <p:cNvPr id="31" name="Cell4_H01"/>
-          <p:cNvSpPr txBox="1"/>
-          <p:nvPr/>
-        </p:nvSpPr>
-        <p:spPr>
-          <a:xfrm>
-            <a:off x="3986783" y="15617952"/>
-            <a:ext cx="1783080" cy="201168"/>
-          </a:xfrm>
-          <a:prstGeom prst="rect">
-            <a:avLst/>
-          </a:prstGeom>
-          <a:noFill/>
-        </p:spPr>
-        <p:txBody>
-          <a:bodyPr wrap="square" lIns="27432" tIns="27432" rIns="27432" bIns="27432" anchor="t">
-            <a:noAutofit/>
-          </a:bodyPr>
-          <a:lstStyle/>
-          <a:p>
-            <a:pPr algn="l">
-              <a:lnSpc>
-                <a:spcPct val="105000"/>
-              </a:lnSpc>
-              <a:spcAft>
-                <a:spcPts val="0"/>
-              </a:spcAft>
-            </a:pPr>
-            <a:r>
-              <a:rPr sz="1000" b="1" i="0">
-                <a:solidFill>
-                  <a:srgbClr val="5E5A66"/>
-                </a:solidFill>
-                <a:latin typeface="Uni Sans Book"/>
-              </a:rPr>
-              <a:t>MEASURED</a:t>
-            </a:r>
-          </a:p>
-        </p:txBody>
-      </p:sp>
-      <p:sp>
-        <p:nvSpPr>
-          <p:cNvPr id="32" name="Cell4_H02"/>
-          <p:cNvSpPr txBox="1"/>
-          <p:nvPr/>
-        </p:nvSpPr>
-        <p:spPr>
-          <a:xfrm>
-            <a:off x="6245352" y="15617952"/>
-            <a:ext cx="1783080" cy="201168"/>
-          </a:xfrm>
-          <a:prstGeom prst="rect">
-            <a:avLst/>
-          </a:prstGeom>
-          <a:noFill/>
-        </p:spPr>
-        <p:txBody>
-          <a:bodyPr wrap="square" lIns="27432" tIns="27432" rIns="27432" bIns="27432" anchor="t">
-            <a:noAutofit/>
-          </a:bodyPr>
-          <a:lstStyle/>
-          <a:p>
-            <a:pPr algn="l">
-              <a:lnSpc>
-                <a:spcPct val="105000"/>
-              </a:lnSpc>
-              <a:spcAft>
-                <a:spcPts val="0"/>
-              </a:spcAft>
-            </a:pPr>
-            <a:r>
-              <a:rPr sz="1000" b="1" i="0">
-                <a:solidFill>
-                  <a:srgbClr val="5E5A66"/>
-                </a:solidFill>
-                <a:latin typeface="Uni Sans Book"/>
-              </a:rPr>
-              <a:t>KEPT?</a:t>
-            </a:r>
-          </a:p>
-        </p:txBody>
-      </p:sp>
-      <p:sp>
-        <p:nvSpPr>
-          <p:cNvPr id="33" name="Cell4_G00"/>
-          <p:cNvSpPr txBox="1"/>
-          <p:nvPr/>
-        </p:nvSpPr>
-        <p:spPr>
-          <a:xfrm>
-            <a:off x="1371600" y="15837408"/>
-            <a:ext cx="5943600" cy="196596"/>
-          </a:xfrm>
-          <a:prstGeom prst="rect">
-            <a:avLst/>
-          </a:prstGeom>
-          <a:noFill/>
-        </p:spPr>
-        <p:txBody>
-          <a:bodyPr wrap="square" lIns="27432" tIns="27432" rIns="27432" bIns="27432" anchor="ctr">
-            <a:noAutofit/>
-          </a:bodyPr>
-          <a:lstStyle/>
-          <a:p>
-            <a:pPr algn="l">
-              <a:lnSpc>
-                <a:spcPct val="105000"/>
-              </a:lnSpc>
-              <a:spcAft>
-                <a:spcPts val="0"/>
-              </a:spcAft>
-            </a:pPr>
-            <a:r>
-              <a:rPr sz="1000" b="1" i="0">
+              <a:rPr sz="2800" b="1" i="0">
                 <a:solidFill>
                   <a:srgbClr val="32006E"/>
                 </a:solidFill>
-                <a:latin typeface="Uni Sans Book"/>
-              </a:rPr>
-              <a:t>THE DATA PATH</a:t>
+                <a:latin typeface="Encode Sans Normal"/>
+              </a:rPr>
+              <a:t>What we made faster</a:t>
             </a:r>
           </a:p>
         </p:txBody>
       </p:sp>
       <p:cxnSp>
         <p:nvCxnSpPr>
-          <p:cNvPr id="34" name="Connector 33"/>
+          <p:cNvPr id="30" name="Connector 29"/>
           <p:cNvCxnSpPr/>
           <p:nvPr/>
         </p:nvCxnSpPr>
         <p:spPr>
           <a:xfrm>
-            <a:off x="1371600" y="16015716"/>
-            <a:ext cx="5943600" cy="0"/>
+            <a:off x="8001000" y="14538960"/>
+            <a:ext cx="12435840" cy="0"/>
           </a:xfrm>
           <a:prstGeom prst="line">
             <a:avLst/>
           </a:prstGeom>
-          <a:ln w="9525">
+          <a:ln w="15875">
             <a:solidFill>
-              <a:srgbClr val="D9D2E3"/>
+              <a:srgbClr val="E8D3A2"/>
             </a:solidFill>
           </a:ln>
         </p:spPr>
@@ -9858,14 +9819,14 @@
       </p:cxnSp>
       <p:sp>
         <p:nvSpPr>
-          <p:cNvPr id="35" name="Cell4_R01C0"/>
+          <p:cNvPr id="31" name="Cell4_Lead"/>
           <p:cNvSpPr txBox="1"/>
           <p:nvPr/>
         </p:nvSpPr>
         <p:spPr>
           <a:xfrm>
-            <a:off x="1371600" y="16052292"/>
-            <a:ext cx="2523744" cy="178307"/>
+            <a:off x="8001000" y="14666976"/>
+            <a:ext cx="12435840" cy="859536"/>
           </a:xfrm>
           <a:prstGeom prst="rect">
             <a:avLst/>
@@ -9887,78 +9848,90 @@
               </a:spcAft>
             </a:pPr>
             <a:r>
-              <a:rPr sz="1100" b="0" i="0">
-                <a:solidFill>
-                  <a:srgbClr val="1F1F24"/>
-                </a:solidFill>
-                <a:latin typeface="Open Sans"/>
-              </a:rPr>
-              <a:t>1 · dataset on the card, no loader</a:t>
-            </a:r>
-          </a:p>
-        </p:txBody>
-      </p:sp>
-      <p:sp>
-        <p:nvSpPr>
-          <p:cNvPr id="36" name="Cell4_R01C1"/>
+              <a:rPr sz="1700" b="1" i="0">
+                <a:solidFill>
+                  <a:srgbClr val="1F1F24"/>
+                </a:solidFill>
+                <a:latin typeface="Open Sans"/>
+              </a:rPr>
+              <a:t>2.07× on the four-cell benchmark</a:t>
+            </a:r>
+            <a:r>
+              <a:rPr sz="1700" b="0" i="0">
+                <a:solidFill>
+                  <a:srgbClr val="1F1F24"/>
+                </a:solidFill>
+                <a:latin typeface="Open Sans"/>
+              </a:rPr>
+              <a:t> — only </a:t>
+            </a:r>
+            <a:r>
+              <a:rPr sz="1700" b="1" i="0">
+                <a:solidFill>
+                  <a:srgbClr val="1F1F24"/>
+                </a:solidFill>
+                <a:latin typeface="Open Sans"/>
+              </a:rPr>
+              <a:t>1.32×</a:t>
+            </a:r>
+            <a:r>
+              <a:rPr sz="1700" b="0" i="0">
+                <a:solidFill>
+                  <a:srgbClr val="1F1F24"/>
+                </a:solidFill>
+                <a:latin typeface="Open Sans"/>
+              </a:rPr>
+              <a:t> of it efficiency; the rest is a second card nobody had used. </a:t>
+            </a:r>
+            <a:r>
+              <a:rPr sz="1700" b="1" i="0">
+                <a:solidFill>
+                  <a:srgbClr val="1F1F24"/>
+                </a:solidFill>
+                <a:latin typeface="Open Sans"/>
+              </a:rPr>
+              <a:t>A third of the twenty were rejected</a:t>
+            </a:r>
+            <a:r>
+              <a:rPr sz="1700" b="0" i="0">
+                <a:solidFill>
+                  <a:srgbClr val="1F1F24"/>
+                </a:solidFill>
+                <a:latin typeface="Open Sans"/>
+              </a:rPr>
+              <a:t>, and a list of only the wins would be marketing rather than a log. Every row had to make the </a:t>
+            </a:r>
+            <a:r>
+              <a:rPr sz="1700" b="0" i="1">
+                <a:solidFill>
+                  <a:srgbClr val="1F1F24"/>
+                </a:solidFill>
+                <a:latin typeface="Open Sans"/>
+              </a:rPr>
+              <a:t>same</a:t>
+            </a:r>
+            <a:r>
+              <a:rPr sz="1700" b="0" i="0">
+                <a:solidFill>
+                  <a:srgbClr val="1F1F24"/>
+                </a:solidFill>
+                <a:latin typeface="Open Sans"/>
+              </a:rPr>
+              <a:t> experiment faster.</a:t>
+            </a:r>
+          </a:p>
+        </p:txBody>
+      </p:sp>
+      <p:sp>
+        <p:nvSpPr>
+          <p:cNvPr id="32" name="Cell4_H00"/>
           <p:cNvSpPr txBox="1"/>
           <p:nvPr/>
         </p:nvSpPr>
         <p:spPr>
           <a:xfrm>
-            <a:off x="3986783" y="16052292"/>
-            <a:ext cx="2167127" cy="178307"/>
-          </a:xfrm>
-          <a:prstGeom prst="rect">
-            <a:avLst/>
-          </a:prstGeom>
-          <a:noFill/>
-        </p:spPr>
-        <p:txBody>
-          <a:bodyPr wrap="square" lIns="36576" tIns="36576" rIns="36576" bIns="36576" anchor="t">
-            <a:noAutofit/>
-          </a:bodyPr>
-          <a:lstStyle/>
-          <a:p>
-            <a:pPr algn="l">
-              <a:lnSpc>
-                <a:spcPct val="108000"/>
-              </a:lnSpc>
-              <a:spcAft>
-                <a:spcPts val="0"/>
-              </a:spcAft>
-            </a:pPr>
-            <a:r>
-              <a:rPr sz="1100" b="0" i="0">
-                <a:solidFill>
-                  <a:srgbClr val="1F1F24"/>
-                </a:solidFill>
-                <a:latin typeface="Open Sans"/>
-              </a:rPr>
-              <a:t>13.8k → </a:t>
-            </a:r>
-            <a:r>
-              <a:rPr sz="1100" b="1" i="0">
-                <a:solidFill>
-                  <a:srgbClr val="1F1F24"/>
-                </a:solidFill>
-                <a:latin typeface="Open Sans"/>
-              </a:rPr>
-              <a:t>18.5k img/s</a:t>
-            </a:r>
-          </a:p>
-        </p:txBody>
-      </p:sp>
-      <p:sp>
-        <p:nvSpPr>
-          <p:cNvPr id="37" name="Cell4_R01C2"/>
-          <p:cNvSpPr txBox="1"/>
-          <p:nvPr/>
-        </p:nvSpPr>
-        <p:spPr>
-          <a:xfrm>
-            <a:off x="6245352" y="16052292"/>
-            <a:ext cx="978408" cy="178307"/>
+            <a:off x="8001000" y="15563088"/>
+            <a:ext cx="1783080" cy="201168"/>
           </a:xfrm>
           <a:prstGeom prst="rect">
             <a:avLst/>
@@ -9980,26 +9953,152 @@
               </a:spcAft>
             </a:pPr>
             <a:r>
-              <a:rPr sz="1100" b="1" i="0">
-                <a:solidFill>
-                  <a:srgbClr val="1F7A4C"/>
-                </a:solidFill>
-                <a:latin typeface="Open Sans"/>
-              </a:rPr>
-              <a:t>yes</a:t>
+              <a:rPr sz="1000" b="1" i="0">
+                <a:solidFill>
+                  <a:srgbClr val="5E5A66"/>
+                </a:solidFill>
+                <a:latin typeface="Uni Sans Book"/>
+              </a:rPr>
+              <a:t>WHAT CHANGED</a:t>
+            </a:r>
+          </a:p>
+        </p:txBody>
+      </p:sp>
+      <p:sp>
+        <p:nvSpPr>
+          <p:cNvPr id="33" name="Cell4_H01"/>
+          <p:cNvSpPr txBox="1"/>
+          <p:nvPr/>
+        </p:nvSpPr>
+        <p:spPr>
+          <a:xfrm>
+            <a:off x="10616184" y="15563088"/>
+            <a:ext cx="1783080" cy="201168"/>
+          </a:xfrm>
+          <a:prstGeom prst="rect">
+            <a:avLst/>
+          </a:prstGeom>
+          <a:noFill/>
+        </p:spPr>
+        <p:txBody>
+          <a:bodyPr wrap="square" lIns="27432" tIns="27432" rIns="27432" bIns="27432" anchor="t">
+            <a:noAutofit/>
+          </a:bodyPr>
+          <a:lstStyle/>
+          <a:p>
+            <a:pPr algn="l">
+              <a:lnSpc>
+                <a:spcPct val="105000"/>
+              </a:lnSpc>
+              <a:spcAft>
+                <a:spcPts val="0"/>
+              </a:spcAft>
+            </a:pPr>
+            <a:r>
+              <a:rPr sz="1000" b="1" i="0">
+                <a:solidFill>
+                  <a:srgbClr val="5E5A66"/>
+                </a:solidFill>
+                <a:latin typeface="Uni Sans Book"/>
+              </a:rPr>
+              <a:t>MEASURED</a:t>
+            </a:r>
+          </a:p>
+        </p:txBody>
+      </p:sp>
+      <p:sp>
+        <p:nvSpPr>
+          <p:cNvPr id="34" name="Cell4_H02"/>
+          <p:cNvSpPr txBox="1"/>
+          <p:nvPr/>
+        </p:nvSpPr>
+        <p:spPr>
+          <a:xfrm>
+            <a:off x="12874752" y="15563088"/>
+            <a:ext cx="1783080" cy="201168"/>
+          </a:xfrm>
+          <a:prstGeom prst="rect">
+            <a:avLst/>
+          </a:prstGeom>
+          <a:noFill/>
+        </p:spPr>
+        <p:txBody>
+          <a:bodyPr wrap="square" lIns="27432" tIns="27432" rIns="27432" bIns="27432" anchor="t">
+            <a:noAutofit/>
+          </a:bodyPr>
+          <a:lstStyle/>
+          <a:p>
+            <a:pPr algn="l">
+              <a:lnSpc>
+                <a:spcPct val="105000"/>
+              </a:lnSpc>
+              <a:spcAft>
+                <a:spcPts val="0"/>
+              </a:spcAft>
+            </a:pPr>
+            <a:r>
+              <a:rPr sz="1000" b="1" i="0">
+                <a:solidFill>
+                  <a:srgbClr val="5E5A66"/>
+                </a:solidFill>
+                <a:latin typeface="Uni Sans Book"/>
+              </a:rPr>
+              <a:t>KEPT?</a:t>
+            </a:r>
+          </a:p>
+        </p:txBody>
+      </p:sp>
+      <p:sp>
+        <p:nvSpPr>
+          <p:cNvPr id="35" name="Cell4_G00"/>
+          <p:cNvSpPr txBox="1"/>
+          <p:nvPr/>
+        </p:nvSpPr>
+        <p:spPr>
+          <a:xfrm>
+            <a:off x="8001000" y="15782544"/>
+            <a:ext cx="5943600" cy="196596"/>
+          </a:xfrm>
+          <a:prstGeom prst="rect">
+            <a:avLst/>
+          </a:prstGeom>
+          <a:noFill/>
+        </p:spPr>
+        <p:txBody>
+          <a:bodyPr wrap="square" lIns="27432" tIns="27432" rIns="27432" bIns="27432" anchor="ctr">
+            <a:noAutofit/>
+          </a:bodyPr>
+          <a:lstStyle/>
+          <a:p>
+            <a:pPr algn="l">
+              <a:lnSpc>
+                <a:spcPct val="105000"/>
+              </a:lnSpc>
+              <a:spcAft>
+                <a:spcPts val="0"/>
+              </a:spcAft>
+            </a:pPr>
+            <a:r>
+              <a:rPr sz="1000" b="1" i="0">
+                <a:solidFill>
+                  <a:srgbClr val="32006E"/>
+                </a:solidFill>
+                <a:latin typeface="Uni Sans Book"/>
+              </a:rPr>
+              <a:t>THE DATA PATH</a:t>
             </a:r>
           </a:p>
         </p:txBody>
       </p:sp>
       <p:cxnSp>
         <p:nvCxnSpPr>
-          <p:cNvPr id="38" name="Connector 37"/>
+          <p:cNvPr id="36" name="Connector 35"/>
           <p:cNvCxnSpPr/>
           <p:nvPr/>
         </p:nvCxnSpPr>
         <p:spPr>
           <a:xfrm>
-            <a:off x="1371600" y="16230600"/>
+            <a:off x="8001000" y="15960852"/>
             <a:ext cx="5943600" cy="0"/>
           </a:xfrm>
           <a:prstGeom prst="line">
@@ -10028,13 +10127,13 @@
       </p:cxnSp>
       <p:sp>
         <p:nvSpPr>
-          <p:cNvPr id="39" name="Cell4_R02C0"/>
+          <p:cNvPr id="37" name="Cell4_R01C0"/>
           <p:cNvSpPr txBox="1"/>
           <p:nvPr/>
         </p:nvSpPr>
         <p:spPr>
           <a:xfrm>
-            <a:off x="1371600" y="16267176"/>
+            <a:off x="8001000" y="15997428"/>
             <a:ext cx="2523744" cy="178307"/>
           </a:xfrm>
           <a:prstGeom prst="rect">
@@ -10063,20 +10162,20 @@
                 </a:solidFill>
                 <a:latin typeface="Open Sans"/>
               </a:rPr>
-              <a:t>2 · images as uint8, cast per batch</a:t>
-            </a:r>
-          </a:p>
-        </p:txBody>
-      </p:sp>
-      <p:sp>
-        <p:nvSpPr>
-          <p:cNvPr id="40" name="Cell4_R02C1"/>
+              <a:t>1 · dataset on the card, no loader</a:t>
+            </a:r>
+          </a:p>
+        </p:txBody>
+      </p:sp>
+      <p:sp>
+        <p:nvSpPr>
+          <p:cNvPr id="38" name="Cell4_R01C1"/>
           <p:cNvSpPr txBox="1"/>
           <p:nvPr/>
         </p:nvSpPr>
         <p:spPr>
           <a:xfrm>
-            <a:off x="3986783" y="16267176"/>
+            <a:off x="10616184" y="15997428"/>
             <a:ext cx="2167127" cy="178307"/>
           </a:xfrm>
           <a:prstGeom prst="rect">
@@ -10105,20 +10204,29 @@
                 </a:solidFill>
                 <a:latin typeface="Open Sans"/>
               </a:rPr>
-              <a:t>4× less memory, free cast</a:t>
-            </a:r>
-          </a:p>
-        </p:txBody>
-      </p:sp>
-      <p:sp>
-        <p:nvSpPr>
-          <p:cNvPr id="41" name="Cell4_R02C2"/>
+              <a:t>13.8k → </a:t>
+            </a:r>
+            <a:r>
+              <a:rPr sz="1100" b="1" i="0">
+                <a:solidFill>
+                  <a:srgbClr val="1F1F24"/>
+                </a:solidFill>
+                <a:latin typeface="Open Sans"/>
+              </a:rPr>
+              <a:t>18.5k img/s</a:t>
+            </a:r>
+          </a:p>
+        </p:txBody>
+      </p:sp>
+      <p:sp>
+        <p:nvSpPr>
+          <p:cNvPr id="39" name="Cell4_R01C2"/>
           <p:cNvSpPr txBox="1"/>
           <p:nvPr/>
         </p:nvSpPr>
         <p:spPr>
           <a:xfrm>
-            <a:off x="6245352" y="16267176"/>
+            <a:off x="12874752" y="15997428"/>
             <a:ext cx="978408" cy="178307"/>
           </a:xfrm>
           <a:prstGeom prst="rect">
@@ -10154,13 +10262,13 @@
       </p:sp>
       <p:cxnSp>
         <p:nvCxnSpPr>
-          <p:cNvPr id="42" name="Connector 41"/>
+          <p:cNvPr id="40" name="Connector 39"/>
           <p:cNvCxnSpPr/>
           <p:nvPr/>
         </p:nvCxnSpPr>
         <p:spPr>
           <a:xfrm>
-            <a:off x="1371600" y="16445484"/>
+            <a:off x="8001000" y="16175736"/>
             <a:ext cx="5943600" cy="0"/>
           </a:xfrm>
           <a:prstGeom prst="line">
@@ -10189,13 +10297,13 @@
       </p:cxnSp>
       <p:sp>
         <p:nvSpPr>
-          <p:cNvPr id="43" name="Cell4_R03C0"/>
+          <p:cNvPr id="41" name="Cell4_R02C0"/>
           <p:cNvSpPr txBox="1"/>
           <p:nvPr/>
         </p:nvSpPr>
         <p:spPr>
           <a:xfrm>
-            <a:off x="1371600" y="16482059"/>
+            <a:off x="8001000" y="16212312"/>
             <a:ext cx="2523744" cy="178307"/>
           </a:xfrm>
           <a:prstGeom prst="rect">
@@ -10224,20 +10332,20 @@
                 </a:solidFill>
                 <a:latin typeface="Open Sans"/>
               </a:rPr>
-              <a:t>3 · augment on the GPU</a:t>
-            </a:r>
-          </a:p>
-        </p:txBody>
-      </p:sp>
-      <p:sp>
-        <p:nvSpPr>
-          <p:cNvPr id="44" name="Cell4_R03C1"/>
+              <a:t>2 · images as uint8, cast per batch</a:t>
+            </a:r>
+          </a:p>
+        </p:txBody>
+      </p:sp>
+      <p:sp>
+        <p:nvSpPr>
+          <p:cNvPr id="42" name="Cell4_R02C1"/>
           <p:cNvSpPr txBox="1"/>
           <p:nvPr/>
         </p:nvSpPr>
         <p:spPr>
           <a:xfrm>
-            <a:off x="3986783" y="16482059"/>
+            <a:off x="10616184" y="16212312"/>
             <a:ext cx="2167127" cy="178307"/>
           </a:xfrm>
           <a:prstGeom prst="rect">
@@ -10266,20 +10374,20 @@
                 </a:solidFill>
                 <a:latin typeface="Open Sans"/>
               </a:rPr>
-              <a:t>no PIL, no host copy</a:t>
-            </a:r>
-          </a:p>
-        </p:txBody>
-      </p:sp>
-      <p:sp>
-        <p:nvSpPr>
-          <p:cNvPr id="45" name="Cell4_R03C2"/>
+              <a:t>4× less memory, free cast</a:t>
+            </a:r>
+          </a:p>
+        </p:txBody>
+      </p:sp>
+      <p:sp>
+        <p:nvSpPr>
+          <p:cNvPr id="43" name="Cell4_R02C2"/>
           <p:cNvSpPr txBox="1"/>
           <p:nvPr/>
         </p:nvSpPr>
         <p:spPr>
           <a:xfrm>
-            <a:off x="6245352" y="16482059"/>
+            <a:off x="12874752" y="16212312"/>
             <a:ext cx="978408" cy="178307"/>
           </a:xfrm>
           <a:prstGeom prst="rect">
@@ -10315,13 +10423,13 @@
       </p:sp>
       <p:cxnSp>
         <p:nvCxnSpPr>
-          <p:cNvPr id="46" name="Connector 45"/>
+          <p:cNvPr id="44" name="Connector 43"/>
           <p:cNvCxnSpPr/>
           <p:nvPr/>
         </p:nvCxnSpPr>
         <p:spPr>
           <a:xfrm>
-            <a:off x="1371600" y="16660368"/>
+            <a:off x="8001000" y="16390620"/>
             <a:ext cx="5943600" cy="0"/>
           </a:xfrm>
           <a:prstGeom prst="line">
@@ -10350,13 +10458,13 @@
       </p:cxnSp>
       <p:sp>
         <p:nvSpPr>
-          <p:cNvPr id="47" name="Cell4_R04C0"/>
+          <p:cNvPr id="45" name="Cell4_R03C0"/>
           <p:cNvSpPr txBox="1"/>
           <p:nvPr/>
         </p:nvSpPr>
         <p:spPr>
           <a:xfrm>
-            <a:off x="1371600" y="16696944"/>
+            <a:off x="8001000" y="16427196"/>
             <a:ext cx="2523744" cy="178307"/>
           </a:xfrm>
           <a:prstGeom prst="rect">
@@ -10385,20 +10493,20 @@
                 </a:solidFill>
                 <a:latin typeface="Open Sans"/>
               </a:rPr>
-              <a:t>4 · tokenize once, up front</a:t>
-            </a:r>
-          </a:p>
-        </p:txBody>
-      </p:sp>
-      <p:sp>
-        <p:nvSpPr>
-          <p:cNvPr id="48" name="Cell4_R04C1"/>
+              <a:t>3 · augment on the GPU</a:t>
+            </a:r>
+          </a:p>
+        </p:txBody>
+      </p:sp>
+      <p:sp>
+        <p:nvSpPr>
+          <p:cNvPr id="46" name="Cell4_R03C1"/>
           <p:cNvSpPr txBox="1"/>
           <p:nvPr/>
         </p:nvSpPr>
         <p:spPr>
           <a:xfrm>
-            <a:off x="3986783" y="16696944"/>
+            <a:off x="10616184" y="16427196"/>
             <a:ext cx="2167127" cy="178307"/>
           </a:xfrm>
           <a:prstGeom prst="rect">
@@ -10427,29 +10535,20 @@
                 </a:solidFill>
                 <a:latin typeface="Open Sans"/>
               </a:rPr>
-              <a:t>53 s vs 85 min — </a:t>
-            </a:r>
-            <a:r>
-              <a:rPr sz="1100" b="1" i="0">
-                <a:solidFill>
-                  <a:srgbClr val="1F1F24"/>
-                </a:solidFill>
-                <a:latin typeface="Open Sans"/>
-              </a:rPr>
-              <a:t>96×</a:t>
-            </a:r>
-          </a:p>
-        </p:txBody>
-      </p:sp>
-      <p:sp>
-        <p:nvSpPr>
-          <p:cNvPr id="49" name="Cell4_R04C2"/>
+              <a:t>no PIL, no host copy</a:t>
+            </a:r>
+          </a:p>
+        </p:txBody>
+      </p:sp>
+      <p:sp>
+        <p:nvSpPr>
+          <p:cNvPr id="47" name="Cell4_R03C2"/>
           <p:cNvSpPr txBox="1"/>
           <p:nvPr/>
         </p:nvSpPr>
         <p:spPr>
           <a:xfrm>
-            <a:off x="6245352" y="16696944"/>
+            <a:off x="12874752" y="16427196"/>
             <a:ext cx="978408" cy="178307"/>
           </a:xfrm>
           <a:prstGeom prst="rect">
@@ -10485,13 +10584,13 @@
       </p:sp>
       <p:cxnSp>
         <p:nvCxnSpPr>
-          <p:cNvPr id="50" name="Connector 49"/>
+          <p:cNvPr id="48" name="Connector 47"/>
           <p:cNvCxnSpPr/>
           <p:nvPr/>
         </p:nvCxnSpPr>
         <p:spPr>
           <a:xfrm>
-            <a:off x="1371600" y="16875252"/>
+            <a:off x="8001000" y="16605504"/>
             <a:ext cx="5943600" cy="0"/>
           </a:xfrm>
           <a:prstGeom prst="line">
@@ -10520,13 +10619,13 @@
       </p:cxnSp>
       <p:sp>
         <p:nvSpPr>
-          <p:cNvPr id="51" name="Cell4_R05C0"/>
+          <p:cNvPr id="49" name="Cell4_R04C0"/>
           <p:cNvSpPr txBox="1"/>
           <p:nvPr/>
         </p:nvSpPr>
         <p:spPr>
           <a:xfrm>
-            <a:off x="1371600" y="16911828"/>
+            <a:off x="8001000" y="16642080"/>
             <a:ext cx="2523744" cy="178307"/>
           </a:xfrm>
           <a:prstGeom prst="rect">
@@ -10555,20 +10654,20 @@
                 </a:solidFill>
                 <a:latin typeface="Open Sans"/>
               </a:rPr>
-              <a:t>5 · token dtype from the vocabulary</a:t>
-            </a:r>
-          </a:p>
-        </p:txBody>
-      </p:sp>
-      <p:sp>
-        <p:nvSpPr>
-          <p:cNvPr id="52" name="Cell4_R05C1"/>
+              <a:t>4 · tokenize once, up front</a:t>
+            </a:r>
+          </a:p>
+        </p:txBody>
+      </p:sp>
+      <p:sp>
+        <p:nvSpPr>
+          <p:cNvPr id="50" name="Cell4_R04C1"/>
           <p:cNvSpPr txBox="1"/>
           <p:nvPr/>
         </p:nvSpPr>
         <p:spPr>
           <a:xfrm>
-            <a:off x="3986783" y="16911828"/>
+            <a:off x="10616184" y="16642080"/>
             <a:ext cx="2167127" cy="178307"/>
           </a:xfrm>
           <a:prstGeom prst="rect">
@@ -10597,7 +10696,7 @@
                 </a:solidFill>
                 <a:latin typeface="Open Sans"/>
               </a:rPr>
-              <a:t>16k → </a:t>
+              <a:t>53 s vs 85 min — </a:t>
             </a:r>
             <a:r>
               <a:rPr sz="1100" b="1" i="0">
@@ -10606,20 +10705,20 @@
                 </a:solidFill>
                 <a:latin typeface="Open Sans"/>
               </a:rPr>
-              <a:t>2 bytes a token</a:t>
-            </a:r>
-          </a:p>
-        </p:txBody>
-      </p:sp>
-      <p:sp>
-        <p:nvSpPr>
-          <p:cNvPr id="53" name="Cell4_R05C2"/>
+              <a:t>96×</a:t>
+            </a:r>
+          </a:p>
+        </p:txBody>
+      </p:sp>
+      <p:sp>
+        <p:nvSpPr>
+          <p:cNvPr id="51" name="Cell4_R04C2"/>
           <p:cNvSpPr txBox="1"/>
           <p:nvPr/>
         </p:nvSpPr>
         <p:spPr>
           <a:xfrm>
-            <a:off x="6245352" y="16911828"/>
+            <a:off x="12874752" y="16642080"/>
             <a:ext cx="978408" cy="178307"/>
           </a:xfrm>
           <a:prstGeom prst="rect">
@@ -10653,57 +10752,15 @@
           </a:p>
         </p:txBody>
       </p:sp>
-      <p:sp>
-        <p:nvSpPr>
-          <p:cNvPr id="54" name="Cell4_G06"/>
-          <p:cNvSpPr txBox="1"/>
-          <p:nvPr/>
-        </p:nvSpPr>
-        <p:spPr>
-          <a:xfrm>
-            <a:off x="1371600" y="17126712"/>
-            <a:ext cx="5943600" cy="196596"/>
-          </a:xfrm>
-          <a:prstGeom prst="rect">
-            <a:avLst/>
-          </a:prstGeom>
-          <a:noFill/>
-        </p:spPr>
-        <p:txBody>
-          <a:bodyPr wrap="square" lIns="27432" tIns="27432" rIns="27432" bIns="27432" anchor="ctr">
-            <a:noAutofit/>
-          </a:bodyPr>
-          <a:lstStyle/>
-          <a:p>
-            <a:pPr algn="l">
-              <a:lnSpc>
-                <a:spcPct val="105000"/>
-              </a:lnSpc>
-              <a:spcAft>
-                <a:spcPts val="0"/>
-              </a:spcAft>
-            </a:pPr>
-            <a:r>
-              <a:rPr sz="1000" b="1" i="0">
-                <a:solidFill>
-                  <a:srgbClr val="32006E"/>
-                </a:solidFill>
-                <a:latin typeface="Uni Sans Book"/>
-              </a:rPr>
-              <a:t>PRECISION AND KERNELS</a:t>
-            </a:r>
-          </a:p>
-        </p:txBody>
-      </p:sp>
       <p:cxnSp>
         <p:nvCxnSpPr>
-          <p:cNvPr id="55" name="Connector 54"/>
+          <p:cNvPr id="52" name="Connector 51"/>
           <p:cNvCxnSpPr/>
           <p:nvPr/>
         </p:nvCxnSpPr>
         <p:spPr>
           <a:xfrm>
-            <a:off x="1371600" y="17305020"/>
+            <a:off x="8001000" y="16820388"/>
             <a:ext cx="5943600" cy="0"/>
           </a:xfrm>
           <a:prstGeom prst="line">
@@ -10732,13 +10789,13 @@
       </p:cxnSp>
       <p:sp>
         <p:nvSpPr>
-          <p:cNvPr id="56" name="Cell4_R07C0"/>
+          <p:cNvPr id="53" name="Cell4_R05C0"/>
           <p:cNvSpPr txBox="1"/>
           <p:nvPr/>
         </p:nvSpPr>
         <p:spPr>
           <a:xfrm>
-            <a:off x="1371600" y="17341596"/>
+            <a:off x="8001000" y="16856964"/>
             <a:ext cx="2523744" cy="178307"/>
           </a:xfrm>
           <a:prstGeom prst="rect">
@@ -10767,20 +10824,20 @@
                 </a:solidFill>
                 <a:latin typeface="Open Sans"/>
               </a:rPr>
-              <a:t>6 · bf16 autocast, not fp16</a:t>
-            </a:r>
-          </a:p>
-        </p:txBody>
-      </p:sp>
-      <p:sp>
-        <p:nvSpPr>
-          <p:cNvPr id="57" name="Cell4_R07C1"/>
+              <a:t>5 · token dtype from the vocabulary</a:t>
+            </a:r>
+          </a:p>
+        </p:txBody>
+      </p:sp>
+      <p:sp>
+        <p:nvSpPr>
+          <p:cNvPr id="54" name="Cell4_R05C1"/>
           <p:cNvSpPr txBox="1"/>
           <p:nvPr/>
         </p:nvSpPr>
         <p:spPr>
           <a:xfrm>
-            <a:off x="3986783" y="17341596"/>
+            <a:off x="10616184" y="16856964"/>
             <a:ext cx="2167127" cy="178307"/>
           </a:xfrm>
           <a:prstGeom prst="rect">
@@ -10803,35 +10860,35 @@
               </a:spcAft>
             </a:pPr>
             <a:r>
+              <a:rPr sz="1100" b="0" i="0">
+                <a:solidFill>
+                  <a:srgbClr val="1F1F24"/>
+                </a:solidFill>
+                <a:latin typeface="Open Sans"/>
+              </a:rPr>
+              <a:t>16k → </a:t>
+            </a:r>
+            <a:r>
               <a:rPr sz="1100" b="1" i="0">
                 <a:solidFill>
                   <a:srgbClr val="1F1F24"/>
                 </a:solidFill>
                 <a:latin typeface="Open Sans"/>
               </a:rPr>
-              <a:t>1.34×</a:t>
-            </a:r>
-            <a:r>
-              <a:rPr sz="1100" b="0" i="0">
-                <a:solidFill>
-                  <a:srgbClr val="1F1F24"/>
-                </a:solidFill>
-                <a:latin typeface="Open Sans"/>
-              </a:rPr>
-              <a:t> on sm_89, no loss-scale</a:t>
-            </a:r>
-          </a:p>
-        </p:txBody>
-      </p:sp>
-      <p:sp>
-        <p:nvSpPr>
-          <p:cNvPr id="58" name="Cell4_R07C2"/>
+              <a:t>2 bytes a token</a:t>
+            </a:r>
+          </a:p>
+        </p:txBody>
+      </p:sp>
+      <p:sp>
+        <p:nvSpPr>
+          <p:cNvPr id="55" name="Cell4_R05C2"/>
           <p:cNvSpPr txBox="1"/>
           <p:nvPr/>
         </p:nvSpPr>
         <p:spPr>
           <a:xfrm>
-            <a:off x="6245352" y="17341596"/>
+            <a:off x="12874752" y="16856964"/>
             <a:ext cx="978408" cy="178307"/>
           </a:xfrm>
           <a:prstGeom prst="rect">
@@ -10865,15 +10922,57 @@
           </a:p>
         </p:txBody>
       </p:sp>
+      <p:sp>
+        <p:nvSpPr>
+          <p:cNvPr id="56" name="Cell4_G06"/>
+          <p:cNvSpPr txBox="1"/>
+          <p:nvPr/>
+        </p:nvSpPr>
+        <p:spPr>
+          <a:xfrm>
+            <a:off x="8001000" y="17071848"/>
+            <a:ext cx="5943600" cy="196596"/>
+          </a:xfrm>
+          <a:prstGeom prst="rect">
+            <a:avLst/>
+          </a:prstGeom>
+          <a:noFill/>
+        </p:spPr>
+        <p:txBody>
+          <a:bodyPr wrap="square" lIns="27432" tIns="27432" rIns="27432" bIns="27432" anchor="ctr">
+            <a:noAutofit/>
+          </a:bodyPr>
+          <a:lstStyle/>
+          <a:p>
+            <a:pPr algn="l">
+              <a:lnSpc>
+                <a:spcPct val="105000"/>
+              </a:lnSpc>
+              <a:spcAft>
+                <a:spcPts val="0"/>
+              </a:spcAft>
+            </a:pPr>
+            <a:r>
+              <a:rPr sz="1000" b="1" i="0">
+                <a:solidFill>
+                  <a:srgbClr val="32006E"/>
+                </a:solidFill>
+                <a:latin typeface="Uni Sans Book"/>
+              </a:rPr>
+              <a:t>PRECISION AND KERNELS</a:t>
+            </a:r>
+          </a:p>
+        </p:txBody>
+      </p:sp>
       <p:cxnSp>
         <p:nvCxnSpPr>
-          <p:cNvPr id="59" name="Connector 58"/>
+          <p:cNvPr id="57" name="Connector 56"/>
           <p:cNvCxnSpPr/>
           <p:nvPr/>
         </p:nvCxnSpPr>
         <p:spPr>
           <a:xfrm>
-            <a:off x="1371600" y="17519904"/>
+            <a:off x="8001000" y="17250156"/>
             <a:ext cx="5943600" cy="0"/>
           </a:xfrm>
           <a:prstGeom prst="line">
@@ -10902,13 +11001,13 @@
       </p:cxnSp>
       <p:sp>
         <p:nvSpPr>
-          <p:cNvPr id="60" name="Cell4_R08C0"/>
+          <p:cNvPr id="58" name="Cell4_R07C0"/>
           <p:cNvSpPr txBox="1"/>
           <p:nvPr/>
         </p:nvSpPr>
         <p:spPr>
           <a:xfrm>
-            <a:off x="1371600" y="17556480"/>
+            <a:off x="8001000" y="17286732"/>
             <a:ext cx="2523744" cy="178307"/>
           </a:xfrm>
           <a:prstGeom prst="rect">
@@ -10937,20 +11036,20 @@
                 </a:solidFill>
                 <a:latin typeface="Open Sans"/>
               </a:rPr>
-              <a:t>7 · channels_last for CNNs, bf16 only</a:t>
-            </a:r>
-          </a:p>
-        </p:txBody>
-      </p:sp>
-      <p:sp>
-        <p:nvSpPr>
-          <p:cNvPr id="61" name="Cell4_R08C1"/>
+              <a:t>6 · bf16 autocast, not fp16</a:t>
+            </a:r>
+          </a:p>
+        </p:txBody>
+      </p:sp>
+      <p:sp>
+        <p:nvSpPr>
+          <p:cNvPr id="59" name="Cell4_R07C1"/>
           <p:cNvSpPr txBox="1"/>
           <p:nvPr/>
         </p:nvSpPr>
         <p:spPr>
           <a:xfrm>
-            <a:off x="3986783" y="17556480"/>
+            <a:off x="10616184" y="17286732"/>
             <a:ext cx="2167127" cy="178307"/>
           </a:xfrm>
           <a:prstGeom prst="rect">
@@ -10973,35 +11072,35 @@
               </a:spcAft>
             </a:pPr>
             <a:r>
+              <a:rPr sz="1100" b="1" i="0">
+                <a:solidFill>
+                  <a:srgbClr val="1F1F24"/>
+                </a:solidFill>
+                <a:latin typeface="Open Sans"/>
+              </a:rPr>
+              <a:t>1.34×</a:t>
+            </a:r>
+            <a:r>
               <a:rPr sz="1100" b="0" i="0">
                 <a:solidFill>
                   <a:srgbClr val="1F1F24"/>
                 </a:solidFill>
                 <a:latin typeface="Open Sans"/>
               </a:rPr>
-              <a:t>fp16 + it is </a:t>
-            </a:r>
-            <a:r>
-              <a:rPr sz="1100" b="1" i="0">
-                <a:solidFill>
-                  <a:srgbClr val="1F1F24"/>
-                </a:solidFill>
-                <a:latin typeface="Open Sans"/>
-              </a:rPr>
-              <a:t>3.5× slower</a:t>
-            </a:r>
-          </a:p>
-        </p:txBody>
-      </p:sp>
-      <p:sp>
-        <p:nvSpPr>
-          <p:cNvPr id="62" name="Cell4_R08C2"/>
+              <a:t> on sm_89, no loss-scale</a:t>
+            </a:r>
+          </a:p>
+        </p:txBody>
+      </p:sp>
+      <p:sp>
+        <p:nvSpPr>
+          <p:cNvPr id="60" name="Cell4_R07C2"/>
           <p:cNvSpPr txBox="1"/>
           <p:nvPr/>
         </p:nvSpPr>
         <p:spPr>
           <a:xfrm>
-            <a:off x="6245352" y="17556480"/>
+            <a:off x="12874752" y="17286732"/>
             <a:ext cx="978408" cy="178307"/>
           </a:xfrm>
           <a:prstGeom prst="rect">
@@ -11030,20 +11129,20 @@
                 </a:solidFill>
                 <a:latin typeface="Open Sans"/>
               </a:rPr>
-              <a:t>guarded</a:t>
+              <a:t>yes</a:t>
             </a:r>
           </a:p>
         </p:txBody>
       </p:sp>
       <p:cxnSp>
         <p:nvCxnSpPr>
-          <p:cNvPr id="63" name="Connector 62"/>
+          <p:cNvPr id="61" name="Connector 60"/>
           <p:cNvCxnSpPr/>
           <p:nvPr/>
         </p:nvCxnSpPr>
         <p:spPr>
           <a:xfrm>
-            <a:off x="1371600" y="17734788"/>
+            <a:off x="8001000" y="17465040"/>
             <a:ext cx="5943600" cy="0"/>
           </a:xfrm>
           <a:prstGeom prst="line">
@@ -11072,13 +11171,13 @@
       </p:cxnSp>
       <p:sp>
         <p:nvSpPr>
-          <p:cNvPr id="64" name="Cell4_R09C0"/>
+          <p:cNvPr id="62" name="Cell4_R08C0"/>
           <p:cNvSpPr txBox="1"/>
           <p:nvPr/>
         </p:nvSpPr>
         <p:spPr>
           <a:xfrm>
-            <a:off x="1371600" y="17771364"/>
+            <a:off x="8001000" y="17501616"/>
             <a:ext cx="2523744" cy="178307"/>
           </a:xfrm>
           <a:prstGeom prst="rect">
@@ -11107,20 +11206,20 @@
                 </a:solidFill>
                 <a:latin typeface="Open Sans"/>
               </a:rPr>
-              <a:t>8 · channels_last for ViTs</a:t>
-            </a:r>
-          </a:p>
-        </p:txBody>
-      </p:sp>
-      <p:sp>
-        <p:nvSpPr>
-          <p:cNvPr id="65" name="Cell4_R09C1"/>
+              <a:t>7 · channels_last for CNNs, bf16 only</a:t>
+            </a:r>
+          </a:p>
+        </p:txBody>
+      </p:sp>
+      <p:sp>
+        <p:nvSpPr>
+          <p:cNvPr id="63" name="Cell4_R08C1"/>
           <p:cNvSpPr txBox="1"/>
           <p:nvPr/>
         </p:nvSpPr>
         <p:spPr>
           <a:xfrm>
-            <a:off x="3986783" y="17771364"/>
+            <a:off x="10616184" y="17501616"/>
             <a:ext cx="2167127" cy="178307"/>
           </a:xfrm>
           <a:prstGeom prst="rect">
@@ -11149,20 +11248,29 @@
                 </a:solidFill>
                 <a:latin typeface="Open Sans"/>
               </a:rPr>
-              <a:t>a no-op on a transformer</a:t>
-            </a:r>
-          </a:p>
-        </p:txBody>
-      </p:sp>
-      <p:sp>
-        <p:nvSpPr>
-          <p:cNvPr id="66" name="Cell4_R09C2"/>
+              <a:t>fp16 + it is </a:t>
+            </a:r>
+            <a:r>
+              <a:rPr sz="1100" b="1" i="0">
+                <a:solidFill>
+                  <a:srgbClr val="1F1F24"/>
+                </a:solidFill>
+                <a:latin typeface="Open Sans"/>
+              </a:rPr>
+              <a:t>3.5× slower</a:t>
+            </a:r>
+          </a:p>
+        </p:txBody>
+      </p:sp>
+      <p:sp>
+        <p:nvSpPr>
+          <p:cNvPr id="64" name="Cell4_R08C2"/>
           <p:cNvSpPr txBox="1"/>
           <p:nvPr/>
         </p:nvSpPr>
         <p:spPr>
           <a:xfrm>
-            <a:off x="6245352" y="17771364"/>
+            <a:off x="12874752" y="17501616"/>
             <a:ext cx="978408" cy="178307"/>
           </a:xfrm>
           <a:prstGeom prst="rect">
@@ -11187,24 +11295,24 @@
             <a:r>
               <a:rPr sz="1100" b="1" i="0">
                 <a:solidFill>
-                  <a:srgbClr val="B03A2E"/>
-                </a:solidFill>
-                <a:latin typeface="Open Sans"/>
-              </a:rPr>
-              <a:t>no</a:t>
+                  <a:srgbClr val="1F7A4C"/>
+                </a:solidFill>
+                <a:latin typeface="Open Sans"/>
+              </a:rPr>
+              <a:t>guarded</a:t>
             </a:r>
           </a:p>
         </p:txBody>
       </p:sp>
       <p:cxnSp>
         <p:nvCxnSpPr>
-          <p:cNvPr id="67" name="Connector 66"/>
+          <p:cNvPr id="65" name="Connector 64"/>
           <p:cNvCxnSpPr/>
           <p:nvPr/>
         </p:nvCxnSpPr>
         <p:spPr>
           <a:xfrm>
-            <a:off x="1371600" y="17949672"/>
+            <a:off x="8001000" y="17679924"/>
             <a:ext cx="5943600" cy="0"/>
           </a:xfrm>
           <a:prstGeom prst="line">
@@ -11233,13 +11341,13 @@
       </p:cxnSp>
       <p:sp>
         <p:nvSpPr>
-          <p:cNvPr id="68" name="Cell4_R010C0"/>
+          <p:cNvPr id="66" name="Cell4_R09C0"/>
           <p:cNvSpPr txBox="1"/>
           <p:nvPr/>
         </p:nvSpPr>
         <p:spPr>
           <a:xfrm>
-            <a:off x="1371600" y="17986248"/>
+            <a:off x="8001000" y="17716500"/>
             <a:ext cx="2523744" cy="178307"/>
           </a:xfrm>
           <a:prstGeom prst="rect">
@@ -11268,20 +11376,20 @@
                 </a:solidFill>
                 <a:latin typeface="Open Sans"/>
               </a:rPr>
-              <a:t>9 · TF32 for matmul and cuDNN</a:t>
-            </a:r>
-          </a:p>
-        </p:txBody>
-      </p:sp>
-      <p:sp>
-        <p:nvSpPr>
-          <p:cNvPr id="69" name="Cell4_R010C1"/>
+              <a:t>8 · channels_last for ViTs</a:t>
+            </a:r>
+          </a:p>
+        </p:txBody>
+      </p:sp>
+      <p:sp>
+        <p:nvSpPr>
+          <p:cNvPr id="67" name="Cell4_R09C1"/>
           <p:cNvSpPr txBox="1"/>
           <p:nvPr/>
         </p:nvSpPr>
         <p:spPr>
           <a:xfrm>
-            <a:off x="3986783" y="17986248"/>
+            <a:off x="10616184" y="17716500"/>
             <a:ext cx="2167127" cy="178307"/>
           </a:xfrm>
           <a:prstGeom prst="rect">
@@ -11310,20 +11418,20 @@
                 </a:solidFill>
                 <a:latin typeface="Open Sans"/>
               </a:rPr>
-              <a:t>free on Ampere and later</a:t>
-            </a:r>
-          </a:p>
-        </p:txBody>
-      </p:sp>
-      <p:sp>
-        <p:nvSpPr>
-          <p:cNvPr id="70" name="Cell4_R010C2"/>
+              <a:t>a no-op on a transformer</a:t>
+            </a:r>
+          </a:p>
+        </p:txBody>
+      </p:sp>
+      <p:sp>
+        <p:nvSpPr>
+          <p:cNvPr id="68" name="Cell4_R09C2"/>
           <p:cNvSpPr txBox="1"/>
           <p:nvPr/>
         </p:nvSpPr>
         <p:spPr>
           <a:xfrm>
-            <a:off x="6245352" y="17986248"/>
+            <a:off x="12874752" y="17716500"/>
             <a:ext cx="978408" cy="178307"/>
           </a:xfrm>
           <a:prstGeom prst="rect">
@@ -11348,24 +11456,24 @@
             <a:r>
               <a:rPr sz="1100" b="1" i="0">
                 <a:solidFill>
-                  <a:srgbClr val="1F7A4C"/>
-                </a:solidFill>
-                <a:latin typeface="Open Sans"/>
-              </a:rPr>
-              <a:t>yes</a:t>
+                  <a:srgbClr val="B03A2E"/>
+                </a:solidFill>
+                <a:latin typeface="Open Sans"/>
+              </a:rPr>
+              <a:t>no</a:t>
             </a:r>
           </a:p>
         </p:txBody>
       </p:sp>
       <p:cxnSp>
         <p:nvCxnSpPr>
-          <p:cNvPr id="71" name="Connector 70"/>
+          <p:cNvPr id="69" name="Connector 68"/>
           <p:cNvCxnSpPr/>
           <p:nvPr/>
         </p:nvCxnSpPr>
         <p:spPr>
           <a:xfrm>
-            <a:off x="1371600" y="18164556"/>
+            <a:off x="8001000" y="17894808"/>
             <a:ext cx="5943600" cy="0"/>
           </a:xfrm>
           <a:prstGeom prst="line">
@@ -11394,13 +11502,13 @@
       </p:cxnSp>
       <p:sp>
         <p:nvSpPr>
-          <p:cNvPr id="72" name="Cell4_R011C0"/>
+          <p:cNvPr id="70" name="Cell4_R010C0"/>
           <p:cNvSpPr txBox="1"/>
           <p:nvPr/>
         </p:nvSpPr>
         <p:spPr>
           <a:xfrm>
-            <a:off x="1371600" y="18201132"/>
+            <a:off x="8001000" y="17931384"/>
             <a:ext cx="2523744" cy="178307"/>
           </a:xfrm>
           <a:prstGeom prst="rect">
@@ -11429,20 +11537,20 @@
                 </a:solidFill>
                 <a:latin typeface="Open Sans"/>
               </a:rPr>
-              <a:t>10 · cudnn.benchmark = True</a:t>
-            </a:r>
-          </a:p>
-        </p:txBody>
-      </p:sp>
-      <p:sp>
-        <p:nvSpPr>
-          <p:cNvPr id="73" name="Cell4_R011C1"/>
+              <a:t>9 · TF32 for matmul and cuDNN</a:t>
+            </a:r>
+          </a:p>
+        </p:txBody>
+      </p:sp>
+      <p:sp>
+        <p:nvSpPr>
+          <p:cNvPr id="71" name="Cell4_R010C1"/>
           <p:cNvSpPr txBox="1"/>
           <p:nvPr/>
         </p:nvSpPr>
         <p:spPr>
           <a:xfrm>
-            <a:off x="3986783" y="18201132"/>
+            <a:off x="10616184" y="17931384"/>
             <a:ext cx="2167127" cy="178307"/>
           </a:xfrm>
           <a:prstGeom prst="rect">
@@ -11471,20 +11579,20 @@
                 </a:solidFill>
                 <a:latin typeface="Open Sans"/>
               </a:rPr>
-              <a:t>worth it when shapes are fixed</a:t>
-            </a:r>
-          </a:p>
-        </p:txBody>
-      </p:sp>
-      <p:sp>
-        <p:nvSpPr>
-          <p:cNvPr id="74" name="Cell4_R011C2"/>
+              <a:t>free on Ampere and later</a:t>
+            </a:r>
+          </a:p>
+        </p:txBody>
+      </p:sp>
+      <p:sp>
+        <p:nvSpPr>
+          <p:cNvPr id="72" name="Cell4_R010C2"/>
           <p:cNvSpPr txBox="1"/>
           <p:nvPr/>
         </p:nvSpPr>
         <p:spPr>
           <a:xfrm>
-            <a:off x="6245352" y="18201132"/>
+            <a:off x="12874752" y="17931384"/>
             <a:ext cx="978408" cy="178307"/>
           </a:xfrm>
           <a:prstGeom prst="rect">
@@ -11518,141 +11626,15 @@
           </a:p>
         </p:txBody>
       </p:sp>
-      <p:sp>
-        <p:nvSpPr>
-          <p:cNvPr id="75" name="Cell4_H10"/>
-          <p:cNvSpPr txBox="1"/>
-          <p:nvPr/>
-        </p:nvSpPr>
-        <p:spPr>
-          <a:xfrm>
-            <a:off x="7863840" y="15617952"/>
-            <a:ext cx="1783080" cy="201168"/>
-          </a:xfrm>
-          <a:prstGeom prst="rect">
-            <a:avLst/>
-          </a:prstGeom>
-          <a:noFill/>
-        </p:spPr>
-        <p:txBody>
-          <a:bodyPr wrap="square" lIns="27432" tIns="27432" rIns="27432" bIns="27432" anchor="t">
-            <a:noAutofit/>
-          </a:bodyPr>
-          <a:lstStyle/>
-          <a:p>
-            <a:pPr algn="l">
-              <a:lnSpc>
-                <a:spcPct val="105000"/>
-              </a:lnSpc>
-              <a:spcAft>
-                <a:spcPts val="0"/>
-              </a:spcAft>
-            </a:pPr>
-            <a:r>
-              <a:rPr sz="1000" b="1" i="0">
-                <a:solidFill>
-                  <a:srgbClr val="5E5A66"/>
-                </a:solidFill>
-                <a:latin typeface="Uni Sans Book"/>
-              </a:rPr>
-              <a:t>WHAT CHANGED</a:t>
-            </a:r>
-          </a:p>
-        </p:txBody>
-      </p:sp>
-      <p:sp>
-        <p:nvSpPr>
-          <p:cNvPr id="76" name="Cell4_H11"/>
-          <p:cNvSpPr txBox="1"/>
-          <p:nvPr/>
-        </p:nvSpPr>
-        <p:spPr>
-          <a:xfrm>
-            <a:off x="10479024" y="15617952"/>
-            <a:ext cx="1783080" cy="201168"/>
-          </a:xfrm>
-          <a:prstGeom prst="rect">
-            <a:avLst/>
-          </a:prstGeom>
-          <a:noFill/>
-        </p:spPr>
-        <p:txBody>
-          <a:bodyPr wrap="square" lIns="27432" tIns="27432" rIns="27432" bIns="27432" anchor="t">
-            <a:noAutofit/>
-          </a:bodyPr>
-          <a:lstStyle/>
-          <a:p>
-            <a:pPr algn="l">
-              <a:lnSpc>
-                <a:spcPct val="105000"/>
-              </a:lnSpc>
-              <a:spcAft>
-                <a:spcPts val="0"/>
-              </a:spcAft>
-            </a:pPr>
-            <a:r>
-              <a:rPr sz="1000" b="1" i="0">
-                <a:solidFill>
-                  <a:srgbClr val="5E5A66"/>
-                </a:solidFill>
-                <a:latin typeface="Uni Sans Book"/>
-              </a:rPr>
-              <a:t>MEASURED</a:t>
-            </a:r>
-          </a:p>
-        </p:txBody>
-      </p:sp>
-      <p:sp>
-        <p:nvSpPr>
-          <p:cNvPr id="77" name="Cell4_H12"/>
-          <p:cNvSpPr txBox="1"/>
-          <p:nvPr/>
-        </p:nvSpPr>
-        <p:spPr>
-          <a:xfrm>
-            <a:off x="12737592" y="15617952"/>
-            <a:ext cx="1783080" cy="201168"/>
-          </a:xfrm>
-          <a:prstGeom prst="rect">
-            <a:avLst/>
-          </a:prstGeom>
-          <a:noFill/>
-        </p:spPr>
-        <p:txBody>
-          <a:bodyPr wrap="square" lIns="27432" tIns="27432" rIns="27432" bIns="27432" anchor="t">
-            <a:noAutofit/>
-          </a:bodyPr>
-          <a:lstStyle/>
-          <a:p>
-            <a:pPr algn="l">
-              <a:lnSpc>
-                <a:spcPct val="105000"/>
-              </a:lnSpc>
-              <a:spcAft>
-                <a:spcPts val="0"/>
-              </a:spcAft>
-            </a:pPr>
-            <a:r>
-              <a:rPr sz="1000" b="1" i="0">
-                <a:solidFill>
-                  <a:srgbClr val="5E5A66"/>
-                </a:solidFill>
-                <a:latin typeface="Uni Sans Book"/>
-              </a:rPr>
-              <a:t>KEPT?</a:t>
-            </a:r>
-          </a:p>
-        </p:txBody>
-      </p:sp>
       <p:cxnSp>
         <p:nvCxnSpPr>
-          <p:cNvPr id="78" name="Connector 77"/>
+          <p:cNvPr id="73" name="Connector 72"/>
           <p:cNvCxnSpPr/>
           <p:nvPr/>
         </p:nvCxnSpPr>
         <p:spPr>
           <a:xfrm>
-            <a:off x="7863840" y="15800832"/>
+            <a:off x="8001000" y="18109692"/>
             <a:ext cx="5943600" cy="0"/>
           </a:xfrm>
           <a:prstGeom prst="line">
@@ -11681,13 +11663,13 @@
       </p:cxnSp>
       <p:sp>
         <p:nvSpPr>
-          <p:cNvPr id="79" name="Cell4_R10C0"/>
+          <p:cNvPr id="74" name="Cell4_R011C0"/>
           <p:cNvSpPr txBox="1"/>
           <p:nvPr/>
         </p:nvSpPr>
         <p:spPr>
           <a:xfrm>
-            <a:off x="7863840" y="15837408"/>
+            <a:off x="8001000" y="18146268"/>
             <a:ext cx="2523744" cy="178307"/>
           </a:xfrm>
           <a:prstGeom prst="rect">
@@ -11716,20 +11698,20 @@
                 </a:solidFill>
                 <a:latin typeface="Open Sans"/>
               </a:rPr>
-              <a:t>11 · fused SGD and AdamW</a:t>
-            </a:r>
-          </a:p>
-        </p:txBody>
-      </p:sp>
-      <p:sp>
-        <p:nvSpPr>
-          <p:cNvPr id="80" name="Cell4_R10C1"/>
+              <a:t>10 · cudnn.benchmark = True</a:t>
+            </a:r>
+          </a:p>
+        </p:txBody>
+      </p:sp>
+      <p:sp>
+        <p:nvSpPr>
+          <p:cNvPr id="75" name="Cell4_R011C1"/>
           <p:cNvSpPr txBox="1"/>
           <p:nvPr/>
         </p:nvSpPr>
         <p:spPr>
           <a:xfrm>
-            <a:off x="10479024" y="15837408"/>
+            <a:off x="10616184" y="18146268"/>
             <a:ext cx="2167127" cy="178307"/>
           </a:xfrm>
           <a:prstGeom prst="rect">
@@ -11758,20 +11740,20 @@
                 </a:solidFill>
                 <a:latin typeface="Open Sans"/>
               </a:rPr>
-              <a:t>one kernel, not a chain</a:t>
-            </a:r>
-          </a:p>
-        </p:txBody>
-      </p:sp>
-      <p:sp>
-        <p:nvSpPr>
-          <p:cNvPr id="81" name="Cell4_R10C2"/>
+              <a:t>worth it when shapes are fixed</a:t>
+            </a:r>
+          </a:p>
+        </p:txBody>
+      </p:sp>
+      <p:sp>
+        <p:nvSpPr>
+          <p:cNvPr id="76" name="Cell4_R011C2"/>
           <p:cNvSpPr txBox="1"/>
           <p:nvPr/>
         </p:nvSpPr>
         <p:spPr>
           <a:xfrm>
-            <a:off x="12737592" y="15837408"/>
+            <a:off x="12874752" y="18146268"/>
             <a:ext cx="978408" cy="178307"/>
           </a:xfrm>
           <a:prstGeom prst="rect">
@@ -11805,15 +11787,141 @@
           </a:p>
         </p:txBody>
       </p:sp>
+      <p:sp>
+        <p:nvSpPr>
+          <p:cNvPr id="77" name="Cell4_H10"/>
+          <p:cNvSpPr txBox="1"/>
+          <p:nvPr/>
+        </p:nvSpPr>
+        <p:spPr>
+          <a:xfrm>
+            <a:off x="14493240" y="15563088"/>
+            <a:ext cx="1783080" cy="201168"/>
+          </a:xfrm>
+          <a:prstGeom prst="rect">
+            <a:avLst/>
+          </a:prstGeom>
+          <a:noFill/>
+        </p:spPr>
+        <p:txBody>
+          <a:bodyPr wrap="square" lIns="27432" tIns="27432" rIns="27432" bIns="27432" anchor="t">
+            <a:noAutofit/>
+          </a:bodyPr>
+          <a:lstStyle/>
+          <a:p>
+            <a:pPr algn="l">
+              <a:lnSpc>
+                <a:spcPct val="105000"/>
+              </a:lnSpc>
+              <a:spcAft>
+                <a:spcPts val="0"/>
+              </a:spcAft>
+            </a:pPr>
+            <a:r>
+              <a:rPr sz="1000" b="1" i="0">
+                <a:solidFill>
+                  <a:srgbClr val="5E5A66"/>
+                </a:solidFill>
+                <a:latin typeface="Uni Sans Book"/>
+              </a:rPr>
+              <a:t>WHAT CHANGED</a:t>
+            </a:r>
+          </a:p>
+        </p:txBody>
+      </p:sp>
+      <p:sp>
+        <p:nvSpPr>
+          <p:cNvPr id="78" name="Cell4_H11"/>
+          <p:cNvSpPr txBox="1"/>
+          <p:nvPr/>
+        </p:nvSpPr>
+        <p:spPr>
+          <a:xfrm>
+            <a:off x="17108424" y="15563088"/>
+            <a:ext cx="1783080" cy="201168"/>
+          </a:xfrm>
+          <a:prstGeom prst="rect">
+            <a:avLst/>
+          </a:prstGeom>
+          <a:noFill/>
+        </p:spPr>
+        <p:txBody>
+          <a:bodyPr wrap="square" lIns="27432" tIns="27432" rIns="27432" bIns="27432" anchor="t">
+            <a:noAutofit/>
+          </a:bodyPr>
+          <a:lstStyle/>
+          <a:p>
+            <a:pPr algn="l">
+              <a:lnSpc>
+                <a:spcPct val="105000"/>
+              </a:lnSpc>
+              <a:spcAft>
+                <a:spcPts val="0"/>
+              </a:spcAft>
+            </a:pPr>
+            <a:r>
+              <a:rPr sz="1000" b="1" i="0">
+                <a:solidFill>
+                  <a:srgbClr val="5E5A66"/>
+                </a:solidFill>
+                <a:latin typeface="Uni Sans Book"/>
+              </a:rPr>
+              <a:t>MEASURED</a:t>
+            </a:r>
+          </a:p>
+        </p:txBody>
+      </p:sp>
+      <p:sp>
+        <p:nvSpPr>
+          <p:cNvPr id="79" name="Cell4_H12"/>
+          <p:cNvSpPr txBox="1"/>
+          <p:nvPr/>
+        </p:nvSpPr>
+        <p:spPr>
+          <a:xfrm>
+            <a:off x="19366992" y="15563088"/>
+            <a:ext cx="1783080" cy="201168"/>
+          </a:xfrm>
+          <a:prstGeom prst="rect">
+            <a:avLst/>
+          </a:prstGeom>
+          <a:noFill/>
+        </p:spPr>
+        <p:txBody>
+          <a:bodyPr wrap="square" lIns="27432" tIns="27432" rIns="27432" bIns="27432" anchor="t">
+            <a:noAutofit/>
+          </a:bodyPr>
+          <a:lstStyle/>
+          <a:p>
+            <a:pPr algn="l">
+              <a:lnSpc>
+                <a:spcPct val="105000"/>
+              </a:lnSpc>
+              <a:spcAft>
+                <a:spcPts val="0"/>
+              </a:spcAft>
+            </a:pPr>
+            <a:r>
+              <a:rPr sz="1000" b="1" i="0">
+                <a:solidFill>
+                  <a:srgbClr val="5E5A66"/>
+                </a:solidFill>
+                <a:latin typeface="Uni Sans Book"/>
+              </a:rPr>
+              <a:t>KEPT?</a:t>
+            </a:r>
+          </a:p>
+        </p:txBody>
+      </p:sp>
       <p:cxnSp>
         <p:nvCxnSpPr>
-          <p:cNvPr id="82" name="Connector 81"/>
+          <p:cNvPr id="80" name="Connector 79"/>
           <p:cNvCxnSpPr/>
           <p:nvPr/>
         </p:nvCxnSpPr>
         <p:spPr>
           <a:xfrm>
-            <a:off x="7863840" y="16015716"/>
+            <a:off x="14493240" y="15745968"/>
             <a:ext cx="5943600" cy="0"/>
           </a:xfrm>
           <a:prstGeom prst="line">
@@ -11842,13 +11950,13 @@
       </p:cxnSp>
       <p:sp>
         <p:nvSpPr>
-          <p:cNvPr id="83" name="Cell4_R11C0"/>
+          <p:cNvPr id="81" name="Cell4_R10C0"/>
           <p:cNvSpPr txBox="1"/>
           <p:nvPr/>
         </p:nvSpPr>
         <p:spPr>
           <a:xfrm>
-            <a:off x="7863840" y="16052292"/>
+            <a:off x="14493240" y="15782544"/>
             <a:ext cx="2523744" cy="178307"/>
           </a:xfrm>
           <a:prstGeom prst="rect">
@@ -11877,20 +11985,20 @@
                 </a:solidFill>
                 <a:latin typeface="Open Sans"/>
               </a:rPr>
-              <a:t>12 · torch.compile</a:t>
-            </a:r>
-          </a:p>
-        </p:txBody>
-      </p:sp>
-      <p:sp>
-        <p:nvSpPr>
-          <p:cNvPr id="84" name="Cell4_R11C1"/>
+              <a:t>11 · fused SGD and AdamW</a:t>
+            </a:r>
+          </a:p>
+        </p:txBody>
+      </p:sp>
+      <p:sp>
+        <p:nvSpPr>
+          <p:cNvPr id="82" name="Cell4_R10C1"/>
           <p:cNvSpPr txBox="1"/>
           <p:nvPr/>
         </p:nvSpPr>
         <p:spPr>
           <a:xfrm>
-            <a:off x="10479024" y="16052292"/>
+            <a:off x="17108424" y="15782544"/>
             <a:ext cx="2167127" cy="178307"/>
           </a:xfrm>
           <a:prstGeom prst="rect">
@@ -11919,20 +12027,20 @@
                 </a:solidFill>
                 <a:latin typeface="Open Sans"/>
               </a:rPr>
-              <a:t>no Triton on Windows</a:t>
-            </a:r>
-          </a:p>
-        </p:txBody>
-      </p:sp>
-      <p:sp>
-        <p:nvSpPr>
-          <p:cNvPr id="85" name="Cell4_R11C2"/>
+              <a:t>one kernel, not a chain</a:t>
+            </a:r>
+          </a:p>
+        </p:txBody>
+      </p:sp>
+      <p:sp>
+        <p:nvSpPr>
+          <p:cNvPr id="83" name="Cell4_R10C2"/>
           <p:cNvSpPr txBox="1"/>
           <p:nvPr/>
         </p:nvSpPr>
         <p:spPr>
           <a:xfrm>
-            <a:off x="12737592" y="16052292"/>
+            <a:off x="19366992" y="15782544"/>
             <a:ext cx="978408" cy="178307"/>
           </a:xfrm>
           <a:prstGeom prst="rect">
@@ -11957,24 +12065,24 @@
             <a:r>
               <a:rPr sz="1100" b="1" i="0">
                 <a:solidFill>
-                  <a:srgbClr val="2A5DB0"/>
-                </a:solidFill>
-                <a:latin typeface="Open Sans"/>
-              </a:rPr>
-              <a:t>can't</a:t>
+                  <a:srgbClr val="1F7A4C"/>
+                </a:solidFill>
+                <a:latin typeface="Open Sans"/>
+              </a:rPr>
+              <a:t>yes</a:t>
             </a:r>
           </a:p>
         </p:txBody>
       </p:sp>
       <p:cxnSp>
         <p:nvCxnSpPr>
-          <p:cNvPr id="86" name="Connector 85"/>
+          <p:cNvPr id="84" name="Connector 83"/>
           <p:cNvCxnSpPr/>
           <p:nvPr/>
         </p:nvCxnSpPr>
         <p:spPr>
           <a:xfrm>
-            <a:off x="7863840" y="16230600"/>
+            <a:off x="14493240" y="15960852"/>
             <a:ext cx="5943600" cy="0"/>
           </a:xfrm>
           <a:prstGeom prst="line">
@@ -12003,13 +12111,13 @@
       </p:cxnSp>
       <p:sp>
         <p:nvSpPr>
-          <p:cNvPr id="87" name="Cell4_R12C0"/>
+          <p:cNvPr id="85" name="Cell4_R11C0"/>
           <p:cNvSpPr txBox="1"/>
           <p:nvPr/>
         </p:nvSpPr>
         <p:spPr>
           <a:xfrm>
-            <a:off x="7863840" y="16267176"/>
+            <a:off x="14493240" y="15997428"/>
             <a:ext cx="2523744" cy="178307"/>
           </a:xfrm>
           <a:prstGeom prst="rect">
@@ -12038,20 +12146,20 @@
                 </a:solidFill>
                 <a:latin typeface="Open Sans"/>
               </a:rPr>
-              <a:t>13 · attention backend</a:t>
-            </a:r>
-          </a:p>
-        </p:txBody>
-      </p:sp>
-      <p:sp>
-        <p:nvSpPr>
-          <p:cNvPr id="88" name="Cell4_R12C1"/>
+              <a:t>12 · torch.compile</a:t>
+            </a:r>
+          </a:p>
+        </p:txBody>
+      </p:sp>
+      <p:sp>
+        <p:nvSpPr>
+          <p:cNvPr id="86" name="Cell4_R11C1"/>
           <p:cNvSpPr txBox="1"/>
           <p:nvPr/>
         </p:nvSpPr>
         <p:spPr>
           <a:xfrm>
-            <a:off x="10479024" y="16267176"/>
+            <a:off x="17108424" y="15997428"/>
             <a:ext cx="2167127" cy="178307"/>
           </a:xfrm>
           <a:prstGeom prst="rect">
@@ -12080,20 +12188,20 @@
                 </a:solidFill>
                 <a:latin typeface="Open Sans"/>
               </a:rPr>
-              <a:t>already sdpa</a:t>
-            </a:r>
-          </a:p>
-        </p:txBody>
-      </p:sp>
-      <p:sp>
-        <p:nvSpPr>
-          <p:cNvPr id="89" name="Cell4_R12C2"/>
+              <a:t>no Triton on Windows</a:t>
+            </a:r>
+          </a:p>
+        </p:txBody>
+      </p:sp>
+      <p:sp>
+        <p:nvSpPr>
+          <p:cNvPr id="87" name="Cell4_R11C2"/>
           <p:cNvSpPr txBox="1"/>
           <p:nvPr/>
         </p:nvSpPr>
         <p:spPr>
           <a:xfrm>
-            <a:off x="12737592" y="16267176"/>
+            <a:off x="19366992" y="15997428"/>
             <a:ext cx="978408" cy="178307"/>
           </a:xfrm>
           <a:prstGeom prst="rect">
@@ -12118,66 +12226,24 @@
             <a:r>
               <a:rPr sz="1100" b="1" i="0">
                 <a:solidFill>
-                  <a:srgbClr val="5E5A66"/>
-                </a:solidFill>
-                <a:latin typeface="Open Sans"/>
-              </a:rPr>
-              <a:t>no change</a:t>
-            </a:r>
-          </a:p>
-        </p:txBody>
-      </p:sp>
-      <p:sp>
-        <p:nvSpPr>
-          <p:cNvPr id="90" name="Cell4_G13"/>
-          <p:cNvSpPr txBox="1"/>
-          <p:nvPr/>
-        </p:nvSpPr>
-        <p:spPr>
-          <a:xfrm>
-            <a:off x="7863840" y="16482059"/>
-            <a:ext cx="5943600" cy="196596"/>
-          </a:xfrm>
-          <a:prstGeom prst="rect">
-            <a:avLst/>
-          </a:prstGeom>
-          <a:noFill/>
-        </p:spPr>
-        <p:txBody>
-          <a:bodyPr wrap="square" lIns="27432" tIns="27432" rIns="27432" bIns="27432" anchor="ctr">
-            <a:noAutofit/>
-          </a:bodyPr>
-          <a:lstStyle/>
-          <a:p>
-            <a:pPr algn="l">
-              <a:lnSpc>
-                <a:spcPct val="105000"/>
-              </a:lnSpc>
-              <a:spcAft>
-                <a:spcPts val="0"/>
-              </a:spcAft>
-            </a:pPr>
-            <a:r>
-              <a:rPr sz="1000" b="1" i="0">
-                <a:solidFill>
-                  <a:srgbClr val="32006E"/>
-                </a:solidFill>
-                <a:latin typeface="Uni Sans Book"/>
-              </a:rPr>
-              <a:t>HOST-SYNC DISCIPLINE</a:t>
+                  <a:srgbClr val="2A5DB0"/>
+                </a:solidFill>
+                <a:latin typeface="Open Sans"/>
+              </a:rPr>
+              <a:t>can't</a:t>
             </a:r>
           </a:p>
         </p:txBody>
       </p:sp>
       <p:cxnSp>
         <p:nvCxnSpPr>
-          <p:cNvPr id="91" name="Connector 90"/>
+          <p:cNvPr id="88" name="Connector 87"/>
           <p:cNvCxnSpPr/>
           <p:nvPr/>
         </p:nvCxnSpPr>
         <p:spPr>
           <a:xfrm>
-            <a:off x="7863840" y="16660368"/>
+            <a:off x="14493240" y="16175736"/>
             <a:ext cx="5943600" cy="0"/>
           </a:xfrm>
           <a:prstGeom prst="line">
@@ -12206,13 +12272,13 @@
       </p:cxnSp>
       <p:sp>
         <p:nvSpPr>
-          <p:cNvPr id="92" name="Cell4_R14C0"/>
+          <p:cNvPr id="89" name="Cell4_R12C0"/>
           <p:cNvSpPr txBox="1"/>
           <p:nvPr/>
         </p:nvSpPr>
         <p:spPr>
           <a:xfrm>
-            <a:off x="7863840" y="16696944"/>
+            <a:off x="14493240" y="16212312"/>
             <a:ext cx="2523744" cy="178307"/>
           </a:xfrm>
           <a:prstGeom prst="rect">
@@ -12241,20 +12307,20 @@
                 </a:solidFill>
                 <a:latin typeface="Open Sans"/>
               </a:rPr>
-              <a:t>14 · drop the per-step .item(), CIFAR</a:t>
-            </a:r>
-          </a:p>
-        </p:txBody>
-      </p:sp>
-      <p:sp>
-        <p:nvSpPr>
-          <p:cNvPr id="93" name="Cell4_R14C1"/>
+              <a:t>13 · attention backend</a:t>
+            </a:r>
+          </a:p>
+        </p:txBody>
+      </p:sp>
+      <p:sp>
+        <p:nvSpPr>
+          <p:cNvPr id="90" name="Cell4_R12C1"/>
           <p:cNvSpPr txBox="1"/>
           <p:nvPr/>
         </p:nvSpPr>
         <p:spPr>
           <a:xfrm>
-            <a:off x="10479024" y="16696944"/>
+            <a:off x="17108424" y="16212312"/>
             <a:ext cx="2167127" cy="178307"/>
           </a:xfrm>
           <a:prstGeom prst="rect">
@@ -12277,26 +12343,26 @@
               </a:spcAft>
             </a:pPr>
             <a:r>
-              <a:rPr sz="1100" b="1" i="0">
-                <a:solidFill>
-                  <a:srgbClr val="1F1F24"/>
-                </a:solidFill>
-                <a:latin typeface="Open Sans"/>
-              </a:rPr>
-              <a:t>~7%</a:t>
-            </a:r>
-          </a:p>
-        </p:txBody>
-      </p:sp>
-      <p:sp>
-        <p:nvSpPr>
-          <p:cNvPr id="94" name="Cell4_R14C2"/>
+              <a:rPr sz="1100" b="0" i="0">
+                <a:solidFill>
+                  <a:srgbClr val="1F1F24"/>
+                </a:solidFill>
+                <a:latin typeface="Open Sans"/>
+              </a:rPr>
+              <a:t>already sdpa</a:t>
+            </a:r>
+          </a:p>
+        </p:txBody>
+      </p:sp>
+      <p:sp>
+        <p:nvSpPr>
+          <p:cNvPr id="91" name="Cell4_R12C2"/>
           <p:cNvSpPr txBox="1"/>
           <p:nvPr/>
         </p:nvSpPr>
         <p:spPr>
           <a:xfrm>
-            <a:off x="12737592" y="16696944"/>
+            <a:off x="19366992" y="16212312"/>
             <a:ext cx="978408" cy="178307"/>
           </a:xfrm>
           <a:prstGeom prst="rect">
@@ -12321,24 +12387,66 @@
             <a:r>
               <a:rPr sz="1100" b="1" i="0">
                 <a:solidFill>
-                  <a:srgbClr val="1F7A4C"/>
-                </a:solidFill>
-                <a:latin typeface="Open Sans"/>
-              </a:rPr>
-              <a:t>yes</a:t>
+                  <a:srgbClr val="5E5A66"/>
+                </a:solidFill>
+                <a:latin typeface="Open Sans"/>
+              </a:rPr>
+              <a:t>no change</a:t>
+            </a:r>
+          </a:p>
+        </p:txBody>
+      </p:sp>
+      <p:sp>
+        <p:nvSpPr>
+          <p:cNvPr id="92" name="Cell4_G13"/>
+          <p:cNvSpPr txBox="1"/>
+          <p:nvPr/>
+        </p:nvSpPr>
+        <p:spPr>
+          <a:xfrm>
+            <a:off x="14493240" y="16427196"/>
+            <a:ext cx="5943600" cy="196596"/>
+          </a:xfrm>
+          <a:prstGeom prst="rect">
+            <a:avLst/>
+          </a:prstGeom>
+          <a:noFill/>
+        </p:spPr>
+        <p:txBody>
+          <a:bodyPr wrap="square" lIns="27432" tIns="27432" rIns="27432" bIns="27432" anchor="ctr">
+            <a:noAutofit/>
+          </a:bodyPr>
+          <a:lstStyle/>
+          <a:p>
+            <a:pPr algn="l">
+              <a:lnSpc>
+                <a:spcPct val="105000"/>
+              </a:lnSpc>
+              <a:spcAft>
+                <a:spcPts val="0"/>
+              </a:spcAft>
+            </a:pPr>
+            <a:r>
+              <a:rPr sz="1000" b="1" i="0">
+                <a:solidFill>
+                  <a:srgbClr val="32006E"/>
+                </a:solidFill>
+                <a:latin typeface="Uni Sans Book"/>
+              </a:rPr>
+              <a:t>HOST-SYNC DISCIPLINE</a:t>
             </a:r>
           </a:p>
         </p:txBody>
       </p:sp>
       <p:cxnSp>
         <p:nvCxnSpPr>
-          <p:cNvPr id="95" name="Connector 94"/>
+          <p:cNvPr id="93" name="Connector 92"/>
           <p:cNvCxnSpPr/>
           <p:nvPr/>
         </p:nvCxnSpPr>
         <p:spPr>
           <a:xfrm>
-            <a:off x="7863840" y="16875252"/>
+            <a:off x="14493240" y="16605504"/>
             <a:ext cx="5943600" cy="0"/>
           </a:xfrm>
           <a:prstGeom prst="line">
@@ -12367,13 +12475,13 @@
       </p:cxnSp>
       <p:sp>
         <p:nvSpPr>
-          <p:cNvPr id="96" name="Cell4_R15C0"/>
+          <p:cNvPr id="94" name="Cell4_R14C0"/>
           <p:cNvSpPr txBox="1"/>
           <p:nvPr/>
         </p:nvSpPr>
         <p:spPr>
           <a:xfrm>
-            <a:off x="7863840" y="16911828"/>
+            <a:off x="14493240" y="16642080"/>
             <a:ext cx="2523744" cy="178307"/>
           </a:xfrm>
           <a:prstGeom prst="rect">
@@ -12402,20 +12510,20 @@
                 </a:solidFill>
                 <a:latin typeface="Open Sans"/>
               </a:rPr>
-              <a:t>15 · the same at MLM scale</a:t>
-            </a:r>
-          </a:p>
-        </p:txBody>
-      </p:sp>
-      <p:sp>
-        <p:nvSpPr>
-          <p:cNvPr id="97" name="Cell4_R15C1"/>
+              <a:t>14 · drop the per-step .item(), CIFAR</a:t>
+            </a:r>
+          </a:p>
+        </p:txBody>
+      </p:sp>
+      <p:sp>
+        <p:nvSpPr>
+          <p:cNvPr id="95" name="Cell4_R14C1"/>
           <p:cNvSpPr txBox="1"/>
           <p:nvPr/>
         </p:nvSpPr>
         <p:spPr>
           <a:xfrm>
-            <a:off x="10479024" y="16911828"/>
+            <a:off x="17108424" y="16642080"/>
             <a:ext cx="2167127" cy="178307"/>
           </a:xfrm>
           <a:prstGeom prst="rect">
@@ -12444,29 +12552,20 @@
                 </a:solidFill>
                 <a:latin typeface="Open Sans"/>
               </a:rPr>
-              <a:t>2%</a:t>
-            </a:r>
-            <a:r>
-              <a:rPr sz="1100" b="0" i="0">
-                <a:solidFill>
-                  <a:srgbClr val="1F1F24"/>
-                </a:solidFill>
-                <a:latin typeface="Open Sans"/>
-              </a:rPr>
-              <a:t> — a live loss is worth it</a:t>
-            </a:r>
-          </a:p>
-        </p:txBody>
-      </p:sp>
-      <p:sp>
-        <p:nvSpPr>
-          <p:cNvPr id="98" name="Cell4_R15C2"/>
+              <a:t>~7%</a:t>
+            </a:r>
+          </a:p>
+        </p:txBody>
+      </p:sp>
+      <p:sp>
+        <p:nvSpPr>
+          <p:cNvPr id="96" name="Cell4_R14C2"/>
           <p:cNvSpPr txBox="1"/>
           <p:nvPr/>
         </p:nvSpPr>
         <p:spPr>
           <a:xfrm>
-            <a:off x="12737592" y="16911828"/>
+            <a:off x="19366992" y="16642080"/>
             <a:ext cx="978408" cy="178307"/>
           </a:xfrm>
           <a:prstGeom prst="rect">
@@ -12491,24 +12590,24 @@
             <a:r>
               <a:rPr sz="1100" b="1" i="0">
                 <a:solidFill>
-                  <a:srgbClr val="B03A2E"/>
-                </a:solidFill>
-                <a:latin typeface="Open Sans"/>
-              </a:rPr>
-              <a:t>no</a:t>
+                  <a:srgbClr val="1F7A4C"/>
+                </a:solidFill>
+                <a:latin typeface="Open Sans"/>
+              </a:rPr>
+              <a:t>yes</a:t>
             </a:r>
           </a:p>
         </p:txBody>
       </p:sp>
       <p:cxnSp>
         <p:nvCxnSpPr>
-          <p:cNvPr id="99" name="Connector 98"/>
+          <p:cNvPr id="97" name="Connector 96"/>
           <p:cNvCxnSpPr/>
           <p:nvPr/>
         </p:nvCxnSpPr>
         <p:spPr>
           <a:xfrm>
-            <a:off x="7863840" y="17090136"/>
+            <a:off x="14493240" y="16820388"/>
             <a:ext cx="5943600" cy="0"/>
           </a:xfrm>
           <a:prstGeom prst="line">
@@ -12537,13 +12636,13 @@
       </p:cxnSp>
       <p:sp>
         <p:nvSpPr>
-          <p:cNvPr id="100" name="Cell4_R16C0"/>
+          <p:cNvPr id="98" name="Cell4_R15C0"/>
           <p:cNvSpPr txBox="1"/>
           <p:nvPr/>
         </p:nvSpPr>
         <p:spPr>
           <a:xfrm>
-            <a:off x="7863840" y="17126712"/>
+            <a:off x="14493240" y="16856964"/>
             <a:ext cx="2523744" cy="178307"/>
           </a:xfrm>
           <a:prstGeom prst="rect">
@@ -12572,20 +12671,20 @@
                 </a:solidFill>
                 <a:latin typeface="Open Sans"/>
               </a:rPr>
-              <a:t>16 · zero_grad(set_to_none=True)</a:t>
-            </a:r>
-          </a:p>
-        </p:txBody>
-      </p:sp>
-      <p:sp>
-        <p:nvSpPr>
-          <p:cNvPr id="101" name="Cell4_R16C1"/>
+              <a:t>15 · the same at MLM scale</a:t>
+            </a:r>
+          </a:p>
+        </p:txBody>
+      </p:sp>
+      <p:sp>
+        <p:nvSpPr>
+          <p:cNvPr id="99" name="Cell4_R15C1"/>
           <p:cNvSpPr txBox="1"/>
           <p:nvPr/>
         </p:nvSpPr>
         <p:spPr>
           <a:xfrm>
-            <a:off x="10479024" y="17126712"/>
+            <a:off x="17108424" y="16856964"/>
             <a:ext cx="2167127" cy="178307"/>
           </a:xfrm>
           <a:prstGeom prst="rect">
@@ -12608,26 +12707,35 @@
               </a:spcAft>
             </a:pPr>
             <a:r>
+              <a:rPr sz="1100" b="1" i="0">
+                <a:solidFill>
+                  <a:srgbClr val="1F1F24"/>
+                </a:solidFill>
+                <a:latin typeface="Open Sans"/>
+              </a:rPr>
+              <a:t>2%</a:t>
+            </a:r>
+            <a:r>
               <a:rPr sz="1100" b="0" i="0">
                 <a:solidFill>
                   <a:srgbClr val="1F1F24"/>
                 </a:solidFill>
                 <a:latin typeface="Open Sans"/>
               </a:rPr>
-              <a:t>skips a full zero-fill</a:t>
-            </a:r>
-          </a:p>
-        </p:txBody>
-      </p:sp>
-      <p:sp>
-        <p:nvSpPr>
-          <p:cNvPr id="102" name="Cell4_R16C2"/>
+              <a:t> — a live loss is worth it</a:t>
+            </a:r>
+          </a:p>
+        </p:txBody>
+      </p:sp>
+      <p:sp>
+        <p:nvSpPr>
+          <p:cNvPr id="100" name="Cell4_R15C2"/>
           <p:cNvSpPr txBox="1"/>
           <p:nvPr/>
         </p:nvSpPr>
         <p:spPr>
           <a:xfrm>
-            <a:off x="12737592" y="17126712"/>
+            <a:off x="19366992" y="16856964"/>
             <a:ext cx="978408" cy="178307"/>
           </a:xfrm>
           <a:prstGeom prst="rect">
@@ -12652,66 +12760,24 @@
             <a:r>
               <a:rPr sz="1100" b="1" i="0">
                 <a:solidFill>
-                  <a:srgbClr val="1F7A4C"/>
-                </a:solidFill>
-                <a:latin typeface="Open Sans"/>
-              </a:rPr>
-              <a:t>yes</a:t>
-            </a:r>
-          </a:p>
-        </p:txBody>
-      </p:sp>
-      <p:sp>
-        <p:nvSpPr>
-          <p:cNvPr id="103" name="Cell4_G17"/>
-          <p:cNvSpPr txBox="1"/>
-          <p:nvPr/>
-        </p:nvSpPr>
-        <p:spPr>
-          <a:xfrm>
-            <a:off x="7863840" y="17341596"/>
-            <a:ext cx="5943600" cy="196596"/>
-          </a:xfrm>
-          <a:prstGeom prst="rect">
-            <a:avLst/>
-          </a:prstGeom>
-          <a:noFill/>
-        </p:spPr>
-        <p:txBody>
-          <a:bodyPr wrap="square" lIns="27432" tIns="27432" rIns="27432" bIns="27432" anchor="ctr">
-            <a:noAutofit/>
-          </a:bodyPr>
-          <a:lstStyle/>
-          <a:p>
-            <a:pPr algn="l">
-              <a:lnSpc>
-                <a:spcPct val="105000"/>
-              </a:lnSpc>
-              <a:spcAft>
-                <a:spcPts val="0"/>
-              </a:spcAft>
-            </a:pPr>
-            <a:r>
-              <a:rPr sz="1000" b="1" i="0">
-                <a:solidFill>
-                  <a:srgbClr val="32006E"/>
-                </a:solidFill>
-                <a:latin typeface="Uni Sans Book"/>
-              </a:rPr>
-              <a:t>BATCHING AND SCHEDULING</a:t>
+                  <a:srgbClr val="B03A2E"/>
+                </a:solidFill>
+                <a:latin typeface="Open Sans"/>
+              </a:rPr>
+              <a:t>no</a:t>
             </a:r>
           </a:p>
         </p:txBody>
       </p:sp>
       <p:cxnSp>
         <p:nvCxnSpPr>
-          <p:cNvPr id="104" name="Connector 103"/>
+          <p:cNvPr id="101" name="Connector 100"/>
           <p:cNvCxnSpPr/>
           <p:nvPr/>
         </p:nvCxnSpPr>
         <p:spPr>
           <a:xfrm>
-            <a:off x="7863840" y="17519904"/>
+            <a:off x="14493240" y="17035272"/>
             <a:ext cx="5943600" cy="0"/>
           </a:xfrm>
           <a:prstGeom prst="line">
@@ -12740,13 +12806,13 @@
       </p:cxnSp>
       <p:sp>
         <p:nvSpPr>
-          <p:cNvPr id="105" name="Cell4_R18C0"/>
+          <p:cNvPr id="102" name="Cell4_R16C0"/>
           <p:cNvSpPr txBox="1"/>
           <p:nvPr/>
         </p:nvSpPr>
         <p:spPr>
           <a:xfrm>
-            <a:off x="7863840" y="17556480"/>
+            <a:off x="14493240" y="17071848"/>
             <a:ext cx="2523744" cy="178307"/>
           </a:xfrm>
           <a:prstGeom prst="rect">
@@ -12775,20 +12841,20 @@
                 </a:solidFill>
                 <a:latin typeface="Open Sans"/>
               </a:rPr>
-              <a:t>17 · batch 64 → 128</a:t>
-            </a:r>
-          </a:p>
-        </p:txBody>
-      </p:sp>
-      <p:sp>
-        <p:nvSpPr>
-          <p:cNvPr id="106" name="Cell4_R18C1"/>
+              <a:t>16 · zero_grad(set_to_none=True)</a:t>
+            </a:r>
+          </a:p>
+        </p:txBody>
+      </p:sp>
+      <p:sp>
+        <p:nvSpPr>
+          <p:cNvPr id="103" name="Cell4_R16C1"/>
           <p:cNvSpPr txBox="1"/>
           <p:nvPr/>
         </p:nvSpPr>
         <p:spPr>
           <a:xfrm>
-            <a:off x="10479024" y="17556480"/>
+            <a:off x="17108424" y="17071848"/>
             <a:ext cx="2167127" cy="178307"/>
           </a:xfrm>
           <a:prstGeom prst="rect">
@@ -12811,44 +12877,26 @@
               </a:spcAft>
             </a:pPr>
             <a:r>
-              <a:rPr sz="1100" b="1" i="0">
-                <a:solidFill>
-                  <a:srgbClr val="1F1F24"/>
-                </a:solidFill>
-                <a:latin typeface="Open Sans"/>
-              </a:rPr>
-              <a:t>1.31×</a:t>
-            </a:r>
-            <a:r>
               <a:rPr sz="1100" b="0" i="0">
                 <a:solidFill>
                   <a:srgbClr val="1F1F24"/>
                 </a:solidFill>
                 <a:latin typeface="Open Sans"/>
               </a:rPr>
-              <a:t> — 2048 is </a:t>
-            </a:r>
-            <a:r>
-              <a:rPr sz="1100" b="0" i="1">
-                <a:solidFill>
-                  <a:srgbClr val="1F1F24"/>
-                </a:solidFill>
-                <a:latin typeface="Open Sans"/>
-              </a:rPr>
-              <a:t>slower</a:t>
-            </a:r>
-          </a:p>
-        </p:txBody>
-      </p:sp>
-      <p:sp>
-        <p:nvSpPr>
-          <p:cNvPr id="107" name="Cell4_R18C2"/>
+              <a:t>skips a full zero-fill</a:t>
+            </a:r>
+          </a:p>
+        </p:txBody>
+      </p:sp>
+      <p:sp>
+        <p:nvSpPr>
+          <p:cNvPr id="104" name="Cell4_R16C2"/>
           <p:cNvSpPr txBox="1"/>
           <p:nvPr/>
         </p:nvSpPr>
         <p:spPr>
           <a:xfrm>
-            <a:off x="12737592" y="17556480"/>
+            <a:off x="19366992" y="17071848"/>
             <a:ext cx="978408" cy="178307"/>
           </a:xfrm>
           <a:prstGeom prst="rect">
@@ -12882,15 +12930,57 @@
           </a:p>
         </p:txBody>
       </p:sp>
+      <p:sp>
+        <p:nvSpPr>
+          <p:cNvPr id="105" name="Cell4_G17"/>
+          <p:cNvSpPr txBox="1"/>
+          <p:nvPr/>
+        </p:nvSpPr>
+        <p:spPr>
+          <a:xfrm>
+            <a:off x="14493240" y="17286732"/>
+            <a:ext cx="5943600" cy="196596"/>
+          </a:xfrm>
+          <a:prstGeom prst="rect">
+            <a:avLst/>
+          </a:prstGeom>
+          <a:noFill/>
+        </p:spPr>
+        <p:txBody>
+          <a:bodyPr wrap="square" lIns="27432" tIns="27432" rIns="27432" bIns="27432" anchor="ctr">
+            <a:noAutofit/>
+          </a:bodyPr>
+          <a:lstStyle/>
+          <a:p>
+            <a:pPr algn="l">
+              <a:lnSpc>
+                <a:spcPct val="105000"/>
+              </a:lnSpc>
+              <a:spcAft>
+                <a:spcPts val="0"/>
+              </a:spcAft>
+            </a:pPr>
+            <a:r>
+              <a:rPr sz="1000" b="1" i="0">
+                <a:solidFill>
+                  <a:srgbClr val="32006E"/>
+                </a:solidFill>
+                <a:latin typeface="Uni Sans Book"/>
+              </a:rPr>
+              <a:t>BATCHING AND SCHEDULING</a:t>
+            </a:r>
+          </a:p>
+        </p:txBody>
+      </p:sp>
       <p:cxnSp>
         <p:nvCxnSpPr>
-          <p:cNvPr id="108" name="Connector 107"/>
+          <p:cNvPr id="106" name="Connector 105"/>
           <p:cNvCxnSpPr/>
           <p:nvPr/>
         </p:nvCxnSpPr>
         <p:spPr>
           <a:xfrm>
-            <a:off x="7863840" y="17734788"/>
+            <a:off x="14493240" y="17465040"/>
             <a:ext cx="5943600" cy="0"/>
           </a:xfrm>
           <a:prstGeom prst="line">
@@ -12919,13 +13009,13 @@
       </p:cxnSp>
       <p:sp>
         <p:nvSpPr>
-          <p:cNvPr id="109" name="Cell4_R19C0"/>
+          <p:cNvPr id="107" name="Cell4_R18C0"/>
           <p:cNvSpPr txBox="1"/>
           <p:nvPr/>
         </p:nvSpPr>
         <p:spPr>
           <a:xfrm>
-            <a:off x="7863840" y="17771364"/>
+            <a:off x="14493240" y="17501616"/>
             <a:ext cx="2523744" cy="178307"/>
           </a:xfrm>
           <a:prstGeom prst="rect">
@@ -12954,20 +13044,20 @@
                 </a:solidFill>
                 <a:latin typeface="Open Sans"/>
               </a:rPr>
-              <a:t>18 · checkpointing for speed</a:t>
-            </a:r>
-          </a:p>
-        </p:txBody>
-      </p:sp>
-      <p:sp>
-        <p:nvSpPr>
-          <p:cNvPr id="110" name="Cell4_R19C1"/>
+              <a:t>17 · batch 64 → 128</a:t>
+            </a:r>
+          </a:p>
+        </p:txBody>
+      </p:sp>
+      <p:sp>
+        <p:nvSpPr>
+          <p:cNvPr id="108" name="Cell4_R18C1"/>
           <p:cNvSpPr txBox="1"/>
           <p:nvPr/>
         </p:nvSpPr>
         <p:spPr>
           <a:xfrm>
-            <a:off x="10479024" y="17771364"/>
+            <a:off x="17108424" y="17501616"/>
             <a:ext cx="2167127" cy="178307"/>
           </a:xfrm>
           <a:prstGeom prst="rect">
@@ -12990,35 +13080,44 @@
               </a:spcAft>
             </a:pPr>
             <a:r>
+              <a:rPr sz="1100" b="1" i="0">
+                <a:solidFill>
+                  <a:srgbClr val="1F1F24"/>
+                </a:solidFill>
+                <a:latin typeface="Open Sans"/>
+              </a:rPr>
+              <a:t>1.31×</a:t>
+            </a:r>
+            <a:r>
               <a:rPr sz="1100" b="0" i="0">
                 <a:solidFill>
                   <a:srgbClr val="1F1F24"/>
                 </a:solidFill>
                 <a:latin typeface="Open Sans"/>
               </a:rPr>
-              <a:t>peak is </a:t>
-            </a:r>
-            <a:r>
-              <a:rPr sz="1100" b="1" i="0">
-                <a:solidFill>
-                  <a:srgbClr val="1F1F24"/>
-                </a:solidFill>
-                <a:latin typeface="Open Sans"/>
-              </a:rPr>
-              <a:t>3.3 GB of 96</a:t>
-            </a:r>
-          </a:p>
-        </p:txBody>
-      </p:sp>
-      <p:sp>
-        <p:nvSpPr>
-          <p:cNvPr id="111" name="Cell4_R19C2"/>
+              <a:t> — 2048 is </a:t>
+            </a:r>
+            <a:r>
+              <a:rPr sz="1100" b="0" i="1">
+                <a:solidFill>
+                  <a:srgbClr val="1F1F24"/>
+                </a:solidFill>
+                <a:latin typeface="Open Sans"/>
+              </a:rPr>
+              <a:t>slower</a:t>
+            </a:r>
+          </a:p>
+        </p:txBody>
+      </p:sp>
+      <p:sp>
+        <p:nvSpPr>
+          <p:cNvPr id="109" name="Cell4_R18C2"/>
           <p:cNvSpPr txBox="1"/>
           <p:nvPr/>
         </p:nvSpPr>
         <p:spPr>
           <a:xfrm>
-            <a:off x="12737592" y="17771364"/>
+            <a:off x="19366992" y="17501616"/>
             <a:ext cx="978408" cy="178307"/>
           </a:xfrm>
           <a:prstGeom prst="rect">
@@ -13043,24 +13142,24 @@
             <a:r>
               <a:rPr sz="1100" b="1" i="0">
                 <a:solidFill>
-                  <a:srgbClr val="B03A2E"/>
-                </a:solidFill>
-                <a:latin typeface="Open Sans"/>
-              </a:rPr>
-              <a:t>no</a:t>
+                  <a:srgbClr val="1F7A4C"/>
+                </a:solidFill>
+                <a:latin typeface="Open Sans"/>
+              </a:rPr>
+              <a:t>yes</a:t>
             </a:r>
           </a:p>
         </p:txBody>
       </p:sp>
       <p:cxnSp>
         <p:nvCxnSpPr>
-          <p:cNvPr id="112" name="Connector 111"/>
+          <p:cNvPr id="110" name="Connector 109"/>
           <p:cNvCxnSpPr/>
           <p:nvPr/>
         </p:nvCxnSpPr>
         <p:spPr>
           <a:xfrm>
-            <a:off x="7863840" y="17949672"/>
+            <a:off x="14493240" y="17679924"/>
             <a:ext cx="5943600" cy="0"/>
           </a:xfrm>
           <a:prstGeom prst="line">
@@ -13089,13 +13188,13 @@
       </p:cxnSp>
       <p:sp>
         <p:nvSpPr>
-          <p:cNvPr id="113" name="Cell4_R110C0"/>
+          <p:cNvPr id="111" name="Cell4_R19C0"/>
           <p:cNvSpPr txBox="1"/>
           <p:nvPr/>
         </p:nvSpPr>
         <p:spPr>
           <a:xfrm>
-            <a:off x="7863840" y="17986248"/>
+            <a:off x="14493240" y="17716500"/>
             <a:ext cx="2523744" cy="178307"/>
           </a:xfrm>
           <a:prstGeom prst="rect">
@@ -13124,20 +13223,20 @@
                 </a:solidFill>
                 <a:latin typeface="Open Sans"/>
               </a:rPr>
-              <a:t>19 · use the second card</a:t>
-            </a:r>
-          </a:p>
-        </p:txBody>
-      </p:sp>
-      <p:sp>
-        <p:nvSpPr>
-          <p:cNvPr id="114" name="Cell4_R110C1"/>
+              <a:t>18 · checkpointing for speed</a:t>
+            </a:r>
+          </a:p>
+        </p:txBody>
+      </p:sp>
+      <p:sp>
+        <p:nvSpPr>
+          <p:cNvPr id="112" name="Cell4_R19C1"/>
           <p:cNvSpPr txBox="1"/>
           <p:nvPr/>
         </p:nvSpPr>
         <p:spPr>
           <a:xfrm>
-            <a:off x="10479024" y="17986248"/>
+            <a:off x="17108424" y="17716500"/>
             <a:ext cx="2167127" cy="178307"/>
           </a:xfrm>
           <a:prstGeom prst="rect">
@@ -13160,35 +13259,35 @@
               </a:spcAft>
             </a:pPr>
             <a:r>
+              <a:rPr sz="1100" b="0" i="0">
+                <a:solidFill>
+                  <a:srgbClr val="1F1F24"/>
+                </a:solidFill>
+                <a:latin typeface="Open Sans"/>
+              </a:rPr>
+              <a:t>peak is </a:t>
+            </a:r>
+            <a:r>
               <a:rPr sz="1100" b="1" i="0">
                 <a:solidFill>
                   <a:srgbClr val="1F1F24"/>
                 </a:solidFill>
                 <a:latin typeface="Open Sans"/>
               </a:rPr>
-              <a:t>91% / 93%</a:t>
-            </a:r>
-            <a:r>
-              <a:rPr sz="1100" b="0" i="0">
-                <a:solidFill>
-                  <a:srgbClr val="1F1F24"/>
-                </a:solidFill>
-                <a:latin typeface="Open Sans"/>
-              </a:rPr>
-              <a:t> busy at 300 W</a:t>
-            </a:r>
-          </a:p>
-        </p:txBody>
-      </p:sp>
-      <p:sp>
-        <p:nvSpPr>
-          <p:cNvPr id="115" name="Cell4_R110C2"/>
+              <a:t>3.3 GB of 96</a:t>
+            </a:r>
+          </a:p>
+        </p:txBody>
+      </p:sp>
+      <p:sp>
+        <p:nvSpPr>
+          <p:cNvPr id="113" name="Cell4_R19C2"/>
           <p:cNvSpPr txBox="1"/>
           <p:nvPr/>
         </p:nvSpPr>
         <p:spPr>
           <a:xfrm>
-            <a:off x="12737592" y="17986248"/>
+            <a:off x="19366992" y="17716500"/>
             <a:ext cx="978408" cy="178307"/>
           </a:xfrm>
           <a:prstGeom prst="rect">
@@ -13213,24 +13312,24 @@
             <a:r>
               <a:rPr sz="1100" b="1" i="0">
                 <a:solidFill>
-                  <a:srgbClr val="1F7A4C"/>
-                </a:solidFill>
-                <a:latin typeface="Open Sans"/>
-              </a:rPr>
-              <a:t>yes</a:t>
+                  <a:srgbClr val="B03A2E"/>
+                </a:solidFill>
+                <a:latin typeface="Open Sans"/>
+              </a:rPr>
+              <a:t>no</a:t>
             </a:r>
           </a:p>
         </p:txBody>
       </p:sp>
       <p:cxnSp>
         <p:nvCxnSpPr>
-          <p:cNvPr id="116" name="Connector 115"/>
+          <p:cNvPr id="114" name="Connector 113"/>
           <p:cNvCxnSpPr/>
           <p:nvPr/>
         </p:nvCxnSpPr>
         <p:spPr>
           <a:xfrm>
-            <a:off x="7863840" y="18164556"/>
+            <a:off x="14493240" y="17894808"/>
             <a:ext cx="5943600" cy="0"/>
           </a:xfrm>
           <a:prstGeom prst="line">
@@ -13259,13 +13358,13 @@
       </p:cxnSp>
       <p:sp>
         <p:nvSpPr>
-          <p:cNvPr id="117" name="Cell4_R111C0"/>
+          <p:cNvPr id="115" name="Cell4_R110C0"/>
           <p:cNvSpPr txBox="1"/>
           <p:nvPr/>
         </p:nvSpPr>
         <p:spPr>
           <a:xfrm>
-            <a:off x="7863840" y="18201132"/>
+            <a:off x="14493240" y="17931384"/>
             <a:ext cx="2523744" cy="178307"/>
           </a:xfrm>
           <a:prstGeom prst="rect">
@@ -13294,20 +13393,20 @@
                 </a:solidFill>
                 <a:latin typeface="Open Sans"/>
               </a:rPr>
-              <a:t>20 · longest-budget-first queue</a:t>
-            </a:r>
-          </a:p>
-        </p:txBody>
-      </p:sp>
-      <p:sp>
-        <p:nvSpPr>
-          <p:cNvPr id="118" name="Cell4_R111C1"/>
+              <a:t>19 · use the second card</a:t>
+            </a:r>
+          </a:p>
+        </p:txBody>
+      </p:sp>
+      <p:sp>
+        <p:nvSpPr>
+          <p:cNvPr id="116" name="Cell4_R110C1"/>
           <p:cNvSpPr txBox="1"/>
           <p:nvPr/>
         </p:nvSpPr>
         <p:spPr>
           <a:xfrm>
-            <a:off x="10479024" y="18201132"/>
+            <a:off x="17108424" y="17931384"/>
             <a:ext cx="2167127" cy="178307"/>
           </a:xfrm>
           <a:prstGeom prst="rect">
@@ -13336,7 +13435,7 @@
                 </a:solidFill>
                 <a:latin typeface="Open Sans"/>
               </a:rPr>
-              <a:t>2.55×</a:t>
+              <a:t>91% / 93%</a:t>
             </a:r>
             <a:r>
               <a:rPr sz="1100" b="0" i="0">
@@ -13345,20 +13444,20 @@
                 </a:solidFill>
                 <a:latin typeface="Open Sans"/>
               </a:rPr>
-              <a:t> projected, 2.07 seen</a:t>
-            </a:r>
-          </a:p>
-        </p:txBody>
-      </p:sp>
-      <p:sp>
-        <p:nvSpPr>
-          <p:cNvPr id="119" name="Cell4_R111C2"/>
+              <a:t> busy at 300 W</a:t>
+            </a:r>
+          </a:p>
+        </p:txBody>
+      </p:sp>
+      <p:sp>
+        <p:nvSpPr>
+          <p:cNvPr id="117" name="Cell4_R110C2"/>
           <p:cNvSpPr txBox="1"/>
           <p:nvPr/>
         </p:nvSpPr>
         <p:spPr>
           <a:xfrm>
-            <a:off x="12737592" y="18201132"/>
+            <a:off x="19366992" y="17931384"/>
             <a:ext cx="978408" cy="178307"/>
           </a:xfrm>
           <a:prstGeom prst="rect">
@@ -13392,65 +13491,23 @@
           </a:p>
         </p:txBody>
       </p:sp>
-      <p:sp>
-        <p:nvSpPr>
-          <p:cNvPr id="120" name="Cell2_Heading"/>
-          <p:cNvSpPr txBox="1"/>
-          <p:nvPr/>
-        </p:nvSpPr>
-        <p:spPr>
-          <a:xfrm>
-            <a:off x="14749272" y="13533120"/>
-            <a:ext cx="5806440" cy="1024128"/>
-          </a:xfrm>
-          <a:prstGeom prst="rect">
-            <a:avLst/>
-          </a:prstGeom>
-          <a:noFill/>
-        </p:spPr>
-        <p:txBody>
-          <a:bodyPr wrap="square" lIns="27432" tIns="27432" rIns="27432" bIns="27432" anchor="b">
-            <a:noAutofit/>
-          </a:bodyPr>
-          <a:lstStyle/>
-          <a:p>
-            <a:pPr algn="l">
-              <a:lnSpc>
-                <a:spcPct val="105000"/>
-              </a:lnSpc>
-              <a:spcAft>
-                <a:spcPts val="0"/>
-              </a:spcAft>
-            </a:pPr>
-            <a:r>
-              <a:rPr sz="3200" b="1" i="0">
-                <a:solidFill>
-                  <a:srgbClr val="32006E"/>
-                </a:solidFill>
-                <a:latin typeface="Encode Sans Normal"/>
-              </a:rPr>
-              <a:t>Budget in tokens, not epochs</a:t>
-            </a:r>
-          </a:p>
-        </p:txBody>
-      </p:sp>
       <p:cxnSp>
         <p:nvCxnSpPr>
-          <p:cNvPr id="121" name="Connector 120"/>
+          <p:cNvPr id="118" name="Connector 117"/>
           <p:cNvCxnSpPr/>
           <p:nvPr/>
         </p:nvCxnSpPr>
         <p:spPr>
           <a:xfrm>
-            <a:off x="14749272" y="14593824"/>
-            <a:ext cx="5806439" cy="0"/>
+            <a:off x="14493240" y="18109692"/>
+            <a:ext cx="5943600" cy="0"/>
           </a:xfrm>
           <a:prstGeom prst="line">
             <a:avLst/>
           </a:prstGeom>
-          <a:ln w="15875">
+          <a:ln w="9525">
             <a:solidFill>
-              <a:srgbClr val="E8D3A2"/>
+              <a:srgbClr val="D9D2E3"/>
             </a:solidFill>
           </a:ln>
         </p:spPr>
@@ -13471,14 +13528,14 @@
       </p:cxnSp>
       <p:sp>
         <p:nvSpPr>
-          <p:cNvPr id="122" name="Cell2_List"/>
+          <p:cNvPr id="119" name="Cell4_R111C0"/>
           <p:cNvSpPr txBox="1"/>
           <p:nvPr/>
         </p:nvSpPr>
         <p:spPr>
           <a:xfrm>
-            <a:off x="14749272" y="14794992"/>
-            <a:ext cx="5806440" cy="3803904"/>
+            <a:off x="14493240" y="18146268"/>
+            <a:ext cx="2523744" cy="178307"/>
           </a:xfrm>
           <a:prstGeom prst="rect">
             <a:avLst/>
@@ -13496,324 +13553,82 @@
                 <a:spcPct val="108000"/>
               </a:lnSpc>
               <a:spcAft>
-                <a:spcPts val="500"/>
+                <a:spcPts val="0"/>
               </a:spcAft>
             </a:pPr>
             <a:r>
-              <a:rPr sz="1300" b="1" i="0">
-                <a:solidFill>
-                  <a:srgbClr val="1F1F24"/>
-                </a:solidFill>
-                <a:latin typeface="Open Sans"/>
-              </a:rPr>
-              <a:t>In 502–504 epochs were correct — the dataset was fixed. Here it is the experiment.</a:t>
-            </a:r>
-            <a:r>
-              <a:rPr sz="1300" b="0" i="0">
-                <a:solidFill>
-                  <a:srgbClr val="1F1F24"/>
-                </a:solidFill>
-                <a:latin typeface="Open Sans"/>
-              </a:rPr>
-              <a:t> Our ladder spans 4M to 1,024M tokens: "40 epochs each" hands the big arm </a:t>
-            </a:r>
-            <a:r>
-              <a:rPr sz="1300" b="1" i="0">
-                <a:solidFill>
-                  <a:srgbClr val="1F1F24"/>
-                </a:solidFill>
-                <a:latin typeface="Open Sans"/>
-              </a:rPr>
-              <a:t>256× the compute</a:t>
-            </a:r>
-            <a:r>
-              <a:rPr sz="1300" b="0" i="0">
-                <a:solidFill>
-                  <a:srgbClr val="1F1F24"/>
-                </a:solidFill>
-                <a:latin typeface="Open Sans"/>
-              </a:rPr>
-              <a:t>.</a:t>
-            </a:r>
-          </a:p>
+              <a:rPr sz="1100" b="0" i="0">
+                <a:solidFill>
+                  <a:srgbClr val="1F1F24"/>
+                </a:solidFill>
+                <a:latin typeface="Open Sans"/>
+              </a:rPr>
+              <a:t>20 · longest-budget-first queue</a:t>
+            </a:r>
+          </a:p>
+        </p:txBody>
+      </p:sp>
+      <p:sp>
+        <p:nvSpPr>
+          <p:cNvPr id="120" name="Cell4_R111C1"/>
+          <p:cNvSpPr txBox="1"/>
+          <p:nvPr/>
+        </p:nvSpPr>
+        <p:spPr>
+          <a:xfrm>
+            <a:off x="17108424" y="18146268"/>
+            <a:ext cx="2167127" cy="178307"/>
+          </a:xfrm>
+          <a:prstGeom prst="rect">
+            <a:avLst/>
+          </a:prstGeom>
+          <a:noFill/>
+        </p:spPr>
+        <p:txBody>
+          <a:bodyPr wrap="square" lIns="36576" tIns="36576" rIns="36576" bIns="36576" anchor="t">
+            <a:noAutofit/>
+          </a:bodyPr>
+          <a:lstStyle/>
           <a:p>
             <a:pPr algn="l">
               <a:lnSpc>
                 <a:spcPct val="108000"/>
               </a:lnSpc>
               <a:spcAft>
-                <a:spcPts val="500"/>
+                <a:spcPts val="0"/>
               </a:spcAft>
             </a:pPr>
             <a:r>
-              <a:rPr sz="1300" b="1" i="0">
-                <a:solidFill>
-                  <a:srgbClr val="1F1F24"/>
-                </a:solidFill>
-                <a:latin typeface="Open Sans"/>
-              </a:rPr>
-              <a:t>So fix tokens, and let epochs fall out.</a:t>
-            </a:r>
-            <a:r>
-              <a:rPr sz="1300" b="0" i="0">
-                <a:solidFill>
-                  <a:srgbClr val="1F1F24"/>
-                </a:solidFill>
-                <a:latin typeface="Open Sans"/>
-              </a:rPr>
-              <a:t> Every run is </a:t>
-            </a:r>
-            <a:r>
-              <a:rPr sz="1300" b="1" i="0">
-                <a:solidFill>
-                  <a:srgbClr val="1F1F24"/>
-                </a:solidFill>
-                <a:latin typeface="Open Sans"/>
-              </a:rPr>
-              <a:t>1.024B tokens of updates</a:t>
-            </a:r>
-            <a:r>
-              <a:rPr sz="1300" b="0" i="0">
-                <a:solidFill>
-                  <a:srgbClr val="1F1F24"/>
-                </a:solidFill>
-                <a:latin typeface="Open Sans"/>
-              </a:rPr>
-              <a:t> — 62,500 steps was never chosen, it is 1.024B ÷ a 16,384-token batch.</a:t>
-            </a:r>
-          </a:p>
-          <a:p>
-            <a:pPr algn="l">
-              <a:lnSpc>
-                <a:spcPct val="108000"/>
-              </a:lnSpc>
-              <a:spcAft>
-                <a:spcPts val="500"/>
-              </a:spcAft>
-            </a:pPr>
-            <a:r>
-              <a:rPr sz="1300" b="1" i="0">
-                <a:solidFill>
-                  <a:srgbClr val="1F1F24"/>
-                </a:solidFill>
-                <a:latin typeface="Open Sans"/>
-              </a:rPr>
-              <a:t>Tokens ÷ tok/s = the wall clock.</a:t>
-            </a:r>
-            <a:r>
-              <a:rPr sz="1300" b="0" i="0">
-                <a:solidFill>
-                  <a:srgbClr val="1F1F24"/>
-                </a:solidFill>
-                <a:latin typeface="Open Sans"/>
-              </a:rPr>
-              <a:t> 1.024B ÷ 443k tok/s ≈ </a:t>
-            </a:r>
-            <a:r>
-              <a:rPr sz="1300" b="1" i="0">
-                <a:solidFill>
-                  <a:srgbClr val="1F1F24"/>
-                </a:solidFill>
-                <a:latin typeface="Open Sans"/>
-              </a:rPr>
-              <a:t>38 min</a:t>
-            </a:r>
-            <a:r>
-              <a:rPr sz="1300" b="0" i="0">
-                <a:solidFill>
-                  <a:srgbClr val="1F1F24"/>
-                </a:solidFill>
-                <a:latin typeface="Open Sans"/>
-              </a:rPr>
-              <a:t> — the hardware chart's top bar, and how a promise gets measured.</a:t>
-            </a:r>
-          </a:p>
-          <a:p>
-            <a:pPr algn="l">
-              <a:lnSpc>
-                <a:spcPct val="108000"/>
-              </a:lnSpc>
-              <a:spcAft>
-                <a:spcPts val="500"/>
-              </a:spcAft>
-            </a:pPr>
-            <a:r>
-              <a:rPr sz="1300" b="1" i="0">
-                <a:solidFill>
-                  <a:srgbClr val="1F1F24"/>
-                </a:solidFill>
-                <a:latin typeface="Open Sans"/>
-              </a:rPr>
-              <a:t>Fixed compute makes the ladder readable.</a:t>
-            </a:r>
-            <a:r>
-              <a:rPr sz="1300" b="0" i="0">
-                <a:solidFill>
-                  <a:srgbClr val="1F1F24"/>
-                </a:solidFill>
-                <a:latin typeface="Open Sans"/>
-              </a:rPr>
-              <a:t> The 4M corpus is seen </a:t>
-            </a:r>
-            <a:r>
-              <a:rPr sz="1300" b="1" i="0">
-                <a:solidFill>
-                  <a:srgbClr val="1F1F24"/>
-                </a:solidFill>
-                <a:latin typeface="Open Sans"/>
-              </a:rPr>
-              <a:t>256 times</a:t>
-            </a:r>
-            <a:r>
-              <a:rPr sz="1300" b="0" i="0">
-                <a:solidFill>
-                  <a:srgbClr val="1F1F24"/>
-                </a:solidFill>
-                <a:latin typeface="Open Sans"/>
-              </a:rPr>
-              <a:t>; the 1,024M corpus, </a:t>
-            </a:r>
-            <a:r>
-              <a:rPr sz="1300" b="1" i="0">
-                <a:solidFill>
-                  <a:srgbClr val="1F1F24"/>
-                </a:solidFill>
-                <a:latin typeface="Open Sans"/>
-              </a:rPr>
-              <a:t>exactly once</a:t>
-            </a:r>
-            <a:r>
-              <a:rPr sz="1300" b="0" i="0">
-                <a:solidFill>
-                  <a:srgbClr val="1F1F24"/>
-                </a:solidFill>
-                <a:latin typeface="Open Sans"/>
-              </a:rPr>
-              <a:t>. Identical compute — only the data moves.</a:t>
-            </a:r>
-          </a:p>
-          <a:p>
-            <a:pPr algn="l">
-              <a:lnSpc>
-                <a:spcPct val="108000"/>
-              </a:lnSpc>
-              <a:spcAft>
-                <a:spcPts val="500"/>
-              </a:spcAft>
-            </a:pPr>
-            <a:r>
-              <a:rPr sz="1300" b="1" i="0">
-                <a:solidFill>
-                  <a:srgbClr val="1F1F24"/>
-                </a:solidFill>
-                <a:latin typeface="Open Sans"/>
-              </a:rPr>
-              <a:t>And a truncated run is not a cheaper run.</a:t>
-            </a:r>
-            <a:r>
-              <a:rPr sz="1300" b="0" i="0">
-                <a:solidFill>
-                  <a:srgbClr val="1F1F24"/>
-                </a:solidFill>
-                <a:latin typeface="Open Sans"/>
-              </a:rPr>
-              <a:t> The schedule anneals to zero at the </a:t>
-            </a:r>
-            <a:r>
-              <a:rPr sz="1300" b="0" i="1">
-                <a:solidFill>
-                  <a:srgbClr val="1F1F24"/>
-                </a:solidFill>
-                <a:latin typeface="Open Sans"/>
-              </a:rPr>
-              <a:t>planned</a:t>
-            </a:r>
-            <a:r>
-              <a:rPr sz="1300" b="0" i="0">
-                <a:solidFill>
-                  <a:srgbClr val="1F1F24"/>
-                </a:solidFill>
-                <a:latin typeface="Open Sans"/>
-              </a:rPr>
-              <a:t> end — a run stopped halfway is mid-schedule, a different experiment.</a:t>
-            </a:r>
-          </a:p>
-          <a:p>
-            <a:pPr algn="l">
-              <a:lnSpc>
-                <a:spcPct val="108000"/>
-              </a:lnSpc>
-              <a:spcAft>
-                <a:spcPts val="500"/>
-              </a:spcAft>
-            </a:pPr>
-            <a:r>
-              <a:rPr sz="1300" b="1" i="0">
-                <a:solidFill>
-                  <a:srgbClr val="1F1F24"/>
-                </a:solidFill>
-                <a:latin typeface="Open Sans"/>
-              </a:rPr>
-              <a:t>Our own records carried the bug.</a:t>
-            </a:r>
-            <a:r>
-              <a:rPr sz="1300" b="0" i="0">
-                <a:solidFill>
-                  <a:srgbClr val="1F1F24"/>
-                </a:solidFill>
-                <a:latin typeface="Open Sans"/>
-              </a:rPr>
-              <a:t> A field named epoch reads </a:t>
-            </a:r>
-            <a:r>
-              <a:rPr sz="1300" b="1" i="0">
-                <a:solidFill>
-                  <a:srgbClr val="1F1F24"/>
-                </a:solidFill>
-                <a:latin typeface="Open Sans"/>
-              </a:rPr>
-              <a:t>125</a:t>
-            </a:r>
-            <a:r>
-              <a:rPr sz="1300" b="0" i="0">
-                <a:solidFill>
-                  <a:srgbClr val="1F1F24"/>
-                </a:solidFill>
-                <a:latin typeface="Open Sans"/>
-              </a:rPr>
-              <a:t> where the truth is </a:t>
-            </a:r>
-            <a:r>
-              <a:rPr sz="1300" b="1" i="0">
-                <a:solidFill>
-                  <a:srgbClr val="1F1F24"/>
-                </a:solidFill>
-                <a:latin typeface="Open Sans"/>
-              </a:rPr>
-              <a:t>16 passes</a:t>
-            </a:r>
-            <a:r>
-              <a:rPr sz="1300" b="0" i="0">
-                <a:solidFill>
-                  <a:srgbClr val="1F1F24"/>
-                </a:solidFill>
-                <a:latin typeface="Open Sans"/>
-              </a:rPr>
-              <a:t> — it kept the name and lost the meaning.</a:t>
-            </a:r>
-          </a:p>
-        </p:txBody>
-      </p:sp>
-      <p:sp>
-        <p:nvSpPr>
-          <p:cNvPr id="123" name="Cell5_Heading"/>
+              <a:rPr sz="1100" b="1" i="0">
+                <a:solidFill>
+                  <a:srgbClr val="1F1F24"/>
+                </a:solidFill>
+                <a:latin typeface="Open Sans"/>
+              </a:rPr>
+              <a:t>2.55×</a:t>
+            </a:r>
+            <a:r>
+              <a:rPr sz="1100" b="0" i="0">
+                <a:solidFill>
+                  <a:srgbClr val="1F1F24"/>
+                </a:solidFill>
+                <a:latin typeface="Open Sans"/>
+              </a:rPr>
+              <a:t> projected, 2.07 seen</a:t>
+            </a:r>
+          </a:p>
+        </p:txBody>
+      </p:sp>
+      <p:sp>
+        <p:nvSpPr>
+          <p:cNvPr id="121" name="Cell4_R111C2"/>
           <p:cNvSpPr txBox="1"/>
           <p:nvPr/>
         </p:nvSpPr>
         <p:spPr>
           <a:xfrm>
-            <a:off x="1371600" y="18836640"/>
-            <a:ext cx="5806440" cy="1024128"/>
+            <a:off x="19366992" y="18146268"/>
+            <a:ext cx="978408" cy="178307"/>
           </a:xfrm>
           <a:prstGeom prst="rect">
             <a:avLst/>
@@ -13821,7 +13636,7 @@
           <a:noFill/>
         </p:spPr>
         <p:txBody>
-          <a:bodyPr wrap="square" lIns="27432" tIns="27432" rIns="27432" bIns="27432" anchor="b">
+          <a:bodyPr wrap="square" lIns="27432" tIns="27432" rIns="27432" bIns="27432" anchor="t">
             <a:noAutofit/>
           </a:bodyPr>
           <a:lstStyle/>
@@ -13835,7 +13650,49 @@
               </a:spcAft>
             </a:pPr>
             <a:r>
-              <a:rPr sz="3200" b="1" i="0">
+              <a:rPr sz="1100" b="1" i="0">
+                <a:solidFill>
+                  <a:srgbClr val="1F7A4C"/>
+                </a:solidFill>
+                <a:latin typeface="Open Sans"/>
+              </a:rPr>
+              <a:t>yes</a:t>
+            </a:r>
+          </a:p>
+        </p:txBody>
+      </p:sp>
+      <p:sp>
+        <p:nvSpPr>
+          <p:cNvPr id="122" name="Cell5_Heading"/>
+          <p:cNvSpPr txBox="1"/>
+          <p:nvPr/>
+        </p:nvSpPr>
+        <p:spPr>
+          <a:xfrm>
+            <a:off x="1371600" y="19028664"/>
+            <a:ext cx="5806440" cy="896112"/>
+          </a:xfrm>
+          <a:prstGeom prst="rect">
+            <a:avLst/>
+          </a:prstGeom>
+          <a:noFill/>
+        </p:spPr>
+        <p:txBody>
+          <a:bodyPr wrap="square" lIns="27432" tIns="27432" rIns="27432" bIns="27432" anchor="b">
+            <a:noAutofit/>
+          </a:bodyPr>
+          <a:lstStyle/>
+          <a:p>
+            <a:pPr algn="l">
+              <a:lnSpc>
+                <a:spcPct val="105000"/>
+              </a:lnSpc>
+              <a:spcAft>
+                <a:spcPts val="0"/>
+              </a:spcAft>
+            </a:pPr>
+            <a:r>
+              <a:rPr sz="2800" b="1" i="0">
                 <a:solidFill>
                   <a:srgbClr val="32006E"/>
                 </a:solidFill>
@@ -13848,13 +13705,13 @@
       </p:sp>
       <p:cxnSp>
         <p:nvCxnSpPr>
-          <p:cNvPr id="124" name="Connector 123"/>
+          <p:cNvPr id="123" name="Connector 122"/>
           <p:cNvCxnSpPr/>
           <p:nvPr/>
         </p:nvCxnSpPr>
         <p:spPr>
           <a:xfrm>
-            <a:off x="1371600" y="19897344"/>
+            <a:off x="1371600" y="19961352"/>
             <a:ext cx="5806440" cy="0"/>
           </a:xfrm>
           <a:prstGeom prst="line">
@@ -13883,13 +13740,13 @@
       </p:cxnSp>
       <p:sp>
         <p:nvSpPr>
-          <p:cNvPr id="125" name="Cell5_Caption"/>
+          <p:cNvPr id="124" name="Cell5_Caption"/>
           <p:cNvSpPr txBox="1"/>
           <p:nvPr/>
         </p:nvSpPr>
         <p:spPr>
           <a:xfrm>
-            <a:off x="1371600" y="22594824"/>
+            <a:off x="1371600" y="22658831"/>
             <a:ext cx="5806440" cy="1417320"/>
           </a:xfrm>
           <a:prstGeom prst="rect">
@@ -13988,14 +13845,14 @@
       </p:sp>
       <p:sp>
         <p:nvSpPr>
-          <p:cNvPr id="126" name="Cell6_Heading"/>
+          <p:cNvPr id="125" name="Cell6_Heading"/>
           <p:cNvSpPr txBox="1"/>
           <p:nvPr/>
         </p:nvSpPr>
         <p:spPr>
           <a:xfrm>
-            <a:off x="8001000" y="18836640"/>
-            <a:ext cx="5806440" cy="1024128"/>
+            <a:off x="8001000" y="19028664"/>
+            <a:ext cx="5806440" cy="896112"/>
           </a:xfrm>
           <a:prstGeom prst="rect">
             <a:avLst/>
@@ -14017,7 +13874,7 @@
               </a:spcAft>
             </a:pPr>
             <a:r>
-              <a:rPr sz="3200" b="1" i="0">
+              <a:rPr sz="2800" b="1" i="0">
                 <a:solidFill>
                   <a:srgbClr val="32006E"/>
                 </a:solidFill>
@@ -14030,13 +13887,13 @@
       </p:sp>
       <p:cxnSp>
         <p:nvCxnSpPr>
-          <p:cNvPr id="127" name="Connector 126"/>
+          <p:cNvPr id="126" name="Connector 125"/>
           <p:cNvCxnSpPr/>
           <p:nvPr/>
         </p:nvCxnSpPr>
         <p:spPr>
           <a:xfrm>
-            <a:off x="8001000" y="19897344"/>
+            <a:off x="8001000" y="19961352"/>
             <a:ext cx="5806440" cy="0"/>
           </a:xfrm>
           <a:prstGeom prst="line">
@@ -14065,13 +13922,13 @@
       </p:cxnSp>
       <p:sp>
         <p:nvSpPr>
-          <p:cNvPr id="128" name="Cell6_Caption"/>
+          <p:cNvPr id="127" name="Cell6_Caption"/>
           <p:cNvSpPr txBox="1"/>
           <p:nvPr/>
         </p:nvSpPr>
         <p:spPr>
           <a:xfrm>
-            <a:off x="8001000" y="22594824"/>
+            <a:off x="8001000" y="22658831"/>
             <a:ext cx="5806440" cy="1417320"/>
           </a:xfrm>
           <a:prstGeom prst="rect">
@@ -14143,14 +14000,14 @@
       </p:sp>
       <p:sp>
         <p:nvSpPr>
-          <p:cNvPr id="129" name="Cell7_Heading"/>
+          <p:cNvPr id="128" name="Cell7_Heading"/>
           <p:cNvSpPr txBox="1"/>
           <p:nvPr/>
         </p:nvSpPr>
         <p:spPr>
           <a:xfrm>
-            <a:off x="14749272" y="18836640"/>
-            <a:ext cx="5806440" cy="1024128"/>
+            <a:off x="14749272" y="19028664"/>
+            <a:ext cx="5806440" cy="896112"/>
           </a:xfrm>
           <a:prstGeom prst="rect">
             <a:avLst/>
@@ -14172,7 +14029,7 @@
               </a:spcAft>
             </a:pPr>
             <a:r>
-              <a:rPr sz="3200" b="1" i="0">
+              <a:rPr sz="2800" b="1" i="0">
                 <a:solidFill>
                   <a:srgbClr val="32006E"/>
                 </a:solidFill>
@@ -14185,13 +14042,13 @@
       </p:sp>
       <p:cxnSp>
         <p:nvCxnSpPr>
-          <p:cNvPr id="130" name="Connector 129"/>
+          <p:cNvPr id="129" name="Connector 128"/>
           <p:cNvCxnSpPr/>
           <p:nvPr/>
         </p:nvCxnSpPr>
         <p:spPr>
           <a:xfrm>
-            <a:off x="14749272" y="19897344"/>
+            <a:off x="14749272" y="19961352"/>
             <a:ext cx="5806439" cy="0"/>
           </a:xfrm>
           <a:prstGeom prst="line">
@@ -14220,13 +14077,13 @@
       </p:cxnSp>
       <p:sp>
         <p:nvSpPr>
-          <p:cNvPr id="131" name="Cell7_Caption"/>
+          <p:cNvPr id="130" name="Cell7_Caption"/>
           <p:cNvSpPr txBox="1"/>
           <p:nvPr/>
         </p:nvSpPr>
         <p:spPr>
           <a:xfrm>
-            <a:off x="14749272" y="22594824"/>
+            <a:off x="14749272" y="22658831"/>
             <a:ext cx="5806440" cy="1417320"/>
           </a:xfrm>
           <a:prstGeom prst="rect">
@@ -14316,14 +14173,14 @@
       </p:sp>
       <p:sp>
         <p:nvSpPr>
-          <p:cNvPr id="132" name="Cell9_Heading"/>
+          <p:cNvPr id="131" name="Cell9_Heading"/>
           <p:cNvSpPr txBox="1"/>
           <p:nvPr/>
         </p:nvSpPr>
         <p:spPr>
           <a:xfrm>
-            <a:off x="1371600" y="24323040"/>
-            <a:ext cx="5806440" cy="1024128"/>
+            <a:off x="1371600" y="24368760"/>
+            <a:ext cx="5806440" cy="896112"/>
           </a:xfrm>
           <a:prstGeom prst="rect">
             <a:avLst/>
@@ -14345,26 +14202,26 @@
               </a:spcAft>
             </a:pPr>
             <a:r>
-              <a:rPr sz="3200" b="1" i="0">
+              <a:rPr sz="2800" b="1" i="0">
                 <a:solidFill>
                   <a:srgbClr val="32006E"/>
                 </a:solidFill>
                 <a:latin typeface="Encode Sans Normal"/>
               </a:rPr>
-              <a:t>An identity is everything that changes the answer</a:t>
+              <a:t>A hundred runs is a filing problem first</a:t>
             </a:r>
           </a:p>
         </p:txBody>
       </p:sp>
       <p:cxnSp>
         <p:nvCxnSpPr>
-          <p:cNvPr id="133" name="Connector 132"/>
+          <p:cNvPr id="132" name="Connector 131"/>
           <p:cNvCxnSpPr/>
           <p:nvPr/>
         </p:nvCxnSpPr>
         <p:spPr>
           <a:xfrm>
-            <a:off x="1371600" y="25383744"/>
+            <a:off x="1371600" y="25301448"/>
             <a:ext cx="5806440" cy="0"/>
           </a:xfrm>
           <a:prstGeom prst="line">
@@ -14393,14 +14250,14 @@
       </p:cxnSp>
       <p:sp>
         <p:nvSpPr>
-          <p:cNvPr id="134" name="Cell9_Body"/>
+          <p:cNvPr id="133" name="Cell9_Body"/>
           <p:cNvSpPr txBox="1"/>
           <p:nvPr/>
         </p:nvSpPr>
         <p:spPr>
           <a:xfrm>
-            <a:off x="1371600" y="25511760"/>
-            <a:ext cx="5806440" cy="2002536"/>
+            <a:off x="1371600" y="25429464"/>
+            <a:ext cx="5806440" cy="2039112"/>
           </a:xfrm>
           <a:prstGeom prst="rect">
             <a:avLst/>
@@ -14428,7 +14285,7 @@
                 </a:solidFill>
                 <a:latin typeface="Open Sans"/>
               </a:rPr>
-              <a:t>Two runs silently overwrote each other — same filename, different vocabularies, and neither record said so. A filename is an identity, so the vocabulary carries a </a:t>
+              <a:t>A study is declared as a </a:t>
             </a:r>
             <a:r>
               <a:rPr sz="1700" b="1" i="0">
@@ -14437,7 +14294,7 @@
                 </a:solidFill>
                 <a:latin typeface="Open Sans"/>
               </a:rPr>
-              <a:t>hash</a:t>
+              <a:t>grid</a:t>
             </a:r>
             <a:r>
               <a:rPr sz="1700" b="0" i="0">
@@ -14446,7 +14303,7 @@
                 </a:solidFill>
                 <a:latin typeface="Open Sans"/>
               </a:rPr>
-              <a:t> rather than a label: 15abd33de5af. The hash also caught two people who prepared </a:t>
+              <a:t> — languages × rates × seeds — never typed run by run. The queue orders it </a:t>
             </a:r>
             <a:r>
               <a:rPr sz="1700" b="1" i="0">
@@ -14455,7 +14312,7 @@
                 </a:solidFill>
                 <a:latin typeface="Open Sans"/>
               </a:rPr>
-              <a:t>"the same" corpus</a:t>
+              <a:t>longest-budget-first</a:t>
             </a:r>
             <a:r>
               <a:rPr sz="1700" b="0" i="0">
@@ -14464,7 +14321,7 @@
                 </a:solidFill>
                 <a:latin typeface="Open Sans"/>
               </a:rPr>
-              <a:t> and built different vocabularies. </a:t>
+              <a:t>. Every run writes a record naming </a:t>
             </a:r>
             <a:r>
               <a:rPr sz="1700" b="1" i="0">
@@ -14473,21 +14330,57 @@
                 </a:solidFill>
                 <a:latin typeface="Open Sans"/>
               </a:rPr>
-              <a:t>197 pretraining and 892 fine-tuning runs later, no collision.</a:t>
-            </a:r>
-          </a:p>
-        </p:txBody>
-      </p:sp>
-      <p:sp>
-        <p:nvSpPr>
-          <p:cNvPr id="135" name="Cell10_Heading"/>
+              <a:t>everything that changes the answer</a:t>
+            </a:r>
+            <a:r>
+              <a:rPr sz="1700" b="0" i="0">
+                <a:solidFill>
+                  <a:srgbClr val="1F1F24"/>
+                </a:solidFill>
+                <a:latin typeface="Open Sans"/>
+              </a:rPr>
+              <a:t> — settings, data fingerprint — after two runs differing only in vocabulary silently overwrote each other. "What have we tried?" is a </a:t>
+            </a:r>
+            <a:r>
+              <a:rPr sz="1700" b="1" i="0">
+                <a:solidFill>
+                  <a:srgbClr val="1F1F24"/>
+                </a:solidFill>
+                <a:latin typeface="Open Sans"/>
+              </a:rPr>
+              <a:t>query</a:t>
+            </a:r>
+            <a:r>
+              <a:rPr sz="1700" b="0" i="0">
+                <a:solidFill>
+                  <a:srgbClr val="1F1F24"/>
+                </a:solidFill>
+                <a:latin typeface="Open Sans"/>
+              </a:rPr>
+              <a:t>: </a:t>
+            </a:r>
+            <a:r>
+              <a:rPr sz="1700" b="1" i="0">
+                <a:solidFill>
+                  <a:srgbClr val="1F1F24"/>
+                </a:solidFill>
+                <a:latin typeface="Open Sans"/>
+              </a:rPr>
+              <a:t>1,089 runs later, no collisions, no archaeology.</a:t>
+            </a:r>
+          </a:p>
+        </p:txBody>
+      </p:sp>
+      <p:sp>
+        <p:nvSpPr>
+          <p:cNvPr id="134" name="Cell10_Heading"/>
           <p:cNvSpPr txBox="1"/>
           <p:nvPr/>
         </p:nvSpPr>
         <p:spPr>
           <a:xfrm>
-            <a:off x="8001000" y="24323040"/>
-            <a:ext cx="5806440" cy="1024128"/>
+            <a:off x="8001000" y="24368760"/>
+            <a:ext cx="5806440" cy="896112"/>
           </a:xfrm>
           <a:prstGeom prst="rect">
             <a:avLst/>
@@ -14509,7 +14402,7 @@
               </a:spcAft>
             </a:pPr>
             <a:r>
-              <a:rPr sz="3200" b="1" i="0">
+              <a:rPr sz="2800" b="1" i="0">
                 <a:solidFill>
                   <a:srgbClr val="32006E"/>
                 </a:solidFill>
@@ -14522,13 +14415,13 @@
       </p:sp>
       <p:cxnSp>
         <p:nvCxnSpPr>
-          <p:cNvPr id="136" name="Connector 135"/>
+          <p:cNvPr id="135" name="Connector 134"/>
           <p:cNvCxnSpPr/>
           <p:nvPr/>
         </p:nvCxnSpPr>
         <p:spPr>
           <a:xfrm>
-            <a:off x="8001000" y="25383744"/>
+            <a:off x="8001000" y="25301448"/>
             <a:ext cx="5806440" cy="0"/>
           </a:xfrm>
           <a:prstGeom prst="line">
@@ -14557,14 +14450,14 @@
       </p:cxnSp>
       <p:sp>
         <p:nvSpPr>
-          <p:cNvPr id="137" name="Cell10_Body"/>
+          <p:cNvPr id="136" name="Cell10_Body"/>
           <p:cNvSpPr txBox="1"/>
           <p:nvPr/>
         </p:nvSpPr>
         <p:spPr>
           <a:xfrm>
-            <a:off x="8001000" y="25511760"/>
-            <a:ext cx="5806440" cy="2002536"/>
+            <a:off x="8001000" y="25429464"/>
+            <a:ext cx="5806440" cy="2039112"/>
           </a:xfrm>
           <a:prstGeom prst="rect">
             <a:avLst/>
@@ -14662,14 +14555,14 @@
       </p:sp>
       <p:sp>
         <p:nvSpPr>
-          <p:cNvPr id="138" name="Cellstrip1_Heading"/>
+          <p:cNvPr id="137" name="Cellstrip1_Heading"/>
           <p:cNvSpPr txBox="1"/>
           <p:nvPr/>
         </p:nvSpPr>
         <p:spPr>
           <a:xfrm>
-            <a:off x="14749272" y="24323040"/>
-            <a:ext cx="5806440" cy="1024128"/>
+            <a:off x="14749272" y="24368760"/>
+            <a:ext cx="5806440" cy="896112"/>
           </a:xfrm>
           <a:prstGeom prst="rect">
             <a:avLst/>
@@ -14691,7 +14584,7 @@
               </a:spcAft>
             </a:pPr>
             <a:r>
-              <a:rPr sz="3200" b="1" i="0">
+              <a:rPr sz="2800" b="1" i="0">
                 <a:solidFill>
                   <a:srgbClr val="32006E"/>
                 </a:solidFill>
@@ -14704,13 +14597,13 @@
       </p:sp>
       <p:cxnSp>
         <p:nvCxnSpPr>
-          <p:cNvPr id="139" name="Connector 138"/>
+          <p:cNvPr id="138" name="Connector 137"/>
           <p:cNvCxnSpPr/>
           <p:nvPr/>
         </p:nvCxnSpPr>
         <p:spPr>
           <a:xfrm>
-            <a:off x="14749272" y="25383744"/>
+            <a:off x="14749272" y="25301448"/>
             <a:ext cx="5806439" cy="0"/>
           </a:xfrm>
           <a:prstGeom prst="line">
@@ -14739,14 +14632,14 @@
       </p:cxnSp>
       <p:sp>
         <p:nvSpPr>
-          <p:cNvPr id="140" name="Cellstrip1_Body"/>
+          <p:cNvPr id="139" name="Cellstrip1_Body"/>
           <p:cNvSpPr txBox="1"/>
           <p:nvPr/>
         </p:nvSpPr>
         <p:spPr>
           <a:xfrm>
-            <a:off x="14749272" y="25511760"/>
-            <a:ext cx="5806440" cy="2002536"/>
+            <a:off x="14749272" y="25429464"/>
+            <a:ext cx="5806440" cy="2039112"/>
           </a:xfrm>
           <a:prstGeom prst="rect">
             <a:avLst/>
@@ -14808,14 +14701,14 @@
       </p:sp>
       <p:sp>
         <p:nvSpPr>
-          <p:cNvPr id="141" name="Cell11_Heading"/>
+          <p:cNvPr id="140" name="Cell11_Heading"/>
           <p:cNvSpPr txBox="1"/>
           <p:nvPr/>
         </p:nvSpPr>
         <p:spPr>
           <a:xfrm>
-            <a:off x="1371600" y="27706320"/>
-            <a:ext cx="12435840" cy="1024128"/>
+            <a:off x="1371600" y="27688032"/>
+            <a:ext cx="12435840" cy="896112"/>
           </a:xfrm>
           <a:prstGeom prst="rect">
             <a:avLst/>
@@ -14837,7 +14730,7 @@
               </a:spcAft>
             </a:pPr>
             <a:r>
-              <a:rPr sz="3200" b="1" i="0">
+              <a:rPr sz="2800" b="1" i="0">
                 <a:solidFill>
                   <a:srgbClr val="32006E"/>
                 </a:solidFill>
@@ -14850,13 +14743,13 @@
       </p:sp>
       <p:cxnSp>
         <p:nvCxnSpPr>
-          <p:cNvPr id="142" name="Connector 141"/>
+          <p:cNvPr id="141" name="Connector 140"/>
           <p:cNvCxnSpPr/>
           <p:nvPr/>
         </p:nvCxnSpPr>
         <p:spPr>
           <a:xfrm>
-            <a:off x="1371600" y="28767024"/>
+            <a:off x="1371600" y="28620720"/>
             <a:ext cx="12435840" cy="0"/>
           </a:xfrm>
           <a:prstGeom prst="line">
@@ -14885,14 +14778,14 @@
       </p:cxnSp>
       <p:sp>
         <p:nvSpPr>
-          <p:cNvPr id="143" name="Cell11_List"/>
+          <p:cNvPr id="142" name="Cell11_List"/>
           <p:cNvSpPr txBox="1"/>
           <p:nvPr/>
         </p:nvSpPr>
         <p:spPr>
           <a:xfrm>
-            <a:off x="1371600" y="28968192"/>
-            <a:ext cx="12435840" cy="2386583"/>
+            <a:off x="1371600" y="28821888"/>
+            <a:ext cx="12435840" cy="2926079"/>
           </a:xfrm>
           <a:prstGeom prst="rect">
             <a:avLst/>
@@ -14907,14 +14800,14 @@
           <a:p>
             <a:pPr algn="l">
               <a:lnSpc>
-                <a:spcPct val="108000"/>
+                <a:spcPct val="102000"/>
               </a:lnSpc>
               <a:spcAft>
                 <a:spcPts val="500"/>
               </a:spcAft>
             </a:pPr>
             <a:r>
-              <a:rPr sz="1300" b="1" i="0">
+              <a:rPr sz="1700" b="1" i="0">
                 <a:solidFill>
                   <a:srgbClr val="1F1F24"/>
                 </a:solidFill>
@@ -14923,7 +14816,7 @@
               <a:t>English is the ruler.</a:t>
             </a:r>
             <a:r>
-              <a:rPr sz="1300" b="0" i="0">
+              <a:rPr sz="1700" b="0" i="0">
                 <a:solidFill>
                   <a:srgbClr val="1F1F24"/>
                 </a:solidFill>
@@ -14932,7 +14825,7 @@
               <a:t> </a:t>
             </a:r>
             <a:r>
-              <a:rPr sz="1300" b="0" i="1">
+              <a:rPr sz="1700" b="0" i="1">
                 <a:solidFill>
                   <a:srgbClr val="1F1F24"/>
                 </a:solidFill>
@@ -14941,7 +14834,7 @@
               <a:t>Why:</a:t>
             </a:r>
             <a:r>
-              <a:rPr sz="1300" b="0" i="0">
+              <a:rPr sz="1700" b="0" i="0">
                 <a:solidFill>
                   <a:srgbClr val="1F1F24"/>
                 </a:solidFill>
@@ -14950,7 +14843,7 @@
               <a:t> the one language where data was never the constraint. </a:t>
             </a:r>
             <a:r>
-              <a:rPr sz="1300" b="0" i="1">
+              <a:rPr sz="1700" b="0" i="1">
                 <a:solidFill>
                   <a:srgbClr val="1F1F24"/>
                 </a:solidFill>
@@ -14959,7 +14852,7 @@
               <a:t>Learned:</a:t>
             </a:r>
             <a:r>
-              <a:rPr sz="1300" b="0" i="0">
+              <a:rPr sz="1700" b="0" i="0">
                 <a:solidFill>
                   <a:srgbClr val="1F1F24"/>
                 </a:solidFill>
@@ -14968,7 +14861,7 @@
               <a:t> </a:t>
             </a:r>
             <a:r>
-              <a:rPr sz="1300" b="1" i="0">
+              <a:rPr sz="1700" b="1" i="0">
                 <a:solidFill>
                   <a:srgbClr val="1F1F24"/>
                 </a:solidFill>
@@ -14977,26 +14870,26 @@
               <a:t>more data stops helping past 64M tokens</a:t>
             </a:r>
             <a:r>
-              <a:rPr sz="1300" b="0" i="0">
-                <a:solidFill>
-                  <a:srgbClr val="1F1F24"/>
-                </a:solidFill>
-                <a:latin typeface="Open Sans"/>
-              </a:rPr>
-              <a:t> — a fact Yoruba could never establish, having no more.</a:t>
+              <a:rPr sz="1700" b="0" i="0">
+                <a:solidFill>
+                  <a:srgbClr val="1F1F24"/>
+                </a:solidFill>
+                <a:latin typeface="Open Sans"/>
+              </a:rPr>
+              <a:t> — which Yoruba, having no more, could never show.</a:t>
             </a:r>
           </a:p>
           <a:p>
             <a:pPr algn="l">
               <a:lnSpc>
-                <a:spcPct val="108000"/>
+                <a:spcPct val="102000"/>
               </a:lnSpc>
               <a:spcAft>
                 <a:spcPts val="500"/>
               </a:spcAft>
             </a:pPr>
             <a:r>
-              <a:rPr sz="1300" b="1" i="0">
+              <a:rPr sz="1700" b="1" i="0">
                 <a:solidFill>
                   <a:srgbClr val="1F1F24"/>
                 </a:solidFill>
@@ -15005,7 +14898,7 @@
               <a:t>French, Indonesian, Mandarin are the control.</a:t>
             </a:r>
             <a:r>
-              <a:rPr sz="1300" b="0" i="0">
+              <a:rPr sz="1700" b="0" i="0">
                 <a:solidFill>
                   <a:srgbClr val="1F1F24"/>
                 </a:solidFill>
@@ -15014,7 +14907,7 @@
               <a:t> </a:t>
             </a:r>
             <a:r>
-              <a:rPr sz="1300" b="0" i="1">
+              <a:rPr sz="1700" b="0" i="1">
                 <a:solidFill>
                   <a:srgbClr val="1F1F24"/>
                 </a:solidFill>
@@ -15023,16 +14916,16 @@
               <a:t>Why:</a:t>
             </a:r>
             <a:r>
-              <a:rPr sz="1300" b="0" i="0">
-                <a:solidFill>
-                  <a:srgbClr val="1F1F24"/>
-                </a:solidFill>
-                <a:latin typeface="Open Sans"/>
-              </a:rPr>
-              <a:t> XLM-R knows these three well, killing the objection that it is just "unfamiliar languages". </a:t>
-            </a:r>
-            <a:r>
-              <a:rPr sz="1300" b="0" i="1">
+              <a:rPr sz="1700" b="0" i="0">
+                <a:solidFill>
+                  <a:srgbClr val="1F1F24"/>
+                </a:solidFill>
+                <a:latin typeface="Open Sans"/>
+              </a:rPr>
+              <a:t> XLM-R knows these three well. </a:t>
+            </a:r>
+            <a:r>
+              <a:rPr sz="1700" b="0" i="1">
                 <a:solidFill>
                   <a:srgbClr val="1F1F24"/>
                 </a:solidFill>
@@ -15041,7 +14934,7 @@
               <a:t>Learned:</a:t>
             </a:r>
             <a:r>
-              <a:rPr sz="1300" b="0" i="0">
+              <a:rPr sz="1700" b="0" i="0">
                 <a:solidFill>
                   <a:srgbClr val="1F1F24"/>
                 </a:solidFill>
@@ -15050,7 +14943,7 @@
               <a:t> they cost </a:t>
             </a:r>
             <a:r>
-              <a:rPr sz="1300" b="1" i="0">
+              <a:rPr sz="1700" b="1" i="0">
                 <a:solidFill>
                   <a:srgbClr val="1F1F24"/>
                 </a:solidFill>
@@ -15059,7 +14952,7 @@
               <a:t>1.04, 1.01, 0.95</a:t>
             </a:r>
             <a:r>
-              <a:rPr sz="1300" b="0" i="0">
+              <a:rPr sz="1700" b="0" i="0">
                 <a:solidFill>
                   <a:srgbClr val="1F1F24"/>
                 </a:solidFill>
@@ -15068,7 +14961,7 @@
               <a:t> — the penalty tracks </a:t>
             </a:r>
             <a:r>
-              <a:rPr sz="1300" b="0" i="1">
+              <a:rPr sz="1700" b="0" i="1">
                 <a:solidFill>
                   <a:srgbClr val="1F1F24"/>
                 </a:solidFill>
@@ -15077,7 +14970,7 @@
               <a:t>coverage</a:t>
             </a:r>
             <a:r>
-              <a:rPr sz="1300" b="0" i="0">
+              <a:rPr sz="1700" b="0" i="0">
                 <a:solidFill>
                   <a:srgbClr val="1F1F24"/>
                 </a:solidFill>
@@ -15089,14 +14982,14 @@
           <a:p>
             <a:pPr algn="l">
               <a:lnSpc>
-                <a:spcPct val="108000"/>
+                <a:spcPct val="102000"/>
               </a:lnSpc>
               <a:spcAft>
                 <a:spcPts val="500"/>
               </a:spcAft>
             </a:pPr>
             <a:r>
-              <a:rPr sz="1300" b="1" i="0">
+              <a:rPr sz="1700" b="1" i="0">
                 <a:solidFill>
                   <a:srgbClr val="1F1F24"/>
                 </a:solidFill>
@@ -15105,7 +14998,7 @@
               <a:t>Twelve African languages are the gradient.</a:t>
             </a:r>
             <a:r>
-              <a:rPr sz="1300" b="0" i="0">
+              <a:rPr sz="1700" b="0" i="0">
                 <a:solidFill>
                   <a:srgbClr val="1F1F24"/>
                 </a:solidFill>
@@ -15114,7 +15007,7 @@
               <a:t> </a:t>
             </a:r>
             <a:r>
-              <a:rPr sz="1300" b="0" i="1">
+              <a:rPr sz="1700" b="0" i="1">
                 <a:solidFill>
                   <a:srgbClr val="1F1F24"/>
                 </a:solidFill>
@@ -15123,16 +15016,16 @@
               <a:t>Why:</a:t>
             </a:r>
             <a:r>
-              <a:rPr sz="1300" b="0" i="0">
-                <a:solidFill>
-                  <a:srgbClr val="1F1F24"/>
-                </a:solidFill>
-                <a:latin typeface="Open Sans"/>
-              </a:rPr>
-              <a:t> one language is an anecdote; seventeen make a slope. </a:t>
-            </a:r>
-            <a:r>
-              <a:rPr sz="1300" b="0" i="1">
+              <a:rPr sz="1700" b="0" i="0">
+                <a:solidFill>
+                  <a:srgbClr val="1F1F24"/>
+                </a:solidFill>
+                <a:latin typeface="Open Sans"/>
+              </a:rPr>
+              <a:t> an anecdote needs a slope behind it. </a:t>
+            </a:r>
+            <a:r>
+              <a:rPr sz="1700" b="0" i="1">
                 <a:solidFill>
                   <a:srgbClr val="1F1F24"/>
                 </a:solidFill>
@@ -15141,16 +15034,16 @@
               <a:t>Learned:</a:t>
             </a:r>
             <a:r>
-              <a:rPr sz="1300" b="0" i="0">
-                <a:solidFill>
-                  <a:srgbClr val="1F1F24"/>
-                </a:solidFill>
-                <a:latin typeface="Open Sans"/>
-              </a:rPr>
-              <a:t> the split falls exactly along coverage — </a:t>
-            </a:r>
-            <a:r>
-              <a:rPr sz="1300" b="1" i="0">
+              <a:rPr sz="1700" b="0" i="0">
+                <a:solidFill>
+                  <a:srgbClr val="1F1F24"/>
+                </a:solidFill>
+                <a:latin typeface="Open Sans"/>
+              </a:rPr>
+              <a:t> the split falls along coverage — </a:t>
+            </a:r>
+            <a:r>
+              <a:rPr sz="1700" b="1" i="0">
                 <a:solidFill>
                   <a:srgbClr val="1F1F24"/>
                 </a:solidFill>
@@ -15159,26 +15052,26 @@
               <a:t>Wolof, uncovered yet cheap at 1.31</a:t>
             </a:r>
             <a:r>
-              <a:rPr sz="1300" b="0" i="0">
-                <a:solidFill>
-                  <a:srgbClr val="1F1F24"/>
-                </a:solidFill>
-                <a:latin typeface="Open Sans"/>
-              </a:rPr>
-              <a:t>, is the exception an anecdote hides.</a:t>
+              <a:rPr sz="1700" b="0" i="0">
+                <a:solidFill>
+                  <a:srgbClr val="1F1F24"/>
+                </a:solidFill>
+                <a:latin typeface="Open Sans"/>
+              </a:rPr>
+              <a:t>, the exception anecdotes hide.</a:t>
             </a:r>
           </a:p>
           <a:p>
             <a:pPr algn="l">
               <a:lnSpc>
-                <a:spcPct val="108000"/>
+                <a:spcPct val="102000"/>
               </a:lnSpc>
               <a:spcAft>
                 <a:spcPts val="500"/>
               </a:spcAft>
             </a:pPr>
             <a:r>
-              <a:rPr sz="1300" b="1" i="0">
+              <a:rPr sz="1700" b="1" i="0">
                 <a:solidFill>
                   <a:srgbClr val="1F1F24"/>
                 </a:solidFill>
@@ -15187,7 +15080,7 @@
               <a:t>Five languages got the whole sweep.</a:t>
             </a:r>
             <a:r>
-              <a:rPr sz="1300" b="0" i="0">
+              <a:rPr sz="1700" b="0" i="0">
                 <a:solidFill>
                   <a:srgbClr val="1F1F24"/>
                 </a:solidFill>
@@ -15196,7 +15089,7 @@
               <a:t> </a:t>
             </a:r>
             <a:r>
-              <a:rPr sz="1300" b="0" i="1">
+              <a:rPr sz="1700" b="0" i="1">
                 <a:solidFill>
                   <a:srgbClr val="1F1F24"/>
                 </a:solidFill>
@@ -15205,16 +15098,16 @@
               <a:t>Why:</a:t>
             </a:r>
             <a:r>
-              <a:rPr sz="1300" b="0" i="0">
-                <a:solidFill>
-                  <a:srgbClr val="1F1F24"/>
-                </a:solidFill>
-                <a:latin typeface="Open Sans"/>
-              </a:rPr>
-              <a:t> "adding a language is one function call" is only true if the settings transfer too. </a:t>
-            </a:r>
-            <a:r>
-              <a:rPr sz="1300" b="0" i="1">
+              <a:rPr sz="1700" b="0" i="0">
+                <a:solidFill>
+                  <a:srgbClr val="1F1F24"/>
+                </a:solidFill>
+                <a:latin typeface="Open Sans"/>
+              </a:rPr>
+              <a:t> "one call per language" is only true if settings transfer. </a:t>
+            </a:r>
+            <a:r>
+              <a:rPr sz="1700" b="0" i="1">
                 <a:solidFill>
                   <a:srgbClr val="1F1F24"/>
                 </a:solidFill>
@@ -15223,7 +15116,7 @@
               <a:t>Learned:</a:t>
             </a:r>
             <a:r>
-              <a:rPr sz="1300" b="0" i="0">
+              <a:rPr sz="1700" b="0" i="0">
                 <a:solidFill>
                   <a:srgbClr val="1F1F24"/>
                 </a:solidFill>
@@ -15232,7 +15125,7 @@
               <a:t> they do not — </a:t>
             </a:r>
             <a:r>
-              <a:rPr sz="1300" b="1" i="0">
+              <a:rPr sz="1700" b="1" i="0">
                 <a:solidFill>
                   <a:srgbClr val="1F1F24"/>
                 </a:solidFill>
@@ -15244,14 +15137,14 @@
           <a:p>
             <a:pPr algn="l">
               <a:lnSpc>
-                <a:spcPct val="108000"/>
+                <a:spcPct val="102000"/>
               </a:lnSpc>
               <a:spcAft>
                 <a:spcPts val="500"/>
               </a:spcAft>
             </a:pPr>
             <a:r>
-              <a:rPr sz="1300" b="1" i="0">
+              <a:rPr sz="1700" b="1" i="0">
                 <a:solidFill>
                   <a:srgbClr val="1F1F24"/>
                 </a:solidFill>
@@ -15260,16 +15153,16 @@
               <a:t>None of us speaks any of them.</a:t>
             </a:r>
             <a:r>
-              <a:rPr sz="1300" b="0" i="0">
-                <a:solidFill>
-                  <a:srgbClr val="1F1F24"/>
-                </a:solidFill>
-                <a:latin typeface="Open Sans"/>
-              </a:rPr>
-              <a:t> So the spread is the evidence, not any one score. The factory made the spread affordable: </a:t>
-            </a:r>
-            <a:r>
-              <a:rPr sz="1300" b="1" i="0">
+              <a:rPr sz="1700" b="0" i="0">
+                <a:solidFill>
+                  <a:srgbClr val="1F1F24"/>
+                </a:solidFill>
+                <a:latin typeface="Open Sans"/>
+              </a:rPr>
+              <a:t> So the spread is the evidence — </a:t>
+            </a:r>
+            <a:r>
+              <a:rPr sz="1700" b="1" i="0">
                 <a:solidFill>
                   <a:srgbClr val="1F1F24"/>
                 </a:solidFill>
@@ -15278,25 +15171,25 @@
               <a:t>nine functions</a:t>
             </a:r>
             <a:r>
-              <a:rPr sz="1300" b="0" i="0">
-                <a:solidFill>
-                  <a:srgbClr val="1F1F24"/>
-                </a:solidFill>
-                <a:latin typeface="Open Sans"/>
-              </a:rPr>
-              <a:t> are its whole interface, so adding a language is one call — </a:t>
-            </a:r>
-            <a:r>
-              <a:rPr sz="1300" b="1" i="0">
-                <a:solidFill>
-                  <a:srgbClr val="1F1F24"/>
-                </a:solidFill>
-                <a:latin typeface="Open Sans"/>
-              </a:rPr>
-              <a:t>twelve pretrained in 48 minutes</a:t>
-            </a:r>
-            <a:r>
-              <a:rPr sz="1300" b="0" i="0">
+              <a:rPr sz="1700" b="0" i="0">
+                <a:solidFill>
+                  <a:srgbClr val="1F1F24"/>
+                </a:solidFill>
+                <a:latin typeface="Open Sans"/>
+              </a:rPr>
+              <a:t>, one call per language, </a:t>
+            </a:r>
+            <a:r>
+              <a:rPr sz="1700" b="1" i="0">
+                <a:solidFill>
+                  <a:srgbClr val="1F1F24"/>
+                </a:solidFill>
+                <a:latin typeface="Open Sans"/>
+              </a:rPr>
+              <a:t>twelve in 48 minutes</a:t>
+            </a:r>
+            <a:r>
+              <a:rPr sz="1700" b="0" i="0">
                 <a:solidFill>
                   <a:srgbClr val="1F1F24"/>
                 </a:solidFill>
@@ -15309,14 +15202,14 @@
       </p:sp>
       <p:sp>
         <p:nvSpPr>
-          <p:cNvPr id="144" name="Cellstrip2_Heading"/>
+          <p:cNvPr id="143" name="Cellstrip2_Heading"/>
           <p:cNvSpPr txBox="1"/>
           <p:nvPr/>
         </p:nvSpPr>
         <p:spPr>
           <a:xfrm>
-            <a:off x="14749272" y="27706320"/>
-            <a:ext cx="5806440" cy="566928"/>
+            <a:off x="14749272" y="27688032"/>
+            <a:ext cx="5806440" cy="896112"/>
           </a:xfrm>
           <a:prstGeom prst="rect">
             <a:avLst/>
@@ -15351,13 +15244,13 @@
       </p:sp>
       <p:cxnSp>
         <p:nvCxnSpPr>
-          <p:cNvPr id="145" name="Connector 144"/>
+          <p:cNvPr id="144" name="Connector 143"/>
           <p:cNvCxnSpPr/>
           <p:nvPr/>
         </p:nvCxnSpPr>
         <p:spPr>
           <a:xfrm>
-            <a:off x="14749272" y="28309824"/>
+            <a:off x="14749272" y="28620720"/>
             <a:ext cx="5806439" cy="0"/>
           </a:xfrm>
           <a:prstGeom prst="line">
@@ -15386,14 +15279,14 @@
       </p:cxnSp>
       <p:sp>
         <p:nvSpPr>
-          <p:cNvPr id="146" name="Cellstrip2_Grp"/>
+          <p:cNvPr id="145" name="Cellstrip2_Grp"/>
           <p:cNvSpPr txBox="1"/>
           <p:nvPr/>
         </p:nvSpPr>
         <p:spPr>
           <a:xfrm>
-            <a:off x="14749272" y="28465272"/>
-            <a:ext cx="5806440" cy="182880"/>
+            <a:off x="14749272" y="28785312"/>
+            <a:ext cx="5806440" cy="219456"/>
           </a:xfrm>
           <a:prstGeom prst="rect">
             <a:avLst/>
@@ -15415,7 +15308,7 @@
               </a:spcAft>
             </a:pPr>
             <a:r>
-              <a:rPr sz="900" b="1" i="0">
+              <a:rPr sz="1400" b="1" i="0">
                 <a:solidFill>
                   <a:srgbClr val="32006E"/>
                 </a:solidFill>
@@ -15428,14 +15321,14 @@
       </p:sp>
       <p:sp>
         <p:nvSpPr>
-          <p:cNvPr id="147" name="Cellstrip2_Ref"/>
+          <p:cNvPr id="146" name="Cellstrip2_Ref"/>
           <p:cNvSpPr txBox="1"/>
           <p:nvPr/>
         </p:nvSpPr>
         <p:spPr>
           <a:xfrm>
-            <a:off x="14749272" y="28657296"/>
-            <a:ext cx="5806440" cy="310896"/>
+            <a:off x="14749272" y="29023056"/>
+            <a:ext cx="5806440" cy="228600"/>
           </a:xfrm>
           <a:prstGeom prst="rect">
             <a:avLst/>
@@ -15457,27 +15350,27 @@
               </a:spcAft>
             </a:pPr>
             <a:r>
-              <a:rPr sz="1000" b="0" i="0">
-                <a:solidFill>
-                  <a:srgbClr val="1F1F24"/>
-                </a:solidFill>
-                <a:latin typeface="Open Sans"/>
-              </a:rPr>
-              <a:t>A. Conneau et al., "Unsupervised cross-lingual representation learning at scale" (XLM-R), ACL 2020</a:t>
-            </a:r>
-          </a:p>
-        </p:txBody>
-      </p:sp>
-      <p:sp>
-        <p:nvSpPr>
-          <p:cNvPr id="148" name="Cellstrip2_Ref"/>
+              <a:rPr sz="1400" b="0" i="0">
+                <a:solidFill>
+                  <a:srgbClr val="1F1F24"/>
+                </a:solidFill>
+                <a:latin typeface="Open Sans"/>
+              </a:rPr>
+              <a:t>Conneau et al. — XLM-R, ACL 2020</a:t>
+            </a:r>
+          </a:p>
+        </p:txBody>
+      </p:sp>
+      <p:sp>
+        <p:nvSpPr>
+          <p:cNvPr id="147" name="Cellstrip2_Ref"/>
           <p:cNvSpPr txBox="1"/>
           <p:nvPr/>
         </p:nvSpPr>
         <p:spPr>
           <a:xfrm>
-            <a:off x="14749272" y="28995624"/>
-            <a:ext cx="5806440" cy="173736"/>
+            <a:off x="14749272" y="29279088"/>
+            <a:ext cx="5806440" cy="228600"/>
           </a:xfrm>
           <a:prstGeom prst="rect">
             <a:avLst/>
@@ -15499,27 +15392,27 @@
               </a:spcAft>
             </a:pPr>
             <a:r>
-              <a:rPr sz="1000" b="0" i="0">
-                <a:solidFill>
-                  <a:srgbClr val="1F1F24"/>
-                </a:solidFill>
-                <a:latin typeface="Open Sans"/>
-              </a:rPr>
-              <a:t>M. Marone et al., "mmBERT," arXiv:2509.06888</a:t>
-            </a:r>
-          </a:p>
-        </p:txBody>
-      </p:sp>
-      <p:sp>
-        <p:nvSpPr>
-          <p:cNvPr id="149" name="Cellstrip2_Ref"/>
+              <a:rPr sz="1400" b="0" i="0">
+                <a:solidFill>
+                  <a:srgbClr val="1F1F24"/>
+                </a:solidFill>
+                <a:latin typeface="Open Sans"/>
+              </a:rPr>
+              <a:t>Marone et al. — mmBERT, arXiv:2509.06888</a:t>
+            </a:r>
+          </a:p>
+        </p:txBody>
+      </p:sp>
+      <p:sp>
+        <p:nvSpPr>
+          <p:cNvPr id="148" name="Cellstrip2_Ref"/>
           <p:cNvSpPr txBox="1"/>
           <p:nvPr/>
         </p:nvSpPr>
         <p:spPr>
           <a:xfrm>
-            <a:off x="14749272" y="29196792"/>
-            <a:ext cx="5806440" cy="173736"/>
+            <a:off x="14749272" y="29535120"/>
+            <a:ext cx="5806440" cy="228600"/>
           </a:xfrm>
           <a:prstGeom prst="rect">
             <a:avLst/>
@@ -15541,27 +15434,27 @@
               </a:spcAft>
             </a:pPr>
             <a:r>
-              <a:rPr sz="1000" b="0" i="0">
-                <a:solidFill>
-                  <a:srgbClr val="1F1F24"/>
-                </a:solidFill>
-                <a:latin typeface="Open Sans"/>
-              </a:rPr>
-              <a:t>Y. Liu et al., "RoBERTa," arXiv:1907.11692</a:t>
-            </a:r>
-          </a:p>
-        </p:txBody>
-      </p:sp>
-      <p:sp>
-        <p:nvSpPr>
-          <p:cNvPr id="150" name="Cellstrip2_Ref"/>
+              <a:rPr sz="1400" b="0" i="0">
+                <a:solidFill>
+                  <a:srgbClr val="1F1F24"/>
+                </a:solidFill>
+                <a:latin typeface="Open Sans"/>
+              </a:rPr>
+              <a:t>Liu et al. — RoBERTa, arXiv:1907.11692</a:t>
+            </a:r>
+          </a:p>
+        </p:txBody>
+      </p:sp>
+      <p:sp>
+        <p:nvSpPr>
+          <p:cNvPr id="149" name="Cellstrip2_Ref"/>
           <p:cNvSpPr txBox="1"/>
           <p:nvPr/>
         </p:nvSpPr>
         <p:spPr>
           <a:xfrm>
-            <a:off x="14749272" y="29397960"/>
-            <a:ext cx="5806440" cy="173736"/>
+            <a:off x="14749272" y="29791152"/>
+            <a:ext cx="5806440" cy="228600"/>
           </a:xfrm>
           <a:prstGeom prst="rect">
             <a:avLst/>
@@ -15583,27 +15476,27 @@
               </a:spcAft>
             </a:pPr>
             <a:r>
-              <a:rPr sz="1000" b="0" i="0">
-                <a:solidFill>
-                  <a:srgbClr val="1F1F24"/>
-                </a:solidFill>
-                <a:latin typeface="Open Sans"/>
-              </a:rPr>
-              <a:t>J. Devlin et al., "BERT" — its 80/10/10 masking, NAACL 2019</a:t>
-            </a:r>
-          </a:p>
-        </p:txBody>
-      </p:sp>
-      <p:sp>
-        <p:nvSpPr>
-          <p:cNvPr id="151" name="Cellstrip2_Ref"/>
+              <a:rPr sz="1400" b="0" i="0">
+                <a:solidFill>
+                  <a:srgbClr val="1F1F24"/>
+                </a:solidFill>
+                <a:latin typeface="Open Sans"/>
+              </a:rPr>
+              <a:t>Devlin et al. — BERT, NAACL 2019</a:t>
+            </a:r>
+          </a:p>
+        </p:txBody>
+      </p:sp>
+      <p:sp>
+        <p:nvSpPr>
+          <p:cNvPr id="150" name="Cellstrip2_Ref"/>
           <p:cNvSpPr txBox="1"/>
           <p:nvPr/>
         </p:nvSpPr>
         <p:spPr>
           <a:xfrm>
-            <a:off x="14749272" y="29599127"/>
-            <a:ext cx="5806440" cy="310896"/>
+            <a:off x="14749272" y="30047184"/>
+            <a:ext cx="5806440" cy="228600"/>
           </a:xfrm>
           <a:prstGeom prst="rect">
             <a:avLst/>
@@ -15625,27 +15518,27 @@
               </a:spcAft>
             </a:pPr>
             <a:r>
-              <a:rPr sz="1000" b="0" i="0">
-                <a:solidFill>
-                  <a:srgbClr val="1F1F24"/>
-                </a:solidFill>
-                <a:latin typeface="Open Sans"/>
-              </a:rPr>
-              <a:t>K. Ogueji et al., "Small data? No problem!" (AfriBERTa), EMNLP MRL 2021</a:t>
-            </a:r>
-          </a:p>
-        </p:txBody>
-      </p:sp>
-      <p:sp>
-        <p:nvSpPr>
-          <p:cNvPr id="152" name="Cellstrip2_Grp"/>
+              <a:rPr sz="1400" b="0" i="0">
+                <a:solidFill>
+                  <a:srgbClr val="1F1F24"/>
+                </a:solidFill>
+                <a:latin typeface="Open Sans"/>
+              </a:rPr>
+              <a:t>Ogueji et al. — AfriBERTa, EMNLP MRL 2021</a:t>
+            </a:r>
+          </a:p>
+        </p:txBody>
+      </p:sp>
+      <p:sp>
+        <p:nvSpPr>
+          <p:cNvPr id="151" name="Cellstrip2_Grp"/>
           <p:cNvSpPr txBox="1"/>
           <p:nvPr/>
         </p:nvSpPr>
         <p:spPr>
           <a:xfrm>
-            <a:off x="14749272" y="29964887"/>
-            <a:ext cx="5806440" cy="182880"/>
+            <a:off x="14749272" y="30339792"/>
+            <a:ext cx="5806440" cy="219456"/>
           </a:xfrm>
           <a:prstGeom prst="rect">
             <a:avLst/>
@@ -15667,7 +15560,7 @@
               </a:spcAft>
             </a:pPr>
             <a:r>
-              <a:rPr sz="900" b="1" i="0">
+              <a:rPr sz="1400" b="1" i="0">
                 <a:solidFill>
                   <a:srgbClr val="32006E"/>
                 </a:solidFill>
@@ -15680,14 +15573,14 @@
       </p:sp>
       <p:sp>
         <p:nvSpPr>
-          <p:cNvPr id="153" name="Cellstrip2_Ref"/>
+          <p:cNvPr id="152" name="Cellstrip2_Ref"/>
           <p:cNvSpPr txBox="1"/>
           <p:nvPr/>
         </p:nvSpPr>
         <p:spPr>
           <a:xfrm>
-            <a:off x="14749272" y="30156911"/>
-            <a:ext cx="5806440" cy="173736"/>
+            <a:off x="14749272" y="30577536"/>
+            <a:ext cx="5806440" cy="228600"/>
           </a:xfrm>
           <a:prstGeom prst="rect">
             <a:avLst/>
@@ -15709,27 +15602,27 @@
               </a:spcAft>
             </a:pPr>
             <a:r>
-              <a:rPr sz="1000" b="0" i="0">
-                <a:solidFill>
-                  <a:srgbClr val="1F1F24"/>
-                </a:solidFill>
-                <a:latin typeface="Open Sans"/>
-              </a:rPr>
-              <a:t>D. I. Adelani et al., "SIB-200," EACL 2024</a:t>
-            </a:r>
-          </a:p>
-        </p:txBody>
-      </p:sp>
-      <p:sp>
-        <p:nvSpPr>
-          <p:cNvPr id="154" name="Cellstrip2_Ref"/>
+              <a:rPr sz="1400" b="0" i="0">
+                <a:solidFill>
+                  <a:srgbClr val="1F1F24"/>
+                </a:solidFill>
+                <a:latin typeface="Open Sans"/>
+              </a:rPr>
+              <a:t>Adelani et al. — SIB-200, EACL 2024</a:t>
+            </a:r>
+          </a:p>
+        </p:txBody>
+      </p:sp>
+      <p:sp>
+        <p:nvSpPr>
+          <p:cNvPr id="153" name="Cellstrip2_Ref"/>
           <p:cNvSpPr txBox="1"/>
           <p:nvPr/>
         </p:nvSpPr>
         <p:spPr>
           <a:xfrm>
-            <a:off x="14749272" y="30358079"/>
-            <a:ext cx="5806440" cy="173736"/>
+            <a:off x="14749272" y="30833568"/>
+            <a:ext cx="5806440" cy="228600"/>
           </a:xfrm>
           <a:prstGeom prst="rect">
             <a:avLst/>
@@ -15751,27 +15644,27 @@
               </a:spcAft>
             </a:pPr>
             <a:r>
-              <a:rPr sz="1000" b="0" i="0">
-                <a:solidFill>
-                  <a:srgbClr val="1F1F24"/>
-                </a:solidFill>
-                <a:latin typeface="Open Sans"/>
-              </a:rPr>
-              <a:t>D. I. Adelani et al., "MasakhaNER 2.0," EMNLP 2022</a:t>
-            </a:r>
-          </a:p>
-        </p:txBody>
-      </p:sp>
-      <p:sp>
-        <p:nvSpPr>
-          <p:cNvPr id="155" name="Cellstrip2_Ref"/>
+              <a:rPr sz="1400" b="0" i="0">
+                <a:solidFill>
+                  <a:srgbClr val="1F1F24"/>
+                </a:solidFill>
+                <a:latin typeface="Open Sans"/>
+              </a:rPr>
+              <a:t>Adelani et al. — MasakhaNER 2.0, EMNLP 2022</a:t>
+            </a:r>
+          </a:p>
+        </p:txBody>
+      </p:sp>
+      <p:sp>
+        <p:nvSpPr>
+          <p:cNvPr id="154" name="Cellstrip2_Ref"/>
           <p:cNvSpPr txBox="1"/>
           <p:nvPr/>
         </p:nvSpPr>
         <p:spPr>
           <a:xfrm>
-            <a:off x="14749272" y="30559247"/>
-            <a:ext cx="5806440" cy="173736"/>
+            <a:off x="14749272" y="31089600"/>
+            <a:ext cx="5806440" cy="228600"/>
           </a:xfrm>
           <a:prstGeom prst="rect">
             <a:avLst/>
@@ -15793,27 +15686,27 @@
               </a:spcAft>
             </a:pPr>
             <a:r>
-              <a:rPr sz="1000" b="0" i="0">
-                <a:solidFill>
-                  <a:srgbClr val="1F1F24"/>
-                </a:solidFill>
-                <a:latin typeface="Open Sans"/>
-              </a:rPr>
-              <a:t>G. Penedo et al., "FineWeb2," arXiv:2506.20920</a:t>
-            </a:r>
-          </a:p>
-        </p:txBody>
-      </p:sp>
-      <p:sp>
-        <p:nvSpPr>
-          <p:cNvPr id="156" name="Cellstrip2_Grp"/>
+              <a:rPr sz="1400" b="0" i="0">
+                <a:solidFill>
+                  <a:srgbClr val="1F1F24"/>
+                </a:solidFill>
+                <a:latin typeface="Open Sans"/>
+              </a:rPr>
+              <a:t>Penedo et al. — FineWeb2, arXiv:2506.20920</a:t>
+            </a:r>
+          </a:p>
+        </p:txBody>
+      </p:sp>
+      <p:sp>
+        <p:nvSpPr>
+          <p:cNvPr id="155" name="Cellstrip2_Grp"/>
           <p:cNvSpPr txBox="1"/>
           <p:nvPr/>
         </p:nvSpPr>
         <p:spPr>
           <a:xfrm>
-            <a:off x="14749272" y="30787847"/>
-            <a:ext cx="5806440" cy="182880"/>
+            <a:off x="14749272" y="31382208"/>
+            <a:ext cx="5806440" cy="219456"/>
           </a:xfrm>
           <a:prstGeom prst="rect">
             <a:avLst/>
@@ -15835,7 +15728,7 @@
               </a:spcAft>
             </a:pPr>
             <a:r>
-              <a:rPr sz="900" b="1" i="0">
+              <a:rPr sz="1400" b="1" i="0">
                 <a:solidFill>
                   <a:srgbClr val="32006E"/>
                 </a:solidFill>
@@ -15848,14 +15741,14 @@
       </p:sp>
       <p:sp>
         <p:nvSpPr>
-          <p:cNvPr id="157" name="Cellstrip2_Ref"/>
+          <p:cNvPr id="156" name="Cellstrip2_Ref"/>
           <p:cNvSpPr txBox="1"/>
           <p:nvPr/>
         </p:nvSpPr>
         <p:spPr>
           <a:xfrm>
-            <a:off x="14749272" y="30979871"/>
-            <a:ext cx="5806440" cy="173736"/>
+            <a:off x="14749272" y="31619952"/>
+            <a:ext cx="5806440" cy="228600"/>
           </a:xfrm>
           <a:prstGeom prst="rect">
             <a:avLst/>
@@ -15877,27 +15770,27 @@
               </a:spcAft>
             </a:pPr>
             <a:r>
-              <a:rPr sz="1000" b="0" i="0">
-                <a:solidFill>
-                  <a:srgbClr val="1F1F24"/>
-                </a:solidFill>
-                <a:latin typeface="Open Sans"/>
-              </a:rPr>
-              <a:t>L. N. Smith, one-cycle schedules, arXiv:1803.09820</a:t>
-            </a:r>
-          </a:p>
-        </p:txBody>
-      </p:sp>
-      <p:sp>
-        <p:nvSpPr>
-          <p:cNvPr id="158" name="Cellstrip2_Ref"/>
+              <a:rPr sz="1400" b="0" i="0">
+                <a:solidFill>
+                  <a:srgbClr val="1F1F24"/>
+                </a:solidFill>
+                <a:latin typeface="Open Sans"/>
+              </a:rPr>
+              <a:t>Smith — one-cycle schedules, arXiv:1803.09820</a:t>
+            </a:r>
+          </a:p>
+        </p:txBody>
+      </p:sp>
+      <p:sp>
+        <p:nvSpPr>
+          <p:cNvPr id="157" name="Cellstrip2_Ref"/>
           <p:cNvSpPr txBox="1"/>
           <p:nvPr/>
         </p:nvSpPr>
         <p:spPr>
           <a:xfrm>
-            <a:off x="14749272" y="31181039"/>
-            <a:ext cx="5806440" cy="310896"/>
+            <a:off x="14749272" y="31875984"/>
+            <a:ext cx="5806440" cy="228600"/>
           </a:xfrm>
           <a:prstGeom prst="rect">
             <a:avLst/>
@@ -15919,26 +15812,26 @@
               </a:spcAft>
             </a:pPr>
             <a:r>
-              <a:rPr sz="1000" b="0" i="0">
-                <a:solidFill>
-                  <a:srgbClr val="1F1F24"/>
-                </a:solidFill>
-                <a:latin typeface="Open Sans"/>
-              </a:rPr>
-              <a:t>J. Dodge et al., "Show your work," EMNLP 2019 — no result without the search budget that produced it</a:t>
+              <a:rPr sz="1400" b="0" i="0">
+                <a:solidFill>
+                  <a:srgbClr val="1F1F24"/>
+                </a:solidFill>
+                <a:latin typeface="Open Sans"/>
+              </a:rPr>
+              <a:t>Dodge et al. — "Show your work," EMNLP 2019</a:t>
             </a:r>
           </a:p>
         </p:txBody>
       </p:sp>
       <p:cxnSp>
         <p:nvCxnSpPr>
-          <p:cNvPr id="159" name="Connector 158"/>
+          <p:cNvPr id="158" name="Connector 157"/>
           <p:cNvCxnSpPr/>
           <p:nvPr/>
         </p:nvCxnSpPr>
         <p:spPr>
           <a:xfrm>
-            <a:off x="1371600" y="31546800"/>
+            <a:off x="1371600" y="31857696"/>
             <a:ext cx="19202400" cy="0"/>
           </a:xfrm>
           <a:prstGeom prst="line">
@@ -15967,13 +15860,13 @@
       </p:cxnSp>
       <p:sp>
         <p:nvSpPr>
-          <p:cNvPr id="160" name="Footer_Sources"/>
+          <p:cNvPr id="159" name="Footer_Sources"/>
           <p:cNvSpPr txBox="1"/>
           <p:nvPr/>
         </p:nvSpPr>
         <p:spPr>
           <a:xfrm>
-            <a:off x="1371600" y="31656527"/>
+            <a:off x="1371600" y="31967424"/>
             <a:ext cx="16733520" cy="1188720"/>
           </a:xfrm>
           <a:prstGeom prst="rect">
@@ -16009,13 +15902,13 @@
       </p:sp>
       <p:sp>
         <p:nvSpPr>
-          <p:cNvPr id="161" name="Footer_Tag"/>
+          <p:cNvPr id="160" name="Footer_Tag"/>
           <p:cNvSpPr txBox="1"/>
           <p:nvPr/>
         </p:nvSpPr>
         <p:spPr>
           <a:xfrm>
-            <a:off x="18288000" y="31674816"/>
+            <a:off x="18288000" y="31985712"/>
             <a:ext cx="2286000" cy="274320"/>
           </a:xfrm>
           <a:prstGeom prst="rect">
@@ -16051,10 +15944,10 @@
       </p:sp>
       <p:pic>
         <p:nvPicPr>
-          <p:cNvPr id="163" name="Embedded_01_Cell1" descr="reports\figures\26-poster-hardware.svg">
+          <p:cNvPr id="162" name="Embedded_01_Cell1" descr="reports\figures\26-poster-hardware.svg">
             <a:extLst>
               <a:ext uri="{FF2B5EF4-FFF2-40B4-BE49-F238E27FC236}">
-                <a16:creationId xmlns:a16="http://schemas.microsoft.com/office/drawing/2014/main" id="{04CFA631-A4A7-7821-7841-E41274EC897C}"/>
+                <a16:creationId xmlns:a16="http://schemas.microsoft.com/office/drawing/2014/main" id="{DE20C52A-072D-F3D1-3427-5351CF0523A7}"/>
               </a:ext>
             </a:extLst>
           </p:cNvPr>
@@ -16077,8 +15970,8 @@
         </p:blipFill>
         <p:spPr>
           <a:xfrm>
-            <a:off x="1567137" y="9235440"/>
-            <a:ext cx="5415366" cy="2423160"/>
+            <a:off x="889541" y="9061704"/>
+            <a:ext cx="6770559" cy="2688336"/>
           </a:xfrm>
           <a:prstGeom prst="rect">
             <a:avLst/>
@@ -16087,10 +15980,10 @@
       </p:pic>
       <p:pic>
         <p:nvPicPr>
-          <p:cNvPr id="165" name="Embedded_02_Cell5" descr="reports\figures\27-poster-cliffs.svg">
+          <p:cNvPr id="164" name="Embedded_02_Cell5" descr="reports\figures\27-poster-cliffs.svg">
             <a:extLst>
               <a:ext uri="{FF2B5EF4-FFF2-40B4-BE49-F238E27FC236}">
-                <a16:creationId xmlns:a16="http://schemas.microsoft.com/office/drawing/2014/main" id="{ED8576A6-39BE-04AA-C320-197DABCBCEEA}"/>
+                <a16:creationId xmlns:a16="http://schemas.microsoft.com/office/drawing/2014/main" id="{11FCBB52-3DF0-65BF-5EAF-FA48828A3FB4}"/>
               </a:ext>
             </a:extLst>
           </p:cNvPr>
@@ -16113,7 +16006,7 @@
         </p:blipFill>
         <p:spPr>
           <a:xfrm>
-            <a:off x="1371600" y="20025475"/>
+            <a:off x="1371600" y="20089482"/>
             <a:ext cx="5806440" cy="2422930"/>
           </a:xfrm>
           <a:prstGeom prst="rect">
@@ -16123,10 +16016,10 @@
       </p:pic>
       <p:pic>
         <p:nvPicPr>
-          <p:cNvPr id="167" name="Embedded_03_Cell6" descr="reports\figures\25-poster-transfer.svg">
+          <p:cNvPr id="166" name="Embedded_03_Cell6" descr="reports\figures\25-poster-transfer.svg">
             <a:extLst>
               <a:ext uri="{FF2B5EF4-FFF2-40B4-BE49-F238E27FC236}">
-                <a16:creationId xmlns:a16="http://schemas.microsoft.com/office/drawing/2014/main" id="{7C8B600C-9ED7-79ED-E3BF-C05C5C823987}"/>
+                <a16:creationId xmlns:a16="http://schemas.microsoft.com/office/drawing/2014/main" id="{B1F2F19C-77F3-06DF-26E8-3E9412CDB117}"/>
               </a:ext>
             </a:extLst>
           </p:cNvPr>
@@ -16149,7 +16042,7 @@
         </p:blipFill>
         <p:spPr>
           <a:xfrm>
-            <a:off x="8009527" y="20025361"/>
+            <a:off x="8009527" y="20089368"/>
             <a:ext cx="5789387" cy="2423160"/>
           </a:xfrm>
           <a:prstGeom prst="rect">
@@ -16159,10 +16052,10 @@
       </p:pic>
       <p:pic>
         <p:nvPicPr>
-          <p:cNvPr id="169" name="Embedded_04_Cell7" descr="reports\figures\28-poster-dashboard.svg">
+          <p:cNvPr id="168" name="Embedded_04_Cell7" descr="reports\figures\28-poster-dashboard.svg">
             <a:extLst>
               <a:ext uri="{FF2B5EF4-FFF2-40B4-BE49-F238E27FC236}">
-                <a16:creationId xmlns:a16="http://schemas.microsoft.com/office/drawing/2014/main" id="{E1A261B2-ECD9-FAD5-6B6A-8190BCF8254B}"/>
+                <a16:creationId xmlns:a16="http://schemas.microsoft.com/office/drawing/2014/main" id="{8E65B7BB-AC02-7D04-6B39-F7A636620838}"/>
               </a:ext>
             </a:extLst>
           </p:cNvPr>
@@ -16185,7 +16078,7 @@
         </p:blipFill>
         <p:spPr>
           <a:xfrm>
-            <a:off x="14751238" y="20025361"/>
+            <a:off x="14751238" y="20089368"/>
             <a:ext cx="5802509" cy="2423160"/>
           </a:xfrm>
           <a:prstGeom prst="rect">

--- a/src/a2-nlp/poster/final/board-model-factory_v2.pptx
+++ b/src/a2-nlp/poster/final/board-model-factory_v2.pptx
@@ -8276,7 +8276,7 @@
         </p:nvSpPr>
         <p:spPr>
           <a:xfrm>
-            <a:off x="1371600" y="11896343"/>
+            <a:off x="1371600" y="12079224"/>
             <a:ext cx="5806440" cy="1417320"/>
           </a:xfrm>
           <a:prstGeom prst="rect">
@@ -8486,7 +8486,7 @@
         <p:spPr>
           <a:xfrm>
             <a:off x="8001000" y="9134856"/>
-            <a:ext cx="5806440" cy="4251959"/>
+            <a:ext cx="5806440" cy="4434840"/>
           </a:xfrm>
           <a:prstGeom prst="rect">
             <a:avLst/>
@@ -8757,7 +8757,7 @@
         <p:spPr>
           <a:xfrm>
             <a:off x="14749272" y="8001000"/>
-            <a:ext cx="5806440" cy="5440680"/>
+            <a:ext cx="5806440" cy="5623560"/>
           </a:xfrm>
           <a:prstGeom prst="rect">
             <a:avLst/>
@@ -8843,7 +8843,7 @@
         <p:spPr>
           <a:xfrm>
             <a:off x="15005304" y="8897112"/>
-            <a:ext cx="1572768" cy="720852"/>
+            <a:ext cx="1572768" cy="751332"/>
           </a:xfrm>
           <a:prstGeom prst="rect">
             <a:avLst/>
@@ -8885,7 +8885,7 @@
         <p:spPr>
           <a:xfrm>
             <a:off x="16706088" y="8897112"/>
-            <a:ext cx="3575303" cy="720852"/>
+            <a:ext cx="3575303" cy="751332"/>
           </a:xfrm>
           <a:prstGeom prst="rect">
             <a:avLst/>
@@ -8926,8 +8926,8 @@
         </p:nvSpPr>
         <p:spPr>
           <a:xfrm>
-            <a:off x="15005304" y="9617964"/>
-            <a:ext cx="1572768" cy="720852"/>
+            <a:off x="15005304" y="9648444"/>
+            <a:ext cx="1572768" cy="751332"/>
           </a:xfrm>
           <a:prstGeom prst="rect">
             <a:avLst/>
@@ -8968,8 +8968,8 @@
         </p:nvSpPr>
         <p:spPr>
           <a:xfrm>
-            <a:off x="16706088" y="9617964"/>
-            <a:ext cx="3575303" cy="720852"/>
+            <a:off x="16706088" y="9648444"/>
+            <a:ext cx="3575303" cy="751332"/>
           </a:xfrm>
           <a:prstGeom prst="rect">
             <a:avLst/>
@@ -9010,8 +9010,8 @@
         </p:nvSpPr>
         <p:spPr>
           <a:xfrm>
-            <a:off x="15005304" y="10338816"/>
-            <a:ext cx="1572768" cy="720852"/>
+            <a:off x="15005304" y="10399776"/>
+            <a:ext cx="1572768" cy="751332"/>
           </a:xfrm>
           <a:prstGeom prst="rect">
             <a:avLst/>
@@ -9052,8 +9052,8 @@
         </p:nvSpPr>
         <p:spPr>
           <a:xfrm>
-            <a:off x="16706088" y="10338816"/>
-            <a:ext cx="3575303" cy="720852"/>
+            <a:off x="16706088" y="10399776"/>
+            <a:ext cx="3575303" cy="751332"/>
           </a:xfrm>
           <a:prstGeom prst="rect">
             <a:avLst/>
@@ -9094,8 +9094,8 @@
         </p:nvSpPr>
         <p:spPr>
           <a:xfrm>
-            <a:off x="15005304" y="11059668"/>
-            <a:ext cx="1572768" cy="720852"/>
+            <a:off x="15005304" y="11151108"/>
+            <a:ext cx="1572768" cy="751332"/>
           </a:xfrm>
           <a:prstGeom prst="rect">
             <a:avLst/>
@@ -9136,8 +9136,8 @@
         </p:nvSpPr>
         <p:spPr>
           <a:xfrm>
-            <a:off x="16706088" y="11059668"/>
-            <a:ext cx="3575303" cy="720852"/>
+            <a:off x="16706088" y="11151108"/>
+            <a:ext cx="3575303" cy="751332"/>
           </a:xfrm>
           <a:prstGeom prst="rect">
             <a:avLst/>
@@ -9178,8 +9178,8 @@
         </p:nvSpPr>
         <p:spPr>
           <a:xfrm>
-            <a:off x="15005304" y="11780520"/>
-            <a:ext cx="1572768" cy="720852"/>
+            <a:off x="15005304" y="11902440"/>
+            <a:ext cx="1572768" cy="751332"/>
           </a:xfrm>
           <a:prstGeom prst="rect">
             <a:avLst/>
@@ -9220,8 +9220,8 @@
         </p:nvSpPr>
         <p:spPr>
           <a:xfrm>
-            <a:off x="16706088" y="11780520"/>
-            <a:ext cx="3575303" cy="720852"/>
+            <a:off x="16706088" y="11902440"/>
+            <a:ext cx="3575303" cy="751332"/>
           </a:xfrm>
           <a:prstGeom prst="rect">
             <a:avLst/>
@@ -9262,8 +9262,8 @@
         </p:nvSpPr>
         <p:spPr>
           <a:xfrm>
-            <a:off x="15005304" y="12501372"/>
-            <a:ext cx="1572768" cy="720852"/>
+            <a:off x="15005304" y="12653772"/>
+            <a:ext cx="1572768" cy="751332"/>
           </a:xfrm>
           <a:prstGeom prst="rect">
             <a:avLst/>
@@ -9304,8 +9304,8 @@
         </p:nvSpPr>
         <p:spPr>
           <a:xfrm>
-            <a:off x="16706088" y="12501372"/>
-            <a:ext cx="3575303" cy="720852"/>
+            <a:off x="16706088" y="12653772"/>
+            <a:ext cx="3575303" cy="751332"/>
           </a:xfrm>
           <a:prstGeom prst="rect">
             <a:avLst/>
@@ -9346,7 +9346,7 @@
         </p:nvSpPr>
         <p:spPr>
           <a:xfrm>
-            <a:off x="1371600" y="13606272"/>
+            <a:off x="1371600" y="13761720"/>
             <a:ext cx="5806440" cy="896112"/>
           </a:xfrm>
           <a:prstGeom prst="rect">
@@ -9388,7 +9388,7 @@
         </p:nvCxnSpPr>
         <p:spPr>
           <a:xfrm>
-            <a:off x="1371600" y="14538960"/>
+            <a:off x="1371600" y="14694408"/>
             <a:ext cx="5806440" cy="0"/>
           </a:xfrm>
           <a:prstGeom prst="line">
@@ -9423,8 +9423,8 @@
         </p:nvSpPr>
         <p:spPr>
           <a:xfrm>
-            <a:off x="1371600" y="14740128"/>
-            <a:ext cx="5806440" cy="4069080"/>
+            <a:off x="1371600" y="14895576"/>
+            <a:ext cx="5806440" cy="3931920"/>
           </a:xfrm>
           <a:prstGeom prst="rect">
             <a:avLst/>
@@ -9748,7 +9748,7 @@
         </p:nvSpPr>
         <p:spPr>
           <a:xfrm>
-            <a:off x="8001000" y="13606272"/>
+            <a:off x="8001000" y="13761720"/>
             <a:ext cx="12435840" cy="896112"/>
           </a:xfrm>
           <a:prstGeom prst="rect">
@@ -9790,7 +9790,7 @@
         </p:nvCxnSpPr>
         <p:spPr>
           <a:xfrm>
-            <a:off x="8001000" y="14538960"/>
+            <a:off x="8001000" y="14694408"/>
             <a:ext cx="12435840" cy="0"/>
           </a:xfrm>
           <a:prstGeom prst="line">
@@ -9825,7 +9825,7 @@
         </p:nvSpPr>
         <p:spPr>
           <a:xfrm>
-            <a:off x="8001000" y="14666976"/>
+            <a:off x="8001000" y="14822424"/>
             <a:ext cx="12435840" cy="859536"/>
           </a:xfrm>
           <a:prstGeom prst="rect">
@@ -9930,7 +9930,7 @@
         </p:nvSpPr>
         <p:spPr>
           <a:xfrm>
-            <a:off x="8001000" y="15563088"/>
+            <a:off x="8001000" y="15718536"/>
             <a:ext cx="1783080" cy="201168"/>
           </a:xfrm>
           <a:prstGeom prst="rect">
@@ -9972,7 +9972,7 @@
         </p:nvSpPr>
         <p:spPr>
           <a:xfrm>
-            <a:off x="10616184" y="15563088"/>
+            <a:off x="10616184" y="15718536"/>
             <a:ext cx="1783080" cy="201168"/>
           </a:xfrm>
           <a:prstGeom prst="rect">
@@ -10014,7 +10014,7 @@
         </p:nvSpPr>
         <p:spPr>
           <a:xfrm>
-            <a:off x="12874752" y="15563088"/>
+            <a:off x="12874752" y="15718536"/>
             <a:ext cx="1783080" cy="201168"/>
           </a:xfrm>
           <a:prstGeom prst="rect">
@@ -10056,7 +10056,7 @@
         </p:nvSpPr>
         <p:spPr>
           <a:xfrm>
-            <a:off x="8001000" y="15782544"/>
+            <a:off x="8001000" y="15937992"/>
             <a:ext cx="5943600" cy="196596"/>
           </a:xfrm>
           <a:prstGeom prst="rect">
@@ -10098,7 +10098,7 @@
         </p:nvCxnSpPr>
         <p:spPr>
           <a:xfrm>
-            <a:off x="8001000" y="15960852"/>
+            <a:off x="8001000" y="16116300"/>
             <a:ext cx="5943600" cy="0"/>
           </a:xfrm>
           <a:prstGeom prst="line">
@@ -10133,7 +10133,7 @@
         </p:nvSpPr>
         <p:spPr>
           <a:xfrm>
-            <a:off x="8001000" y="15997428"/>
+            <a:off x="8001000" y="16152876"/>
             <a:ext cx="2523744" cy="178307"/>
           </a:xfrm>
           <a:prstGeom prst="rect">
@@ -10175,7 +10175,7 @@
         </p:nvSpPr>
         <p:spPr>
           <a:xfrm>
-            <a:off x="10616184" y="15997428"/>
+            <a:off x="10616184" y="16152876"/>
             <a:ext cx="2167127" cy="178307"/>
           </a:xfrm>
           <a:prstGeom prst="rect">
@@ -10226,7 +10226,7 @@
         </p:nvSpPr>
         <p:spPr>
           <a:xfrm>
-            <a:off x="12874752" y="15997428"/>
+            <a:off x="12874752" y="16152876"/>
             <a:ext cx="978408" cy="178307"/>
           </a:xfrm>
           <a:prstGeom prst="rect">
@@ -10268,7 +10268,7 @@
         </p:nvCxnSpPr>
         <p:spPr>
           <a:xfrm>
-            <a:off x="8001000" y="16175736"/>
+            <a:off x="8001000" y="16331184"/>
             <a:ext cx="5943600" cy="0"/>
           </a:xfrm>
           <a:prstGeom prst="line">
@@ -10303,7 +10303,7 @@
         </p:nvSpPr>
         <p:spPr>
           <a:xfrm>
-            <a:off x="8001000" y="16212312"/>
+            <a:off x="8001000" y="16367759"/>
             <a:ext cx="2523744" cy="178307"/>
           </a:xfrm>
           <a:prstGeom prst="rect">
@@ -10345,7 +10345,7 @@
         </p:nvSpPr>
         <p:spPr>
           <a:xfrm>
-            <a:off x="10616184" y="16212312"/>
+            <a:off x="10616184" y="16367759"/>
             <a:ext cx="2167127" cy="178307"/>
           </a:xfrm>
           <a:prstGeom prst="rect">
@@ -10387,7 +10387,7 @@
         </p:nvSpPr>
         <p:spPr>
           <a:xfrm>
-            <a:off x="12874752" y="16212312"/>
+            <a:off x="12874752" y="16367759"/>
             <a:ext cx="978408" cy="178307"/>
           </a:xfrm>
           <a:prstGeom prst="rect">
@@ -10429,7 +10429,7 @@
         </p:nvCxnSpPr>
         <p:spPr>
           <a:xfrm>
-            <a:off x="8001000" y="16390620"/>
+            <a:off x="8001000" y="16546067"/>
             <a:ext cx="5943600" cy="0"/>
           </a:xfrm>
           <a:prstGeom prst="line">
@@ -10464,7 +10464,7 @@
         </p:nvSpPr>
         <p:spPr>
           <a:xfrm>
-            <a:off x="8001000" y="16427196"/>
+            <a:off x="8001000" y="16582643"/>
             <a:ext cx="2523744" cy="178307"/>
           </a:xfrm>
           <a:prstGeom prst="rect">
@@ -10506,7 +10506,7 @@
         </p:nvSpPr>
         <p:spPr>
           <a:xfrm>
-            <a:off x="10616184" y="16427196"/>
+            <a:off x="10616184" y="16582643"/>
             <a:ext cx="2167127" cy="178307"/>
           </a:xfrm>
           <a:prstGeom prst="rect">
@@ -10548,7 +10548,7 @@
         </p:nvSpPr>
         <p:spPr>
           <a:xfrm>
-            <a:off x="12874752" y="16427196"/>
+            <a:off x="12874752" y="16582643"/>
             <a:ext cx="978408" cy="178307"/>
           </a:xfrm>
           <a:prstGeom prst="rect">
@@ -10590,7 +10590,7 @@
         </p:nvCxnSpPr>
         <p:spPr>
           <a:xfrm>
-            <a:off x="8001000" y="16605504"/>
+            <a:off x="8001000" y="16760952"/>
             <a:ext cx="5943600" cy="0"/>
           </a:xfrm>
           <a:prstGeom prst="line">
@@ -10625,7 +10625,7 @@
         </p:nvSpPr>
         <p:spPr>
           <a:xfrm>
-            <a:off x="8001000" y="16642080"/>
+            <a:off x="8001000" y="16797528"/>
             <a:ext cx="2523744" cy="178307"/>
           </a:xfrm>
           <a:prstGeom prst="rect">
@@ -10667,7 +10667,7 @@
         </p:nvSpPr>
         <p:spPr>
           <a:xfrm>
-            <a:off x="10616184" y="16642080"/>
+            <a:off x="10616184" y="16797528"/>
             <a:ext cx="2167127" cy="178307"/>
           </a:xfrm>
           <a:prstGeom prst="rect">
@@ -10718,7 +10718,7 @@
         </p:nvSpPr>
         <p:spPr>
           <a:xfrm>
-            <a:off x="12874752" y="16642080"/>
+            <a:off x="12874752" y="16797528"/>
             <a:ext cx="978408" cy="178307"/>
           </a:xfrm>
           <a:prstGeom prst="rect">
@@ -10760,7 +10760,7 @@
         </p:nvCxnSpPr>
         <p:spPr>
           <a:xfrm>
-            <a:off x="8001000" y="16820388"/>
+            <a:off x="8001000" y="16975836"/>
             <a:ext cx="5943600" cy="0"/>
           </a:xfrm>
           <a:prstGeom prst="line">
@@ -10795,7 +10795,7 @@
         </p:nvSpPr>
         <p:spPr>
           <a:xfrm>
-            <a:off x="8001000" y="16856964"/>
+            <a:off x="8001000" y="17012412"/>
             <a:ext cx="2523744" cy="178307"/>
           </a:xfrm>
           <a:prstGeom prst="rect">
@@ -10837,7 +10837,7 @@
         </p:nvSpPr>
         <p:spPr>
           <a:xfrm>
-            <a:off x="10616184" y="16856964"/>
+            <a:off x="10616184" y="17012412"/>
             <a:ext cx="2167127" cy="178307"/>
           </a:xfrm>
           <a:prstGeom prst="rect">
@@ -10888,7 +10888,7 @@
         </p:nvSpPr>
         <p:spPr>
           <a:xfrm>
-            <a:off x="12874752" y="16856964"/>
+            <a:off x="12874752" y="17012412"/>
             <a:ext cx="978408" cy="178307"/>
           </a:xfrm>
           <a:prstGeom prst="rect">
@@ -10930,7 +10930,7 @@
         </p:nvSpPr>
         <p:spPr>
           <a:xfrm>
-            <a:off x="8001000" y="17071848"/>
+            <a:off x="8001000" y="17227296"/>
             <a:ext cx="5943600" cy="196596"/>
           </a:xfrm>
           <a:prstGeom prst="rect">
@@ -10972,7 +10972,7 @@
         </p:nvCxnSpPr>
         <p:spPr>
           <a:xfrm>
-            <a:off x="8001000" y="17250156"/>
+            <a:off x="8001000" y="17405604"/>
             <a:ext cx="5943600" cy="0"/>
           </a:xfrm>
           <a:prstGeom prst="line">
@@ -11007,7 +11007,7 @@
         </p:nvSpPr>
         <p:spPr>
           <a:xfrm>
-            <a:off x="8001000" y="17286732"/>
+            <a:off x="8001000" y="17442180"/>
             <a:ext cx="2523744" cy="178307"/>
           </a:xfrm>
           <a:prstGeom prst="rect">
@@ -11049,7 +11049,7 @@
         </p:nvSpPr>
         <p:spPr>
           <a:xfrm>
-            <a:off x="10616184" y="17286732"/>
+            <a:off x="10616184" y="17442180"/>
             <a:ext cx="2167127" cy="178307"/>
           </a:xfrm>
           <a:prstGeom prst="rect">
@@ -11100,7 +11100,7 @@
         </p:nvSpPr>
         <p:spPr>
           <a:xfrm>
-            <a:off x="12874752" y="17286732"/>
+            <a:off x="12874752" y="17442180"/>
             <a:ext cx="978408" cy="178307"/>
           </a:xfrm>
           <a:prstGeom prst="rect">
@@ -11142,7 +11142,7 @@
         </p:nvCxnSpPr>
         <p:spPr>
           <a:xfrm>
-            <a:off x="8001000" y="17465040"/>
+            <a:off x="8001000" y="17620488"/>
             <a:ext cx="5943600" cy="0"/>
           </a:xfrm>
           <a:prstGeom prst="line">
@@ -11177,7 +11177,7 @@
         </p:nvSpPr>
         <p:spPr>
           <a:xfrm>
-            <a:off x="8001000" y="17501616"/>
+            <a:off x="8001000" y="17657064"/>
             <a:ext cx="2523744" cy="178307"/>
           </a:xfrm>
           <a:prstGeom prst="rect">
@@ -11219,7 +11219,7 @@
         </p:nvSpPr>
         <p:spPr>
           <a:xfrm>
-            <a:off x="10616184" y="17501616"/>
+            <a:off x="10616184" y="17657064"/>
             <a:ext cx="2167127" cy="178307"/>
           </a:xfrm>
           <a:prstGeom prst="rect">
@@ -11270,7 +11270,7 @@
         </p:nvSpPr>
         <p:spPr>
           <a:xfrm>
-            <a:off x="12874752" y="17501616"/>
+            <a:off x="12874752" y="17657064"/>
             <a:ext cx="978408" cy="178307"/>
           </a:xfrm>
           <a:prstGeom prst="rect">
@@ -11312,7 +11312,7 @@
         </p:nvCxnSpPr>
         <p:spPr>
           <a:xfrm>
-            <a:off x="8001000" y="17679924"/>
+            <a:off x="8001000" y="17835372"/>
             <a:ext cx="5943600" cy="0"/>
           </a:xfrm>
           <a:prstGeom prst="line">
@@ -11347,7 +11347,7 @@
         </p:nvSpPr>
         <p:spPr>
           <a:xfrm>
-            <a:off x="8001000" y="17716500"/>
+            <a:off x="8001000" y="17871948"/>
             <a:ext cx="2523744" cy="178307"/>
           </a:xfrm>
           <a:prstGeom prst="rect">
@@ -11389,7 +11389,7 @@
         </p:nvSpPr>
         <p:spPr>
           <a:xfrm>
-            <a:off x="10616184" y="17716500"/>
+            <a:off x="10616184" y="17871948"/>
             <a:ext cx="2167127" cy="178307"/>
           </a:xfrm>
           <a:prstGeom prst="rect">
@@ -11431,7 +11431,7 @@
         </p:nvSpPr>
         <p:spPr>
           <a:xfrm>
-            <a:off x="12874752" y="17716500"/>
+            <a:off x="12874752" y="17871948"/>
             <a:ext cx="978408" cy="178307"/>
           </a:xfrm>
           <a:prstGeom prst="rect">
@@ -11473,7 +11473,7 @@
         </p:nvCxnSpPr>
         <p:spPr>
           <a:xfrm>
-            <a:off x="8001000" y="17894808"/>
+            <a:off x="8001000" y="18050256"/>
             <a:ext cx="5943600" cy="0"/>
           </a:xfrm>
           <a:prstGeom prst="line">
@@ -11508,7 +11508,7 @@
         </p:nvSpPr>
         <p:spPr>
           <a:xfrm>
-            <a:off x="8001000" y="17931384"/>
+            <a:off x="8001000" y="18086832"/>
             <a:ext cx="2523744" cy="178307"/>
           </a:xfrm>
           <a:prstGeom prst="rect">
@@ -11550,7 +11550,7 @@
         </p:nvSpPr>
         <p:spPr>
           <a:xfrm>
-            <a:off x="10616184" y="17931384"/>
+            <a:off x="10616184" y="18086832"/>
             <a:ext cx="2167127" cy="178307"/>
           </a:xfrm>
           <a:prstGeom prst="rect">
@@ -11592,7 +11592,7 @@
         </p:nvSpPr>
         <p:spPr>
           <a:xfrm>
-            <a:off x="12874752" y="17931384"/>
+            <a:off x="12874752" y="18086832"/>
             <a:ext cx="978408" cy="178307"/>
           </a:xfrm>
           <a:prstGeom prst="rect">
@@ -11634,7 +11634,7 @@
         </p:nvCxnSpPr>
         <p:spPr>
           <a:xfrm>
-            <a:off x="8001000" y="18109692"/>
+            <a:off x="8001000" y="18265140"/>
             <a:ext cx="5943600" cy="0"/>
           </a:xfrm>
           <a:prstGeom prst="line">
@@ -11669,7 +11669,7 @@
         </p:nvSpPr>
         <p:spPr>
           <a:xfrm>
-            <a:off x="8001000" y="18146268"/>
+            <a:off x="8001000" y="18301716"/>
             <a:ext cx="2523744" cy="178307"/>
           </a:xfrm>
           <a:prstGeom prst="rect">
@@ -11711,7 +11711,7 @@
         </p:nvSpPr>
         <p:spPr>
           <a:xfrm>
-            <a:off x="10616184" y="18146268"/>
+            <a:off x="10616184" y="18301716"/>
             <a:ext cx="2167127" cy="178307"/>
           </a:xfrm>
           <a:prstGeom prst="rect">
@@ -11753,7 +11753,7 @@
         </p:nvSpPr>
         <p:spPr>
           <a:xfrm>
-            <a:off x="12874752" y="18146268"/>
+            <a:off x="12874752" y="18301716"/>
             <a:ext cx="978408" cy="178307"/>
           </a:xfrm>
           <a:prstGeom prst="rect">
@@ -11795,7 +11795,7 @@
         </p:nvSpPr>
         <p:spPr>
           <a:xfrm>
-            <a:off x="14493240" y="15563088"/>
+            <a:off x="14493240" y="15718536"/>
             <a:ext cx="1783080" cy="201168"/>
           </a:xfrm>
           <a:prstGeom prst="rect">
@@ -11837,7 +11837,7 @@
         </p:nvSpPr>
         <p:spPr>
           <a:xfrm>
-            <a:off x="17108424" y="15563088"/>
+            <a:off x="17108424" y="15718536"/>
             <a:ext cx="1783080" cy="201168"/>
           </a:xfrm>
           <a:prstGeom prst="rect">
@@ -11879,7 +11879,7 @@
         </p:nvSpPr>
         <p:spPr>
           <a:xfrm>
-            <a:off x="19366992" y="15563088"/>
+            <a:off x="19366992" y="15718536"/>
             <a:ext cx="1783080" cy="201168"/>
           </a:xfrm>
           <a:prstGeom prst="rect">
@@ -11921,7 +11921,7 @@
         </p:nvCxnSpPr>
         <p:spPr>
           <a:xfrm>
-            <a:off x="14493240" y="15745968"/>
+            <a:off x="14493240" y="15901416"/>
             <a:ext cx="5943600" cy="0"/>
           </a:xfrm>
           <a:prstGeom prst="line">
@@ -11956,7 +11956,7 @@
         </p:nvSpPr>
         <p:spPr>
           <a:xfrm>
-            <a:off x="14493240" y="15782544"/>
+            <a:off x="14493240" y="15937992"/>
             <a:ext cx="2523744" cy="178307"/>
           </a:xfrm>
           <a:prstGeom prst="rect">
@@ -11998,7 +11998,7 @@
         </p:nvSpPr>
         <p:spPr>
           <a:xfrm>
-            <a:off x="17108424" y="15782544"/>
+            <a:off x="17108424" y="15937992"/>
             <a:ext cx="2167127" cy="178307"/>
           </a:xfrm>
           <a:prstGeom prst="rect">
@@ -12040,7 +12040,7 @@
         </p:nvSpPr>
         <p:spPr>
           <a:xfrm>
-            <a:off x="19366992" y="15782544"/>
+            <a:off x="19366992" y="15937992"/>
             <a:ext cx="978408" cy="178307"/>
           </a:xfrm>
           <a:prstGeom prst="rect">
@@ -12082,7 +12082,7 @@
         </p:nvCxnSpPr>
         <p:spPr>
           <a:xfrm>
-            <a:off x="14493240" y="15960852"/>
+            <a:off x="14493240" y="16116300"/>
             <a:ext cx="5943600" cy="0"/>
           </a:xfrm>
           <a:prstGeom prst="line">
@@ -12117,7 +12117,7 @@
         </p:nvSpPr>
         <p:spPr>
           <a:xfrm>
-            <a:off x="14493240" y="15997428"/>
+            <a:off x="14493240" y="16152876"/>
             <a:ext cx="2523744" cy="178307"/>
           </a:xfrm>
           <a:prstGeom prst="rect">
@@ -12159,7 +12159,7 @@
         </p:nvSpPr>
         <p:spPr>
           <a:xfrm>
-            <a:off x="17108424" y="15997428"/>
+            <a:off x="17108424" y="16152876"/>
             <a:ext cx="2167127" cy="178307"/>
           </a:xfrm>
           <a:prstGeom prst="rect">
@@ -12201,7 +12201,7 @@
         </p:nvSpPr>
         <p:spPr>
           <a:xfrm>
-            <a:off x="19366992" y="15997428"/>
+            <a:off x="19366992" y="16152876"/>
             <a:ext cx="978408" cy="178307"/>
           </a:xfrm>
           <a:prstGeom prst="rect">
@@ -12243,7 +12243,7 @@
         </p:nvCxnSpPr>
         <p:spPr>
           <a:xfrm>
-            <a:off x="14493240" y="16175736"/>
+            <a:off x="14493240" y="16331184"/>
             <a:ext cx="5943600" cy="0"/>
           </a:xfrm>
           <a:prstGeom prst="line">
@@ -12278,7 +12278,7 @@
         </p:nvSpPr>
         <p:spPr>
           <a:xfrm>
-            <a:off x="14493240" y="16212312"/>
+            <a:off x="14493240" y="16367759"/>
             <a:ext cx="2523744" cy="178307"/>
           </a:xfrm>
           <a:prstGeom prst="rect">
@@ -12320,7 +12320,7 @@
         </p:nvSpPr>
         <p:spPr>
           <a:xfrm>
-            <a:off x="17108424" y="16212312"/>
+            <a:off x="17108424" y="16367759"/>
             <a:ext cx="2167127" cy="178307"/>
           </a:xfrm>
           <a:prstGeom prst="rect">
@@ -12362,7 +12362,7 @@
         </p:nvSpPr>
         <p:spPr>
           <a:xfrm>
-            <a:off x="19366992" y="16212312"/>
+            <a:off x="19366992" y="16367759"/>
             <a:ext cx="978408" cy="178307"/>
           </a:xfrm>
           <a:prstGeom prst="rect">
@@ -12404,7 +12404,7 @@
         </p:nvSpPr>
         <p:spPr>
           <a:xfrm>
-            <a:off x="14493240" y="16427196"/>
+            <a:off x="14493240" y="16582643"/>
             <a:ext cx="5943600" cy="196596"/>
           </a:xfrm>
           <a:prstGeom prst="rect">
@@ -12446,7 +12446,7 @@
         </p:nvCxnSpPr>
         <p:spPr>
           <a:xfrm>
-            <a:off x="14493240" y="16605504"/>
+            <a:off x="14493240" y="16760952"/>
             <a:ext cx="5943600" cy="0"/>
           </a:xfrm>
           <a:prstGeom prst="line">
@@ -12481,7 +12481,7 @@
         </p:nvSpPr>
         <p:spPr>
           <a:xfrm>
-            <a:off x="14493240" y="16642080"/>
+            <a:off x="14493240" y="16797528"/>
             <a:ext cx="2523744" cy="178307"/>
           </a:xfrm>
           <a:prstGeom prst="rect">
@@ -12523,7 +12523,7 @@
         </p:nvSpPr>
         <p:spPr>
           <a:xfrm>
-            <a:off x="17108424" y="16642080"/>
+            <a:off x="17108424" y="16797528"/>
             <a:ext cx="2167127" cy="178307"/>
           </a:xfrm>
           <a:prstGeom prst="rect">
@@ -12565,7 +12565,7 @@
         </p:nvSpPr>
         <p:spPr>
           <a:xfrm>
-            <a:off x="19366992" y="16642080"/>
+            <a:off x="19366992" y="16797528"/>
             <a:ext cx="978408" cy="178307"/>
           </a:xfrm>
           <a:prstGeom prst="rect">
@@ -12607,7 +12607,7 @@
         </p:nvCxnSpPr>
         <p:spPr>
           <a:xfrm>
-            <a:off x="14493240" y="16820388"/>
+            <a:off x="14493240" y="16975836"/>
             <a:ext cx="5943600" cy="0"/>
           </a:xfrm>
           <a:prstGeom prst="line">
@@ -12642,7 +12642,7 @@
         </p:nvSpPr>
         <p:spPr>
           <a:xfrm>
-            <a:off x="14493240" y="16856964"/>
+            <a:off x="14493240" y="17012412"/>
             <a:ext cx="2523744" cy="178307"/>
           </a:xfrm>
           <a:prstGeom prst="rect">
@@ -12684,7 +12684,7 @@
         </p:nvSpPr>
         <p:spPr>
           <a:xfrm>
-            <a:off x="17108424" y="16856964"/>
+            <a:off x="17108424" y="17012412"/>
             <a:ext cx="2167127" cy="178307"/>
           </a:xfrm>
           <a:prstGeom prst="rect">
@@ -12735,7 +12735,7 @@
         </p:nvSpPr>
         <p:spPr>
           <a:xfrm>
-            <a:off x="19366992" y="16856964"/>
+            <a:off x="19366992" y="17012412"/>
             <a:ext cx="978408" cy="178307"/>
           </a:xfrm>
           <a:prstGeom prst="rect">
@@ -12777,7 +12777,7 @@
         </p:nvCxnSpPr>
         <p:spPr>
           <a:xfrm>
-            <a:off x="14493240" y="17035272"/>
+            <a:off x="14493240" y="17190720"/>
             <a:ext cx="5943600" cy="0"/>
           </a:xfrm>
           <a:prstGeom prst="line">
@@ -12812,7 +12812,7 @@
         </p:nvSpPr>
         <p:spPr>
           <a:xfrm>
-            <a:off x="14493240" y="17071848"/>
+            <a:off x="14493240" y="17227296"/>
             <a:ext cx="2523744" cy="178307"/>
           </a:xfrm>
           <a:prstGeom prst="rect">
@@ -12854,7 +12854,7 @@
         </p:nvSpPr>
         <p:spPr>
           <a:xfrm>
-            <a:off x="17108424" y="17071848"/>
+            <a:off x="17108424" y="17227296"/>
             <a:ext cx="2167127" cy="178307"/>
           </a:xfrm>
           <a:prstGeom prst="rect">
@@ -12896,7 +12896,7 @@
         </p:nvSpPr>
         <p:spPr>
           <a:xfrm>
-            <a:off x="19366992" y="17071848"/>
+            <a:off x="19366992" y="17227296"/>
             <a:ext cx="978408" cy="178307"/>
           </a:xfrm>
           <a:prstGeom prst="rect">
@@ -12938,7 +12938,7 @@
         </p:nvSpPr>
         <p:spPr>
           <a:xfrm>
-            <a:off x="14493240" y="17286732"/>
+            <a:off x="14493240" y="17442180"/>
             <a:ext cx="5943600" cy="196596"/>
           </a:xfrm>
           <a:prstGeom prst="rect">
@@ -12980,7 +12980,7 @@
         </p:nvCxnSpPr>
         <p:spPr>
           <a:xfrm>
-            <a:off x="14493240" y="17465040"/>
+            <a:off x="14493240" y="17620488"/>
             <a:ext cx="5943600" cy="0"/>
           </a:xfrm>
           <a:prstGeom prst="line">
@@ -13015,7 +13015,7 @@
         </p:nvSpPr>
         <p:spPr>
           <a:xfrm>
-            <a:off x="14493240" y="17501616"/>
+            <a:off x="14493240" y="17657064"/>
             <a:ext cx="2523744" cy="178307"/>
           </a:xfrm>
           <a:prstGeom prst="rect">
@@ -13057,7 +13057,7 @@
         </p:nvSpPr>
         <p:spPr>
           <a:xfrm>
-            <a:off x="17108424" y="17501616"/>
+            <a:off x="17108424" y="17657064"/>
             <a:ext cx="2167127" cy="178307"/>
           </a:xfrm>
           <a:prstGeom prst="rect">
@@ -13117,7 +13117,7 @@
         </p:nvSpPr>
         <p:spPr>
           <a:xfrm>
-            <a:off x="19366992" y="17501616"/>
+            <a:off x="19366992" y="17657064"/>
             <a:ext cx="978408" cy="178307"/>
           </a:xfrm>
           <a:prstGeom prst="rect">
@@ -13159,7 +13159,7 @@
         </p:nvCxnSpPr>
         <p:spPr>
           <a:xfrm>
-            <a:off x="14493240" y="17679924"/>
+            <a:off x="14493240" y="17835372"/>
             <a:ext cx="5943600" cy="0"/>
           </a:xfrm>
           <a:prstGeom prst="line">
@@ -13194,7 +13194,7 @@
         </p:nvSpPr>
         <p:spPr>
           <a:xfrm>
-            <a:off x="14493240" y="17716500"/>
+            <a:off x="14493240" y="17871948"/>
             <a:ext cx="2523744" cy="178307"/>
           </a:xfrm>
           <a:prstGeom prst="rect">
@@ -13236,7 +13236,7 @@
         </p:nvSpPr>
         <p:spPr>
           <a:xfrm>
-            <a:off x="17108424" y="17716500"/>
+            <a:off x="17108424" y="17871948"/>
             <a:ext cx="2167127" cy="178307"/>
           </a:xfrm>
           <a:prstGeom prst="rect">
@@ -13287,7 +13287,7 @@
         </p:nvSpPr>
         <p:spPr>
           <a:xfrm>
-            <a:off x="19366992" y="17716500"/>
+            <a:off x="19366992" y="17871948"/>
             <a:ext cx="978408" cy="178307"/>
           </a:xfrm>
           <a:prstGeom prst="rect">
@@ -13329,7 +13329,7 @@
         </p:nvCxnSpPr>
         <p:spPr>
           <a:xfrm>
-            <a:off x="14493240" y="17894808"/>
+            <a:off x="14493240" y="18050256"/>
             <a:ext cx="5943600" cy="0"/>
           </a:xfrm>
           <a:prstGeom prst="line">
@@ -13364,7 +13364,7 @@
         </p:nvSpPr>
         <p:spPr>
           <a:xfrm>
-            <a:off x="14493240" y="17931384"/>
+            <a:off x="14493240" y="18086832"/>
             <a:ext cx="2523744" cy="178307"/>
           </a:xfrm>
           <a:prstGeom prst="rect">
@@ -13406,7 +13406,7 @@
         </p:nvSpPr>
         <p:spPr>
           <a:xfrm>
-            <a:off x="17108424" y="17931384"/>
+            <a:off x="17108424" y="18086832"/>
             <a:ext cx="2167127" cy="178307"/>
           </a:xfrm>
           <a:prstGeom prst="rect">
@@ -13457,7 +13457,7 @@
         </p:nvSpPr>
         <p:spPr>
           <a:xfrm>
-            <a:off x="19366992" y="17931384"/>
+            <a:off x="19366992" y="18086832"/>
             <a:ext cx="978408" cy="178307"/>
           </a:xfrm>
           <a:prstGeom prst="rect">
@@ -13499,7 +13499,7 @@
         </p:nvCxnSpPr>
         <p:spPr>
           <a:xfrm>
-            <a:off x="14493240" y="18109692"/>
+            <a:off x="14493240" y="18265140"/>
             <a:ext cx="5943600" cy="0"/>
           </a:xfrm>
           <a:prstGeom prst="line">
@@ -13534,7 +13534,7 @@
         </p:nvSpPr>
         <p:spPr>
           <a:xfrm>
-            <a:off x="14493240" y="18146268"/>
+            <a:off x="14493240" y="18301716"/>
             <a:ext cx="2523744" cy="178307"/>
           </a:xfrm>
           <a:prstGeom prst="rect">
@@ -13576,7 +13576,7 @@
         </p:nvSpPr>
         <p:spPr>
           <a:xfrm>
-            <a:off x="17108424" y="18146268"/>
+            <a:off x="17108424" y="18301716"/>
             <a:ext cx="2167127" cy="178307"/>
           </a:xfrm>
           <a:prstGeom prst="rect">
@@ -13627,7 +13627,7 @@
         </p:nvSpPr>
         <p:spPr>
           <a:xfrm>
-            <a:off x="19366992" y="18146268"/>
+            <a:off x="19366992" y="18301716"/>
             <a:ext cx="978408" cy="178307"/>
           </a:xfrm>
           <a:prstGeom prst="rect">
@@ -13669,7 +13669,7 @@
         </p:nvSpPr>
         <p:spPr>
           <a:xfrm>
-            <a:off x="1371600" y="19028664"/>
+            <a:off x="1371600" y="19046952"/>
             <a:ext cx="5806440" cy="896112"/>
           </a:xfrm>
           <a:prstGeom prst="rect">
@@ -13711,7 +13711,7 @@
         </p:nvCxnSpPr>
         <p:spPr>
           <a:xfrm>
-            <a:off x="1371600" y="19961352"/>
+            <a:off x="1371600" y="19979639"/>
             <a:ext cx="5806440" cy="0"/>
           </a:xfrm>
           <a:prstGeom prst="line">
@@ -13851,7 +13851,7 @@
         </p:nvSpPr>
         <p:spPr>
           <a:xfrm>
-            <a:off x="8001000" y="19028664"/>
+            <a:off x="8001000" y="19046952"/>
             <a:ext cx="5806440" cy="896112"/>
           </a:xfrm>
           <a:prstGeom prst="rect">
@@ -13893,7 +13893,7 @@
         </p:nvCxnSpPr>
         <p:spPr>
           <a:xfrm>
-            <a:off x="8001000" y="19961352"/>
+            <a:off x="8001000" y="19979639"/>
             <a:ext cx="5806440" cy="0"/>
           </a:xfrm>
           <a:prstGeom prst="line">
@@ -14006,7 +14006,7 @@
         </p:nvSpPr>
         <p:spPr>
           <a:xfrm>
-            <a:off x="14749272" y="19028664"/>
+            <a:off x="14749272" y="19046952"/>
             <a:ext cx="5806440" cy="896112"/>
           </a:xfrm>
           <a:prstGeom prst="rect">
@@ -14048,7 +14048,7 @@
         </p:nvCxnSpPr>
         <p:spPr>
           <a:xfrm>
-            <a:off x="14749272" y="19961352"/>
+            <a:off x="14749272" y="19979639"/>
             <a:ext cx="5806439" cy="0"/>
           </a:xfrm>
           <a:prstGeom prst="line">
@@ -15279,56 +15279,14 @@
       </p:cxnSp>
       <p:sp>
         <p:nvSpPr>
-          <p:cNvPr id="145" name="Cellstrip2_Grp"/>
+          <p:cNvPr id="145" name="Cellstrip2_Ref"/>
           <p:cNvSpPr txBox="1"/>
           <p:nvPr/>
         </p:nvSpPr>
         <p:spPr>
           <a:xfrm>
-            <a:off x="14749272" y="28785312"/>
-            <a:ext cx="5806440" cy="219456"/>
-          </a:xfrm>
-          <a:prstGeom prst="rect">
-            <a:avLst/>
-          </a:prstGeom>
-          <a:noFill/>
-        </p:spPr>
-        <p:txBody>
-          <a:bodyPr wrap="square" lIns="27432" tIns="27432" rIns="27432" bIns="27432" anchor="t">
-            <a:noAutofit/>
-          </a:bodyPr>
-          <a:lstStyle/>
-          <a:p>
-            <a:pPr algn="l">
-              <a:lnSpc>
-                <a:spcPct val="105000"/>
-              </a:lnSpc>
-              <a:spcAft>
-                <a:spcPts val="0"/>
-              </a:spcAft>
-            </a:pPr>
-            <a:r>
-              <a:rPr sz="1400" b="1" i="0">
-                <a:solidFill>
-                  <a:srgbClr val="32006E"/>
-                </a:solidFill>
-                <a:latin typeface="Uni Sans Book"/>
-              </a:rPr>
-              <a:t>MODELS</a:t>
-            </a:r>
-          </a:p>
-        </p:txBody>
-      </p:sp>
-      <p:sp>
-        <p:nvSpPr>
-          <p:cNvPr id="146" name="Cellstrip2_Ref"/>
-          <p:cNvSpPr txBox="1"/>
-          <p:nvPr/>
-        </p:nvSpPr>
-        <p:spPr>
-          <a:xfrm>
-            <a:off x="14749272" y="29023056"/>
-            <a:ext cx="5806440" cy="228600"/>
+            <a:off x="14749272" y="28748736"/>
+            <a:ext cx="5806440" cy="612648"/>
           </a:xfrm>
           <a:prstGeom prst="rect">
             <a:avLst/>
@@ -15350,27 +15308,27 @@
               </a:spcAft>
             </a:pPr>
             <a:r>
-              <a:rPr sz="1400" b="0" i="0">
-                <a:solidFill>
-                  <a:srgbClr val="1F1F24"/>
-                </a:solidFill>
-                <a:latin typeface="Open Sans"/>
-              </a:rPr>
-              <a:t>Conneau et al. — XLM-R, ACL 2020</a:t>
-            </a:r>
-          </a:p>
-        </p:txBody>
-      </p:sp>
-      <p:sp>
-        <p:nvSpPr>
-          <p:cNvPr id="147" name="Cellstrip2_Ref"/>
+              <a:rPr sz="1300" b="0" i="0">
+                <a:solidFill>
+                  <a:srgbClr val="1F1F24"/>
+                </a:solidFill>
+                <a:latin typeface="Open Sans"/>
+              </a:rPr>
+              <a:t>A. Conneau et al., "Unsupervised cross-lingual representation learning at scale," ACL, 2020, pp. 8440–8451.</a:t>
+            </a:r>
+          </a:p>
+        </p:txBody>
+      </p:sp>
+      <p:sp>
+        <p:nvSpPr>
+          <p:cNvPr id="146" name="Cellstrip2_Ref"/>
           <p:cNvSpPr txBox="1"/>
           <p:nvPr/>
         </p:nvSpPr>
         <p:spPr>
           <a:xfrm>
-            <a:off x="14749272" y="29279088"/>
-            <a:ext cx="5806440" cy="228600"/>
+            <a:off x="14749272" y="29388816"/>
+            <a:ext cx="5806440" cy="420623"/>
           </a:xfrm>
           <a:prstGeom prst="rect">
             <a:avLst/>
@@ -15392,27 +15350,27 @@
               </a:spcAft>
             </a:pPr>
             <a:r>
-              <a:rPr sz="1400" b="0" i="0">
-                <a:solidFill>
-                  <a:srgbClr val="1F1F24"/>
-                </a:solidFill>
-                <a:latin typeface="Open Sans"/>
-              </a:rPr>
-              <a:t>Marone et al. — mmBERT, arXiv:2509.06888</a:t>
-            </a:r>
-          </a:p>
-        </p:txBody>
-      </p:sp>
-      <p:sp>
-        <p:nvSpPr>
-          <p:cNvPr id="148" name="Cellstrip2_Ref"/>
+              <a:rPr sz="1300" b="0" i="0">
+                <a:solidFill>
+                  <a:srgbClr val="1F1F24"/>
+                </a:solidFill>
+                <a:latin typeface="Open Sans"/>
+              </a:rPr>
+              <a:t>M. Marone et al., "mmBERT: A modern multilingual encoder," arXiv:2509.06888, 2025.</a:t>
+            </a:r>
+          </a:p>
+        </p:txBody>
+      </p:sp>
+      <p:sp>
+        <p:nvSpPr>
+          <p:cNvPr id="147" name="Cellstrip2_Ref"/>
           <p:cNvSpPr txBox="1"/>
           <p:nvPr/>
         </p:nvSpPr>
         <p:spPr>
           <a:xfrm>
-            <a:off x="14749272" y="29535120"/>
-            <a:ext cx="5806440" cy="228600"/>
+            <a:off x="14749272" y="29836872"/>
+            <a:ext cx="5806440" cy="612648"/>
           </a:xfrm>
           <a:prstGeom prst="rect">
             <a:avLst/>
@@ -15434,27 +15392,27 @@
               </a:spcAft>
             </a:pPr>
             <a:r>
-              <a:rPr sz="1400" b="0" i="0">
-                <a:solidFill>
-                  <a:srgbClr val="1F1F24"/>
-                </a:solidFill>
-                <a:latin typeface="Open Sans"/>
-              </a:rPr>
-              <a:t>Liu et al. — RoBERTa, arXiv:1907.11692</a:t>
-            </a:r>
-          </a:p>
-        </p:txBody>
-      </p:sp>
-      <p:sp>
-        <p:nvSpPr>
-          <p:cNvPr id="149" name="Cellstrip2_Ref"/>
+              <a:rPr sz="1300" b="0" i="0">
+                <a:solidFill>
+                  <a:srgbClr val="1F1F24"/>
+                </a:solidFill>
+                <a:latin typeface="Open Sans"/>
+              </a:rPr>
+              <a:t>Y. Liu et al., "RoBERTa: A robustly optimized BERT pretraining approach," arXiv:1907.11692, 2019.</a:t>
+            </a:r>
+          </a:p>
+        </p:txBody>
+      </p:sp>
+      <p:sp>
+        <p:nvSpPr>
+          <p:cNvPr id="148" name="Cellstrip2_Ref"/>
           <p:cNvSpPr txBox="1"/>
           <p:nvPr/>
         </p:nvSpPr>
         <p:spPr>
           <a:xfrm>
-            <a:off x="14749272" y="29791152"/>
-            <a:ext cx="5806440" cy="228600"/>
+            <a:off x="14749272" y="30476952"/>
+            <a:ext cx="5806440" cy="420623"/>
           </a:xfrm>
           <a:prstGeom prst="rect">
             <a:avLst/>
@@ -15476,27 +15434,27 @@
               </a:spcAft>
             </a:pPr>
             <a:r>
-              <a:rPr sz="1400" b="0" i="0">
-                <a:solidFill>
-                  <a:srgbClr val="1F1F24"/>
-                </a:solidFill>
-                <a:latin typeface="Open Sans"/>
-              </a:rPr>
-              <a:t>Devlin et al. — BERT, NAACL 2019</a:t>
-            </a:r>
-          </a:p>
-        </p:txBody>
-      </p:sp>
-      <p:sp>
-        <p:nvSpPr>
-          <p:cNvPr id="150" name="Cellstrip2_Ref"/>
+              <a:rPr sz="1300" b="0" i="0">
+                <a:solidFill>
+                  <a:srgbClr val="1F1F24"/>
+                </a:solidFill>
+                <a:latin typeface="Open Sans"/>
+              </a:rPr>
+              <a:t>D. I. Adelani et al., "SIB-200," EACL, 2024, pp. 226–245.</a:t>
+            </a:r>
+          </a:p>
+        </p:txBody>
+      </p:sp>
+      <p:sp>
+        <p:nvSpPr>
+          <p:cNvPr id="149" name="Cellstrip2_Ref"/>
           <p:cNvSpPr txBox="1"/>
           <p:nvPr/>
         </p:nvSpPr>
         <p:spPr>
           <a:xfrm>
-            <a:off x="14749272" y="30047184"/>
-            <a:ext cx="5806440" cy="228600"/>
+            <a:off x="14749272" y="30925008"/>
+            <a:ext cx="5806440" cy="420623"/>
           </a:xfrm>
           <a:prstGeom prst="rect">
             <a:avLst/>
@@ -15518,69 +15476,27 @@
               </a:spcAft>
             </a:pPr>
             <a:r>
-              <a:rPr sz="1400" b="0" i="0">
-                <a:solidFill>
-                  <a:srgbClr val="1F1F24"/>
-                </a:solidFill>
-                <a:latin typeface="Open Sans"/>
-              </a:rPr>
-              <a:t>Ogueji et al. — AfriBERTa, EMNLP MRL 2021</a:t>
-            </a:r>
-          </a:p>
-        </p:txBody>
-      </p:sp>
-      <p:sp>
-        <p:nvSpPr>
-          <p:cNvPr id="151" name="Cellstrip2_Grp"/>
+              <a:rPr sz="1300" b="0" i="0">
+                <a:solidFill>
+                  <a:srgbClr val="1F1F24"/>
+                </a:solidFill>
+                <a:latin typeface="Open Sans"/>
+              </a:rPr>
+              <a:t>D. I. Adelani et al., "MasakhaNER 2.0," EMNLP, 2022, pp. 4488–4508.</a:t>
+            </a:r>
+          </a:p>
+        </p:txBody>
+      </p:sp>
+      <p:sp>
+        <p:nvSpPr>
+          <p:cNvPr id="150" name="Cellstrip2_Ref"/>
           <p:cNvSpPr txBox="1"/>
           <p:nvPr/>
         </p:nvSpPr>
         <p:spPr>
           <a:xfrm>
-            <a:off x="14749272" y="30339792"/>
-            <a:ext cx="5806440" cy="219456"/>
-          </a:xfrm>
-          <a:prstGeom prst="rect">
-            <a:avLst/>
-          </a:prstGeom>
-          <a:noFill/>
-        </p:spPr>
-        <p:txBody>
-          <a:bodyPr wrap="square" lIns="27432" tIns="27432" rIns="27432" bIns="27432" anchor="t">
-            <a:noAutofit/>
-          </a:bodyPr>
-          <a:lstStyle/>
-          <a:p>
-            <a:pPr algn="l">
-              <a:lnSpc>
-                <a:spcPct val="105000"/>
-              </a:lnSpc>
-              <a:spcAft>
-                <a:spcPts val="0"/>
-              </a:spcAft>
-            </a:pPr>
-            <a:r>
-              <a:rPr sz="1400" b="1" i="0">
-                <a:solidFill>
-                  <a:srgbClr val="32006E"/>
-                </a:solidFill>
-                <a:latin typeface="Uni Sans Book"/>
-              </a:rPr>
-              <a:t>DATA</a:t>
-            </a:r>
-          </a:p>
-        </p:txBody>
-      </p:sp>
-      <p:sp>
-        <p:nvSpPr>
-          <p:cNvPr id="152" name="Cellstrip2_Ref"/>
-          <p:cNvSpPr txBox="1"/>
-          <p:nvPr/>
-        </p:nvSpPr>
-        <p:spPr>
-          <a:xfrm>
-            <a:off x="14749272" y="30577536"/>
-            <a:ext cx="5806440" cy="228600"/>
+            <a:off x="14749272" y="31373064"/>
+            <a:ext cx="5806440" cy="420623"/>
           </a:xfrm>
           <a:prstGeom prst="rect">
             <a:avLst/>
@@ -15602,27 +15518,27 @@
               </a:spcAft>
             </a:pPr>
             <a:r>
-              <a:rPr sz="1400" b="0" i="0">
-                <a:solidFill>
-                  <a:srgbClr val="1F1F24"/>
-                </a:solidFill>
-                <a:latin typeface="Open Sans"/>
-              </a:rPr>
-              <a:t>Adelani et al. — SIB-200, EACL 2024</a:t>
-            </a:r>
-          </a:p>
-        </p:txBody>
-      </p:sp>
-      <p:sp>
-        <p:nvSpPr>
-          <p:cNvPr id="153" name="Cellstrip2_Ref"/>
+              <a:rPr sz="1300" b="0" i="0">
+                <a:solidFill>
+                  <a:srgbClr val="1F1F24"/>
+                </a:solidFill>
+                <a:latin typeface="Open Sans"/>
+              </a:rPr>
+              <a:t>G. Penedo et al., "FineWeb2: One pipeline to scale them all," arXiv:2506.20920, 2025.</a:t>
+            </a:r>
+          </a:p>
+        </p:txBody>
+      </p:sp>
+      <p:sp>
+        <p:nvSpPr>
+          <p:cNvPr id="151" name="Cellstrip2_Ref"/>
           <p:cNvSpPr txBox="1"/>
           <p:nvPr/>
         </p:nvSpPr>
         <p:spPr>
           <a:xfrm>
-            <a:off x="14749272" y="30833568"/>
-            <a:ext cx="5806440" cy="228600"/>
+            <a:off x="14749272" y="31821120"/>
+            <a:ext cx="5806440" cy="612648"/>
           </a:xfrm>
           <a:prstGeom prst="rect">
             <a:avLst/>
@@ -15644,188 +15560,20 @@
               </a:spcAft>
             </a:pPr>
             <a:r>
-              <a:rPr sz="1400" b="0" i="0">
-                <a:solidFill>
-                  <a:srgbClr val="1F1F24"/>
-                </a:solidFill>
-                <a:latin typeface="Open Sans"/>
-              </a:rPr>
-              <a:t>Adelani et al. — MasakhaNER 2.0, EMNLP 2022</a:t>
-            </a:r>
-          </a:p>
-        </p:txBody>
-      </p:sp>
-      <p:sp>
-        <p:nvSpPr>
-          <p:cNvPr id="154" name="Cellstrip2_Ref"/>
-          <p:cNvSpPr txBox="1"/>
-          <p:nvPr/>
-        </p:nvSpPr>
-        <p:spPr>
-          <a:xfrm>
-            <a:off x="14749272" y="31089600"/>
-            <a:ext cx="5806440" cy="228600"/>
-          </a:xfrm>
-          <a:prstGeom prst="rect">
-            <a:avLst/>
-          </a:prstGeom>
-          <a:noFill/>
-        </p:spPr>
-        <p:txBody>
-          <a:bodyPr wrap="square" lIns="36576" tIns="36576" rIns="36576" bIns="36576" anchor="t">
-            <a:noAutofit/>
-          </a:bodyPr>
-          <a:lstStyle/>
-          <a:p>
-            <a:pPr algn="l">
-              <a:lnSpc>
-                <a:spcPct val="108000"/>
-              </a:lnSpc>
-              <a:spcAft>
-                <a:spcPts val="0"/>
-              </a:spcAft>
-            </a:pPr>
-            <a:r>
-              <a:rPr sz="1400" b="0" i="0">
-                <a:solidFill>
-                  <a:srgbClr val="1F1F24"/>
-                </a:solidFill>
-                <a:latin typeface="Open Sans"/>
-              </a:rPr>
-              <a:t>Penedo et al. — FineWeb2, arXiv:2506.20920</a:t>
-            </a:r>
-          </a:p>
-        </p:txBody>
-      </p:sp>
-      <p:sp>
-        <p:nvSpPr>
-          <p:cNvPr id="155" name="Cellstrip2_Grp"/>
-          <p:cNvSpPr txBox="1"/>
-          <p:nvPr/>
-        </p:nvSpPr>
-        <p:spPr>
-          <a:xfrm>
-            <a:off x="14749272" y="31382208"/>
-            <a:ext cx="5806440" cy="219456"/>
-          </a:xfrm>
-          <a:prstGeom prst="rect">
-            <a:avLst/>
-          </a:prstGeom>
-          <a:noFill/>
-        </p:spPr>
-        <p:txBody>
-          <a:bodyPr wrap="square" lIns="27432" tIns="27432" rIns="27432" bIns="27432" anchor="t">
-            <a:noAutofit/>
-          </a:bodyPr>
-          <a:lstStyle/>
-          <a:p>
-            <a:pPr algn="l">
-              <a:lnSpc>
-                <a:spcPct val="105000"/>
-              </a:lnSpc>
-              <a:spcAft>
-                <a:spcPts val="0"/>
-              </a:spcAft>
-            </a:pPr>
-            <a:r>
-              <a:rPr sz="1400" b="1" i="0">
-                <a:solidFill>
-                  <a:srgbClr val="32006E"/>
-                </a:solidFill>
-                <a:latin typeface="Uni Sans Book"/>
-              </a:rPr>
-              <a:t>METHOD</a:t>
-            </a:r>
-          </a:p>
-        </p:txBody>
-      </p:sp>
-      <p:sp>
-        <p:nvSpPr>
-          <p:cNvPr id="156" name="Cellstrip2_Ref"/>
-          <p:cNvSpPr txBox="1"/>
-          <p:nvPr/>
-        </p:nvSpPr>
-        <p:spPr>
-          <a:xfrm>
-            <a:off x="14749272" y="31619952"/>
-            <a:ext cx="5806440" cy="228600"/>
-          </a:xfrm>
-          <a:prstGeom prst="rect">
-            <a:avLst/>
-          </a:prstGeom>
-          <a:noFill/>
-        </p:spPr>
-        <p:txBody>
-          <a:bodyPr wrap="square" lIns="36576" tIns="36576" rIns="36576" bIns="36576" anchor="t">
-            <a:noAutofit/>
-          </a:bodyPr>
-          <a:lstStyle/>
-          <a:p>
-            <a:pPr algn="l">
-              <a:lnSpc>
-                <a:spcPct val="108000"/>
-              </a:lnSpc>
-              <a:spcAft>
-                <a:spcPts val="0"/>
-              </a:spcAft>
-            </a:pPr>
-            <a:r>
-              <a:rPr sz="1400" b="0" i="0">
-                <a:solidFill>
-                  <a:srgbClr val="1F1F24"/>
-                </a:solidFill>
-                <a:latin typeface="Open Sans"/>
-              </a:rPr>
-              <a:t>Smith — one-cycle schedules, arXiv:1803.09820</a:t>
-            </a:r>
-          </a:p>
-        </p:txBody>
-      </p:sp>
-      <p:sp>
-        <p:nvSpPr>
-          <p:cNvPr id="157" name="Cellstrip2_Ref"/>
-          <p:cNvSpPr txBox="1"/>
-          <p:nvPr/>
-        </p:nvSpPr>
-        <p:spPr>
-          <a:xfrm>
-            <a:off x="14749272" y="31875984"/>
-            <a:ext cx="5806440" cy="228600"/>
-          </a:xfrm>
-          <a:prstGeom prst="rect">
-            <a:avLst/>
-          </a:prstGeom>
-          <a:noFill/>
-        </p:spPr>
-        <p:txBody>
-          <a:bodyPr wrap="square" lIns="36576" tIns="36576" rIns="36576" bIns="36576" anchor="t">
-            <a:noAutofit/>
-          </a:bodyPr>
-          <a:lstStyle/>
-          <a:p>
-            <a:pPr algn="l">
-              <a:lnSpc>
-                <a:spcPct val="108000"/>
-              </a:lnSpc>
-              <a:spcAft>
-                <a:spcPts val="0"/>
-              </a:spcAft>
-            </a:pPr>
-            <a:r>
-              <a:rPr sz="1400" b="0" i="0">
-                <a:solidFill>
-                  <a:srgbClr val="1F1F24"/>
-                </a:solidFill>
-                <a:latin typeface="Open Sans"/>
-              </a:rPr>
-              <a:t>Dodge et al. — "Show your work," EMNLP 2019</a:t>
+              <a:rPr sz="1300" b="0" i="0">
+                <a:solidFill>
+                  <a:srgbClr val="1F1F24"/>
+                </a:solidFill>
+                <a:latin typeface="Open Sans"/>
+              </a:rPr>
+              <a:t>L. N. Smith, "A disciplined approach to neural network hyper-parameters," arXiv:1803.09820, 2018.</a:t>
             </a:r>
           </a:p>
         </p:txBody>
       </p:sp>
       <p:cxnSp>
         <p:nvCxnSpPr>
-          <p:cNvPr id="158" name="Connector 157"/>
+          <p:cNvPr id="152" name="Connector 151"/>
           <p:cNvCxnSpPr/>
           <p:nvPr/>
         </p:nvCxnSpPr>
@@ -15860,7 +15608,7 @@
       </p:cxnSp>
       <p:sp>
         <p:nvSpPr>
-          <p:cNvPr id="159" name="Footer_Sources"/>
+          <p:cNvPr id="153" name="Footer_Sources"/>
           <p:cNvSpPr txBox="1"/>
           <p:nvPr/>
         </p:nvSpPr>
@@ -15902,7 +15650,7 @@
       </p:sp>
       <p:sp>
         <p:nvSpPr>
-          <p:cNvPr id="160" name="Footer_Tag"/>
+          <p:cNvPr id="154" name="Footer_Tag"/>
           <p:cNvSpPr txBox="1"/>
           <p:nvPr/>
         </p:nvSpPr>
@@ -15944,10 +15692,10 @@
       </p:sp>
       <p:pic>
         <p:nvPicPr>
-          <p:cNvPr id="162" name="Embedded_01_Cell1" descr="reports\figures\26-poster-hardware.svg">
+          <p:cNvPr id="156" name="Embedded_01_Cell1" descr="reports\figures\26-poster-hardware.svg">
             <a:extLst>
               <a:ext uri="{FF2B5EF4-FFF2-40B4-BE49-F238E27FC236}">
-                <a16:creationId xmlns:a16="http://schemas.microsoft.com/office/drawing/2014/main" id="{DE20C52A-072D-F3D1-3427-5351CF0523A7}"/>
+                <a16:creationId xmlns:a16="http://schemas.microsoft.com/office/drawing/2014/main" id="{477E9668-A654-1E84-261C-8B1D16732065}"/>
               </a:ext>
             </a:extLst>
           </p:cNvPr>
@@ -15970,8 +15718,8 @@
         </p:blipFill>
         <p:spPr>
           <a:xfrm>
-            <a:off x="889541" y="9061704"/>
-            <a:ext cx="6770559" cy="2688336"/>
+            <a:off x="868680" y="9062093"/>
+            <a:ext cx="6812280" cy="2870437"/>
           </a:xfrm>
           <a:prstGeom prst="rect">
             <a:avLst/>
@@ -15980,10 +15728,10 @@
       </p:pic>
       <p:pic>
         <p:nvPicPr>
-          <p:cNvPr id="164" name="Embedded_02_Cell5" descr="reports\figures\27-poster-cliffs.svg">
+          <p:cNvPr id="158" name="Embedded_02_Cell5" descr="reports\figures\27-poster-cliffs.svg">
             <a:extLst>
               <a:ext uri="{FF2B5EF4-FFF2-40B4-BE49-F238E27FC236}">
-                <a16:creationId xmlns:a16="http://schemas.microsoft.com/office/drawing/2014/main" id="{11FCBB52-3DF0-65BF-5EAF-FA48828A3FB4}"/>
+                <a16:creationId xmlns:a16="http://schemas.microsoft.com/office/drawing/2014/main" id="{67A52BAE-9152-6DC1-D6F7-6A20A00CC843}"/>
               </a:ext>
             </a:extLst>
           </p:cNvPr>
@@ -16006,8 +15754,8 @@
         </p:blipFill>
         <p:spPr>
           <a:xfrm>
-            <a:off x="1371600" y="20089482"/>
-            <a:ext cx="5806440" cy="2422930"/>
+            <a:off x="1393237" y="20107656"/>
+            <a:ext cx="5763165" cy="2404872"/>
           </a:xfrm>
           <a:prstGeom prst="rect">
             <a:avLst/>
@@ -16016,10 +15764,10 @@
       </p:pic>
       <p:pic>
         <p:nvPicPr>
-          <p:cNvPr id="166" name="Embedded_03_Cell6" descr="reports\figures\25-poster-transfer.svg">
+          <p:cNvPr id="160" name="Embedded_03_Cell6" descr="reports\figures\25-poster-transfer.svg">
             <a:extLst>
               <a:ext uri="{FF2B5EF4-FFF2-40B4-BE49-F238E27FC236}">
-                <a16:creationId xmlns:a16="http://schemas.microsoft.com/office/drawing/2014/main" id="{B1F2F19C-77F3-06DF-26E8-3E9412CDB117}"/>
+                <a16:creationId xmlns:a16="http://schemas.microsoft.com/office/drawing/2014/main" id="{A86D3DCA-82D1-F8E6-AE75-F4A5270B9A6B}"/>
               </a:ext>
             </a:extLst>
           </p:cNvPr>
@@ -16042,8 +15790,8 @@
         </p:blipFill>
         <p:spPr>
           <a:xfrm>
-            <a:off x="8009527" y="20089368"/>
-            <a:ext cx="5789387" cy="2423160"/>
+            <a:off x="8031373" y="20107656"/>
+            <a:ext cx="5745693" cy="2404872"/>
           </a:xfrm>
           <a:prstGeom prst="rect">
             <a:avLst/>
@@ -16052,10 +15800,10 @@
       </p:pic>
       <p:pic>
         <p:nvPicPr>
-          <p:cNvPr id="168" name="Embedded_04_Cell7" descr="reports\figures\28-poster-dashboard.svg">
+          <p:cNvPr id="162" name="Embedded_04_Cell7" descr="reports\figures\28-poster-dashboard.svg">
             <a:extLst>
               <a:ext uri="{FF2B5EF4-FFF2-40B4-BE49-F238E27FC236}">
-                <a16:creationId xmlns:a16="http://schemas.microsoft.com/office/drawing/2014/main" id="{8E65B7BB-AC02-7D04-6B39-F7A636620838}"/>
+                <a16:creationId xmlns:a16="http://schemas.microsoft.com/office/drawing/2014/main" id="{D4FC8B6B-B824-15BA-E4C6-AD128F1EA9BD}"/>
               </a:ext>
             </a:extLst>
           </p:cNvPr>
@@ -16078,8 +15826,8 @@
         </p:blipFill>
         <p:spPr>
           <a:xfrm>
-            <a:off x="14751238" y="20089368"/>
-            <a:ext cx="5802509" cy="2423160"/>
+            <a:off x="14773134" y="20107656"/>
+            <a:ext cx="5758717" cy="2404872"/>
           </a:xfrm>
           <a:prstGeom prst="rect">
             <a:avLst/>

--- a/src/a2-nlp/poster/final/board-model-factory_v2.pptx
+++ b/src/a2-nlp/poster/final/board-model-factory_v2.pptx
@@ -8523,7 +8523,7 @@
                 </a:solidFill>
                 <a:latin typeface="Open Sans"/>
               </a:rPr>
-              <a:t> — 12–16 bytes a parameter. Our 98M: </a:t>
+              <a:t> — 12–16 bytes a parameter. Our 98M model: </a:t>
             </a:r>
             <a:r>
               <a:rPr sz="1700" b="1" i="0">
@@ -8541,7 +8541,7 @@
                 </a:solidFill>
                 <a:latin typeface="Open Sans"/>
               </a:rPr>
-              <a:t>. A 7B: </a:t>
+              <a:t>. A 7B model: </a:t>
             </a:r>
             <a:r>
               <a:rPr sz="1700" b="1" i="0">
@@ -8559,7 +8559,7 @@
                 </a:solidFill>
                 <a:latin typeface="Open Sans"/>
               </a:rPr>
-              <a:t> — no consumer card.</a:t>
+              <a:t> — no consumer card has it.</a:t>
             </a:r>
           </a:p>
           <a:p>
@@ -8587,7 +8587,7 @@
                 </a:solidFill>
                 <a:latin typeface="Open Sans"/>
               </a:rPr>
-              <a:t> Accumulation runs a big step as smaller passes — same update, </a:t>
+              <a:t> Accumulation runs a big step as smaller passes — the same update, </a:t>
             </a:r>
             <a:r>
               <a:rPr sz="1700" b="1" i="0">
@@ -8605,7 +8605,7 @@
                 </a:solidFill>
                 <a:latin typeface="Open Sans"/>
               </a:rPr>
-              <a:t>.</a:t>
+              <a:t> of the cost.</a:t>
             </a:r>
           </a:p>
           <a:p>
@@ -9461,7 +9461,7 @@
                 </a:solidFill>
                 <a:latin typeface="Open Sans"/>
               </a:rPr>
-              <a:t> Here it </a:t>
+              <a:t> Here the dataset </a:t>
             </a:r>
             <a:r>
               <a:rPr sz="1700" b="0" i="1">
@@ -9479,7 +9479,7 @@
                 </a:solidFill>
                 <a:latin typeface="Open Sans"/>
               </a:rPr>
-              <a:t> the experiment — "40 epochs" gives one arm </a:t>
+              <a:t> the experiment — "40 epochs each" gives one arm </a:t>
             </a:r>
             <a:r>
               <a:rPr sz="1700" b="1" i="0">
@@ -9488,7 +9488,7 @@
                 </a:solidFill>
                 <a:latin typeface="Open Sans"/>
               </a:rPr>
-              <a:t>256×</a:t>
+              <a:t>256× the compute</a:t>
             </a:r>
             <a:r>
               <a:rPr sz="1700" b="0" i="0">
@@ -9497,7 +9497,7 @@
                 </a:solidFill>
                 <a:latin typeface="Open Sans"/>
               </a:rPr>
-              <a:t>.</a:t>
+              <a:t> of another.</a:t>
             </a:r>
           </a:p>
           <a:p>
@@ -9516,7 +9516,7 @@
                 </a:solidFill>
                 <a:latin typeface="Open Sans"/>
               </a:rPr>
-              <a:t>So fix tokens, and let epochs fall out.</a:t>
+              <a:t>So fix the total number of tokens, and let epochs fall out.</a:t>
             </a:r>
             <a:r>
               <a:rPr sz="1700" b="0" i="0">
@@ -9543,7 +9543,7 @@
                 </a:solidFill>
                 <a:latin typeface="Open Sans"/>
               </a:rPr>
-              <a:t>: the 4M corpus seen </a:t>
+              <a:t>: the 4M corpus is seen </a:t>
             </a:r>
             <a:r>
               <a:rPr sz="1700" b="1" i="0">
@@ -9552,7 +9552,7 @@
                 </a:solidFill>
                 <a:latin typeface="Open Sans"/>
               </a:rPr>
-              <a:t>256×</a:t>
+              <a:t>256 times</a:t>
             </a:r>
             <a:r>
               <a:rPr sz="1700" b="0" i="0">
@@ -9561,25 +9561,7 @@
                 </a:solidFill>
                 <a:latin typeface="Open Sans"/>
               </a:rPr>
-              <a:t>, the 1,024M </a:t>
-            </a:r>
-            <a:r>
-              <a:rPr sz="1700" b="1" i="0">
-                <a:solidFill>
-                  <a:srgbClr val="1F1F24"/>
-                </a:solidFill>
-                <a:latin typeface="Open Sans"/>
-              </a:rPr>
-              <a:t>once</a:t>
-            </a:r>
-            <a:r>
-              <a:rPr sz="1700" b="0" i="0">
-                <a:solidFill>
-                  <a:srgbClr val="1F1F24"/>
-                </a:solidFill>
-                <a:latin typeface="Open Sans"/>
-              </a:rPr>
-              <a:t>.</a:t>
+              <a:t>, the 1,024M once.</a:t>
             </a:r>
           </a:p>
           <a:p>
@@ -9607,7 +9589,7 @@
                 </a:solidFill>
                 <a:latin typeface="Open Sans"/>
               </a:rPr>
-              <a:t> 1.024B ÷ 443k ≈ </a:t>
+              <a:t> 1.024B tokens ÷ 443k tok/s ≈ </a:t>
             </a:r>
             <a:r>
               <a:rPr sz="1700" b="1" i="0">
@@ -9625,7 +9607,7 @@
                 </a:solidFill>
                 <a:latin typeface="Open Sans"/>
               </a:rPr>
-              <a:t> — the chart's top bar.</a:t>
+              <a:t> — the top bar of the chart above.</a:t>
             </a:r>
           </a:p>
           <a:p>
@@ -9671,7 +9653,7 @@
                 </a:solidFill>
                 <a:latin typeface="Open Sans"/>
               </a:rPr>
-              <a:t> end — halfway is mid-schedule.</a:t>
+              <a:t> end — a stopped run is caught mid-schedule, not half as good.</a:t>
             </a:r>
           </a:p>
           <a:p>
@@ -9717,7 +9699,7 @@
                 </a:solidFill>
                 <a:latin typeface="Open Sans"/>
               </a:rPr>
-              <a:t>; the truth: </a:t>
+              <a:t>; the truth is </a:t>
             </a:r>
             <a:r>
               <a:rPr sz="1700" b="1" i="0">
@@ -9735,7 +9717,7 @@
                 </a:solidFill>
                 <a:latin typeface="Open Sans"/>
               </a:rPr>
-              <a:t>.</a:t>
+              <a:t> — the name outlived the meaning.</a:t>
             </a:r>
           </a:p>
         </p:txBody>
@@ -14590,7 +14572,7 @@
                 </a:solidFill>
                 <a:latin typeface="Encode Sans Normal"/>
               </a:rPr>
-              <a:t>What we do not claim, and what we would do next</a:t>
+              <a:t>Ethics: what we do not claim, and what is next</a:t>
             </a:r>
           </a:p>
         </p:txBody>
@@ -14707,7 +14689,7 @@
         </p:nvSpPr>
         <p:spPr>
           <a:xfrm>
-            <a:off x="1371600" y="27688032"/>
+            <a:off x="1371600" y="27633168"/>
             <a:ext cx="12435840" cy="896112"/>
           </a:xfrm>
           <a:prstGeom prst="rect">
@@ -14749,7 +14731,7 @@
         </p:nvCxnSpPr>
         <p:spPr>
           <a:xfrm>
-            <a:off x="1371600" y="28620720"/>
+            <a:off x="1371600" y="28565856"/>
             <a:ext cx="12435840" cy="0"/>
           </a:xfrm>
           <a:prstGeom prst="line">
@@ -14784,8 +14766,8 @@
         </p:nvSpPr>
         <p:spPr>
           <a:xfrm>
-            <a:off x="1371600" y="28821888"/>
-            <a:ext cx="12435840" cy="2926079"/>
+            <a:off x="1371600" y="28767023"/>
+            <a:ext cx="12435840" cy="2999231"/>
           </a:xfrm>
           <a:prstGeom prst="rect">
             <a:avLst/>
@@ -14803,7 +14785,7 @@
                 <a:spcPct val="102000"/>
               </a:lnSpc>
               <a:spcAft>
-                <a:spcPts val="500"/>
+                <a:spcPts val="300"/>
               </a:spcAft>
             </a:pPr>
             <a:r>
@@ -14840,43 +14822,7 @@
                 </a:solidFill>
                 <a:latin typeface="Open Sans"/>
               </a:rPr>
-              <a:t> the one language where data was never the constraint. </a:t>
-            </a:r>
-            <a:r>
-              <a:rPr sz="1700" b="0" i="1">
-                <a:solidFill>
-                  <a:srgbClr val="1F1F24"/>
-                </a:solidFill>
-                <a:latin typeface="Open Sans"/>
-              </a:rPr>
-              <a:t>Learned:</a:t>
-            </a:r>
-            <a:r>
-              <a:rPr sz="1700" b="0" i="0">
-                <a:solidFill>
-                  <a:srgbClr val="1F1F24"/>
-                </a:solidFill>
-                <a:latin typeface="Open Sans"/>
-              </a:rPr>
-              <a:t> </a:t>
-            </a:r>
-            <a:r>
-              <a:rPr sz="1700" b="1" i="0">
-                <a:solidFill>
-                  <a:srgbClr val="1F1F24"/>
-                </a:solidFill>
-                <a:latin typeface="Open Sans"/>
-              </a:rPr>
-              <a:t>more data stops helping past 64M tokens</a:t>
-            </a:r>
-            <a:r>
-              <a:rPr sz="1700" b="0" i="0">
-                <a:solidFill>
-                  <a:srgbClr val="1F1F24"/>
-                </a:solidFill>
-                <a:latin typeface="Open Sans"/>
-              </a:rPr>
-              <a:t> — which Yoruba, having no more, could never show.</a:t>
+              <a:t> the one language where data was never the constraint.</a:t>
             </a:r>
           </a:p>
           <a:p>
@@ -14885,17 +14831,35 @@
                 <a:spcPct val="102000"/>
               </a:lnSpc>
               <a:spcAft>
-                <a:spcPts val="500"/>
+                <a:spcPts val="300"/>
               </a:spcAft>
             </a:pPr>
             <a:r>
+              <a:rPr sz="1700" b="0" i="1">
+                <a:solidFill>
+                  <a:srgbClr val="1F1F24"/>
+                </a:solidFill>
+                <a:latin typeface="Open Sans"/>
+              </a:rPr>
+              <a:t>Learned:</a:t>
+            </a:r>
+            <a:r>
+              <a:rPr sz="1700" b="0" i="0">
+                <a:solidFill>
+                  <a:srgbClr val="1F1F24"/>
+                </a:solidFill>
+                <a:latin typeface="Open Sans"/>
+              </a:rPr>
+              <a:t> </a:t>
+            </a:r>
+            <a:r>
               <a:rPr sz="1700" b="1" i="0">
                 <a:solidFill>
                   <a:srgbClr val="1F1F24"/>
                 </a:solidFill>
                 <a:latin typeface="Open Sans"/>
               </a:rPr>
-              <a:t>French, Indonesian, Mandarin are the control.</a:t>
+              <a:t>more data stops helping past 64M tokens</a:t>
             </a:r>
             <a:r>
               <a:rPr sz="1700" b="0" i="0">
@@ -14904,79 +14868,7 @@
                 </a:solidFill>
                 <a:latin typeface="Open Sans"/>
               </a:rPr>
-              <a:t> </a:t>
-            </a:r>
-            <a:r>
-              <a:rPr sz="1700" b="0" i="1">
-                <a:solidFill>
-                  <a:srgbClr val="1F1F24"/>
-                </a:solidFill>
-                <a:latin typeface="Open Sans"/>
-              </a:rPr>
-              <a:t>Why:</a:t>
-            </a:r>
-            <a:r>
-              <a:rPr sz="1700" b="0" i="0">
-                <a:solidFill>
-                  <a:srgbClr val="1F1F24"/>
-                </a:solidFill>
-                <a:latin typeface="Open Sans"/>
-              </a:rPr>
-              <a:t> XLM-R knows these three well. </a:t>
-            </a:r>
-            <a:r>
-              <a:rPr sz="1700" b="0" i="1">
-                <a:solidFill>
-                  <a:srgbClr val="1F1F24"/>
-                </a:solidFill>
-                <a:latin typeface="Open Sans"/>
-              </a:rPr>
-              <a:t>Learned:</a:t>
-            </a:r>
-            <a:r>
-              <a:rPr sz="1700" b="0" i="0">
-                <a:solidFill>
-                  <a:srgbClr val="1F1F24"/>
-                </a:solidFill>
-                <a:latin typeface="Open Sans"/>
-              </a:rPr>
-              <a:t> they cost </a:t>
-            </a:r>
-            <a:r>
-              <a:rPr sz="1700" b="1" i="0">
-                <a:solidFill>
-                  <a:srgbClr val="1F1F24"/>
-                </a:solidFill>
-                <a:latin typeface="Open Sans"/>
-              </a:rPr>
-              <a:t>1.04, 1.01, 0.95</a:t>
-            </a:r>
-            <a:r>
-              <a:rPr sz="1700" b="0" i="0">
-                <a:solidFill>
-                  <a:srgbClr val="1F1F24"/>
-                </a:solidFill>
-                <a:latin typeface="Open Sans"/>
-              </a:rPr>
-              <a:t> — the penalty tracks </a:t>
-            </a:r>
-            <a:r>
-              <a:rPr sz="1700" b="0" i="1">
-                <a:solidFill>
-                  <a:srgbClr val="1F1F24"/>
-                </a:solidFill>
-                <a:latin typeface="Open Sans"/>
-              </a:rPr>
-              <a:t>coverage</a:t>
-            </a:r>
-            <a:r>
-              <a:rPr sz="1700" b="0" i="0">
-                <a:solidFill>
-                  <a:srgbClr val="1F1F24"/>
-                </a:solidFill>
-                <a:latin typeface="Open Sans"/>
-              </a:rPr>
-              <a:t>, not "African".</a:t>
+              <a:t> — which Yoruba, having no more, could never show.</a:t>
             </a:r>
           </a:p>
           <a:p>
@@ -14985,7 +14877,7 @@
                 <a:spcPct val="102000"/>
               </a:lnSpc>
               <a:spcAft>
-                <a:spcPts val="500"/>
+                <a:spcPts val="300"/>
               </a:spcAft>
             </a:pPr>
             <a:r>
@@ -14995,7 +14887,7 @@
                 </a:solidFill>
                 <a:latin typeface="Open Sans"/>
               </a:rPr>
-              <a:t>Twelve African languages are the gradient.</a:t>
+              <a:t>French, Indonesian, Mandarin are the control.</a:t>
             </a:r>
             <a:r>
               <a:rPr sz="1700" b="0" i="0">
@@ -15022,43 +14914,7 @@
                 </a:solidFill>
                 <a:latin typeface="Open Sans"/>
               </a:rPr>
-              <a:t> an anecdote needs a slope behind it. </a:t>
-            </a:r>
-            <a:r>
-              <a:rPr sz="1700" b="0" i="1">
-                <a:solidFill>
-                  <a:srgbClr val="1F1F24"/>
-                </a:solidFill>
-                <a:latin typeface="Open Sans"/>
-              </a:rPr>
-              <a:t>Learned:</a:t>
-            </a:r>
-            <a:r>
-              <a:rPr sz="1700" b="0" i="0">
-                <a:solidFill>
-                  <a:srgbClr val="1F1F24"/>
-                </a:solidFill>
-                <a:latin typeface="Open Sans"/>
-              </a:rPr>
-              <a:t> the split falls along coverage — </a:t>
-            </a:r>
-            <a:r>
-              <a:rPr sz="1700" b="1" i="0">
-                <a:solidFill>
-                  <a:srgbClr val="1F1F24"/>
-                </a:solidFill>
-                <a:latin typeface="Open Sans"/>
-              </a:rPr>
-              <a:t>Wolof, uncovered yet cheap at 1.31</a:t>
-            </a:r>
-            <a:r>
-              <a:rPr sz="1700" b="0" i="0">
-                <a:solidFill>
-                  <a:srgbClr val="1F1F24"/>
-                </a:solidFill>
-                <a:latin typeface="Open Sans"/>
-              </a:rPr>
-              <a:t>, the exception anecdotes hide.</a:t>
+              <a:t> XLM-R knows all three well.</a:t>
             </a:r>
           </a:p>
           <a:p>
@@ -15067,17 +14923,35 @@
                 <a:spcPct val="102000"/>
               </a:lnSpc>
               <a:spcAft>
-                <a:spcPts val="500"/>
+                <a:spcPts val="300"/>
               </a:spcAft>
             </a:pPr>
             <a:r>
+              <a:rPr sz="1700" b="0" i="1">
+                <a:solidFill>
+                  <a:srgbClr val="1F1F24"/>
+                </a:solidFill>
+                <a:latin typeface="Open Sans"/>
+              </a:rPr>
+              <a:t>Learned:</a:t>
+            </a:r>
+            <a:r>
+              <a:rPr sz="1700" b="0" i="0">
+                <a:solidFill>
+                  <a:srgbClr val="1F1F24"/>
+                </a:solidFill>
+                <a:latin typeface="Open Sans"/>
+              </a:rPr>
+              <a:t> they cost </a:t>
+            </a:r>
+            <a:r>
               <a:rPr sz="1700" b="1" i="0">
                 <a:solidFill>
                   <a:srgbClr val="1F1F24"/>
                 </a:solidFill>
                 <a:latin typeface="Open Sans"/>
               </a:rPr>
-              <a:t>Five languages got the whole sweep.</a:t>
+              <a:t>1.04, 1.01, 0.95</a:t>
             </a:r>
             <a:r>
               <a:rPr sz="1700" b="0" i="0">
@@ -15086,7 +14960,7 @@
                 </a:solidFill>
                 <a:latin typeface="Open Sans"/>
               </a:rPr>
-              <a:t> </a:t>
+              <a:t> — the penalty tracks </a:t>
             </a:r>
             <a:r>
               <a:rPr sz="1700" b="0" i="1">
@@ -15095,7 +14969,7 @@
                 </a:solidFill>
                 <a:latin typeface="Open Sans"/>
               </a:rPr>
-              <a:t>Why:</a:t>
+              <a:t>coverage</a:t>
             </a:r>
             <a:r>
               <a:rPr sz="1700" b="0" i="0">
@@ -15104,34 +14978,7 @@
                 </a:solidFill>
                 <a:latin typeface="Open Sans"/>
               </a:rPr>
-              <a:t> "one call per language" is only true if settings transfer. </a:t>
-            </a:r>
-            <a:r>
-              <a:rPr sz="1700" b="0" i="1">
-                <a:solidFill>
-                  <a:srgbClr val="1F1F24"/>
-                </a:solidFill>
-                <a:latin typeface="Open Sans"/>
-              </a:rPr>
-              <a:t>Learned:</a:t>
-            </a:r>
-            <a:r>
-              <a:rPr sz="1700" b="0" i="0">
-                <a:solidFill>
-                  <a:srgbClr val="1F1F24"/>
-                </a:solidFill>
-                <a:latin typeface="Open Sans"/>
-              </a:rPr>
-              <a:t> they do not — </a:t>
-            </a:r>
-            <a:r>
-              <a:rPr sz="1700" b="1" i="0">
-                <a:solidFill>
-                  <a:srgbClr val="1F1F24"/>
-                </a:solidFill>
-                <a:latin typeface="Open Sans"/>
-              </a:rPr>
-              <a:t>the rate four languages want destroys Igbo.</a:t>
+              <a:t>, not "African".</a:t>
             </a:r>
           </a:p>
           <a:p>
@@ -15140,7 +14987,7 @@
                 <a:spcPct val="102000"/>
               </a:lnSpc>
               <a:spcAft>
-                <a:spcPts val="500"/>
+                <a:spcPts val="300"/>
               </a:spcAft>
             </a:pPr>
             <a:r>
@@ -15150,6 +14997,181 @@
                 </a:solidFill>
                 <a:latin typeface="Open Sans"/>
               </a:rPr>
+              <a:t>Twelve African languages are the gradient.</a:t>
+            </a:r>
+            <a:r>
+              <a:rPr sz="1700" b="0" i="0">
+                <a:solidFill>
+                  <a:srgbClr val="1F1F24"/>
+                </a:solidFill>
+                <a:latin typeface="Open Sans"/>
+              </a:rPr>
+              <a:t> </a:t>
+            </a:r>
+            <a:r>
+              <a:rPr sz="1700" b="0" i="1">
+                <a:solidFill>
+                  <a:srgbClr val="1F1F24"/>
+                </a:solidFill>
+                <a:latin typeface="Open Sans"/>
+              </a:rPr>
+              <a:t>Why:</a:t>
+            </a:r>
+            <a:r>
+              <a:rPr sz="1700" b="0" i="0">
+                <a:solidFill>
+                  <a:srgbClr val="1F1F24"/>
+                </a:solidFill>
+                <a:latin typeface="Open Sans"/>
+              </a:rPr>
+              <a:t> an anecdote needs a slope behind it.</a:t>
+            </a:r>
+          </a:p>
+          <a:p>
+            <a:pPr algn="l">
+              <a:lnSpc>
+                <a:spcPct val="102000"/>
+              </a:lnSpc>
+              <a:spcAft>
+                <a:spcPts val="300"/>
+              </a:spcAft>
+            </a:pPr>
+            <a:r>
+              <a:rPr sz="1700" b="0" i="1">
+                <a:solidFill>
+                  <a:srgbClr val="1F1F24"/>
+                </a:solidFill>
+                <a:latin typeface="Open Sans"/>
+              </a:rPr>
+              <a:t>Learned:</a:t>
+            </a:r>
+            <a:r>
+              <a:rPr sz="1700" b="0" i="0">
+                <a:solidFill>
+                  <a:srgbClr val="1F1F24"/>
+                </a:solidFill>
+                <a:latin typeface="Open Sans"/>
+              </a:rPr>
+              <a:t> the split falls along coverage — with </a:t>
+            </a:r>
+            <a:r>
+              <a:rPr sz="1700" b="1" i="0">
+                <a:solidFill>
+                  <a:srgbClr val="1F1F24"/>
+                </a:solidFill>
+                <a:latin typeface="Open Sans"/>
+              </a:rPr>
+              <a:t>Wolof, uncovered yet cheap at 1.31</a:t>
+            </a:r>
+            <a:r>
+              <a:rPr sz="1700" b="0" i="0">
+                <a:solidFill>
+                  <a:srgbClr val="1F1F24"/>
+                </a:solidFill>
+                <a:latin typeface="Open Sans"/>
+              </a:rPr>
+              <a:t>, the exception an anecdote hides.</a:t>
+            </a:r>
+          </a:p>
+          <a:p>
+            <a:pPr algn="l">
+              <a:lnSpc>
+                <a:spcPct val="102000"/>
+              </a:lnSpc>
+              <a:spcAft>
+                <a:spcPts val="300"/>
+              </a:spcAft>
+            </a:pPr>
+            <a:r>
+              <a:rPr sz="1700" b="1" i="0">
+                <a:solidFill>
+                  <a:srgbClr val="1F1F24"/>
+                </a:solidFill>
+                <a:latin typeface="Open Sans"/>
+              </a:rPr>
+              <a:t>Five languages got the whole sweep.</a:t>
+            </a:r>
+            <a:r>
+              <a:rPr sz="1700" b="0" i="0">
+                <a:solidFill>
+                  <a:srgbClr val="1F1F24"/>
+                </a:solidFill>
+                <a:latin typeface="Open Sans"/>
+              </a:rPr>
+              <a:t> </a:t>
+            </a:r>
+            <a:r>
+              <a:rPr sz="1700" b="0" i="1">
+                <a:solidFill>
+                  <a:srgbClr val="1F1F24"/>
+                </a:solidFill>
+                <a:latin typeface="Open Sans"/>
+              </a:rPr>
+              <a:t>Why:</a:t>
+            </a:r>
+            <a:r>
+              <a:rPr sz="1700" b="0" i="0">
+                <a:solidFill>
+                  <a:srgbClr val="1F1F24"/>
+                </a:solidFill>
+                <a:latin typeface="Open Sans"/>
+              </a:rPr>
+              <a:t> "one call per language" is only true if the settings transfer.</a:t>
+            </a:r>
+          </a:p>
+          <a:p>
+            <a:pPr algn="l">
+              <a:lnSpc>
+                <a:spcPct val="102000"/>
+              </a:lnSpc>
+              <a:spcAft>
+                <a:spcPts val="300"/>
+              </a:spcAft>
+            </a:pPr>
+            <a:r>
+              <a:rPr sz="1700" b="0" i="1">
+                <a:solidFill>
+                  <a:srgbClr val="1F1F24"/>
+                </a:solidFill>
+                <a:latin typeface="Open Sans"/>
+              </a:rPr>
+              <a:t>Learned:</a:t>
+            </a:r>
+            <a:r>
+              <a:rPr sz="1700" b="0" i="0">
+                <a:solidFill>
+                  <a:srgbClr val="1F1F24"/>
+                </a:solidFill>
+                <a:latin typeface="Open Sans"/>
+              </a:rPr>
+              <a:t> they do not — </a:t>
+            </a:r>
+            <a:r>
+              <a:rPr sz="1700" b="1" i="0">
+                <a:solidFill>
+                  <a:srgbClr val="1F1F24"/>
+                </a:solidFill>
+                <a:latin typeface="Open Sans"/>
+              </a:rPr>
+              <a:t>the rate four languages want destroys Igbo.</a:t>
+            </a:r>
+          </a:p>
+          <a:p>
+            <a:pPr algn="l">
+              <a:lnSpc>
+                <a:spcPct val="102000"/>
+              </a:lnSpc>
+              <a:spcAft>
+                <a:spcPts val="300"/>
+              </a:spcAft>
+            </a:pPr>
+            <a:r>
+              <a:rPr sz="1700" b="1" i="0">
+                <a:solidFill>
+                  <a:srgbClr val="1F1F24"/>
+                </a:solidFill>
+                <a:latin typeface="Open Sans"/>
+              </a:rPr>
               <a:t>None of us speaks any of them.</a:t>
             </a:r>
             <a:r>
@@ -15159,8 +15181,18 @@
                 </a:solidFill>
                 <a:latin typeface="Open Sans"/>
               </a:rPr>
-              <a:t> So the spread is the evidence — </a:t>
-            </a:r>
+              <a:t> So the spread is the evidence, not any one score.</a:t>
+            </a:r>
+          </a:p>
+          <a:p>
+            <a:pPr algn="l">
+              <a:lnSpc>
+                <a:spcPct val="102000"/>
+              </a:lnSpc>
+              <a:spcAft>
+                <a:spcPts val="300"/>
+              </a:spcAft>
+            </a:pPr>
             <a:r>
               <a:rPr sz="1700" b="1" i="0">
                 <a:solidFill>
@@ -15168,7 +15200,7 @@
                 </a:solidFill>
                 <a:latin typeface="Open Sans"/>
               </a:rPr>
-              <a:t>nine functions</a:t>
+              <a:t>Nine functions</a:t>
             </a:r>
             <a:r>
               <a:rPr sz="1700" b="0" i="0">
@@ -15177,7 +15209,7 @@
                 </a:solidFill>
                 <a:latin typeface="Open Sans"/>
               </a:rPr>
-              <a:t>, one call per language, </a:t>
+              <a:t>, one call per language — </a:t>
             </a:r>
             <a:r>
               <a:rPr sz="1700" b="1" i="0">
@@ -15186,7 +15218,7 @@
                 </a:solidFill>
                 <a:latin typeface="Open Sans"/>
               </a:rPr>
-              <a:t>twelve in 48 minutes</a:t>
+              <a:t>twelve pretrained in 48 minutes</a:t>
             </a:r>
             <a:r>
               <a:rPr sz="1700" b="0" i="0">
@@ -15208,7 +15240,7 @@
         </p:nvSpPr>
         <p:spPr>
           <a:xfrm>
-            <a:off x="14749272" y="27688032"/>
+            <a:off x="14749272" y="27633168"/>
             <a:ext cx="5806440" cy="896112"/>
           </a:xfrm>
           <a:prstGeom prst="rect">
@@ -15250,7 +15282,7 @@
         </p:nvCxnSpPr>
         <p:spPr>
           <a:xfrm>
-            <a:off x="14749272" y="28620720"/>
+            <a:off x="14749272" y="28565856"/>
             <a:ext cx="5806439" cy="0"/>
           </a:xfrm>
           <a:prstGeom prst="line">
@@ -15279,14 +15311,14 @@
       </p:cxnSp>
       <p:sp>
         <p:nvSpPr>
-          <p:cNvPr id="145" name="Cellstrip2_Ref"/>
+          <p:cNvPr id="145" name="Cellstrip2_Refs"/>
           <p:cNvSpPr txBox="1"/>
           <p:nvPr/>
         </p:nvSpPr>
         <p:spPr>
           <a:xfrm>
-            <a:off x="14749272" y="28748736"/>
-            <a:ext cx="5806440" cy="612648"/>
+            <a:off x="14749272" y="28693872"/>
+            <a:ext cx="5806440" cy="3072383"/>
           </a:xfrm>
           <a:prstGeom prst="rect">
             <a:avLst/>
@@ -15299,12 +15331,12 @@
           </a:bodyPr>
           <a:lstStyle/>
           <a:p>
-            <a:pPr algn="l">
+            <a:pPr marL="182880" indent="-182880" algn="l">
               <a:lnSpc>
                 <a:spcPct val="108000"/>
               </a:lnSpc>
               <a:spcAft>
-                <a:spcPts val="0"/>
+                <a:spcPts val="600"/>
               </a:spcAft>
             </a:pPr>
             <a:r>
@@ -15317,36 +15349,13 @@
               <a:t>A. Conneau et al., "Unsupervised cross-lingual representation learning at scale," ACL, 2020, pp. 8440–8451.</a:t>
             </a:r>
           </a:p>
-        </p:txBody>
-      </p:sp>
-      <p:sp>
-        <p:nvSpPr>
-          <p:cNvPr id="146" name="Cellstrip2_Ref"/>
-          <p:cNvSpPr txBox="1"/>
-          <p:nvPr/>
-        </p:nvSpPr>
-        <p:spPr>
-          <a:xfrm>
-            <a:off x="14749272" y="29388816"/>
-            <a:ext cx="5806440" cy="420623"/>
-          </a:xfrm>
-          <a:prstGeom prst="rect">
-            <a:avLst/>
-          </a:prstGeom>
-          <a:noFill/>
-        </p:spPr>
-        <p:txBody>
-          <a:bodyPr wrap="square" lIns="36576" tIns="36576" rIns="36576" bIns="36576" anchor="t">
-            <a:noAutofit/>
-          </a:bodyPr>
-          <a:lstStyle/>
-          <a:p>
-            <a:pPr algn="l">
+          <a:p>
+            <a:pPr marL="182880" indent="-182880" algn="l">
               <a:lnSpc>
                 <a:spcPct val="108000"/>
               </a:lnSpc>
               <a:spcAft>
-                <a:spcPts val="0"/>
+                <a:spcPts val="600"/>
               </a:spcAft>
             </a:pPr>
             <a:r>
@@ -15359,36 +15368,13 @@
               <a:t>M. Marone et al., "mmBERT: A modern multilingual encoder," arXiv:2509.06888, 2025.</a:t>
             </a:r>
           </a:p>
-        </p:txBody>
-      </p:sp>
-      <p:sp>
-        <p:nvSpPr>
-          <p:cNvPr id="147" name="Cellstrip2_Ref"/>
-          <p:cNvSpPr txBox="1"/>
-          <p:nvPr/>
-        </p:nvSpPr>
-        <p:spPr>
-          <a:xfrm>
-            <a:off x="14749272" y="29836872"/>
-            <a:ext cx="5806440" cy="612648"/>
-          </a:xfrm>
-          <a:prstGeom prst="rect">
-            <a:avLst/>
-          </a:prstGeom>
-          <a:noFill/>
-        </p:spPr>
-        <p:txBody>
-          <a:bodyPr wrap="square" lIns="36576" tIns="36576" rIns="36576" bIns="36576" anchor="t">
-            <a:noAutofit/>
-          </a:bodyPr>
-          <a:lstStyle/>
-          <a:p>
-            <a:pPr algn="l">
+          <a:p>
+            <a:pPr marL="182880" indent="-182880" algn="l">
               <a:lnSpc>
                 <a:spcPct val="108000"/>
               </a:lnSpc>
               <a:spcAft>
-                <a:spcPts val="0"/>
+                <a:spcPts val="600"/>
               </a:spcAft>
             </a:pPr>
             <a:r>
@@ -15401,36 +15387,13 @@
               <a:t>Y. Liu et al., "RoBERTa: A robustly optimized BERT pretraining approach," arXiv:1907.11692, 2019.</a:t>
             </a:r>
           </a:p>
-        </p:txBody>
-      </p:sp>
-      <p:sp>
-        <p:nvSpPr>
-          <p:cNvPr id="148" name="Cellstrip2_Ref"/>
-          <p:cNvSpPr txBox="1"/>
-          <p:nvPr/>
-        </p:nvSpPr>
-        <p:spPr>
-          <a:xfrm>
-            <a:off x="14749272" y="30476952"/>
-            <a:ext cx="5806440" cy="420623"/>
-          </a:xfrm>
-          <a:prstGeom prst="rect">
-            <a:avLst/>
-          </a:prstGeom>
-          <a:noFill/>
-        </p:spPr>
-        <p:txBody>
-          <a:bodyPr wrap="square" lIns="36576" tIns="36576" rIns="36576" bIns="36576" anchor="t">
-            <a:noAutofit/>
-          </a:bodyPr>
-          <a:lstStyle/>
-          <a:p>
-            <a:pPr algn="l">
+          <a:p>
+            <a:pPr marL="182880" indent="-182880" algn="l">
               <a:lnSpc>
                 <a:spcPct val="108000"/>
               </a:lnSpc>
               <a:spcAft>
-                <a:spcPts val="0"/>
+                <a:spcPts val="600"/>
               </a:spcAft>
             </a:pPr>
             <a:r>
@@ -15443,36 +15406,13 @@
               <a:t>D. I. Adelani et al., "SIB-200," EACL, 2024, pp. 226–245.</a:t>
             </a:r>
           </a:p>
-        </p:txBody>
-      </p:sp>
-      <p:sp>
-        <p:nvSpPr>
-          <p:cNvPr id="149" name="Cellstrip2_Ref"/>
-          <p:cNvSpPr txBox="1"/>
-          <p:nvPr/>
-        </p:nvSpPr>
-        <p:spPr>
-          <a:xfrm>
-            <a:off x="14749272" y="30925008"/>
-            <a:ext cx="5806440" cy="420623"/>
-          </a:xfrm>
-          <a:prstGeom prst="rect">
-            <a:avLst/>
-          </a:prstGeom>
-          <a:noFill/>
-        </p:spPr>
-        <p:txBody>
-          <a:bodyPr wrap="square" lIns="36576" tIns="36576" rIns="36576" bIns="36576" anchor="t">
-            <a:noAutofit/>
-          </a:bodyPr>
-          <a:lstStyle/>
-          <a:p>
-            <a:pPr algn="l">
+          <a:p>
+            <a:pPr marL="182880" indent="-182880" algn="l">
               <a:lnSpc>
                 <a:spcPct val="108000"/>
               </a:lnSpc>
               <a:spcAft>
-                <a:spcPts val="0"/>
+                <a:spcPts val="600"/>
               </a:spcAft>
             </a:pPr>
             <a:r>
@@ -15485,36 +15425,13 @@
               <a:t>D. I. Adelani et al., "MasakhaNER 2.0," EMNLP, 2022, pp. 4488–4508.</a:t>
             </a:r>
           </a:p>
-        </p:txBody>
-      </p:sp>
-      <p:sp>
-        <p:nvSpPr>
-          <p:cNvPr id="150" name="Cellstrip2_Ref"/>
-          <p:cNvSpPr txBox="1"/>
-          <p:nvPr/>
-        </p:nvSpPr>
-        <p:spPr>
-          <a:xfrm>
-            <a:off x="14749272" y="31373064"/>
-            <a:ext cx="5806440" cy="420623"/>
-          </a:xfrm>
-          <a:prstGeom prst="rect">
-            <a:avLst/>
-          </a:prstGeom>
-          <a:noFill/>
-        </p:spPr>
-        <p:txBody>
-          <a:bodyPr wrap="square" lIns="36576" tIns="36576" rIns="36576" bIns="36576" anchor="t">
-            <a:noAutofit/>
-          </a:bodyPr>
-          <a:lstStyle/>
-          <a:p>
-            <a:pPr algn="l">
+          <a:p>
+            <a:pPr marL="182880" indent="-182880" algn="l">
               <a:lnSpc>
                 <a:spcPct val="108000"/>
               </a:lnSpc>
               <a:spcAft>
-                <a:spcPts val="0"/>
+                <a:spcPts val="600"/>
               </a:spcAft>
             </a:pPr>
             <a:r>
@@ -15527,36 +15444,13 @@
               <a:t>G. Penedo et al., "FineWeb2: One pipeline to scale them all," arXiv:2506.20920, 2025.</a:t>
             </a:r>
           </a:p>
-        </p:txBody>
-      </p:sp>
-      <p:sp>
-        <p:nvSpPr>
-          <p:cNvPr id="151" name="Cellstrip2_Ref"/>
-          <p:cNvSpPr txBox="1"/>
-          <p:nvPr/>
-        </p:nvSpPr>
-        <p:spPr>
-          <a:xfrm>
-            <a:off x="14749272" y="31821120"/>
-            <a:ext cx="5806440" cy="612648"/>
-          </a:xfrm>
-          <a:prstGeom prst="rect">
-            <a:avLst/>
-          </a:prstGeom>
-          <a:noFill/>
-        </p:spPr>
-        <p:txBody>
-          <a:bodyPr wrap="square" lIns="36576" tIns="36576" rIns="36576" bIns="36576" anchor="t">
-            <a:noAutofit/>
-          </a:bodyPr>
-          <a:lstStyle/>
-          <a:p>
-            <a:pPr algn="l">
+          <a:p>
+            <a:pPr marL="182880" indent="-182880" algn="l">
               <a:lnSpc>
                 <a:spcPct val="108000"/>
               </a:lnSpc>
               <a:spcAft>
-                <a:spcPts val="0"/>
+                <a:spcPts val="600"/>
               </a:spcAft>
             </a:pPr>
             <a:r>
@@ -15573,7 +15467,7 @@
       </p:sp>
       <p:cxnSp>
         <p:nvCxnSpPr>
-          <p:cNvPr id="152" name="Connector 151"/>
+          <p:cNvPr id="146" name="Connector 145"/>
           <p:cNvCxnSpPr/>
           <p:nvPr/>
         </p:nvCxnSpPr>
@@ -15608,7 +15502,7 @@
       </p:cxnSp>
       <p:sp>
         <p:nvSpPr>
-          <p:cNvPr id="153" name="Footer_Sources"/>
+          <p:cNvPr id="147" name="Footer_Sources"/>
           <p:cNvSpPr txBox="1"/>
           <p:nvPr/>
         </p:nvSpPr>
@@ -15650,7 +15544,7 @@
       </p:sp>
       <p:sp>
         <p:nvSpPr>
-          <p:cNvPr id="154" name="Footer_Tag"/>
+          <p:cNvPr id="148" name="Footer_Tag"/>
           <p:cNvSpPr txBox="1"/>
           <p:nvPr/>
         </p:nvSpPr>
@@ -15692,10 +15586,10 @@
       </p:sp>
       <p:pic>
         <p:nvPicPr>
-          <p:cNvPr id="156" name="Embedded_01_Cell1" descr="reports\figures\26-poster-hardware.svg">
+          <p:cNvPr id="150" name="Embedded_01_Cell1" descr="reports\figures\26-poster-hardware.svg">
             <a:extLst>
               <a:ext uri="{FF2B5EF4-FFF2-40B4-BE49-F238E27FC236}">
-                <a16:creationId xmlns:a16="http://schemas.microsoft.com/office/drawing/2014/main" id="{477E9668-A654-1E84-261C-8B1D16732065}"/>
+                <a16:creationId xmlns:a16="http://schemas.microsoft.com/office/drawing/2014/main" id="{25E56258-B9C6-F505-EF69-3E9768B74CA9}"/>
               </a:ext>
             </a:extLst>
           </p:cNvPr>
@@ -15718,8 +15612,8 @@
         </p:blipFill>
         <p:spPr>
           <a:xfrm>
-            <a:off x="868680" y="9062093"/>
-            <a:ext cx="6812280" cy="2870437"/>
+            <a:off x="868680" y="9063045"/>
+            <a:ext cx="6812280" cy="2868533"/>
           </a:xfrm>
           <a:prstGeom prst="rect">
             <a:avLst/>
@@ -15728,10 +15622,10 @@
       </p:pic>
       <p:pic>
         <p:nvPicPr>
-          <p:cNvPr id="158" name="Embedded_02_Cell5" descr="reports\figures\27-poster-cliffs.svg">
+          <p:cNvPr id="152" name="Embedded_02_Cell5" descr="reports\figures\27-poster-cliffs.svg">
             <a:extLst>
               <a:ext uri="{FF2B5EF4-FFF2-40B4-BE49-F238E27FC236}">
-                <a16:creationId xmlns:a16="http://schemas.microsoft.com/office/drawing/2014/main" id="{67A52BAE-9152-6DC1-D6F7-6A20A00CC843}"/>
+                <a16:creationId xmlns:a16="http://schemas.microsoft.com/office/drawing/2014/main" id="{CACEC23D-4B24-089E-CFD4-320690328DCB}"/>
               </a:ext>
             </a:extLst>
           </p:cNvPr>
@@ -15764,10 +15658,10 @@
       </p:pic>
       <p:pic>
         <p:nvPicPr>
-          <p:cNvPr id="160" name="Embedded_03_Cell6" descr="reports\figures\25-poster-transfer.svg">
+          <p:cNvPr id="154" name="Embedded_03_Cell6" descr="reports\figures\25-poster-transfer.svg">
             <a:extLst>
               <a:ext uri="{FF2B5EF4-FFF2-40B4-BE49-F238E27FC236}">
-                <a16:creationId xmlns:a16="http://schemas.microsoft.com/office/drawing/2014/main" id="{A86D3DCA-82D1-F8E6-AE75-F4A5270B9A6B}"/>
+                <a16:creationId xmlns:a16="http://schemas.microsoft.com/office/drawing/2014/main" id="{B01A4BD2-E5D7-2B66-76EA-AC9DD9DB21BF}"/>
               </a:ext>
             </a:extLst>
           </p:cNvPr>
@@ -15800,10 +15694,10 @@
       </p:pic>
       <p:pic>
         <p:nvPicPr>
-          <p:cNvPr id="162" name="Embedded_04_Cell7" descr="reports\figures\28-poster-dashboard.svg">
+          <p:cNvPr id="156" name="Embedded_04_Cell7" descr="reports\figures\28-poster-dashboard.svg">
             <a:extLst>
               <a:ext uri="{FF2B5EF4-FFF2-40B4-BE49-F238E27FC236}">
-                <a16:creationId xmlns:a16="http://schemas.microsoft.com/office/drawing/2014/main" id="{D4FC8B6B-B824-15BA-E4C6-AD128F1EA9BD}"/>
+                <a16:creationId xmlns:a16="http://schemas.microsoft.com/office/drawing/2014/main" id="{A8B18E37-33F0-08FB-E771-661D0350B798}"/>
               </a:ext>
             </a:extLst>
           </p:cNvPr>

--- a/src/a2-nlp/poster/final/board-model-factory_v2.pptx
+++ b/src/a2-nlp/poster/final/board-model-factory_v2.pptx
@@ -8504,7 +8504,7 @@
                 <a:spcPct val="102000"/>
               </a:lnSpc>
               <a:spcAft>
-                <a:spcPts val="500"/>
+                <a:spcPts val="400"/>
               </a:spcAft>
             </a:pPr>
             <a:r>
@@ -8514,7 +8514,7 @@
                 </a:solidFill>
                 <a:latin typeface="Open Sans"/>
               </a:rPr>
-              <a:t>What has to fit is the model</a:t>
+              <a:t>What must fit is the model</a:t>
             </a:r>
             <a:r>
               <a:rPr sz="1700" b="0" i="0">
@@ -8523,7 +8523,7 @@
                 </a:solidFill>
                 <a:latin typeface="Open Sans"/>
               </a:rPr>
-              <a:t> — 12–16 bytes a parameter. Our 98M model: </a:t>
+              <a:t> — about 12–16 bytes per parameter. Our 98M needs </a:t>
             </a:r>
             <a:r>
               <a:rPr sz="1700" b="1" i="0">
@@ -8541,7 +8541,7 @@
                 </a:solidFill>
                 <a:latin typeface="Open Sans"/>
               </a:rPr>
-              <a:t>. A 7B model: </a:t>
+              <a:t>; a 7B — a small chat assistant — needs </a:t>
             </a:r>
             <a:r>
               <a:rPr sz="1700" b="1" i="0">
@@ -8559,7 +8559,7 @@
                 </a:solidFill>
                 <a:latin typeface="Open Sans"/>
               </a:rPr>
-              <a:t> — no consumer card has it.</a:t>
+              <a:t>, beyond any consumer card.</a:t>
             </a:r>
           </a:p>
           <a:p>
@@ -8568,7 +8568,7 @@
                 <a:spcPct val="102000"/>
               </a:lnSpc>
               <a:spcAft>
-                <a:spcPts val="500"/>
+                <a:spcPts val="400"/>
               </a:spcAft>
             </a:pPr>
             <a:r>
@@ -8587,7 +8587,7 @@
                 </a:solidFill>
                 <a:latin typeface="Open Sans"/>
               </a:rPr>
-              <a:t> Accumulation runs a big step as smaller passes — the same update, </a:t>
+              <a:t> Accumulation runs one big step as smaller passes — </a:t>
             </a:r>
             <a:r>
               <a:rPr sz="1700" b="1" i="0">
@@ -8596,7 +8596,7 @@
                 </a:solidFill>
                 <a:latin typeface="Open Sans"/>
               </a:rPr>
-              <a:t>within 2%</a:t>
+              <a:t>the same update</a:t>
             </a:r>
             <a:r>
               <a:rPr sz="1700" b="0" i="0">
@@ -8605,7 +8605,7 @@
                 </a:solidFill>
                 <a:latin typeface="Open Sans"/>
               </a:rPr>
-              <a:t> of the cost.</a:t>
+              <a:t>, within 2%.</a:t>
             </a:r>
           </a:p>
           <a:p>
@@ -8614,7 +8614,7 @@
                 <a:spcPct val="102000"/>
               </a:lnSpc>
               <a:spcAft>
-                <a:spcPts val="500"/>
+                <a:spcPts val="400"/>
               </a:spcAft>
             </a:pPr>
             <a:r>
@@ -8624,7 +8624,7 @@
                 </a:solidFill>
                 <a:latin typeface="Open Sans"/>
               </a:rPr>
-              <a:t>So an 8 GB laptop trains the step a 96 GB card trains.</a:t>
+              <a:t>So an 8 GB laptop trains the very step a 96 GB card trains.</a:t>
             </a:r>
             <a:r>
               <a:rPr sz="1700" b="0" i="0">
@@ -8651,7 +8651,7 @@
                 </a:solidFill>
                 <a:latin typeface="Open Sans"/>
               </a:rPr>
-              <a:t>.</a:t>
+              <a:t> — the same model.</a:t>
             </a:r>
           </a:p>
           <a:p>
@@ -8660,7 +8660,7 @@
                 <a:spcPct val="102000"/>
               </a:lnSpc>
               <a:spcAft>
-                <a:spcPts val="500"/>
+                <a:spcPts val="400"/>
               </a:spcAft>
             </a:pPr>
             <a:r>
@@ -8706,7 +8706,7 @@
                 <a:spcPct val="102000"/>
               </a:lnSpc>
               <a:spcAft>
-                <a:spcPts val="500"/>
+                <a:spcPts val="400"/>
               </a:spcAft>
             </a:pPr>
             <a:r>
@@ -8725,7 +8725,7 @@
                 </a:solidFill>
                 <a:latin typeface="Open Sans"/>
               </a:rPr>
-              <a:t> An oversized batch spills to system RAM: </a:t>
+              <a:t> An oversized batch silently spills into system RAM: </a:t>
             </a:r>
             <a:r>
               <a:rPr sz="1700" b="1" i="0">
@@ -8743,7 +8743,7 @@
                 </a:solidFill>
                 <a:latin typeface="Open Sans"/>
               </a:rPr>
-              <a:t>, no error.</a:t>
+              <a:t>, no error anywhere.</a:t>
             </a:r>
           </a:p>
         </p:txBody>
@@ -9442,7 +9442,7 @@
                 <a:spcPct val="102000"/>
               </a:lnSpc>
               <a:spcAft>
-                <a:spcPts val="500"/>
+                <a:spcPts val="400"/>
               </a:spcAft>
             </a:pPr>
             <a:r>
@@ -9506,7 +9506,7 @@
                 <a:spcPct val="102000"/>
               </a:lnSpc>
               <a:spcAft>
-                <a:spcPts val="500"/>
+                <a:spcPts val="400"/>
               </a:spcAft>
             </a:pPr>
             <a:r>
@@ -9570,7 +9570,7 @@
                 <a:spcPct val="102000"/>
               </a:lnSpc>
               <a:spcAft>
-                <a:spcPts val="500"/>
+                <a:spcPts val="400"/>
               </a:spcAft>
             </a:pPr>
             <a:r>
@@ -9616,7 +9616,7 @@
                 <a:spcPct val="102000"/>
               </a:lnSpc>
               <a:spcAft>
-                <a:spcPts val="500"/>
+                <a:spcPts val="400"/>
               </a:spcAft>
             </a:pPr>
             <a:r>
@@ -9662,7 +9662,7 @@
                 <a:spcPct val="102000"/>
               </a:lnSpc>
               <a:spcAft>
-                <a:spcPts val="500"/>
+                <a:spcPts val="400"/>
               </a:spcAft>
             </a:pPr>
             <a:r>
@@ -14658,7 +14658,7 @@
                 </a:solidFill>
                 <a:latin typeface="Open Sans"/>
               </a:rPr>
-              <a:t> — every judgement here is a benchmark number. The corpus is scraped web text nobody consented to. The audit gate prints </a:t>
+              <a:t> — every judgement here is a benchmark number. The corpus is scraped web text nobody consented to. The factory is itself an ethics tool: </a:t>
             </a:r>
             <a:r>
               <a:rPr sz="1700" b="1" i="0">
@@ -14667,6 +14667,24 @@
                 </a:solidFill>
                 <a:latin typeface="Open Sans"/>
               </a:rPr>
+              <a:t>sweeping seeds keeps a claim off one lucky draw</a:t>
+            </a:r>
+            <a:r>
+              <a:rPr sz="1700" b="0" i="0">
+                <a:solidFill>
+                  <a:srgbClr val="1F1F24"/>
+                </a:solidFill>
+                <a:latin typeface="Open Sans"/>
+              </a:rPr>
+              <a:t>, each language at its own best. Our gate prints </a:t>
+            </a:r>
+            <a:r>
+              <a:rPr sz="1700" b="1" i="0">
+                <a:solidFill>
+                  <a:srgbClr val="1F1F24"/>
+                </a:solidFill>
+                <a:latin typeface="Open Sans"/>
+              </a:rPr>
               <a:t>9 claims: 6 supported, 2 not, 1 underpowered</a:t>
             </a:r>
             <a:r>
@@ -14676,7 +14694,7 @@
                 </a:solidFill>
                 <a:latin typeface="Open Sans"/>
               </a:rPr>
-              <a:t>. Next: a wall meter, a corpus audit, the evaluation we could not do.</a:t>
+              <a:t>. Next: a corpus audit, the evaluation we could not do.</a:t>
             </a:r>
           </a:p>
         </p:txBody>
@@ -14868,7 +14886,7 @@
                 </a:solidFill>
                 <a:latin typeface="Open Sans"/>
               </a:rPr>
-              <a:t> — which Yoruba, having no more, could never show.</a:t>
+              <a:t> — so Yoruba's 69M-token corpus is not the bottleneck it looks like.</a:t>
             </a:r>
           </a:p>
           <a:p>
@@ -14914,7 +14932,7 @@
                 </a:solidFill>
                 <a:latin typeface="Open Sans"/>
               </a:rPr>
-              <a:t> XLM-R knows all three well.</a:t>
+              <a:t> the borrowed vocabulary knows these three, so they test mere unfamiliarity.</a:t>
             </a:r>
           </a:p>
           <a:p>
@@ -14942,7 +14960,7 @@
                 </a:solidFill>
                 <a:latin typeface="Open Sans"/>
               </a:rPr>
-              <a:t> they cost </a:t>
+              <a:t> they pay </a:t>
             </a:r>
             <a:r>
               <a:rPr sz="1700" b="1" i="0">
@@ -14960,16 +14978,16 @@
                 </a:solidFill>
                 <a:latin typeface="Open Sans"/>
               </a:rPr>
-              <a:t> — the penalty tracks </a:t>
-            </a:r>
-            <a:r>
-              <a:rPr sz="1700" b="0" i="1">
-                <a:solidFill>
-                  <a:srgbClr val="1F1F24"/>
-                </a:solidFill>
-                <a:latin typeface="Open Sans"/>
-              </a:rPr>
-              <a:t>coverage</a:t>
+              <a:t> tokens where a language's own vocabulary pays one. </a:t>
+            </a:r>
+            <a:r>
+              <a:rPr sz="1700" b="1" i="0">
+                <a:solidFill>
+                  <a:srgbClr val="1F1F24"/>
+                </a:solidFill>
+                <a:latin typeface="Open Sans"/>
+              </a:rPr>
+              <a:t>Yoruba pays 1.76</a:t>
             </a:r>
             <a:r>
               <a:rPr sz="1700" b="0" i="0">
@@ -14978,7 +14996,7 @@
                 </a:solidFill>
                 <a:latin typeface="Open Sans"/>
               </a:rPr>
-              <a:t>, not "African".</a:t>
+              <a:t> — second-highest of seventeen.</a:t>
             </a:r>
           </a:p>
           <a:p>
@@ -15024,7 +15042,7 @@
                 </a:solidFill>
                 <a:latin typeface="Open Sans"/>
               </a:rPr>
-              <a:t> an anecdote needs a slope behind it.</a:t>
+              <a:t> one language is an anecdote; seventeen make a slope.</a:t>
             </a:r>
           </a:p>
           <a:p>
@@ -15052,7 +15070,7 @@
                 </a:solidFill>
                 <a:latin typeface="Open Sans"/>
               </a:rPr>
-              <a:t> the split falls along coverage — with </a:t>
+              <a:t> the cost tracks </a:t>
             </a:r>
             <a:r>
               <a:rPr sz="1700" b="1" i="0">
@@ -15061,6 +15079,24 @@
                 </a:solidFill>
                 <a:latin typeface="Open Sans"/>
               </a:rPr>
+              <a:t>vocabulary coverage</a:t>
+            </a:r>
+            <a:r>
+              <a:rPr sz="1700" b="0" i="0">
+                <a:solidFill>
+                  <a:srgbClr val="1F1F24"/>
+                </a:solidFill>
+                <a:latin typeface="Open Sans"/>
+              </a:rPr>
+              <a:t>, not geography — </a:t>
+            </a:r>
+            <a:r>
+              <a:rPr sz="1700" b="1" i="0">
+                <a:solidFill>
+                  <a:srgbClr val="1F1F24"/>
+                </a:solidFill>
+                <a:latin typeface="Open Sans"/>
+              </a:rPr>
               <a:t>Wolof, uncovered yet cheap at 1.31</a:t>
             </a:r>
             <a:r>
@@ -15070,90 +15106,7 @@
                 </a:solidFill>
                 <a:latin typeface="Open Sans"/>
               </a:rPr>
-              <a:t>, the exception an anecdote hides.</a:t>
-            </a:r>
-          </a:p>
-          <a:p>
-            <a:pPr algn="l">
-              <a:lnSpc>
-                <a:spcPct val="102000"/>
-              </a:lnSpc>
-              <a:spcAft>
-                <a:spcPts val="300"/>
-              </a:spcAft>
-            </a:pPr>
-            <a:r>
-              <a:rPr sz="1700" b="1" i="0">
-                <a:solidFill>
-                  <a:srgbClr val="1F1F24"/>
-                </a:solidFill>
-                <a:latin typeface="Open Sans"/>
-              </a:rPr>
-              <a:t>Five languages got the whole sweep.</a:t>
-            </a:r>
-            <a:r>
-              <a:rPr sz="1700" b="0" i="0">
-                <a:solidFill>
-                  <a:srgbClr val="1F1F24"/>
-                </a:solidFill>
-                <a:latin typeface="Open Sans"/>
-              </a:rPr>
-              <a:t> </a:t>
-            </a:r>
-            <a:r>
-              <a:rPr sz="1700" b="0" i="1">
-                <a:solidFill>
-                  <a:srgbClr val="1F1F24"/>
-                </a:solidFill>
-                <a:latin typeface="Open Sans"/>
-              </a:rPr>
-              <a:t>Why:</a:t>
-            </a:r>
-            <a:r>
-              <a:rPr sz="1700" b="0" i="0">
-                <a:solidFill>
-                  <a:srgbClr val="1F1F24"/>
-                </a:solidFill>
-                <a:latin typeface="Open Sans"/>
-              </a:rPr>
-              <a:t> "one call per language" is only true if the settings transfer.</a:t>
-            </a:r>
-          </a:p>
-          <a:p>
-            <a:pPr algn="l">
-              <a:lnSpc>
-                <a:spcPct val="102000"/>
-              </a:lnSpc>
-              <a:spcAft>
-                <a:spcPts val="300"/>
-              </a:spcAft>
-            </a:pPr>
-            <a:r>
-              <a:rPr sz="1700" b="0" i="1">
-                <a:solidFill>
-                  <a:srgbClr val="1F1F24"/>
-                </a:solidFill>
-                <a:latin typeface="Open Sans"/>
-              </a:rPr>
-              <a:t>Learned:</a:t>
-            </a:r>
-            <a:r>
-              <a:rPr sz="1700" b="0" i="0">
-                <a:solidFill>
-                  <a:srgbClr val="1F1F24"/>
-                </a:solidFill>
-                <a:latin typeface="Open Sans"/>
-              </a:rPr>
-              <a:t> they do not — </a:t>
-            </a:r>
-            <a:r>
-              <a:rPr sz="1700" b="1" i="0">
-                <a:solidFill>
-                  <a:srgbClr val="1F1F24"/>
-                </a:solidFill>
-                <a:latin typeface="Open Sans"/>
-              </a:rPr>
-              <a:t>the rate four languages want destroys Igbo.</a:t>
+              <a:t>, proves it.</a:t>
             </a:r>
           </a:p>
           <a:p>
@@ -15589,7 +15542,7 @@
           <p:cNvPr id="150" name="Embedded_01_Cell1" descr="reports\figures\26-poster-hardware.svg">
             <a:extLst>
               <a:ext uri="{FF2B5EF4-FFF2-40B4-BE49-F238E27FC236}">
-                <a16:creationId xmlns:a16="http://schemas.microsoft.com/office/drawing/2014/main" id="{25E56258-B9C6-F505-EF69-3E9768B74CA9}"/>
+                <a16:creationId xmlns:a16="http://schemas.microsoft.com/office/drawing/2014/main" id="{44ACE5D3-4546-FDD1-E373-2D0AEB9F7747}"/>
               </a:ext>
             </a:extLst>
           </p:cNvPr>
@@ -15625,7 +15578,7 @@
           <p:cNvPr id="152" name="Embedded_02_Cell5" descr="reports\figures\27-poster-cliffs.svg">
             <a:extLst>
               <a:ext uri="{FF2B5EF4-FFF2-40B4-BE49-F238E27FC236}">
-                <a16:creationId xmlns:a16="http://schemas.microsoft.com/office/drawing/2014/main" id="{CACEC23D-4B24-089E-CFD4-320690328DCB}"/>
+                <a16:creationId xmlns:a16="http://schemas.microsoft.com/office/drawing/2014/main" id="{C4EA4F98-51EC-4584-2D25-33199148B51A}"/>
               </a:ext>
             </a:extLst>
           </p:cNvPr>
@@ -15661,7 +15614,7 @@
           <p:cNvPr id="154" name="Embedded_03_Cell6" descr="reports\figures\25-poster-transfer.svg">
             <a:extLst>
               <a:ext uri="{FF2B5EF4-FFF2-40B4-BE49-F238E27FC236}">
-                <a16:creationId xmlns:a16="http://schemas.microsoft.com/office/drawing/2014/main" id="{B01A4BD2-E5D7-2B66-76EA-AC9DD9DB21BF}"/>
+                <a16:creationId xmlns:a16="http://schemas.microsoft.com/office/drawing/2014/main" id="{84A8470C-C9E1-9026-7B22-4CD4EADAFE40}"/>
               </a:ext>
             </a:extLst>
           </p:cNvPr>
@@ -15697,7 +15650,7 @@
           <p:cNvPr id="156" name="Embedded_04_Cell7" descr="reports\figures\28-poster-dashboard.svg">
             <a:extLst>
               <a:ext uri="{FF2B5EF4-FFF2-40B4-BE49-F238E27FC236}">
-                <a16:creationId xmlns:a16="http://schemas.microsoft.com/office/drawing/2014/main" id="{A8B18E37-33F0-08FB-E771-661D0350B798}"/>
+                <a16:creationId xmlns:a16="http://schemas.microsoft.com/office/drawing/2014/main" id="{55ADA9BB-ACEF-C8EC-4FA9-1860498CCFD2}"/>
               </a:ext>
             </a:extLst>
           </p:cNvPr>

--- a/src/a2-nlp/poster/final/board-model-factory_v2.pptx
+++ b/src/a2-nlp/poster/final/board-model-factory_v2.pptx
@@ -8199,7 +8199,7 @@
         </p:nvSpPr>
         <p:spPr>
           <a:xfrm>
-            <a:off x="1371600" y="8001000"/>
+            <a:off x="1371600" y="7955279"/>
             <a:ext cx="5806440" cy="896112"/>
           </a:xfrm>
           <a:prstGeom prst="rect">
@@ -8241,7 +8241,7 @@
         </p:nvCxnSpPr>
         <p:spPr>
           <a:xfrm>
-            <a:off x="1371600" y="8933688"/>
+            <a:off x="1371600" y="8887967"/>
             <a:ext cx="5806440" cy="0"/>
           </a:xfrm>
           <a:prstGeom prst="line">
@@ -8276,8 +8276,8 @@
         </p:nvSpPr>
         <p:spPr>
           <a:xfrm>
-            <a:off x="1371600" y="12079224"/>
-            <a:ext cx="5806440" cy="1417320"/>
+            <a:off x="1371600" y="11987784"/>
+            <a:ext cx="5806440" cy="1463040"/>
           </a:xfrm>
           <a:prstGeom prst="rect">
             <a:avLst/>
@@ -8295,7 +8295,7 @@
                 <a:spcPct val="108000"/>
               </a:lnSpc>
               <a:spcAft>
-                <a:spcPts val="0"/>
+                <a:spcPts val="600"/>
               </a:spcAft>
             </a:pPr>
             <a:r>
@@ -8408,7 +8408,7 @@
         </p:nvSpPr>
         <p:spPr>
           <a:xfrm>
-            <a:off x="8001000" y="8001000"/>
+            <a:off x="8001000" y="7955279"/>
             <a:ext cx="5806440" cy="896112"/>
           </a:xfrm>
           <a:prstGeom prst="rect">
@@ -8450,7 +8450,7 @@
         </p:nvCxnSpPr>
         <p:spPr>
           <a:xfrm>
-            <a:off x="8001000" y="8933688"/>
+            <a:off x="8001000" y="8887967"/>
             <a:ext cx="5806440" cy="0"/>
           </a:xfrm>
           <a:prstGeom prst="line">
@@ -8485,7 +8485,7 @@
         </p:nvSpPr>
         <p:spPr>
           <a:xfrm>
-            <a:off x="8001000" y="9134856"/>
+            <a:off x="8001000" y="9089136"/>
             <a:ext cx="5806440" cy="4434840"/>
           </a:xfrm>
           <a:prstGeom prst="rect">
@@ -8504,7 +8504,7 @@
                 <a:spcPct val="102000"/>
               </a:lnSpc>
               <a:spcAft>
-                <a:spcPts val="400"/>
+                <a:spcPts val="600"/>
               </a:spcAft>
             </a:pPr>
             <a:r>
@@ -8568,7 +8568,7 @@
                 <a:spcPct val="102000"/>
               </a:lnSpc>
               <a:spcAft>
-                <a:spcPts val="400"/>
+                <a:spcPts val="600"/>
               </a:spcAft>
             </a:pPr>
             <a:r>
@@ -8614,7 +8614,7 @@
                 <a:spcPct val="102000"/>
               </a:lnSpc>
               <a:spcAft>
-                <a:spcPts val="400"/>
+                <a:spcPts val="600"/>
               </a:spcAft>
             </a:pPr>
             <a:r>
@@ -8660,7 +8660,7 @@
                 <a:spcPct val="102000"/>
               </a:lnSpc>
               <a:spcAft>
-                <a:spcPts val="400"/>
+                <a:spcPts val="600"/>
               </a:spcAft>
             </a:pPr>
             <a:r>
@@ -8706,7 +8706,7 @@
                 <a:spcPct val="102000"/>
               </a:lnSpc>
               <a:spcAft>
-                <a:spcPts val="400"/>
+                <a:spcPts val="600"/>
               </a:spcAft>
             </a:pPr>
             <a:r>
@@ -8743,7 +8743,7 @@
                 </a:solidFill>
                 <a:latin typeface="Open Sans"/>
               </a:rPr>
-              <a:t>, no error anywhere.</a:t>
+              <a:t>.</a:t>
             </a:r>
           </a:p>
         </p:txBody>
@@ -8756,7 +8756,7 @@
         </p:nvSpPr>
         <p:spPr>
           <a:xfrm>
-            <a:off x="14749272" y="8001000"/>
+            <a:off x="14749272" y="7955279"/>
             <a:ext cx="5806440" cy="5623560"/>
           </a:xfrm>
           <a:prstGeom prst="rect">
@@ -8800,7 +8800,7 @@
         </p:nvSpPr>
         <p:spPr>
           <a:xfrm>
-            <a:off x="15023592" y="8220456"/>
+            <a:off x="15023592" y="8174736"/>
             <a:ext cx="5257800" cy="548640"/>
           </a:xfrm>
           <a:prstGeom prst="rect">
@@ -8842,7 +8842,7 @@
         </p:nvSpPr>
         <p:spPr>
           <a:xfrm>
-            <a:off x="15005304" y="8897112"/>
+            <a:off x="15005304" y="8851392"/>
             <a:ext cx="1572768" cy="751332"/>
           </a:xfrm>
           <a:prstGeom prst="rect">
@@ -8884,7 +8884,7 @@
         </p:nvSpPr>
         <p:spPr>
           <a:xfrm>
-            <a:off x="16706088" y="8897112"/>
+            <a:off x="16706088" y="8851392"/>
             <a:ext cx="3575303" cy="751332"/>
           </a:xfrm>
           <a:prstGeom prst="rect">
@@ -8926,7 +8926,7 @@
         </p:nvSpPr>
         <p:spPr>
           <a:xfrm>
-            <a:off x="15005304" y="9648444"/>
+            <a:off x="15005304" y="9602724"/>
             <a:ext cx="1572768" cy="751332"/>
           </a:xfrm>
           <a:prstGeom prst="rect">
@@ -8968,7 +8968,7 @@
         </p:nvSpPr>
         <p:spPr>
           <a:xfrm>
-            <a:off x="16706088" y="9648444"/>
+            <a:off x="16706088" y="9602724"/>
             <a:ext cx="3575303" cy="751332"/>
           </a:xfrm>
           <a:prstGeom prst="rect">
@@ -9010,7 +9010,7 @@
         </p:nvSpPr>
         <p:spPr>
           <a:xfrm>
-            <a:off x="15005304" y="10399776"/>
+            <a:off x="15005304" y="10354056"/>
             <a:ext cx="1572768" cy="751332"/>
           </a:xfrm>
           <a:prstGeom prst="rect">
@@ -9052,7 +9052,7 @@
         </p:nvSpPr>
         <p:spPr>
           <a:xfrm>
-            <a:off x="16706088" y="10399776"/>
+            <a:off x="16706088" y="10354056"/>
             <a:ext cx="3575303" cy="751332"/>
           </a:xfrm>
           <a:prstGeom prst="rect">
@@ -9094,7 +9094,7 @@
         </p:nvSpPr>
         <p:spPr>
           <a:xfrm>
-            <a:off x="15005304" y="11151108"/>
+            <a:off x="15005304" y="11105388"/>
             <a:ext cx="1572768" cy="751332"/>
           </a:xfrm>
           <a:prstGeom prst="rect">
@@ -9136,7 +9136,7 @@
         </p:nvSpPr>
         <p:spPr>
           <a:xfrm>
-            <a:off x="16706088" y="11151108"/>
+            <a:off x="16706088" y="11105388"/>
             <a:ext cx="3575303" cy="751332"/>
           </a:xfrm>
           <a:prstGeom prst="rect">
@@ -9178,7 +9178,7 @@
         </p:nvSpPr>
         <p:spPr>
           <a:xfrm>
-            <a:off x="15005304" y="11902440"/>
+            <a:off x="15005304" y="11856720"/>
             <a:ext cx="1572768" cy="751332"/>
           </a:xfrm>
           <a:prstGeom prst="rect">
@@ -9220,7 +9220,7 @@
         </p:nvSpPr>
         <p:spPr>
           <a:xfrm>
-            <a:off x="16706088" y="11902440"/>
+            <a:off x="16706088" y="11856720"/>
             <a:ext cx="3575303" cy="751332"/>
           </a:xfrm>
           <a:prstGeom prst="rect">
@@ -9262,7 +9262,7 @@
         </p:nvSpPr>
         <p:spPr>
           <a:xfrm>
-            <a:off x="15005304" y="12653772"/>
+            <a:off x="15005304" y="12608052"/>
             <a:ext cx="1572768" cy="751332"/>
           </a:xfrm>
           <a:prstGeom prst="rect">
@@ -9304,7 +9304,7 @@
         </p:nvSpPr>
         <p:spPr>
           <a:xfrm>
-            <a:off x="16706088" y="12653772"/>
+            <a:off x="16706088" y="12608052"/>
             <a:ext cx="3575303" cy="751332"/>
           </a:xfrm>
           <a:prstGeom prst="rect">
@@ -9346,7 +9346,7 @@
         </p:nvSpPr>
         <p:spPr>
           <a:xfrm>
-            <a:off x="1371600" y="13761720"/>
+            <a:off x="1371600" y="13716000"/>
             <a:ext cx="5806440" cy="896112"/>
           </a:xfrm>
           <a:prstGeom prst="rect">
@@ -9388,7 +9388,7 @@
         </p:nvCxnSpPr>
         <p:spPr>
           <a:xfrm>
-            <a:off x="1371600" y="14694408"/>
+            <a:off x="1371600" y="14648688"/>
             <a:ext cx="5806440" cy="0"/>
           </a:xfrm>
           <a:prstGeom prst="line">
@@ -9423,7 +9423,7 @@
         </p:nvSpPr>
         <p:spPr>
           <a:xfrm>
-            <a:off x="1371600" y="14895576"/>
+            <a:off x="1371600" y="14849855"/>
             <a:ext cx="5806440" cy="3931920"/>
           </a:xfrm>
           <a:prstGeom prst="rect">
@@ -9442,7 +9442,7 @@
                 <a:spcPct val="102000"/>
               </a:lnSpc>
               <a:spcAft>
-                <a:spcPts val="400"/>
+                <a:spcPts val="600"/>
               </a:spcAft>
             </a:pPr>
             <a:r>
@@ -9506,7 +9506,7 @@
                 <a:spcPct val="102000"/>
               </a:lnSpc>
               <a:spcAft>
-                <a:spcPts val="400"/>
+                <a:spcPts val="600"/>
               </a:spcAft>
             </a:pPr>
             <a:r>
@@ -9570,7 +9570,7 @@
                 <a:spcPct val="102000"/>
               </a:lnSpc>
               <a:spcAft>
-                <a:spcPts val="400"/>
+                <a:spcPts val="600"/>
               </a:spcAft>
             </a:pPr>
             <a:r>
@@ -9616,7 +9616,7 @@
                 <a:spcPct val="102000"/>
               </a:lnSpc>
               <a:spcAft>
-                <a:spcPts val="400"/>
+                <a:spcPts val="600"/>
               </a:spcAft>
             </a:pPr>
             <a:r>
@@ -9662,7 +9662,7 @@
                 <a:spcPct val="102000"/>
               </a:lnSpc>
               <a:spcAft>
-                <a:spcPts val="400"/>
+                <a:spcPts val="600"/>
               </a:spcAft>
             </a:pPr>
             <a:r>
@@ -9717,7 +9717,7 @@
                 </a:solidFill>
                 <a:latin typeface="Open Sans"/>
               </a:rPr>
-              <a:t> — the name outlived the meaning.</a:t>
+              <a:t>.</a:t>
             </a:r>
           </a:p>
         </p:txBody>
@@ -9730,7 +9730,7 @@
         </p:nvSpPr>
         <p:spPr>
           <a:xfrm>
-            <a:off x="8001000" y="13761720"/>
+            <a:off x="8001000" y="13716000"/>
             <a:ext cx="12435840" cy="896112"/>
           </a:xfrm>
           <a:prstGeom prst="rect">
@@ -9772,7 +9772,7 @@
         </p:nvCxnSpPr>
         <p:spPr>
           <a:xfrm>
-            <a:off x="8001000" y="14694408"/>
+            <a:off x="8001000" y="14648688"/>
             <a:ext cx="12435840" cy="0"/>
           </a:xfrm>
           <a:prstGeom prst="line">
@@ -9807,7 +9807,7 @@
         </p:nvSpPr>
         <p:spPr>
           <a:xfrm>
-            <a:off x="8001000" y="14822424"/>
+            <a:off x="8001000" y="14776704"/>
             <a:ext cx="12435840" cy="859536"/>
           </a:xfrm>
           <a:prstGeom prst="rect">
@@ -9912,7 +9912,7 @@
         </p:nvSpPr>
         <p:spPr>
           <a:xfrm>
-            <a:off x="8001000" y="15718536"/>
+            <a:off x="8001000" y="15672816"/>
             <a:ext cx="1783080" cy="201168"/>
           </a:xfrm>
           <a:prstGeom prst="rect">
@@ -9954,7 +9954,7 @@
         </p:nvSpPr>
         <p:spPr>
           <a:xfrm>
-            <a:off x="10616184" y="15718536"/>
+            <a:off x="10616184" y="15672816"/>
             <a:ext cx="1783080" cy="201168"/>
           </a:xfrm>
           <a:prstGeom prst="rect">
@@ -9996,7 +9996,7 @@
         </p:nvSpPr>
         <p:spPr>
           <a:xfrm>
-            <a:off x="12874752" y="15718536"/>
+            <a:off x="12874752" y="15672816"/>
             <a:ext cx="1783080" cy="201168"/>
           </a:xfrm>
           <a:prstGeom prst="rect">
@@ -10038,7 +10038,7 @@
         </p:nvSpPr>
         <p:spPr>
           <a:xfrm>
-            <a:off x="8001000" y="15937992"/>
+            <a:off x="8001000" y="15892272"/>
             <a:ext cx="5943600" cy="196596"/>
           </a:xfrm>
           <a:prstGeom prst="rect">
@@ -10080,7 +10080,7 @@
         </p:nvCxnSpPr>
         <p:spPr>
           <a:xfrm>
-            <a:off x="8001000" y="16116300"/>
+            <a:off x="8001000" y="16070580"/>
             <a:ext cx="5943600" cy="0"/>
           </a:xfrm>
           <a:prstGeom prst="line">
@@ -10115,7 +10115,7 @@
         </p:nvSpPr>
         <p:spPr>
           <a:xfrm>
-            <a:off x="8001000" y="16152876"/>
+            <a:off x="8001000" y="16107155"/>
             <a:ext cx="2523744" cy="178307"/>
           </a:xfrm>
           <a:prstGeom prst="rect">
@@ -10157,7 +10157,7 @@
         </p:nvSpPr>
         <p:spPr>
           <a:xfrm>
-            <a:off x="10616184" y="16152876"/>
+            <a:off x="10616184" y="16107155"/>
             <a:ext cx="2167127" cy="178307"/>
           </a:xfrm>
           <a:prstGeom prst="rect">
@@ -10208,7 +10208,7 @@
         </p:nvSpPr>
         <p:spPr>
           <a:xfrm>
-            <a:off x="12874752" y="16152876"/>
+            <a:off x="12874752" y="16107155"/>
             <a:ext cx="978408" cy="178307"/>
           </a:xfrm>
           <a:prstGeom prst="rect">
@@ -10250,7 +10250,7 @@
         </p:nvCxnSpPr>
         <p:spPr>
           <a:xfrm>
-            <a:off x="8001000" y="16331184"/>
+            <a:off x="8001000" y="16285463"/>
             <a:ext cx="5943600" cy="0"/>
           </a:xfrm>
           <a:prstGeom prst="line">
@@ -10285,7 +10285,7 @@
         </p:nvSpPr>
         <p:spPr>
           <a:xfrm>
-            <a:off x="8001000" y="16367759"/>
+            <a:off x="8001000" y="16322039"/>
             <a:ext cx="2523744" cy="178307"/>
           </a:xfrm>
           <a:prstGeom prst="rect">
@@ -10327,7 +10327,7 @@
         </p:nvSpPr>
         <p:spPr>
           <a:xfrm>
-            <a:off x="10616184" y="16367759"/>
+            <a:off x="10616184" y="16322039"/>
             <a:ext cx="2167127" cy="178307"/>
           </a:xfrm>
           <a:prstGeom prst="rect">
@@ -10369,7 +10369,7 @@
         </p:nvSpPr>
         <p:spPr>
           <a:xfrm>
-            <a:off x="12874752" y="16367759"/>
+            <a:off x="12874752" y="16322039"/>
             <a:ext cx="978408" cy="178307"/>
           </a:xfrm>
           <a:prstGeom prst="rect">
@@ -10411,7 +10411,7 @@
         </p:nvCxnSpPr>
         <p:spPr>
           <a:xfrm>
-            <a:off x="8001000" y="16546067"/>
+            <a:off x="8001000" y="16500347"/>
             <a:ext cx="5943600" cy="0"/>
           </a:xfrm>
           <a:prstGeom prst="line">
@@ -10446,7 +10446,7 @@
         </p:nvSpPr>
         <p:spPr>
           <a:xfrm>
-            <a:off x="8001000" y="16582643"/>
+            <a:off x="8001000" y="16536923"/>
             <a:ext cx="2523744" cy="178307"/>
           </a:xfrm>
           <a:prstGeom prst="rect">
@@ -10488,7 +10488,7 @@
         </p:nvSpPr>
         <p:spPr>
           <a:xfrm>
-            <a:off x="10616184" y="16582643"/>
+            <a:off x="10616184" y="16536923"/>
             <a:ext cx="2167127" cy="178307"/>
           </a:xfrm>
           <a:prstGeom prst="rect">
@@ -10530,7 +10530,7 @@
         </p:nvSpPr>
         <p:spPr>
           <a:xfrm>
-            <a:off x="12874752" y="16582643"/>
+            <a:off x="12874752" y="16536923"/>
             <a:ext cx="978408" cy="178307"/>
           </a:xfrm>
           <a:prstGeom prst="rect">
@@ -10572,7 +10572,7 @@
         </p:nvCxnSpPr>
         <p:spPr>
           <a:xfrm>
-            <a:off x="8001000" y="16760952"/>
+            <a:off x="8001000" y="16715232"/>
             <a:ext cx="5943600" cy="0"/>
           </a:xfrm>
           <a:prstGeom prst="line">
@@ -10607,7 +10607,7 @@
         </p:nvSpPr>
         <p:spPr>
           <a:xfrm>
-            <a:off x="8001000" y="16797528"/>
+            <a:off x="8001000" y="16751808"/>
             <a:ext cx="2523744" cy="178307"/>
           </a:xfrm>
           <a:prstGeom prst="rect">
@@ -10649,7 +10649,7 @@
         </p:nvSpPr>
         <p:spPr>
           <a:xfrm>
-            <a:off x="10616184" y="16797528"/>
+            <a:off x="10616184" y="16751808"/>
             <a:ext cx="2167127" cy="178307"/>
           </a:xfrm>
           <a:prstGeom prst="rect">
@@ -10700,7 +10700,7 @@
         </p:nvSpPr>
         <p:spPr>
           <a:xfrm>
-            <a:off x="12874752" y="16797528"/>
+            <a:off x="12874752" y="16751808"/>
             <a:ext cx="978408" cy="178307"/>
           </a:xfrm>
           <a:prstGeom prst="rect">
@@ -10742,7 +10742,7 @@
         </p:nvCxnSpPr>
         <p:spPr>
           <a:xfrm>
-            <a:off x="8001000" y="16975836"/>
+            <a:off x="8001000" y="16930116"/>
             <a:ext cx="5943600" cy="0"/>
           </a:xfrm>
           <a:prstGeom prst="line">
@@ -10777,7 +10777,7 @@
         </p:nvSpPr>
         <p:spPr>
           <a:xfrm>
-            <a:off x="8001000" y="17012412"/>
+            <a:off x="8001000" y="16966692"/>
             <a:ext cx="2523744" cy="178307"/>
           </a:xfrm>
           <a:prstGeom prst="rect">
@@ -10819,7 +10819,7 @@
         </p:nvSpPr>
         <p:spPr>
           <a:xfrm>
-            <a:off x="10616184" y="17012412"/>
+            <a:off x="10616184" y="16966692"/>
             <a:ext cx="2167127" cy="178307"/>
           </a:xfrm>
           <a:prstGeom prst="rect">
@@ -10870,7 +10870,7 @@
         </p:nvSpPr>
         <p:spPr>
           <a:xfrm>
-            <a:off x="12874752" y="17012412"/>
+            <a:off x="12874752" y="16966692"/>
             <a:ext cx="978408" cy="178307"/>
           </a:xfrm>
           <a:prstGeom prst="rect">
@@ -10912,7 +10912,7 @@
         </p:nvSpPr>
         <p:spPr>
           <a:xfrm>
-            <a:off x="8001000" y="17227296"/>
+            <a:off x="8001000" y="17181576"/>
             <a:ext cx="5943600" cy="196596"/>
           </a:xfrm>
           <a:prstGeom prst="rect">
@@ -10954,7 +10954,7 @@
         </p:nvCxnSpPr>
         <p:spPr>
           <a:xfrm>
-            <a:off x="8001000" y="17405604"/>
+            <a:off x="8001000" y="17359884"/>
             <a:ext cx="5943600" cy="0"/>
           </a:xfrm>
           <a:prstGeom prst="line">
@@ -10989,7 +10989,7 @@
         </p:nvSpPr>
         <p:spPr>
           <a:xfrm>
-            <a:off x="8001000" y="17442180"/>
+            <a:off x="8001000" y="17396460"/>
             <a:ext cx="2523744" cy="178307"/>
           </a:xfrm>
           <a:prstGeom prst="rect">
@@ -11031,7 +11031,7 @@
         </p:nvSpPr>
         <p:spPr>
           <a:xfrm>
-            <a:off x="10616184" y="17442180"/>
+            <a:off x="10616184" y="17396460"/>
             <a:ext cx="2167127" cy="178307"/>
           </a:xfrm>
           <a:prstGeom prst="rect">
@@ -11082,7 +11082,7 @@
         </p:nvSpPr>
         <p:spPr>
           <a:xfrm>
-            <a:off x="12874752" y="17442180"/>
+            <a:off x="12874752" y="17396460"/>
             <a:ext cx="978408" cy="178307"/>
           </a:xfrm>
           <a:prstGeom prst="rect">
@@ -11124,7 +11124,7 @@
         </p:nvCxnSpPr>
         <p:spPr>
           <a:xfrm>
-            <a:off x="8001000" y="17620488"/>
+            <a:off x="8001000" y="17574768"/>
             <a:ext cx="5943600" cy="0"/>
           </a:xfrm>
           <a:prstGeom prst="line">
@@ -11159,7 +11159,7 @@
         </p:nvSpPr>
         <p:spPr>
           <a:xfrm>
-            <a:off x="8001000" y="17657064"/>
+            <a:off x="8001000" y="17611344"/>
             <a:ext cx="2523744" cy="178307"/>
           </a:xfrm>
           <a:prstGeom prst="rect">
@@ -11201,7 +11201,7 @@
         </p:nvSpPr>
         <p:spPr>
           <a:xfrm>
-            <a:off x="10616184" y="17657064"/>
+            <a:off x="10616184" y="17611344"/>
             <a:ext cx="2167127" cy="178307"/>
           </a:xfrm>
           <a:prstGeom prst="rect">
@@ -11252,7 +11252,7 @@
         </p:nvSpPr>
         <p:spPr>
           <a:xfrm>
-            <a:off x="12874752" y="17657064"/>
+            <a:off x="12874752" y="17611344"/>
             <a:ext cx="978408" cy="178307"/>
           </a:xfrm>
           <a:prstGeom prst="rect">
@@ -11294,7 +11294,7 @@
         </p:nvCxnSpPr>
         <p:spPr>
           <a:xfrm>
-            <a:off x="8001000" y="17835372"/>
+            <a:off x="8001000" y="17789652"/>
             <a:ext cx="5943600" cy="0"/>
           </a:xfrm>
           <a:prstGeom prst="line">
@@ -11329,7 +11329,7 @@
         </p:nvSpPr>
         <p:spPr>
           <a:xfrm>
-            <a:off x="8001000" y="17871948"/>
+            <a:off x="8001000" y="17826227"/>
             <a:ext cx="2523744" cy="178307"/>
           </a:xfrm>
           <a:prstGeom prst="rect">
@@ -11371,7 +11371,7 @@
         </p:nvSpPr>
         <p:spPr>
           <a:xfrm>
-            <a:off x="10616184" y="17871948"/>
+            <a:off x="10616184" y="17826227"/>
             <a:ext cx="2167127" cy="178307"/>
           </a:xfrm>
           <a:prstGeom prst="rect">
@@ -11413,7 +11413,7 @@
         </p:nvSpPr>
         <p:spPr>
           <a:xfrm>
-            <a:off x="12874752" y="17871948"/>
+            <a:off x="12874752" y="17826227"/>
             <a:ext cx="978408" cy="178307"/>
           </a:xfrm>
           <a:prstGeom prst="rect">
@@ -11455,7 +11455,7 @@
         </p:nvCxnSpPr>
         <p:spPr>
           <a:xfrm>
-            <a:off x="8001000" y="18050256"/>
+            <a:off x="8001000" y="18004535"/>
             <a:ext cx="5943600" cy="0"/>
           </a:xfrm>
           <a:prstGeom prst="line">
@@ -11490,7 +11490,7 @@
         </p:nvSpPr>
         <p:spPr>
           <a:xfrm>
-            <a:off x="8001000" y="18086832"/>
+            <a:off x="8001000" y="18041111"/>
             <a:ext cx="2523744" cy="178307"/>
           </a:xfrm>
           <a:prstGeom prst="rect">
@@ -11532,7 +11532,7 @@
         </p:nvSpPr>
         <p:spPr>
           <a:xfrm>
-            <a:off x="10616184" y="18086832"/>
+            <a:off x="10616184" y="18041111"/>
             <a:ext cx="2167127" cy="178307"/>
           </a:xfrm>
           <a:prstGeom prst="rect">
@@ -11574,7 +11574,7 @@
         </p:nvSpPr>
         <p:spPr>
           <a:xfrm>
-            <a:off x="12874752" y="18086832"/>
+            <a:off x="12874752" y="18041111"/>
             <a:ext cx="978408" cy="178307"/>
           </a:xfrm>
           <a:prstGeom prst="rect">
@@ -11616,7 +11616,7 @@
         </p:nvCxnSpPr>
         <p:spPr>
           <a:xfrm>
-            <a:off x="8001000" y="18265140"/>
+            <a:off x="8001000" y="18219420"/>
             <a:ext cx="5943600" cy="0"/>
           </a:xfrm>
           <a:prstGeom prst="line">
@@ -11651,7 +11651,7 @@
         </p:nvSpPr>
         <p:spPr>
           <a:xfrm>
-            <a:off x="8001000" y="18301716"/>
+            <a:off x="8001000" y="18255996"/>
             <a:ext cx="2523744" cy="178307"/>
           </a:xfrm>
           <a:prstGeom prst="rect">
@@ -11693,7 +11693,7 @@
         </p:nvSpPr>
         <p:spPr>
           <a:xfrm>
-            <a:off x="10616184" y="18301716"/>
+            <a:off x="10616184" y="18255996"/>
             <a:ext cx="2167127" cy="178307"/>
           </a:xfrm>
           <a:prstGeom prst="rect">
@@ -11735,7 +11735,7 @@
         </p:nvSpPr>
         <p:spPr>
           <a:xfrm>
-            <a:off x="12874752" y="18301716"/>
+            <a:off x="12874752" y="18255996"/>
             <a:ext cx="978408" cy="178307"/>
           </a:xfrm>
           <a:prstGeom prst="rect">
@@ -11777,7 +11777,7 @@
         </p:nvSpPr>
         <p:spPr>
           <a:xfrm>
-            <a:off x="14493240" y="15718536"/>
+            <a:off x="14493240" y="15672816"/>
             <a:ext cx="1783080" cy="201168"/>
           </a:xfrm>
           <a:prstGeom prst="rect">
@@ -11819,7 +11819,7 @@
         </p:nvSpPr>
         <p:spPr>
           <a:xfrm>
-            <a:off x="17108424" y="15718536"/>
+            <a:off x="17108424" y="15672816"/>
             <a:ext cx="1783080" cy="201168"/>
           </a:xfrm>
           <a:prstGeom prst="rect">
@@ -11861,7 +11861,7 @@
         </p:nvSpPr>
         <p:spPr>
           <a:xfrm>
-            <a:off x="19366992" y="15718536"/>
+            <a:off x="19366992" y="15672816"/>
             <a:ext cx="1783080" cy="201168"/>
           </a:xfrm>
           <a:prstGeom prst="rect">
@@ -11903,7 +11903,7 @@
         </p:nvCxnSpPr>
         <p:spPr>
           <a:xfrm>
-            <a:off x="14493240" y="15901416"/>
+            <a:off x="14493240" y="15855696"/>
             <a:ext cx="5943600" cy="0"/>
           </a:xfrm>
           <a:prstGeom prst="line">
@@ -11938,7 +11938,7 @@
         </p:nvSpPr>
         <p:spPr>
           <a:xfrm>
-            <a:off x="14493240" y="15937992"/>
+            <a:off x="14493240" y="15892272"/>
             <a:ext cx="2523744" cy="178307"/>
           </a:xfrm>
           <a:prstGeom prst="rect">
@@ -11980,7 +11980,7 @@
         </p:nvSpPr>
         <p:spPr>
           <a:xfrm>
-            <a:off x="17108424" y="15937992"/>
+            <a:off x="17108424" y="15892272"/>
             <a:ext cx="2167127" cy="178307"/>
           </a:xfrm>
           <a:prstGeom prst="rect">
@@ -12022,7 +12022,7 @@
         </p:nvSpPr>
         <p:spPr>
           <a:xfrm>
-            <a:off x="19366992" y="15937992"/>
+            <a:off x="19366992" y="15892272"/>
             <a:ext cx="978408" cy="178307"/>
           </a:xfrm>
           <a:prstGeom prst="rect">
@@ -12064,7 +12064,7 @@
         </p:nvCxnSpPr>
         <p:spPr>
           <a:xfrm>
-            <a:off x="14493240" y="16116300"/>
+            <a:off x="14493240" y="16070580"/>
             <a:ext cx="5943600" cy="0"/>
           </a:xfrm>
           <a:prstGeom prst="line">
@@ -12099,7 +12099,7 @@
         </p:nvSpPr>
         <p:spPr>
           <a:xfrm>
-            <a:off x="14493240" y="16152876"/>
+            <a:off x="14493240" y="16107155"/>
             <a:ext cx="2523744" cy="178307"/>
           </a:xfrm>
           <a:prstGeom prst="rect">
@@ -12141,7 +12141,7 @@
         </p:nvSpPr>
         <p:spPr>
           <a:xfrm>
-            <a:off x="17108424" y="16152876"/>
+            <a:off x="17108424" y="16107155"/>
             <a:ext cx="2167127" cy="178307"/>
           </a:xfrm>
           <a:prstGeom prst="rect">
@@ -12183,7 +12183,7 @@
         </p:nvSpPr>
         <p:spPr>
           <a:xfrm>
-            <a:off x="19366992" y="16152876"/>
+            <a:off x="19366992" y="16107155"/>
             <a:ext cx="978408" cy="178307"/>
           </a:xfrm>
           <a:prstGeom prst="rect">
@@ -12225,7 +12225,7 @@
         </p:nvCxnSpPr>
         <p:spPr>
           <a:xfrm>
-            <a:off x="14493240" y="16331184"/>
+            <a:off x="14493240" y="16285463"/>
             <a:ext cx="5943600" cy="0"/>
           </a:xfrm>
           <a:prstGeom prst="line">
@@ -12260,7 +12260,7 @@
         </p:nvSpPr>
         <p:spPr>
           <a:xfrm>
-            <a:off x="14493240" y="16367759"/>
+            <a:off x="14493240" y="16322039"/>
             <a:ext cx="2523744" cy="178307"/>
           </a:xfrm>
           <a:prstGeom prst="rect">
@@ -12302,7 +12302,7 @@
         </p:nvSpPr>
         <p:spPr>
           <a:xfrm>
-            <a:off x="17108424" y="16367759"/>
+            <a:off x="17108424" y="16322039"/>
             <a:ext cx="2167127" cy="178307"/>
           </a:xfrm>
           <a:prstGeom prst="rect">
@@ -12344,7 +12344,7 @@
         </p:nvSpPr>
         <p:spPr>
           <a:xfrm>
-            <a:off x="19366992" y="16367759"/>
+            <a:off x="19366992" y="16322039"/>
             <a:ext cx="978408" cy="178307"/>
           </a:xfrm>
           <a:prstGeom prst="rect">
@@ -12386,7 +12386,7 @@
         </p:nvSpPr>
         <p:spPr>
           <a:xfrm>
-            <a:off x="14493240" y="16582643"/>
+            <a:off x="14493240" y="16536923"/>
             <a:ext cx="5943600" cy="196596"/>
           </a:xfrm>
           <a:prstGeom prst="rect">
@@ -12428,7 +12428,7 @@
         </p:nvCxnSpPr>
         <p:spPr>
           <a:xfrm>
-            <a:off x="14493240" y="16760952"/>
+            <a:off x="14493240" y="16715232"/>
             <a:ext cx="5943600" cy="0"/>
           </a:xfrm>
           <a:prstGeom prst="line">
@@ -12463,7 +12463,7 @@
         </p:nvSpPr>
         <p:spPr>
           <a:xfrm>
-            <a:off x="14493240" y="16797528"/>
+            <a:off x="14493240" y="16751808"/>
             <a:ext cx="2523744" cy="178307"/>
           </a:xfrm>
           <a:prstGeom prst="rect">
@@ -12505,7 +12505,7 @@
         </p:nvSpPr>
         <p:spPr>
           <a:xfrm>
-            <a:off x="17108424" y="16797528"/>
+            <a:off x="17108424" y="16751808"/>
             <a:ext cx="2167127" cy="178307"/>
           </a:xfrm>
           <a:prstGeom prst="rect">
@@ -12547,7 +12547,7 @@
         </p:nvSpPr>
         <p:spPr>
           <a:xfrm>
-            <a:off x="19366992" y="16797528"/>
+            <a:off x="19366992" y="16751808"/>
             <a:ext cx="978408" cy="178307"/>
           </a:xfrm>
           <a:prstGeom prst="rect">
@@ -12589,7 +12589,7 @@
         </p:nvCxnSpPr>
         <p:spPr>
           <a:xfrm>
-            <a:off x="14493240" y="16975836"/>
+            <a:off x="14493240" y="16930116"/>
             <a:ext cx="5943600" cy="0"/>
           </a:xfrm>
           <a:prstGeom prst="line">
@@ -12624,7 +12624,7 @@
         </p:nvSpPr>
         <p:spPr>
           <a:xfrm>
-            <a:off x="14493240" y="17012412"/>
+            <a:off x="14493240" y="16966692"/>
             <a:ext cx="2523744" cy="178307"/>
           </a:xfrm>
           <a:prstGeom prst="rect">
@@ -12666,7 +12666,7 @@
         </p:nvSpPr>
         <p:spPr>
           <a:xfrm>
-            <a:off x="17108424" y="17012412"/>
+            <a:off x="17108424" y="16966692"/>
             <a:ext cx="2167127" cy="178307"/>
           </a:xfrm>
           <a:prstGeom prst="rect">
@@ -12717,7 +12717,7 @@
         </p:nvSpPr>
         <p:spPr>
           <a:xfrm>
-            <a:off x="19366992" y="17012412"/>
+            <a:off x="19366992" y="16966692"/>
             <a:ext cx="978408" cy="178307"/>
           </a:xfrm>
           <a:prstGeom prst="rect">
@@ -12759,7 +12759,7 @@
         </p:nvCxnSpPr>
         <p:spPr>
           <a:xfrm>
-            <a:off x="14493240" y="17190720"/>
+            <a:off x="14493240" y="17145000"/>
             <a:ext cx="5943600" cy="0"/>
           </a:xfrm>
           <a:prstGeom prst="line">
@@ -12794,7 +12794,7 @@
         </p:nvSpPr>
         <p:spPr>
           <a:xfrm>
-            <a:off x="14493240" y="17227296"/>
+            <a:off x="14493240" y="17181576"/>
             <a:ext cx="2523744" cy="178307"/>
           </a:xfrm>
           <a:prstGeom prst="rect">
@@ -12836,7 +12836,7 @@
         </p:nvSpPr>
         <p:spPr>
           <a:xfrm>
-            <a:off x="17108424" y="17227296"/>
+            <a:off x="17108424" y="17181576"/>
             <a:ext cx="2167127" cy="178307"/>
           </a:xfrm>
           <a:prstGeom prst="rect">
@@ -12878,7 +12878,7 @@
         </p:nvSpPr>
         <p:spPr>
           <a:xfrm>
-            <a:off x="19366992" y="17227296"/>
+            <a:off x="19366992" y="17181576"/>
             <a:ext cx="978408" cy="178307"/>
           </a:xfrm>
           <a:prstGeom prst="rect">
@@ -12920,7 +12920,7 @@
         </p:nvSpPr>
         <p:spPr>
           <a:xfrm>
-            <a:off x="14493240" y="17442180"/>
+            <a:off x="14493240" y="17396460"/>
             <a:ext cx="5943600" cy="196596"/>
           </a:xfrm>
           <a:prstGeom prst="rect">
@@ -12962,7 +12962,7 @@
         </p:nvCxnSpPr>
         <p:spPr>
           <a:xfrm>
-            <a:off x="14493240" y="17620488"/>
+            <a:off x="14493240" y="17574768"/>
             <a:ext cx="5943600" cy="0"/>
           </a:xfrm>
           <a:prstGeom prst="line">
@@ -12997,7 +12997,7 @@
         </p:nvSpPr>
         <p:spPr>
           <a:xfrm>
-            <a:off x="14493240" y="17657064"/>
+            <a:off x="14493240" y="17611344"/>
             <a:ext cx="2523744" cy="178307"/>
           </a:xfrm>
           <a:prstGeom prst="rect">
@@ -13039,7 +13039,7 @@
         </p:nvSpPr>
         <p:spPr>
           <a:xfrm>
-            <a:off x="17108424" y="17657064"/>
+            <a:off x="17108424" y="17611344"/>
             <a:ext cx="2167127" cy="178307"/>
           </a:xfrm>
           <a:prstGeom prst="rect">
@@ -13099,7 +13099,7 @@
         </p:nvSpPr>
         <p:spPr>
           <a:xfrm>
-            <a:off x="19366992" y="17657064"/>
+            <a:off x="19366992" y="17611344"/>
             <a:ext cx="978408" cy="178307"/>
           </a:xfrm>
           <a:prstGeom prst="rect">
@@ -13141,7 +13141,7 @@
         </p:nvCxnSpPr>
         <p:spPr>
           <a:xfrm>
-            <a:off x="14493240" y="17835372"/>
+            <a:off x="14493240" y="17789652"/>
             <a:ext cx="5943600" cy="0"/>
           </a:xfrm>
           <a:prstGeom prst="line">
@@ -13176,7 +13176,7 @@
         </p:nvSpPr>
         <p:spPr>
           <a:xfrm>
-            <a:off x="14493240" y="17871948"/>
+            <a:off x="14493240" y="17826227"/>
             <a:ext cx="2523744" cy="178307"/>
           </a:xfrm>
           <a:prstGeom prst="rect">
@@ -13218,7 +13218,7 @@
         </p:nvSpPr>
         <p:spPr>
           <a:xfrm>
-            <a:off x="17108424" y="17871948"/>
+            <a:off x="17108424" y="17826227"/>
             <a:ext cx="2167127" cy="178307"/>
           </a:xfrm>
           <a:prstGeom prst="rect">
@@ -13269,7 +13269,7 @@
         </p:nvSpPr>
         <p:spPr>
           <a:xfrm>
-            <a:off x="19366992" y="17871948"/>
+            <a:off x="19366992" y="17826227"/>
             <a:ext cx="978408" cy="178307"/>
           </a:xfrm>
           <a:prstGeom prst="rect">
@@ -13311,7 +13311,7 @@
         </p:nvCxnSpPr>
         <p:spPr>
           <a:xfrm>
-            <a:off x="14493240" y="18050256"/>
+            <a:off x="14493240" y="18004535"/>
             <a:ext cx="5943600" cy="0"/>
           </a:xfrm>
           <a:prstGeom prst="line">
@@ -13346,7 +13346,7 @@
         </p:nvSpPr>
         <p:spPr>
           <a:xfrm>
-            <a:off x="14493240" y="18086832"/>
+            <a:off x="14493240" y="18041111"/>
             <a:ext cx="2523744" cy="178307"/>
           </a:xfrm>
           <a:prstGeom prst="rect">
@@ -13388,7 +13388,7 @@
         </p:nvSpPr>
         <p:spPr>
           <a:xfrm>
-            <a:off x="17108424" y="18086832"/>
+            <a:off x="17108424" y="18041111"/>
             <a:ext cx="2167127" cy="178307"/>
           </a:xfrm>
           <a:prstGeom prst="rect">
@@ -13439,7 +13439,7 @@
         </p:nvSpPr>
         <p:spPr>
           <a:xfrm>
-            <a:off x="19366992" y="18086832"/>
+            <a:off x="19366992" y="18041111"/>
             <a:ext cx="978408" cy="178307"/>
           </a:xfrm>
           <a:prstGeom prst="rect">
@@ -13481,7 +13481,7 @@
         </p:nvCxnSpPr>
         <p:spPr>
           <a:xfrm>
-            <a:off x="14493240" y="18265140"/>
+            <a:off x="14493240" y="18219420"/>
             <a:ext cx="5943600" cy="0"/>
           </a:xfrm>
           <a:prstGeom prst="line">
@@ -13516,7 +13516,7 @@
         </p:nvSpPr>
         <p:spPr>
           <a:xfrm>
-            <a:off x="14493240" y="18301716"/>
+            <a:off x="14493240" y="18255996"/>
             <a:ext cx="2523744" cy="178307"/>
           </a:xfrm>
           <a:prstGeom prst="rect">
@@ -13558,7 +13558,7 @@
         </p:nvSpPr>
         <p:spPr>
           <a:xfrm>
-            <a:off x="17108424" y="18301716"/>
+            <a:off x="17108424" y="18255996"/>
             <a:ext cx="2167127" cy="178307"/>
           </a:xfrm>
           <a:prstGeom prst="rect">
@@ -13609,7 +13609,7 @@
         </p:nvSpPr>
         <p:spPr>
           <a:xfrm>
-            <a:off x="19366992" y="18301716"/>
+            <a:off x="19366992" y="18255996"/>
             <a:ext cx="978408" cy="178307"/>
           </a:xfrm>
           <a:prstGeom prst="rect">
@@ -13651,7 +13651,7 @@
         </p:nvSpPr>
         <p:spPr>
           <a:xfrm>
-            <a:off x="1371600" y="19046952"/>
+            <a:off x="1371600" y="18973800"/>
             <a:ext cx="5806440" cy="896112"/>
           </a:xfrm>
           <a:prstGeom prst="rect">
@@ -13693,7 +13693,7 @@
         </p:nvCxnSpPr>
         <p:spPr>
           <a:xfrm>
-            <a:off x="1371600" y="19979639"/>
+            <a:off x="1371600" y="19906488"/>
             <a:ext cx="5806440" cy="0"/>
           </a:xfrm>
           <a:prstGeom prst="line">
@@ -13728,8 +13728,8 @@
         </p:nvSpPr>
         <p:spPr>
           <a:xfrm>
-            <a:off x="1371600" y="22658831"/>
-            <a:ext cx="5806440" cy="1417320"/>
+            <a:off x="1371600" y="22539960"/>
+            <a:ext cx="5806440" cy="1463040"/>
           </a:xfrm>
           <a:prstGeom prst="rect">
             <a:avLst/>
@@ -13747,7 +13747,7 @@
                 <a:spcPct val="108000"/>
               </a:lnSpc>
               <a:spcAft>
-                <a:spcPts val="0"/>
+                <a:spcPts val="600"/>
               </a:spcAft>
             </a:pPr>
             <a:r>
@@ -13811,7 +13811,26 @@
                 </a:solidFill>
                 <a:latin typeface="Open Sans"/>
               </a:rPr>
-              <a:t>. So "still flat at step k" is evidence of nothing. </a:t>
+              <a:t>.</a:t>
+            </a:r>
+          </a:p>
+          <a:p>
+            <a:pPr algn="l">
+              <a:lnSpc>
+                <a:spcPct val="108000"/>
+              </a:lnSpc>
+              <a:spcAft>
+                <a:spcPts val="600"/>
+              </a:spcAft>
+            </a:pPr>
+            <a:r>
+              <a:rPr sz="1700" b="0" i="0">
+                <a:solidFill>
+                  <a:srgbClr val="1F1F24"/>
+                </a:solidFill>
+                <a:latin typeface="Open Sans"/>
+              </a:rPr>
+              <a:t>So "still flat at step k" is evidence of nothing. </a:t>
             </a:r>
             <a:r>
               <a:rPr sz="1700" b="1" i="0">
@@ -13833,7 +13852,7 @@
         </p:nvSpPr>
         <p:spPr>
           <a:xfrm>
-            <a:off x="8001000" y="19046952"/>
+            <a:off x="8001000" y="18973800"/>
             <a:ext cx="5806440" cy="896112"/>
           </a:xfrm>
           <a:prstGeom prst="rect">
@@ -13875,7 +13894,7 @@
         </p:nvCxnSpPr>
         <p:spPr>
           <a:xfrm>
-            <a:off x="8001000" y="19979639"/>
+            <a:off x="8001000" y="19906488"/>
             <a:ext cx="5806440" cy="0"/>
           </a:xfrm>
           <a:prstGeom prst="line">
@@ -13910,8 +13929,8 @@
         </p:nvSpPr>
         <p:spPr>
           <a:xfrm>
-            <a:off x="8001000" y="22658831"/>
-            <a:ext cx="5806440" cy="1417320"/>
+            <a:off x="8001000" y="22539960"/>
+            <a:ext cx="5806440" cy="1463040"/>
           </a:xfrm>
           <a:prstGeom prst="rect">
             <a:avLst/>
@@ -13929,7 +13948,7 @@
                 <a:spcPct val="108000"/>
               </a:lnSpc>
               <a:spcAft>
-                <a:spcPts val="0"/>
+                <a:spcPts val="600"/>
               </a:spcAft>
             </a:pPr>
             <a:r>
@@ -13988,7 +14007,7 @@
         </p:nvSpPr>
         <p:spPr>
           <a:xfrm>
-            <a:off x="14749272" y="19046952"/>
+            <a:off x="14749272" y="18973800"/>
             <a:ext cx="5806440" cy="896112"/>
           </a:xfrm>
           <a:prstGeom prst="rect">
@@ -14030,7 +14049,7 @@
         </p:nvCxnSpPr>
         <p:spPr>
           <a:xfrm>
-            <a:off x="14749272" y="19979639"/>
+            <a:off x="14749272" y="19906488"/>
             <a:ext cx="5806439" cy="0"/>
           </a:xfrm>
           <a:prstGeom prst="line">
@@ -14065,8 +14084,8 @@
         </p:nvSpPr>
         <p:spPr>
           <a:xfrm>
-            <a:off x="14749272" y="22658831"/>
-            <a:ext cx="5806440" cy="1417320"/>
+            <a:off x="14749272" y="22539960"/>
+            <a:ext cx="5806440" cy="1463040"/>
           </a:xfrm>
           <a:prstGeom prst="rect">
             <a:avLst/>
@@ -14084,7 +14103,7 @@
                 <a:spcPct val="108000"/>
               </a:lnSpc>
               <a:spcAft>
-                <a:spcPts val="0"/>
+                <a:spcPts val="600"/>
               </a:spcAft>
             </a:pPr>
             <a:r>
@@ -14161,7 +14180,7 @@
         </p:nvSpPr>
         <p:spPr>
           <a:xfrm>
-            <a:off x="1371600" y="24368760"/>
+            <a:off x="1371600" y="24268176"/>
             <a:ext cx="5806440" cy="896112"/>
           </a:xfrm>
           <a:prstGeom prst="rect">
@@ -14203,7 +14222,7 @@
         </p:nvCxnSpPr>
         <p:spPr>
           <a:xfrm>
-            <a:off x="1371600" y="25301448"/>
+            <a:off x="1371600" y="25200864"/>
             <a:ext cx="5806440" cy="0"/>
           </a:xfrm>
           <a:prstGeom prst="line">
@@ -14238,8 +14257,8 @@
         </p:nvSpPr>
         <p:spPr>
           <a:xfrm>
-            <a:off x="1371600" y="25429464"/>
-            <a:ext cx="5806440" cy="2039112"/>
+            <a:off x="1371600" y="25328880"/>
+            <a:ext cx="5806440" cy="2377440"/>
           </a:xfrm>
           <a:prstGeom prst="rect">
             <a:avLst/>
@@ -14257,7 +14276,7 @@
                 <a:spcPct val="108000"/>
               </a:lnSpc>
               <a:spcAft>
-                <a:spcPts val="0"/>
+                <a:spcPts val="600"/>
               </a:spcAft>
             </a:pPr>
             <a:r>
@@ -14285,7 +14304,7 @@
                 </a:solidFill>
                 <a:latin typeface="Open Sans"/>
               </a:rPr>
-              <a:t> — languages × rates × seeds — never typed run by run. The queue orders it </a:t>
+              <a:t>, languages × rates × seeds, never typed run by run; the queue orders it </a:t>
             </a:r>
             <a:r>
               <a:rPr sz="1700" b="1" i="0">
@@ -14303,7 +14322,26 @@
                 </a:solidFill>
                 <a:latin typeface="Open Sans"/>
               </a:rPr>
-              <a:t>. Every run writes a record naming </a:t>
+              <a:t>.</a:t>
+            </a:r>
+          </a:p>
+          <a:p>
+            <a:pPr algn="l">
+              <a:lnSpc>
+                <a:spcPct val="108000"/>
+              </a:lnSpc>
+              <a:spcAft>
+                <a:spcPts val="600"/>
+              </a:spcAft>
+            </a:pPr>
+            <a:r>
+              <a:rPr sz="1700" b="0" i="0">
+                <a:solidFill>
+                  <a:srgbClr val="1F1F24"/>
+                </a:solidFill>
+                <a:latin typeface="Open Sans"/>
+              </a:rPr>
+              <a:t>Every run writes a record naming </a:t>
             </a:r>
             <a:r>
               <a:rPr sz="1700" b="1" i="0">
@@ -14321,7 +14359,26 @@
                 </a:solidFill>
                 <a:latin typeface="Open Sans"/>
               </a:rPr>
-              <a:t> — settings, data fingerprint — after two runs differing only in vocabulary silently overwrote each other. "What have we tried?" is a </a:t>
+              <a:t>: data fingerprint, vocabulary, settings.</a:t>
+            </a:r>
+          </a:p>
+          <a:p>
+            <a:pPr algn="l">
+              <a:lnSpc>
+                <a:spcPct val="108000"/>
+              </a:lnSpc>
+              <a:spcAft>
+                <a:spcPts val="600"/>
+              </a:spcAft>
+            </a:pPr>
+            <a:r>
+              <a:rPr sz="1700" b="0" i="0">
+                <a:solidFill>
+                  <a:srgbClr val="1F1F24"/>
+                </a:solidFill>
+                <a:latin typeface="Open Sans"/>
+              </a:rPr>
+              <a:t>"What have we tried?" is a </a:t>
             </a:r>
             <a:r>
               <a:rPr sz="1700" b="1" i="0">
@@ -14361,7 +14418,7 @@
         </p:nvSpPr>
         <p:spPr>
           <a:xfrm>
-            <a:off x="8001000" y="24368760"/>
+            <a:off x="8001000" y="24268176"/>
             <a:ext cx="5806440" cy="896112"/>
           </a:xfrm>
           <a:prstGeom prst="rect">
@@ -14403,7 +14460,7 @@
         </p:nvCxnSpPr>
         <p:spPr>
           <a:xfrm>
-            <a:off x="8001000" y="25301448"/>
+            <a:off x="8001000" y="25200864"/>
             <a:ext cx="5806440" cy="0"/>
           </a:xfrm>
           <a:prstGeom prst="line">
@@ -14438,8 +14495,8 @@
         </p:nvSpPr>
         <p:spPr>
           <a:xfrm>
-            <a:off x="8001000" y="25429464"/>
-            <a:ext cx="5806440" cy="2039112"/>
+            <a:off x="8001000" y="25328880"/>
+            <a:ext cx="5806440" cy="2377440"/>
           </a:xfrm>
           <a:prstGeom prst="rect">
             <a:avLst/>
@@ -14457,7 +14514,7 @@
                 <a:spcPct val="108000"/>
               </a:lnSpc>
               <a:spcAft>
-                <a:spcPts val="0"/>
+                <a:spcPts val="600"/>
               </a:spcAft>
             </a:pPr>
             <a:r>
@@ -14467,7 +14524,26 @@
                 </a:solidFill>
                 <a:latin typeface="Open Sans"/>
               </a:rPr>
-              <a:t>Run the same recipe twice and it lands in two different places. That is the seed, not the change you made. So we measured </a:t>
+              <a:t>Run the same recipe twice and it lands in two different places. That is the seed, not the change you made.</a:t>
+            </a:r>
+          </a:p>
+          <a:p>
+            <a:pPr algn="l">
+              <a:lnSpc>
+                <a:spcPct val="108000"/>
+              </a:lnSpc>
+              <a:spcAft>
+                <a:spcPts val="600"/>
+              </a:spcAft>
+            </a:pPr>
+            <a:r>
+              <a:rPr sz="1700" b="0" i="0">
+                <a:solidFill>
+                  <a:srgbClr val="1F1F24"/>
+                </a:solidFill>
+                <a:latin typeface="Open Sans"/>
+              </a:rPr>
+              <a:t>So we measured </a:t>
             </a:r>
             <a:r>
               <a:rPr sz="1700" b="1" i="0">
@@ -14503,7 +14579,26 @@
                 </a:solidFill>
                 <a:latin typeface="Open Sans"/>
               </a:rPr>
-              <a:t> — at three runs a side, no test can call anything significant. The spread is a property of </a:t>
+              <a:t>. At three runs a side, no test can call anything significant.</a:t>
+            </a:r>
+          </a:p>
+          <a:p>
+            <a:pPr algn="l">
+              <a:lnSpc>
+                <a:spcPct val="108000"/>
+              </a:lnSpc>
+              <a:spcAft>
+                <a:spcPts val="600"/>
+              </a:spcAft>
+            </a:pPr>
+            <a:r>
+              <a:rPr sz="1700" b="0" i="0">
+                <a:solidFill>
+                  <a:srgbClr val="1F1F24"/>
+                </a:solidFill>
+                <a:latin typeface="Open Sans"/>
+              </a:rPr>
+              <a:t>The spread is a property of </a:t>
             </a:r>
             <a:r>
               <a:rPr sz="1700" b="1" i="0">
@@ -14521,7 +14616,7 @@
                 </a:solidFill>
                 <a:latin typeface="Open Sans"/>
               </a:rPr>
-              <a:t> — re-measured, never a constant we reused. </a:t>
+              <a:t>, never a constant we reused. </a:t>
             </a:r>
             <a:r>
               <a:rPr sz="1700" b="1" i="0">
@@ -14543,7 +14638,7 @@
         </p:nvSpPr>
         <p:spPr>
           <a:xfrm>
-            <a:off x="14749272" y="24368760"/>
+            <a:off x="14749272" y="24268176"/>
             <a:ext cx="5806440" cy="896112"/>
           </a:xfrm>
           <a:prstGeom prst="rect">
@@ -14585,7 +14680,7 @@
         </p:nvCxnSpPr>
         <p:spPr>
           <a:xfrm>
-            <a:off x="14749272" y="25301448"/>
+            <a:off x="14749272" y="25200864"/>
             <a:ext cx="5806439" cy="0"/>
           </a:xfrm>
           <a:prstGeom prst="line">
@@ -14620,8 +14715,8 @@
         </p:nvSpPr>
         <p:spPr>
           <a:xfrm>
-            <a:off x="14749272" y="25429464"/>
-            <a:ext cx="5806440" cy="2039112"/>
+            <a:off x="14749272" y="25328880"/>
+            <a:ext cx="5806440" cy="2377440"/>
           </a:xfrm>
           <a:prstGeom prst="rect">
             <a:avLst/>
@@ -14639,7 +14734,7 @@
                 <a:spcPct val="108000"/>
               </a:lnSpc>
               <a:spcAft>
-                <a:spcPts val="0"/>
+                <a:spcPts val="600"/>
               </a:spcAft>
             </a:pPr>
             <a:r>
@@ -14658,7 +14753,26 @@
                 </a:solidFill>
                 <a:latin typeface="Open Sans"/>
               </a:rPr>
-              <a:t> — every judgement here is a benchmark number. The corpus is scraped web text nobody consented to. The factory is itself an ethics tool: </a:t>
+              <a:t> — every judgement here is a benchmark number. And the corpus is scraped web text nobody consented to.</a:t>
+            </a:r>
+          </a:p>
+          <a:p>
+            <a:pPr algn="l">
+              <a:lnSpc>
+                <a:spcPct val="108000"/>
+              </a:lnSpc>
+              <a:spcAft>
+                <a:spcPts val="600"/>
+              </a:spcAft>
+            </a:pPr>
+            <a:r>
+              <a:rPr sz="1700" b="0" i="0">
+                <a:solidFill>
+                  <a:srgbClr val="1F1F24"/>
+                </a:solidFill>
+                <a:latin typeface="Open Sans"/>
+              </a:rPr>
+              <a:t>The factory is itself an ethics tool: </a:t>
             </a:r>
             <a:r>
               <a:rPr sz="1700" b="1" i="0">
@@ -14667,7 +14781,7 @@
                 </a:solidFill>
                 <a:latin typeface="Open Sans"/>
               </a:rPr>
-              <a:t>sweeping seeds keeps a claim off one lucky draw</a:t>
+              <a:t>sweeping seeds avoids one lucky draw</a:t>
             </a:r>
             <a:r>
               <a:rPr sz="1700" b="0" i="0">
@@ -14676,7 +14790,26 @@
                 </a:solidFill>
                 <a:latin typeface="Open Sans"/>
               </a:rPr>
-              <a:t>, each language at its own best. Our gate prints </a:t>
+              <a:t>, each language at its own best.</a:t>
+            </a:r>
+          </a:p>
+          <a:p>
+            <a:pPr algn="l">
+              <a:lnSpc>
+                <a:spcPct val="108000"/>
+              </a:lnSpc>
+              <a:spcAft>
+                <a:spcPts val="600"/>
+              </a:spcAft>
+            </a:pPr>
+            <a:r>
+              <a:rPr sz="1700" b="0" i="0">
+                <a:solidFill>
+                  <a:srgbClr val="1F1F24"/>
+                </a:solidFill>
+                <a:latin typeface="Open Sans"/>
+              </a:rPr>
+              <a:t>Our gate prints </a:t>
             </a:r>
             <a:r>
               <a:rPr sz="1700" b="1" i="0">
@@ -14707,7 +14840,7 @@
         </p:nvSpPr>
         <p:spPr>
           <a:xfrm>
-            <a:off x="1371600" y="27633168"/>
+            <a:off x="1371600" y="27898344"/>
             <a:ext cx="12435840" cy="896112"/>
           </a:xfrm>
           <a:prstGeom prst="rect">
@@ -14749,7 +14882,7 @@
         </p:nvCxnSpPr>
         <p:spPr>
           <a:xfrm>
-            <a:off x="1371600" y="28565856"/>
+            <a:off x="1371600" y="28831032"/>
             <a:ext cx="12435840" cy="0"/>
           </a:xfrm>
           <a:prstGeom prst="line">
@@ -14784,8 +14917,8 @@
         </p:nvSpPr>
         <p:spPr>
           <a:xfrm>
-            <a:off x="1371600" y="28767023"/>
-            <a:ext cx="12435840" cy="2999231"/>
+            <a:off x="1371600" y="29032200"/>
+            <a:ext cx="12435840" cy="2743200"/>
           </a:xfrm>
           <a:prstGeom prst="rect">
             <a:avLst/>
@@ -14800,10 +14933,10 @@
           <a:p>
             <a:pPr algn="l">
               <a:lnSpc>
-                <a:spcPct val="102000"/>
+                <a:spcPct val="110000"/>
               </a:lnSpc>
               <a:spcAft>
-                <a:spcPts val="300"/>
+                <a:spcPts val="800"/>
               </a:spcAft>
             </a:pPr>
             <a:r>
@@ -14840,25 +14973,97 @@
                 </a:solidFill>
                 <a:latin typeface="Open Sans"/>
               </a:rPr>
-              <a:t> the one language where data was never the constraint.</a:t>
+              <a:t> the one language where data was never the constraint. </a:t>
+            </a:r>
+            <a:r>
+              <a:rPr sz="1700" b="0" i="1">
+                <a:solidFill>
+                  <a:srgbClr val="1F1F24"/>
+                </a:solidFill>
+                <a:latin typeface="Open Sans"/>
+              </a:rPr>
+              <a:t>Learned:</a:t>
+            </a:r>
+            <a:r>
+              <a:rPr sz="1700" b="0" i="0">
+                <a:solidFill>
+                  <a:srgbClr val="1F1F24"/>
+                </a:solidFill>
+                <a:latin typeface="Open Sans"/>
+              </a:rPr>
+              <a:t> </a:t>
+            </a:r>
+            <a:r>
+              <a:rPr sz="1700" b="1" i="0">
+                <a:solidFill>
+                  <a:srgbClr val="1F1F24"/>
+                </a:solidFill>
+                <a:latin typeface="Open Sans"/>
+              </a:rPr>
+              <a:t>more data stops helping past 64M tokens</a:t>
+            </a:r>
+            <a:r>
+              <a:rPr sz="1700" b="0" i="0">
+                <a:solidFill>
+                  <a:srgbClr val="1F1F24"/>
+                </a:solidFill>
+                <a:latin typeface="Open Sans"/>
+              </a:rPr>
+              <a:t> — so Yoruba's 69M-token corpus is not the bottleneck it looks like.</a:t>
             </a:r>
           </a:p>
           <a:p>
             <a:pPr algn="l">
               <a:lnSpc>
-                <a:spcPct val="102000"/>
+                <a:spcPct val="110000"/>
               </a:lnSpc>
               <a:spcAft>
-                <a:spcPts val="300"/>
+                <a:spcPts val="800"/>
               </a:spcAft>
             </a:pPr>
             <a:r>
+              <a:rPr sz="1700" b="1" i="0">
+                <a:solidFill>
+                  <a:srgbClr val="1F1F24"/>
+                </a:solidFill>
+                <a:latin typeface="Open Sans"/>
+              </a:rPr>
+              <a:t>French, Indonesian, Mandarin are the control.</a:t>
+            </a:r>
+            <a:r>
+              <a:rPr sz="1700" b="0" i="0">
+                <a:solidFill>
+                  <a:srgbClr val="1F1F24"/>
+                </a:solidFill>
+                <a:latin typeface="Open Sans"/>
+              </a:rPr>
+              <a:t> </a:t>
+            </a:r>
+            <a:r>
               <a:rPr sz="1700" b="0" i="1">
                 <a:solidFill>
                   <a:srgbClr val="1F1F24"/>
                 </a:solidFill>
                 <a:latin typeface="Open Sans"/>
               </a:rPr>
+              <a:t>Why:</a:t>
+            </a:r>
+            <a:r>
+              <a:rPr sz="1700" b="0" i="0">
+                <a:solidFill>
+                  <a:srgbClr val="1F1F24"/>
+                </a:solidFill>
+                <a:latin typeface="Open Sans"/>
+              </a:rPr>
+              <a:t> the borrowed vocabulary knows these three, so they test mere unfamiliarity. </a:t>
+            </a:r>
+            <a:r>
+              <a:rPr sz="1700" b="0" i="1">
+                <a:solidFill>
+                  <a:srgbClr val="1F1F24"/>
+                </a:solidFill>
+                <a:latin typeface="Open Sans"/>
+              </a:rPr>
               <a:t>Learned:</a:t>
             </a:r>
             <a:r>
@@ -14868,7 +15073,7 @@
                 </a:solidFill>
                 <a:latin typeface="Open Sans"/>
               </a:rPr>
-              <a:t> </a:t>
+              <a:t> they pay </a:t>
             </a:r>
             <a:r>
               <a:rPr sz="1700" b="1" i="0">
@@ -14877,7 +15082,7 @@
                 </a:solidFill>
                 <a:latin typeface="Open Sans"/>
               </a:rPr>
-              <a:t>more data stops helping past 64M tokens</a:t>
+              <a:t>1.04, 1.01, 0.95</a:t>
             </a:r>
             <a:r>
               <a:rPr sz="1700" b="0" i="0">
@@ -14886,16 +15091,34 @@
                 </a:solidFill>
                 <a:latin typeface="Open Sans"/>
               </a:rPr>
-              <a:t> — so Yoruba's 69M-token corpus is not the bottleneck it looks like.</a:t>
+              <a:t> tokens where a language's own vocabulary pays one. </a:t>
+            </a:r>
+            <a:r>
+              <a:rPr sz="1700" b="1" i="0">
+                <a:solidFill>
+                  <a:srgbClr val="1F1F24"/>
+                </a:solidFill>
+                <a:latin typeface="Open Sans"/>
+              </a:rPr>
+              <a:t>Yoruba pays 1.76</a:t>
+            </a:r>
+            <a:r>
+              <a:rPr sz="1700" b="0" i="0">
+                <a:solidFill>
+                  <a:srgbClr val="1F1F24"/>
+                </a:solidFill>
+                <a:latin typeface="Open Sans"/>
+              </a:rPr>
+              <a:t> — second-highest of seventeen.</a:t>
             </a:r>
           </a:p>
           <a:p>
             <a:pPr algn="l">
               <a:lnSpc>
-                <a:spcPct val="102000"/>
+                <a:spcPct val="110000"/>
               </a:lnSpc>
               <a:spcAft>
-                <a:spcPts val="300"/>
+                <a:spcPts val="800"/>
               </a:spcAft>
             </a:pPr>
             <a:r>
@@ -14905,7 +15128,7 @@
                 </a:solidFill>
                 <a:latin typeface="Open Sans"/>
               </a:rPr>
-              <a:t>French, Indonesian, Mandarin are the control.</a:t>
+              <a:t>Twelve African languages are the gradient.</a:t>
             </a:r>
             <a:r>
               <a:rPr sz="1700" b="0" i="0">
@@ -14932,218 +15155,70 @@
                 </a:solidFill>
                 <a:latin typeface="Open Sans"/>
               </a:rPr>
-              <a:t> the borrowed vocabulary knows these three, so they test mere unfamiliarity.</a:t>
+              <a:t> one language is an anecdote; seventeen make a slope. </a:t>
+            </a:r>
+            <a:r>
+              <a:rPr sz="1700" b="0" i="1">
+                <a:solidFill>
+                  <a:srgbClr val="1F1F24"/>
+                </a:solidFill>
+                <a:latin typeface="Open Sans"/>
+              </a:rPr>
+              <a:t>Learned:</a:t>
+            </a:r>
+            <a:r>
+              <a:rPr sz="1700" b="0" i="0">
+                <a:solidFill>
+                  <a:srgbClr val="1F1F24"/>
+                </a:solidFill>
+                <a:latin typeface="Open Sans"/>
+              </a:rPr>
+              <a:t> the cost tracks </a:t>
+            </a:r>
+            <a:r>
+              <a:rPr sz="1700" b="1" i="0">
+                <a:solidFill>
+                  <a:srgbClr val="1F1F24"/>
+                </a:solidFill>
+                <a:latin typeface="Open Sans"/>
+              </a:rPr>
+              <a:t>vocabulary coverage</a:t>
+            </a:r>
+            <a:r>
+              <a:rPr sz="1700" b="0" i="0">
+                <a:solidFill>
+                  <a:srgbClr val="1F1F24"/>
+                </a:solidFill>
+                <a:latin typeface="Open Sans"/>
+              </a:rPr>
+              <a:t>, not geography — </a:t>
+            </a:r>
+            <a:r>
+              <a:rPr sz="1700" b="1" i="0">
+                <a:solidFill>
+                  <a:srgbClr val="1F1F24"/>
+                </a:solidFill>
+                <a:latin typeface="Open Sans"/>
+              </a:rPr>
+              <a:t>Wolof, uncovered yet cheap at 1.31</a:t>
+            </a:r>
+            <a:r>
+              <a:rPr sz="1700" b="0" i="0">
+                <a:solidFill>
+                  <a:srgbClr val="1F1F24"/>
+                </a:solidFill>
+                <a:latin typeface="Open Sans"/>
+              </a:rPr>
+              <a:t>, proves it.</a:t>
             </a:r>
           </a:p>
           <a:p>
             <a:pPr algn="l">
               <a:lnSpc>
-                <a:spcPct val="102000"/>
+                <a:spcPct val="110000"/>
               </a:lnSpc>
               <a:spcAft>
-                <a:spcPts val="300"/>
-              </a:spcAft>
-            </a:pPr>
-            <a:r>
-              <a:rPr sz="1700" b="0" i="1">
-                <a:solidFill>
-                  <a:srgbClr val="1F1F24"/>
-                </a:solidFill>
-                <a:latin typeface="Open Sans"/>
-              </a:rPr>
-              <a:t>Learned:</a:t>
-            </a:r>
-            <a:r>
-              <a:rPr sz="1700" b="0" i="0">
-                <a:solidFill>
-                  <a:srgbClr val="1F1F24"/>
-                </a:solidFill>
-                <a:latin typeface="Open Sans"/>
-              </a:rPr>
-              <a:t> they pay </a:t>
-            </a:r>
-            <a:r>
-              <a:rPr sz="1700" b="1" i="0">
-                <a:solidFill>
-                  <a:srgbClr val="1F1F24"/>
-                </a:solidFill>
-                <a:latin typeface="Open Sans"/>
-              </a:rPr>
-              <a:t>1.04, 1.01, 0.95</a:t>
-            </a:r>
-            <a:r>
-              <a:rPr sz="1700" b="0" i="0">
-                <a:solidFill>
-                  <a:srgbClr val="1F1F24"/>
-                </a:solidFill>
-                <a:latin typeface="Open Sans"/>
-              </a:rPr>
-              <a:t> tokens where a language's own vocabulary pays one. </a:t>
-            </a:r>
-            <a:r>
-              <a:rPr sz="1700" b="1" i="0">
-                <a:solidFill>
-                  <a:srgbClr val="1F1F24"/>
-                </a:solidFill>
-                <a:latin typeface="Open Sans"/>
-              </a:rPr>
-              <a:t>Yoruba pays 1.76</a:t>
-            </a:r>
-            <a:r>
-              <a:rPr sz="1700" b="0" i="0">
-                <a:solidFill>
-                  <a:srgbClr val="1F1F24"/>
-                </a:solidFill>
-                <a:latin typeface="Open Sans"/>
-              </a:rPr>
-              <a:t> — second-highest of seventeen.</a:t>
-            </a:r>
-          </a:p>
-          <a:p>
-            <a:pPr algn="l">
-              <a:lnSpc>
-                <a:spcPct val="102000"/>
-              </a:lnSpc>
-              <a:spcAft>
-                <a:spcPts val="300"/>
-              </a:spcAft>
-            </a:pPr>
-            <a:r>
-              <a:rPr sz="1700" b="1" i="0">
-                <a:solidFill>
-                  <a:srgbClr val="1F1F24"/>
-                </a:solidFill>
-                <a:latin typeface="Open Sans"/>
-              </a:rPr>
-              <a:t>Twelve African languages are the gradient.</a:t>
-            </a:r>
-            <a:r>
-              <a:rPr sz="1700" b="0" i="0">
-                <a:solidFill>
-                  <a:srgbClr val="1F1F24"/>
-                </a:solidFill>
-                <a:latin typeface="Open Sans"/>
-              </a:rPr>
-              <a:t> </a:t>
-            </a:r>
-            <a:r>
-              <a:rPr sz="1700" b="0" i="1">
-                <a:solidFill>
-                  <a:srgbClr val="1F1F24"/>
-                </a:solidFill>
-                <a:latin typeface="Open Sans"/>
-              </a:rPr>
-              <a:t>Why:</a:t>
-            </a:r>
-            <a:r>
-              <a:rPr sz="1700" b="0" i="0">
-                <a:solidFill>
-                  <a:srgbClr val="1F1F24"/>
-                </a:solidFill>
-                <a:latin typeface="Open Sans"/>
-              </a:rPr>
-              <a:t> one language is an anecdote; seventeen make a slope.</a:t>
-            </a:r>
-          </a:p>
-          <a:p>
-            <a:pPr algn="l">
-              <a:lnSpc>
-                <a:spcPct val="102000"/>
-              </a:lnSpc>
-              <a:spcAft>
-                <a:spcPts val="300"/>
-              </a:spcAft>
-            </a:pPr>
-            <a:r>
-              <a:rPr sz="1700" b="0" i="1">
-                <a:solidFill>
-                  <a:srgbClr val="1F1F24"/>
-                </a:solidFill>
-                <a:latin typeface="Open Sans"/>
-              </a:rPr>
-              <a:t>Learned:</a:t>
-            </a:r>
-            <a:r>
-              <a:rPr sz="1700" b="0" i="0">
-                <a:solidFill>
-                  <a:srgbClr val="1F1F24"/>
-                </a:solidFill>
-                <a:latin typeface="Open Sans"/>
-              </a:rPr>
-              <a:t> the cost tracks </a:t>
-            </a:r>
-            <a:r>
-              <a:rPr sz="1700" b="1" i="0">
-                <a:solidFill>
-                  <a:srgbClr val="1F1F24"/>
-                </a:solidFill>
-                <a:latin typeface="Open Sans"/>
-              </a:rPr>
-              <a:t>vocabulary coverage</a:t>
-            </a:r>
-            <a:r>
-              <a:rPr sz="1700" b="0" i="0">
-                <a:solidFill>
-                  <a:srgbClr val="1F1F24"/>
-                </a:solidFill>
-                <a:latin typeface="Open Sans"/>
-              </a:rPr>
-              <a:t>, not geography — </a:t>
-            </a:r>
-            <a:r>
-              <a:rPr sz="1700" b="1" i="0">
-                <a:solidFill>
-                  <a:srgbClr val="1F1F24"/>
-                </a:solidFill>
-                <a:latin typeface="Open Sans"/>
-              </a:rPr>
-              <a:t>Wolof, uncovered yet cheap at 1.31</a:t>
-            </a:r>
-            <a:r>
-              <a:rPr sz="1700" b="0" i="0">
-                <a:solidFill>
-                  <a:srgbClr val="1F1F24"/>
-                </a:solidFill>
-                <a:latin typeface="Open Sans"/>
-              </a:rPr>
-              <a:t>, proves it.</a:t>
-            </a:r>
-          </a:p>
-          <a:p>
-            <a:pPr algn="l">
-              <a:lnSpc>
-                <a:spcPct val="102000"/>
-              </a:lnSpc>
-              <a:spcAft>
-                <a:spcPts val="300"/>
-              </a:spcAft>
-            </a:pPr>
-            <a:r>
-              <a:rPr sz="1700" b="1" i="0">
-                <a:solidFill>
-                  <a:srgbClr val="1F1F24"/>
-                </a:solidFill>
-                <a:latin typeface="Open Sans"/>
-              </a:rPr>
-              <a:t>None of us speaks any of them.</a:t>
-            </a:r>
-            <a:r>
-              <a:rPr sz="1700" b="0" i="0">
-                <a:solidFill>
-                  <a:srgbClr val="1F1F24"/>
-                </a:solidFill>
-                <a:latin typeface="Open Sans"/>
-              </a:rPr>
-              <a:t> So the spread is the evidence, not any one score.</a:t>
-            </a:r>
-          </a:p>
-          <a:p>
-            <a:pPr algn="l">
-              <a:lnSpc>
-                <a:spcPct val="102000"/>
-              </a:lnSpc>
-              <a:spcAft>
-                <a:spcPts val="300"/>
+                <a:spcPts val="800"/>
               </a:spcAft>
             </a:pPr>
             <a:r>
@@ -15193,7 +15268,7 @@
         </p:nvSpPr>
         <p:spPr>
           <a:xfrm>
-            <a:off x="14749272" y="27633168"/>
+            <a:off x="14749272" y="27898344"/>
             <a:ext cx="5806440" cy="896112"/>
           </a:xfrm>
           <a:prstGeom prst="rect">
@@ -15235,7 +15310,7 @@
         </p:nvCxnSpPr>
         <p:spPr>
           <a:xfrm>
-            <a:off x="14749272" y="28565856"/>
+            <a:off x="14749272" y="28831032"/>
             <a:ext cx="5806439" cy="0"/>
           </a:xfrm>
           <a:prstGeom prst="line">
@@ -15270,8 +15345,8 @@
         </p:nvSpPr>
         <p:spPr>
           <a:xfrm>
-            <a:off x="14749272" y="28693872"/>
-            <a:ext cx="5806440" cy="3072383"/>
+            <a:off x="14749272" y="28959048"/>
+            <a:ext cx="5806440" cy="2816351"/>
           </a:xfrm>
           <a:prstGeom prst="rect">
             <a:avLst/>
@@ -15299,7 +15374,7 @@
                 </a:solidFill>
                 <a:latin typeface="Open Sans"/>
               </a:rPr>
-              <a:t>A. Conneau et al., "Unsupervised cross-lingual representation learning at scale," ACL, 2020, pp. 8440–8451.</a:t>
+              <a:t>A. Conneau et al., "Unsupervised cross-lingual representation learning at scale," ACL, 2020.</a:t>
             </a:r>
           </a:p>
           <a:p>
@@ -15356,7 +15431,7 @@
                 </a:solidFill>
                 <a:latin typeface="Open Sans"/>
               </a:rPr>
-              <a:t>D. I. Adelani et al., "SIB-200," EACL, 2024, pp. 226–245.</a:t>
+              <a:t>D. I. Adelani et al., "SIB-200," EACL, 2024.</a:t>
             </a:r>
           </a:p>
           <a:p>
@@ -15375,7 +15450,7 @@
                 </a:solidFill>
                 <a:latin typeface="Open Sans"/>
               </a:rPr>
-              <a:t>D. I. Adelani et al., "MasakhaNER 2.0," EMNLP, 2022, pp. 4488–4508.</a:t>
+              <a:t>D. I. Adelani et al., "MasakhaNER 2.0," EMNLP, 2022.</a:t>
             </a:r>
           </a:p>
           <a:p>
@@ -15395,25 +15470,6 @@
                 <a:latin typeface="Open Sans"/>
               </a:rPr>
               <a:t>G. Penedo et al., "FineWeb2: One pipeline to scale them all," arXiv:2506.20920, 2025.</a:t>
-            </a:r>
-          </a:p>
-          <a:p>
-            <a:pPr marL="182880" indent="-182880" algn="l">
-              <a:lnSpc>
-                <a:spcPct val="108000"/>
-              </a:lnSpc>
-              <a:spcAft>
-                <a:spcPts val="600"/>
-              </a:spcAft>
-            </a:pPr>
-            <a:r>
-              <a:rPr sz="1300" b="0" i="0">
-                <a:solidFill>
-                  <a:srgbClr val="1F1F24"/>
-                </a:solidFill>
-                <a:latin typeface="Open Sans"/>
-              </a:rPr>
-              <a:t>L. N. Smith, "A disciplined approach to neural network hyper-parameters," arXiv:1803.09820, 2018.</a:t>
             </a:r>
           </a:p>
         </p:txBody>
@@ -15542,7 +15598,7 @@
           <p:cNvPr id="150" name="Embedded_01_Cell1" descr="reports\figures\26-poster-hardware.svg">
             <a:extLst>
               <a:ext uri="{FF2B5EF4-FFF2-40B4-BE49-F238E27FC236}">
-                <a16:creationId xmlns:a16="http://schemas.microsoft.com/office/drawing/2014/main" id="{44ACE5D3-4546-FDD1-E373-2D0AEB9F7747}"/>
+                <a16:creationId xmlns:a16="http://schemas.microsoft.com/office/drawing/2014/main" id="{247D4356-0F01-2702-EC92-45D6F374C105}"/>
               </a:ext>
             </a:extLst>
           </p:cNvPr>
@@ -15565,8 +15621,8 @@
         </p:blipFill>
         <p:spPr>
           <a:xfrm>
-            <a:off x="868680" y="9063045"/>
-            <a:ext cx="6812280" cy="2868533"/>
+            <a:off x="919783" y="9015984"/>
+            <a:ext cx="6710074" cy="2825496"/>
           </a:xfrm>
           <a:prstGeom prst="rect">
             <a:avLst/>
@@ -15578,7 +15634,7 @@
           <p:cNvPr id="152" name="Embedded_02_Cell5" descr="reports\figures\27-poster-cliffs.svg">
             <a:extLst>
               <a:ext uri="{FF2B5EF4-FFF2-40B4-BE49-F238E27FC236}">
-                <a16:creationId xmlns:a16="http://schemas.microsoft.com/office/drawing/2014/main" id="{C4EA4F98-51EC-4584-2D25-33199148B51A}"/>
+                <a16:creationId xmlns:a16="http://schemas.microsoft.com/office/drawing/2014/main" id="{3875AB90-4DA9-B713-046B-A58A7BF163EB}"/>
               </a:ext>
             </a:extLst>
           </p:cNvPr>
@@ -15601,8 +15657,8 @@
         </p:blipFill>
         <p:spPr>
           <a:xfrm>
-            <a:off x="1393237" y="20107656"/>
-            <a:ext cx="5763165" cy="2404872"/>
+            <a:off x="1448020" y="20034504"/>
+            <a:ext cx="5653599" cy="2359152"/>
           </a:xfrm>
           <a:prstGeom prst="rect">
             <a:avLst/>
@@ -15614,7 +15670,7 @@
           <p:cNvPr id="154" name="Embedded_03_Cell6" descr="reports\figures\25-poster-transfer.svg">
             <a:extLst>
               <a:ext uri="{FF2B5EF4-FFF2-40B4-BE49-F238E27FC236}">
-                <a16:creationId xmlns:a16="http://schemas.microsoft.com/office/drawing/2014/main" id="{84A8470C-C9E1-9026-7B22-4CD4EADAFE40}"/>
+                <a16:creationId xmlns:a16="http://schemas.microsoft.com/office/drawing/2014/main" id="{82163DF5-1B34-A871-6E86-2BDE299C6671}"/>
               </a:ext>
             </a:extLst>
           </p:cNvPr>
@@ -15637,8 +15693,8 @@
         </p:blipFill>
         <p:spPr>
           <a:xfrm>
-            <a:off x="8031373" y="20107656"/>
-            <a:ext cx="5745693" cy="2404872"/>
+            <a:off x="8085990" y="20034504"/>
+            <a:ext cx="5636460" cy="2359152"/>
           </a:xfrm>
           <a:prstGeom prst="rect">
             <a:avLst/>
@@ -15650,7 +15706,7 @@
           <p:cNvPr id="156" name="Embedded_04_Cell7" descr="reports\figures\28-poster-dashboard.svg">
             <a:extLst>
               <a:ext uri="{FF2B5EF4-FFF2-40B4-BE49-F238E27FC236}">
-                <a16:creationId xmlns:a16="http://schemas.microsoft.com/office/drawing/2014/main" id="{55ADA9BB-ACEF-C8EC-4FA9-1860498CCFD2}"/>
+                <a16:creationId xmlns:a16="http://schemas.microsoft.com/office/drawing/2014/main" id="{22EC8672-5420-11BD-BFAF-A7CFD4FAF258}"/>
               </a:ext>
             </a:extLst>
           </p:cNvPr>
@@ -15673,8 +15729,8 @@
         </p:blipFill>
         <p:spPr>
           <a:xfrm>
-            <a:off x="14773134" y="20107656"/>
-            <a:ext cx="5758717" cy="2404872"/>
+            <a:off x="14827875" y="20034504"/>
+            <a:ext cx="5649235" cy="2359152"/>
           </a:xfrm>
           <a:prstGeom prst="rect">
             <a:avLst/>

--- a/src/a2-nlp/poster/final/board-model-factory_v2.pptx
+++ b/src/a2-nlp/poster/final/board-model-factory_v2.pptx
@@ -8157,8 +8157,8 @@
         </p:nvSpPr>
         <p:spPr>
           <a:xfrm>
-            <a:off x="1399032" y="5925312"/>
-            <a:ext cx="17373600" cy="384048"/>
+            <a:off x="1399032" y="6510528"/>
+            <a:ext cx="17373600" cy="548640"/>
           </a:xfrm>
           <a:prstGeom prst="rect">
             <a:avLst/>
@@ -8166,7 +8166,7 @@
           <a:noFill/>
         </p:spPr>
         <p:txBody>
-          <a:bodyPr wrap="square" lIns="27432" tIns="27432" rIns="27432" bIns="27432" anchor="t">
+          <a:bodyPr wrap="square" lIns="27432" tIns="27432" rIns="27432" bIns="27432" anchor="ctr">
             <a:noAutofit/>
           </a:bodyPr>
           <a:lstStyle/>
@@ -8180,11 +8180,11 @@
               </a:spcAft>
             </a:pPr>
             <a:r>
-              <a:rPr sz="1400" b="0" i="0">
+              <a:rPr sz="1900" b="0" i="0">
                 <a:solidFill>
                   <a:srgbClr val="E8D3A2"/>
                 </a:solidFill>
-                <a:latin typeface="Open Sans"/>
+                <a:latin typeface="Uni Sans Book"/>
               </a:rPr>
               <a:t>Jeffrey Stall · Patrick Kwok · Leon Wan — CSED 504. This board is the machinery; the upper board is the experiment it served.</a:t>
             </a:r>
@@ -8199,8 +8199,8 @@
         </p:nvSpPr>
         <p:spPr>
           <a:xfrm>
-            <a:off x="1371600" y="8046720"/>
-            <a:ext cx="5806440" cy="1024128"/>
+            <a:off x="1371600" y="7955279"/>
+            <a:ext cx="5806440" cy="896112"/>
           </a:xfrm>
           <a:prstGeom prst="rect">
             <a:avLst/>
@@ -8222,7 +8222,7 @@
               </a:spcAft>
             </a:pPr>
             <a:r>
-              <a:rPr sz="3200" b="1" i="0">
+              <a:rPr sz="2800" b="1" i="0">
                 <a:solidFill>
                   <a:srgbClr val="32006E"/>
                 </a:solidFill>
@@ -8241,7 +8241,7 @@
         </p:nvCxnSpPr>
         <p:spPr>
           <a:xfrm>
-            <a:off x="1371600" y="9107424"/>
+            <a:off x="1371600" y="8887967"/>
             <a:ext cx="5806440" cy="0"/>
           </a:xfrm>
           <a:prstGeom prst="line">
@@ -8276,8 +8276,8 @@
         </p:nvSpPr>
         <p:spPr>
           <a:xfrm>
-            <a:off x="1371600" y="11804904"/>
-            <a:ext cx="5806440" cy="1417320"/>
+            <a:off x="1371600" y="11987784"/>
+            <a:ext cx="5806440" cy="1463040"/>
           </a:xfrm>
           <a:prstGeom prst="rect">
             <a:avLst/>
@@ -8295,7 +8295,7 @@
                 <a:spcPct val="108000"/>
               </a:lnSpc>
               <a:spcAft>
-                <a:spcPts val="0"/>
+                <a:spcPts val="600"/>
               </a:spcAft>
             </a:pPr>
             <a:r>
@@ -8408,8 +8408,8 @@
         </p:nvSpPr>
         <p:spPr>
           <a:xfrm>
-            <a:off x="8001000" y="8046720"/>
-            <a:ext cx="5806440" cy="1024128"/>
+            <a:off x="8001000" y="7955279"/>
+            <a:ext cx="5806440" cy="896112"/>
           </a:xfrm>
           <a:prstGeom prst="rect">
             <a:avLst/>
@@ -8431,7 +8431,7 @@
               </a:spcAft>
             </a:pPr>
             <a:r>
-              <a:rPr sz="3200" b="1" i="0">
+              <a:rPr sz="2800" b="1" i="0">
                 <a:solidFill>
                   <a:srgbClr val="32006E"/>
                 </a:solidFill>
@@ -8450,7 +8450,7 @@
         </p:nvCxnSpPr>
         <p:spPr>
           <a:xfrm>
-            <a:off x="8001000" y="9107424"/>
+            <a:off x="8001000" y="8887967"/>
             <a:ext cx="5806440" cy="0"/>
           </a:xfrm>
           <a:prstGeom prst="line">
@@ -8479,14 +8479,14 @@
       </p:cxnSp>
       <p:sp>
         <p:nvSpPr>
-          <p:cNvPr id="11" name="Cell8_Lead"/>
+          <p:cNvPr id="11" name="Cell8_List"/>
           <p:cNvSpPr txBox="1"/>
           <p:nvPr/>
         </p:nvSpPr>
         <p:spPr>
           <a:xfrm>
-            <a:off x="8001000" y="9235440"/>
-            <a:ext cx="5806440" cy="621792"/>
+            <a:off x="8001000" y="9089136"/>
+            <a:ext cx="5806440" cy="4434840"/>
           </a:xfrm>
           <a:prstGeom prst="rect">
             <a:avLst/>
@@ -8501,20 +8501,29 @@
           <a:p>
             <a:pPr algn="l">
               <a:lnSpc>
-                <a:spcPct val="108000"/>
+                <a:spcPct val="102000"/>
               </a:lnSpc>
               <a:spcAft>
-                <a:spcPts val="0"/>
+                <a:spcPts val="600"/>
               </a:spcAft>
             </a:pPr>
             <a:r>
+              <a:rPr sz="1700" b="1" i="0">
+                <a:solidFill>
+                  <a:srgbClr val="1F1F24"/>
+                </a:solidFill>
+                <a:latin typeface="Open Sans"/>
+              </a:rPr>
+              <a:t>What must fit is the model</a:t>
+            </a:r>
+            <a:r>
               <a:rPr sz="1700" b="0" i="0">
                 <a:solidFill>
                   <a:srgbClr val="1F1F24"/>
                 </a:solidFill>
                 <a:latin typeface="Open Sans"/>
               </a:rPr>
-              <a:t>What has to </a:t>
+              <a:t> — about 12–16 bytes per parameter. Our 98M needs </a:t>
             </a:r>
             <a:r>
               <a:rPr sz="1700" b="1" i="0">
@@ -8523,7 +8532,7 @@
                 </a:solidFill>
                 <a:latin typeface="Open Sans"/>
               </a:rPr>
-              <a:t>fit</a:t>
+              <a:t>1.6 GB</a:t>
             </a:r>
             <a:r>
               <a:rPr sz="1700" b="0" i="0">
@@ -8532,318 +8541,176 @@
                 </a:solidFill>
                 <a:latin typeface="Open Sans"/>
               </a:rPr>
-              <a:t> is the model. Everything above that is a choice.</a:t>
-            </a:r>
-          </a:p>
-        </p:txBody>
-      </p:sp>
-      <p:sp>
-        <p:nvSpPr>
-          <p:cNvPr id="12" name="Cell8_List"/>
-          <p:cNvSpPr txBox="1"/>
-          <p:nvPr/>
-        </p:nvSpPr>
-        <p:spPr>
-          <a:xfrm>
-            <a:off x="8001000" y="9930384"/>
-            <a:ext cx="5806440" cy="3364991"/>
-          </a:xfrm>
-          <a:prstGeom prst="rect">
-            <a:avLst/>
-          </a:prstGeom>
-          <a:noFill/>
-        </p:spPr>
-        <p:txBody>
-          <a:bodyPr wrap="square" lIns="36576" tIns="36576" rIns="36576" bIns="36576" anchor="t">
-            <a:noAutofit/>
-          </a:bodyPr>
-          <a:lstStyle/>
+              <a:t>; a 7B — a small chat assistant — needs </a:t>
+            </a:r>
+            <a:r>
+              <a:rPr sz="1700" b="1" i="0">
+                <a:solidFill>
+                  <a:srgbClr val="1F1F24"/>
+                </a:solidFill>
+                <a:latin typeface="Open Sans"/>
+              </a:rPr>
+              <a:t>84–112 GB</a:t>
+            </a:r>
+            <a:r>
+              <a:rPr sz="1700" b="0" i="0">
+                <a:solidFill>
+                  <a:srgbClr val="1F1F24"/>
+                </a:solidFill>
+                <a:latin typeface="Open Sans"/>
+              </a:rPr>
+              <a:t>, beyond any consumer card.</a:t>
+            </a:r>
+          </a:p>
           <a:p>
             <a:pPr algn="l">
               <a:lnSpc>
-                <a:spcPct val="108000"/>
+                <a:spcPct val="102000"/>
               </a:lnSpc>
               <a:spcAft>
-                <a:spcPts val="500"/>
+                <a:spcPts val="600"/>
               </a:spcAft>
             </a:pPr>
             <a:r>
-              <a:rPr sz="1300" b="1" i="0">
-                <a:solidFill>
-                  <a:srgbClr val="1F1F24"/>
-                </a:solidFill>
-                <a:latin typeface="Open Sans"/>
-              </a:rPr>
-              <a:t>The floor is the model</a:t>
-            </a:r>
-            <a:r>
-              <a:rPr sz="1300" b="0" i="0">
-                <a:solidFill>
-                  <a:srgbClr val="1F1F24"/>
-                </a:solidFill>
-                <a:latin typeface="Open Sans"/>
-              </a:rPr>
-              <a:t> — weights, gradients, optimizer state: 12–16 bytes a parameter. Our 98M: </a:t>
-            </a:r>
-            <a:r>
-              <a:rPr sz="1300" b="1" i="0">
-                <a:solidFill>
-                  <a:srgbClr val="1F1F24"/>
-                </a:solidFill>
-                <a:latin typeface="Open Sans"/>
-              </a:rPr>
-              <a:t>1.6 GB</a:t>
-            </a:r>
-            <a:r>
-              <a:rPr sz="1300" b="0" i="0">
-                <a:solidFill>
-                  <a:srgbClr val="1F1F24"/>
-                </a:solidFill>
-                <a:latin typeface="Open Sans"/>
-              </a:rPr>
-              <a:t>. A 7B model: </a:t>
-            </a:r>
-            <a:r>
-              <a:rPr sz="1300" b="1" i="0">
-                <a:solidFill>
-                  <a:srgbClr val="1F1F24"/>
-                </a:solidFill>
-                <a:latin typeface="Open Sans"/>
-              </a:rPr>
-              <a:t>84–112 GB</a:t>
-            </a:r>
-            <a:r>
-              <a:rPr sz="1300" b="0" i="0">
-                <a:solidFill>
-                  <a:srgbClr val="1F1F24"/>
-                </a:solidFill>
-                <a:latin typeface="Open Sans"/>
-              </a:rPr>
-              <a:t>, which no consumer card has. </a:t>
-            </a:r>
-            <a:r>
-              <a:rPr sz="1300" b="0" i="1">
-                <a:solidFill>
-                  <a:srgbClr val="1F1F24"/>
-                </a:solidFill>
-                <a:latin typeface="Open Sans"/>
-              </a:rPr>
-              <a:t>(arithmetic)</a:t>
+              <a:rPr sz="1700" b="1" i="0">
+                <a:solidFill>
+                  <a:srgbClr val="1F1F24"/>
+                </a:solidFill>
+                <a:latin typeface="Open Sans"/>
+              </a:rPr>
+              <a:t>Everything above the floor is batch, and batch is optional.</a:t>
+            </a:r>
+            <a:r>
+              <a:rPr sz="1700" b="0" i="0">
+                <a:solidFill>
+                  <a:srgbClr val="1F1F24"/>
+                </a:solidFill>
+                <a:latin typeface="Open Sans"/>
+              </a:rPr>
+              <a:t> Accumulation runs one big step as smaller passes — </a:t>
+            </a:r>
+            <a:r>
+              <a:rPr sz="1700" b="1" i="0">
+                <a:solidFill>
+                  <a:srgbClr val="1F1F24"/>
+                </a:solidFill>
+                <a:latin typeface="Open Sans"/>
+              </a:rPr>
+              <a:t>the same update</a:t>
+            </a:r>
+            <a:r>
+              <a:rPr sz="1700" b="0" i="0">
+                <a:solidFill>
+                  <a:srgbClr val="1F1F24"/>
+                </a:solidFill>
+                <a:latin typeface="Open Sans"/>
+              </a:rPr>
+              <a:t>, within 2%.</a:t>
             </a:r>
           </a:p>
           <a:p>
             <a:pPr algn="l">
               <a:lnSpc>
-                <a:spcPct val="108000"/>
+                <a:spcPct val="102000"/>
               </a:lnSpc>
               <a:spcAft>
-                <a:spcPts val="500"/>
+                <a:spcPts val="600"/>
               </a:spcAft>
             </a:pPr>
             <a:r>
-              <a:rPr sz="1300" b="1" i="0">
-                <a:solidFill>
-                  <a:srgbClr val="1F1F24"/>
-                </a:solidFill>
-                <a:latin typeface="Open Sans"/>
-              </a:rPr>
-              <a:t>Everything above it is batch, and batch is optional.</a:t>
-            </a:r>
-            <a:r>
-              <a:rPr sz="1300" b="0" i="0">
-                <a:solidFill>
-                  <a:srgbClr val="1F1F24"/>
-                </a:solidFill>
-                <a:latin typeface="Open Sans"/>
-              </a:rPr>
-              <a:t> Accumulation runs a 16,384-token step as smaller passes — same update, </a:t>
-            </a:r>
-            <a:r>
-              <a:rPr sz="1300" b="1" i="0">
-                <a:solidFill>
-                  <a:srgbClr val="1F1F24"/>
-                </a:solidFill>
-                <a:latin typeface="Open Sans"/>
-              </a:rPr>
-              <a:t>within 2%</a:t>
-            </a:r>
-            <a:r>
-              <a:rPr sz="1300" b="0" i="0">
-                <a:solidFill>
-                  <a:srgbClr val="1F1F24"/>
-                </a:solidFill>
-                <a:latin typeface="Open Sans"/>
-              </a:rPr>
-              <a:t> of the cost.</a:t>
+              <a:rPr sz="1700" b="1" i="0">
+                <a:solidFill>
+                  <a:srgbClr val="1F1F24"/>
+                </a:solidFill>
+                <a:latin typeface="Open Sans"/>
+              </a:rPr>
+              <a:t>So an 8 GB laptop trains the very step a 96 GB card trains.</a:t>
+            </a:r>
+            <a:r>
+              <a:rPr sz="1700" b="0" i="0">
+                <a:solidFill>
+                  <a:srgbClr val="1F1F24"/>
+                </a:solidFill>
+                <a:latin typeface="Open Sans"/>
+              </a:rPr>
+              <a:t> A 10 GB run folds into </a:t>
+            </a:r>
+            <a:r>
+              <a:rPr sz="1700" b="1" i="0">
+                <a:solidFill>
+                  <a:srgbClr val="1F1F24"/>
+                </a:solidFill>
+                <a:latin typeface="Open Sans"/>
+              </a:rPr>
+              <a:t>6.1 GB at 28,027 tok/s</a:t>
+            </a:r>
+            <a:r>
+              <a:rPr sz="1700" b="0" i="0">
+                <a:solidFill>
+                  <a:srgbClr val="1F1F24"/>
+                </a:solidFill>
+                <a:latin typeface="Open Sans"/>
+              </a:rPr>
+              <a:t> — the same model.</a:t>
             </a:r>
           </a:p>
           <a:p>
             <a:pPr algn="l">
               <a:lnSpc>
-                <a:spcPct val="108000"/>
+                <a:spcPct val="102000"/>
               </a:lnSpc>
               <a:spcAft>
-                <a:spcPts val="500"/>
+                <a:spcPts val="600"/>
               </a:spcAft>
             </a:pPr>
             <a:r>
-              <a:rPr sz="1300" b="1" i="0">
-                <a:solidFill>
-                  <a:srgbClr val="1F1F24"/>
-                </a:solidFill>
-                <a:latin typeface="Open Sans"/>
-              </a:rPr>
-              <a:t>So an 8 GB laptop trains the step a 96 GB card trains.</a:t>
-            </a:r>
-            <a:r>
-              <a:rPr sz="1300" b="0" i="0">
-                <a:solidFill>
-                  <a:srgbClr val="1F1F24"/>
-                </a:solidFill>
-                <a:latin typeface="Open Sans"/>
-              </a:rPr>
-              <a:t> A 10 GB run folds into </a:t>
-            </a:r>
-            <a:r>
-              <a:rPr sz="1300" b="1" i="0">
-                <a:solidFill>
-                  <a:srgbClr val="1F1F24"/>
-                </a:solidFill>
-                <a:latin typeface="Open Sans"/>
-              </a:rPr>
-              <a:t>6.1 GB at 28,027 tok/s</a:t>
-            </a:r>
-            <a:r>
-              <a:rPr sz="1300" b="0" i="0">
-                <a:solidFill>
-                  <a:srgbClr val="1F1F24"/>
-                </a:solidFill>
-                <a:latin typeface="Open Sans"/>
-              </a:rPr>
-              <a:t>.</a:t>
+              <a:rPr sz="1700" b="1" i="0">
+                <a:solidFill>
+                  <a:srgbClr val="1F1F24"/>
+                </a:solidFill>
+                <a:latin typeface="Open Sans"/>
+              </a:rPr>
+              <a:t>Nobody on the chart beside this needed 80 GB.</a:t>
+            </a:r>
+            <a:r>
+              <a:rPr sz="1700" b="0" i="0">
+                <a:solidFill>
+                  <a:srgbClr val="1F1F24"/>
+                </a:solidFill>
+                <a:latin typeface="Open Sans"/>
+              </a:rPr>
+              <a:t> 96, 80, 24, 16, 8 GB — all ran the same step. The A100 sells </a:t>
+            </a:r>
+            <a:r>
+              <a:rPr sz="1700" b="1" i="0">
+                <a:solidFill>
+                  <a:srgbClr val="1F1F24"/>
+                </a:solidFill>
+                <a:latin typeface="Open Sans"/>
+              </a:rPr>
+              <a:t>speed</a:t>
+            </a:r>
+            <a:r>
+              <a:rPr sz="1700" b="0" i="0">
+                <a:solidFill>
+                  <a:srgbClr val="1F1F24"/>
+                </a:solidFill>
+                <a:latin typeface="Open Sans"/>
+              </a:rPr>
+              <a:t>, not room.</a:t>
             </a:r>
           </a:p>
           <a:p>
             <a:pPr algn="l">
               <a:lnSpc>
-                <a:spcPct val="108000"/>
+                <a:spcPct val="102000"/>
               </a:lnSpc>
               <a:spcAft>
-                <a:spcPts val="500"/>
+                <a:spcPts val="600"/>
               </a:spcAft>
             </a:pPr>
             <a:r>
-              <a:rPr sz="1300" b="1" i="0">
-                <a:solidFill>
-                  <a:srgbClr val="1F1F24"/>
-                </a:solidFill>
-                <a:latin typeface="Open Sans"/>
-              </a:rPr>
-              <a:t>Nobody on the chart beside this needed 80 GB.</a:t>
-            </a:r>
-            <a:r>
-              <a:rPr sz="1300" b="0" i="0">
-                <a:solidFill>
-                  <a:srgbClr val="1F1F24"/>
-                </a:solidFill>
-                <a:latin typeface="Open Sans"/>
-              </a:rPr>
-              <a:t> 96, 80, 24, 16, 8 GB — all ran the same step. The A100's price buys its </a:t>
-            </a:r>
-            <a:r>
-              <a:rPr sz="1300" b="1" i="0">
-                <a:solidFill>
-                  <a:srgbClr val="1F1F24"/>
-                </a:solidFill>
-                <a:latin typeface="Open Sans"/>
-              </a:rPr>
-              <a:t>speed</a:t>
-            </a:r>
-            <a:r>
-              <a:rPr sz="1300" b="0" i="0">
-                <a:solidFill>
-                  <a:srgbClr val="1F1F24"/>
-                </a:solidFill>
-                <a:latin typeface="Open Sans"/>
-              </a:rPr>
-              <a:t>, not capacity.</a:t>
-            </a:r>
-          </a:p>
-          <a:p>
-            <a:pPr algn="l">
-              <a:lnSpc>
-                <a:spcPct val="108000"/>
-              </a:lnSpc>
-              <a:spcAft>
-                <a:spcPts val="500"/>
-              </a:spcAft>
-            </a:pPr>
-            <a:r>
-              <a:rPr sz="1300" b="1" i="0">
-                <a:solidFill>
-                  <a:srgbClr val="1F1F24"/>
-                </a:solidFill>
-                <a:latin typeface="Open Sans"/>
-              </a:rPr>
-              <a:t>More memory does not buy speed.</a:t>
-            </a:r>
-            <a:r>
-              <a:rPr sz="1300" b="0" i="0">
-                <a:solidFill>
-                  <a:srgbClr val="1F1F24"/>
-                </a:solidFill>
-                <a:latin typeface="Open Sans"/>
-              </a:rPr>
-              <a:t> Batch 2048 uses </a:t>
-            </a:r>
-            <a:r>
-              <a:rPr sz="1300" b="1" i="0">
-                <a:solidFill>
-                  <a:srgbClr val="1F1F24"/>
-                </a:solidFill>
-                <a:latin typeface="Open Sans"/>
-              </a:rPr>
-              <a:t>89.7 GB</a:t>
-            </a:r>
-            <a:r>
-              <a:rPr sz="1300" b="0" i="0">
-                <a:solidFill>
-                  <a:srgbClr val="1F1F24"/>
-                </a:solidFill>
-                <a:latin typeface="Open Sans"/>
-              </a:rPr>
-              <a:t> and is </a:t>
-            </a:r>
-            <a:r>
-              <a:rPr sz="1300" b="0" i="1">
-                <a:solidFill>
-                  <a:srgbClr val="1F1F24"/>
-                </a:solidFill>
-                <a:latin typeface="Open Sans"/>
-              </a:rPr>
-              <a:t>slower</a:t>
-            </a:r>
-            <a:r>
-              <a:rPr sz="1300" b="0" i="0">
-                <a:solidFill>
-                  <a:srgbClr val="1F1F24"/>
-                </a:solidFill>
-                <a:latin typeface="Open Sans"/>
-              </a:rPr>
-              <a:t> than 128.</a:t>
-            </a:r>
-          </a:p>
-          <a:p>
-            <a:pPr algn="l">
-              <a:lnSpc>
-                <a:spcPct val="108000"/>
-              </a:lnSpc>
-              <a:spcAft>
-                <a:spcPts val="500"/>
-              </a:spcAft>
-            </a:pPr>
-            <a:r>
-              <a:rPr sz="1300" b="1" i="0">
+              <a:rPr sz="1700" b="1" i="0">
                 <a:solidFill>
                   <a:srgbClr val="1F1F24"/>
                 </a:solidFill>
@@ -8852,25 +8719,25 @@
               <a:t>And Windows does not warn you.</a:t>
             </a:r>
             <a:r>
-              <a:rPr sz="1300" b="0" i="0">
-                <a:solidFill>
-                  <a:srgbClr val="1F1F24"/>
-                </a:solidFill>
-                <a:latin typeface="Open Sans"/>
-              </a:rPr>
-              <a:t> An oversized batch spills to system RAM: </a:t>
-            </a:r>
-            <a:r>
-              <a:rPr sz="1300" b="1" i="0">
-                <a:solidFill>
-                  <a:srgbClr val="1F1F24"/>
-                </a:solidFill>
-                <a:latin typeface="Open Sans"/>
-              </a:rPr>
-              <a:t>5,075 tok/s, no error</a:t>
-            </a:r>
-            <a:r>
-              <a:rPr sz="1300" b="0" i="0">
+              <a:rPr sz="1700" b="0" i="0">
+                <a:solidFill>
+                  <a:srgbClr val="1F1F24"/>
+                </a:solidFill>
+                <a:latin typeface="Open Sans"/>
+              </a:rPr>
+              <a:t> An oversized batch silently spills into system RAM: </a:t>
+            </a:r>
+            <a:r>
+              <a:rPr sz="1700" b="1" i="0">
+                <a:solidFill>
+                  <a:srgbClr val="1F1F24"/>
+                </a:solidFill>
+                <a:latin typeface="Open Sans"/>
+              </a:rPr>
+              <a:t>28,027 → 5,075 tok/s</a:t>
+            </a:r>
+            <a:r>
+              <a:rPr sz="1700" b="0" i="0">
                 <a:solidFill>
                   <a:srgbClr val="1F1F24"/>
                 </a:solidFill>
@@ -8883,14 +8750,14 @@
       </p:sp>
       <p:sp>
         <p:nvSpPr>
-          <p:cNvPr id="13" name="Cell3_Box"/>
+          <p:cNvPr id="12" name="Cell3_Box"/>
           <p:cNvSpPr/>
           <p:nvPr/>
         </p:nvSpPr>
         <p:spPr>
           <a:xfrm>
-            <a:off x="14749272" y="8046720"/>
-            <a:ext cx="5806440" cy="5303520"/>
+            <a:off x="14749272" y="7955279"/>
+            <a:ext cx="5806440" cy="5623560"/>
           </a:xfrm>
           <a:prstGeom prst="rect">
             <a:avLst/>
@@ -8927,13 +8794,13 @@
       </p:sp>
       <p:sp>
         <p:nvSpPr>
-          <p:cNvPr id="14" name="Cell3_Heading"/>
+          <p:cNvPr id="13" name="Cell3_Heading"/>
           <p:cNvSpPr txBox="1"/>
           <p:nvPr/>
         </p:nvSpPr>
         <p:spPr>
           <a:xfrm>
-            <a:off x="15023592" y="8266176"/>
+            <a:off x="15023592" y="8174736"/>
             <a:ext cx="5257800" cy="548640"/>
           </a:xfrm>
           <a:prstGeom prst="rect">
@@ -8969,14 +8836,14 @@
       </p:sp>
       <p:sp>
         <p:nvSpPr>
-          <p:cNvPr id="15" name="Cell3_Value1"/>
+          <p:cNvPr id="14" name="Cell3_Value1"/>
           <p:cNvSpPr txBox="1"/>
           <p:nvPr/>
         </p:nvSpPr>
         <p:spPr>
           <a:xfrm>
-            <a:off x="15005304" y="8942832"/>
-            <a:ext cx="1572768" cy="697992"/>
+            <a:off x="15005304" y="8851392"/>
+            <a:ext cx="1572768" cy="751332"/>
           </a:xfrm>
           <a:prstGeom prst="rect">
             <a:avLst/>
@@ -9011,14 +8878,14 @@
       </p:sp>
       <p:sp>
         <p:nvSpPr>
-          <p:cNvPr id="16" name="Cell3_Label1"/>
+          <p:cNvPr id="15" name="Cell3_Label1"/>
           <p:cNvSpPr txBox="1"/>
           <p:nvPr/>
         </p:nvSpPr>
         <p:spPr>
           <a:xfrm>
-            <a:off x="16706088" y="8942832"/>
-            <a:ext cx="3575303" cy="697992"/>
+            <a:off x="16706088" y="8851392"/>
+            <a:ext cx="3575303" cy="751332"/>
           </a:xfrm>
           <a:prstGeom prst="rect">
             <a:avLst/>
@@ -9053,14 +8920,14 @@
       </p:sp>
       <p:sp>
         <p:nvSpPr>
-          <p:cNvPr id="17" name="Cell3_Value2"/>
+          <p:cNvPr id="16" name="Cell3_Value2"/>
           <p:cNvSpPr txBox="1"/>
           <p:nvPr/>
         </p:nvSpPr>
         <p:spPr>
           <a:xfrm>
-            <a:off x="15005304" y="9640824"/>
-            <a:ext cx="1572768" cy="697992"/>
+            <a:off x="15005304" y="9602724"/>
+            <a:ext cx="1572768" cy="751332"/>
           </a:xfrm>
           <a:prstGeom prst="rect">
             <a:avLst/>
@@ -9095,14 +8962,14 @@
       </p:sp>
       <p:sp>
         <p:nvSpPr>
-          <p:cNvPr id="18" name="Cell3_Label2"/>
+          <p:cNvPr id="17" name="Cell3_Label2"/>
           <p:cNvSpPr txBox="1"/>
           <p:nvPr/>
         </p:nvSpPr>
         <p:spPr>
           <a:xfrm>
-            <a:off x="16706088" y="9640824"/>
-            <a:ext cx="3575303" cy="697992"/>
+            <a:off x="16706088" y="9602724"/>
+            <a:ext cx="3575303" cy="751332"/>
           </a:xfrm>
           <a:prstGeom prst="rect">
             <a:avLst/>
@@ -9137,14 +9004,14 @@
       </p:sp>
       <p:sp>
         <p:nvSpPr>
-          <p:cNvPr id="19" name="Cell3_Value3"/>
+          <p:cNvPr id="18" name="Cell3_Value3"/>
           <p:cNvSpPr txBox="1"/>
           <p:nvPr/>
         </p:nvSpPr>
         <p:spPr>
           <a:xfrm>
-            <a:off x="15005304" y="10338816"/>
-            <a:ext cx="1572768" cy="697992"/>
+            <a:off x="15005304" y="10354056"/>
+            <a:ext cx="1572768" cy="751332"/>
           </a:xfrm>
           <a:prstGeom prst="rect">
             <a:avLst/>
@@ -9179,14 +9046,14 @@
       </p:sp>
       <p:sp>
         <p:nvSpPr>
-          <p:cNvPr id="20" name="Cell3_Label3"/>
+          <p:cNvPr id="19" name="Cell3_Label3"/>
           <p:cNvSpPr txBox="1"/>
           <p:nvPr/>
         </p:nvSpPr>
         <p:spPr>
           <a:xfrm>
-            <a:off x="16706088" y="10338816"/>
-            <a:ext cx="3575303" cy="697992"/>
+            <a:off x="16706088" y="10354056"/>
+            <a:ext cx="3575303" cy="751332"/>
           </a:xfrm>
           <a:prstGeom prst="rect">
             <a:avLst/>
@@ -9221,14 +9088,14 @@
       </p:sp>
       <p:sp>
         <p:nvSpPr>
-          <p:cNvPr id="21" name="Cell3_Value4"/>
+          <p:cNvPr id="20" name="Cell3_Value4"/>
           <p:cNvSpPr txBox="1"/>
           <p:nvPr/>
         </p:nvSpPr>
         <p:spPr>
           <a:xfrm>
-            <a:off x="15005304" y="11036808"/>
-            <a:ext cx="1572768" cy="697992"/>
+            <a:off x="15005304" y="11105388"/>
+            <a:ext cx="1572768" cy="751332"/>
           </a:xfrm>
           <a:prstGeom prst="rect">
             <a:avLst/>
@@ -9263,14 +9130,14 @@
       </p:sp>
       <p:sp>
         <p:nvSpPr>
-          <p:cNvPr id="22" name="Cell3_Label4"/>
+          <p:cNvPr id="21" name="Cell3_Label4"/>
           <p:cNvSpPr txBox="1"/>
           <p:nvPr/>
         </p:nvSpPr>
         <p:spPr>
           <a:xfrm>
-            <a:off x="16706088" y="11036808"/>
-            <a:ext cx="3575303" cy="697992"/>
+            <a:off x="16706088" y="11105388"/>
+            <a:ext cx="3575303" cy="751332"/>
           </a:xfrm>
           <a:prstGeom prst="rect">
             <a:avLst/>
@@ -9305,14 +9172,14 @@
       </p:sp>
       <p:sp>
         <p:nvSpPr>
-          <p:cNvPr id="23" name="Cell3_Value5"/>
+          <p:cNvPr id="22" name="Cell3_Value5"/>
           <p:cNvSpPr txBox="1"/>
           <p:nvPr/>
         </p:nvSpPr>
         <p:spPr>
           <a:xfrm>
-            <a:off x="15005304" y="11734800"/>
-            <a:ext cx="1572768" cy="697992"/>
+            <a:off x="15005304" y="11856720"/>
+            <a:ext cx="1572768" cy="751332"/>
           </a:xfrm>
           <a:prstGeom prst="rect">
             <a:avLst/>
@@ -9347,14 +9214,14 @@
       </p:sp>
       <p:sp>
         <p:nvSpPr>
-          <p:cNvPr id="24" name="Cell3_Label5"/>
+          <p:cNvPr id="23" name="Cell3_Label5"/>
           <p:cNvSpPr txBox="1"/>
           <p:nvPr/>
         </p:nvSpPr>
         <p:spPr>
           <a:xfrm>
-            <a:off x="16706088" y="11734800"/>
-            <a:ext cx="3575303" cy="697992"/>
+            <a:off x="16706088" y="11856720"/>
+            <a:ext cx="3575303" cy="751332"/>
           </a:xfrm>
           <a:prstGeom prst="rect">
             <a:avLst/>
@@ -9389,14 +9256,14 @@
       </p:sp>
       <p:sp>
         <p:nvSpPr>
-          <p:cNvPr id="25" name="Cell3_Value6"/>
+          <p:cNvPr id="24" name="Cell3_Value6"/>
           <p:cNvSpPr txBox="1"/>
           <p:nvPr/>
         </p:nvSpPr>
         <p:spPr>
           <a:xfrm>
-            <a:off x="15005304" y="12432792"/>
-            <a:ext cx="1572768" cy="697992"/>
+            <a:off x="15005304" y="12608052"/>
+            <a:ext cx="1572768" cy="751332"/>
           </a:xfrm>
           <a:prstGeom prst="rect">
             <a:avLst/>
@@ -9431,14 +9298,14 @@
       </p:sp>
       <p:sp>
         <p:nvSpPr>
-          <p:cNvPr id="26" name="Cell3_Label6"/>
+          <p:cNvPr id="25" name="Cell3_Label6"/>
           <p:cNvSpPr txBox="1"/>
           <p:nvPr/>
         </p:nvSpPr>
         <p:spPr>
           <a:xfrm>
-            <a:off x="16706088" y="12432792"/>
-            <a:ext cx="3575303" cy="697992"/>
+            <a:off x="16706088" y="12608052"/>
+            <a:ext cx="3575303" cy="751332"/>
           </a:xfrm>
           <a:prstGeom prst="rect">
             <a:avLst/>
@@ -9473,14 +9340,14 @@
       </p:sp>
       <p:sp>
         <p:nvSpPr>
-          <p:cNvPr id="27" name="Cell4_Heading"/>
+          <p:cNvPr id="26" name="Cell2_Heading"/>
           <p:cNvSpPr txBox="1"/>
           <p:nvPr/>
         </p:nvSpPr>
         <p:spPr>
           <a:xfrm>
-            <a:off x="1371600" y="13533120"/>
-            <a:ext cx="12435840" cy="1024128"/>
+            <a:off x="1371600" y="13716000"/>
+            <a:ext cx="5806440" cy="896112"/>
           </a:xfrm>
           <a:prstGeom prst="rect">
             <a:avLst/>
@@ -9502,27 +9369,27 @@
               </a:spcAft>
             </a:pPr>
             <a:r>
-              <a:rPr sz="3200" b="1" i="0">
+              <a:rPr sz="2800" b="1" i="0">
                 <a:solidFill>
                   <a:srgbClr val="32006E"/>
                 </a:solidFill>
                 <a:latin typeface="Encode Sans Normal"/>
               </a:rPr>
-              <a:t>What we made faster</a:t>
+              <a:t>Budget in tokens, not epochs</a:t>
             </a:r>
           </a:p>
         </p:txBody>
       </p:sp>
       <p:cxnSp>
         <p:nvCxnSpPr>
-          <p:cNvPr id="28" name="Connector 27"/>
+          <p:cNvPr id="27" name="Connector 26"/>
           <p:cNvCxnSpPr/>
           <p:nvPr/>
         </p:nvCxnSpPr>
         <p:spPr>
           <a:xfrm>
-            <a:off x="1371600" y="14593824"/>
-            <a:ext cx="12435840" cy="0"/>
+            <a:off x="1371600" y="14648688"/>
+            <a:ext cx="5806440" cy="0"/>
           </a:xfrm>
           <a:prstGeom prst="line">
             <a:avLst/>
@@ -9550,14 +9417,14 @@
       </p:cxnSp>
       <p:sp>
         <p:nvSpPr>
-          <p:cNvPr id="29" name="Cell4_Lead"/>
+          <p:cNvPr id="28" name="Cell2_List"/>
           <p:cNvSpPr txBox="1"/>
           <p:nvPr/>
         </p:nvSpPr>
         <p:spPr>
           <a:xfrm>
-            <a:off x="1371600" y="14721840"/>
-            <a:ext cx="12435840" cy="859536"/>
+            <a:off x="1371600" y="14849855"/>
+            <a:ext cx="5806440" cy="3931920"/>
           </a:xfrm>
           <a:prstGeom prst="rect">
             <a:avLst/>
@@ -9572,10 +9439,10 @@
           <a:p>
             <a:pPr algn="l">
               <a:lnSpc>
-                <a:spcPct val="108000"/>
+                <a:spcPct val="102000"/>
               </a:lnSpc>
               <a:spcAft>
-                <a:spcPts val="0"/>
+                <a:spcPts val="600"/>
               </a:spcAft>
             </a:pPr>
             <a:r>
@@ -9585,7 +9452,7 @@
                 </a:solidFill>
                 <a:latin typeface="Open Sans"/>
               </a:rPr>
-              <a:t>2.07× on the four-cell benchmark</a:t>
+              <a:t>Epochs were right in 502–504: the dataset was fixed.</a:t>
             </a:r>
             <a:r>
               <a:rPr sz="1700" b="0" i="0">
@@ -9594,7 +9461,25 @@
                 </a:solidFill>
                 <a:latin typeface="Open Sans"/>
               </a:rPr>
-              <a:t> — only </a:t>
+              <a:t> Here the dataset </a:t>
+            </a:r>
+            <a:r>
+              <a:rPr sz="1700" b="0" i="1">
+                <a:solidFill>
+                  <a:srgbClr val="1F1F24"/>
+                </a:solidFill>
+                <a:latin typeface="Open Sans"/>
+              </a:rPr>
+              <a:t>is</a:t>
+            </a:r>
+            <a:r>
+              <a:rPr sz="1700" b="0" i="0">
+                <a:solidFill>
+                  <a:srgbClr val="1F1F24"/>
+                </a:solidFill>
+                <a:latin typeface="Open Sans"/>
+              </a:rPr>
+              <a:t> the experiment — "40 epochs each" gives one arm </a:t>
             </a:r>
             <a:r>
               <a:rPr sz="1700" b="1" i="0">
@@ -9603,7 +9488,7 @@
                 </a:solidFill>
                 <a:latin typeface="Open Sans"/>
               </a:rPr>
-              <a:t>1.32×</a:t>
+              <a:t>256× the compute</a:t>
             </a:r>
             <a:r>
               <a:rPr sz="1700" b="0" i="0">
@@ -9612,8 +9497,18 @@
                 </a:solidFill>
                 <a:latin typeface="Open Sans"/>
               </a:rPr>
-              <a:t> of it efficiency; the rest is a second card nobody had used. </a:t>
-            </a:r>
+              <a:t> of another.</a:t>
+            </a:r>
+          </a:p>
+          <a:p>
+            <a:pPr algn="l">
+              <a:lnSpc>
+                <a:spcPct val="102000"/>
+              </a:lnSpc>
+              <a:spcAft>
+                <a:spcPts val="600"/>
+              </a:spcAft>
+            </a:pPr>
             <a:r>
               <a:rPr sz="1700" b="1" i="0">
                 <a:solidFill>
@@ -9621,7 +9516,7 @@
                 </a:solidFill>
                 <a:latin typeface="Open Sans"/>
               </a:rPr>
-              <a:t>A third of the twenty were rejected</a:t>
+              <a:t>So fix the total number of tokens, and let epochs fall out.</a:t>
             </a:r>
             <a:r>
               <a:rPr sz="1700" b="0" i="0">
@@ -9630,7 +9525,117 @@
                 </a:solidFill>
                 <a:latin typeface="Open Sans"/>
               </a:rPr>
-              <a:t>, and a list of only the wins would be marketing rather than a log. Every row had to make the </a:t>
+              <a:t> Every run is </a:t>
+            </a:r>
+            <a:r>
+              <a:rPr sz="1700" b="1" i="0">
+                <a:solidFill>
+                  <a:srgbClr val="1F1F24"/>
+                </a:solidFill>
+                <a:latin typeface="Open Sans"/>
+              </a:rPr>
+              <a:t>1.024B tokens</a:t>
+            </a:r>
+            <a:r>
+              <a:rPr sz="1700" b="0" i="0">
+                <a:solidFill>
+                  <a:srgbClr val="1F1F24"/>
+                </a:solidFill>
+                <a:latin typeface="Open Sans"/>
+              </a:rPr>
+              <a:t>: the 4M corpus is seen </a:t>
+            </a:r>
+            <a:r>
+              <a:rPr sz="1700" b="1" i="0">
+                <a:solidFill>
+                  <a:srgbClr val="1F1F24"/>
+                </a:solidFill>
+                <a:latin typeface="Open Sans"/>
+              </a:rPr>
+              <a:t>256 times</a:t>
+            </a:r>
+            <a:r>
+              <a:rPr sz="1700" b="0" i="0">
+                <a:solidFill>
+                  <a:srgbClr val="1F1F24"/>
+                </a:solidFill>
+                <a:latin typeface="Open Sans"/>
+              </a:rPr>
+              <a:t>, the 1,024M once.</a:t>
+            </a:r>
+          </a:p>
+          <a:p>
+            <a:pPr algn="l">
+              <a:lnSpc>
+                <a:spcPct val="102000"/>
+              </a:lnSpc>
+              <a:spcAft>
+                <a:spcPts val="600"/>
+              </a:spcAft>
+            </a:pPr>
+            <a:r>
+              <a:rPr sz="1700" b="1" i="0">
+                <a:solidFill>
+                  <a:srgbClr val="1F1F24"/>
+                </a:solidFill>
+                <a:latin typeface="Open Sans"/>
+              </a:rPr>
+              <a:t>Tokens ÷ tok/s = the wall clock.</a:t>
+            </a:r>
+            <a:r>
+              <a:rPr sz="1700" b="0" i="0">
+                <a:solidFill>
+                  <a:srgbClr val="1F1F24"/>
+                </a:solidFill>
+                <a:latin typeface="Open Sans"/>
+              </a:rPr>
+              <a:t> 1.024B tokens ÷ 443k tok/s ≈ </a:t>
+            </a:r>
+            <a:r>
+              <a:rPr sz="1700" b="1" i="0">
+                <a:solidFill>
+                  <a:srgbClr val="1F1F24"/>
+                </a:solidFill>
+                <a:latin typeface="Open Sans"/>
+              </a:rPr>
+              <a:t>38 min</a:t>
+            </a:r>
+            <a:r>
+              <a:rPr sz="1700" b="0" i="0">
+                <a:solidFill>
+                  <a:srgbClr val="1F1F24"/>
+                </a:solidFill>
+                <a:latin typeface="Open Sans"/>
+              </a:rPr>
+              <a:t> — the top bar of the chart above.</a:t>
+            </a:r>
+          </a:p>
+          <a:p>
+            <a:pPr algn="l">
+              <a:lnSpc>
+                <a:spcPct val="102000"/>
+              </a:lnSpc>
+              <a:spcAft>
+                <a:spcPts val="600"/>
+              </a:spcAft>
+            </a:pPr>
+            <a:r>
+              <a:rPr sz="1700" b="1" i="0">
+                <a:solidFill>
+                  <a:srgbClr val="1F1F24"/>
+                </a:solidFill>
+                <a:latin typeface="Open Sans"/>
+              </a:rPr>
+              <a:t>A truncated run is a different experiment.</a:t>
+            </a:r>
+            <a:r>
+              <a:rPr sz="1700" b="0" i="0">
+                <a:solidFill>
+                  <a:srgbClr val="1F1F24"/>
+                </a:solidFill>
+                <a:latin typeface="Open Sans"/>
+              </a:rPr>
+              <a:t> The schedule anneals to zero at the </a:t>
             </a:r>
             <a:r>
               <a:rPr sz="1700" b="0" i="1">
@@ -9639,7 +9644,7 @@
                 </a:solidFill>
                 <a:latin typeface="Open Sans"/>
               </a:rPr>
-              <a:t>same</a:t>
+              <a:t>planned</a:t>
             </a:r>
             <a:r>
               <a:rPr sz="1700" b="0" i="0">
@@ -9648,21 +9653,85 @@
                 </a:solidFill>
                 <a:latin typeface="Open Sans"/>
               </a:rPr>
-              <a:t> experiment faster.</a:t>
-            </a:r>
-          </a:p>
-        </p:txBody>
-      </p:sp>
-      <p:sp>
-        <p:nvSpPr>
-          <p:cNvPr id="30" name="Cell4_H00"/>
+              <a:t> end — a stopped run is caught mid-schedule, not half as good.</a:t>
+            </a:r>
+          </a:p>
+          <a:p>
+            <a:pPr algn="l">
+              <a:lnSpc>
+                <a:spcPct val="102000"/>
+              </a:lnSpc>
+              <a:spcAft>
+                <a:spcPts val="600"/>
+              </a:spcAft>
+            </a:pPr>
+            <a:r>
+              <a:rPr sz="1700" b="1" i="0">
+                <a:solidFill>
+                  <a:srgbClr val="1F1F24"/>
+                </a:solidFill>
+                <a:latin typeface="Open Sans"/>
+              </a:rPr>
+              <a:t>Our own records carried the bug.</a:t>
+            </a:r>
+            <a:r>
+              <a:rPr sz="1700" b="0" i="0">
+                <a:solidFill>
+                  <a:srgbClr val="1F1F24"/>
+                </a:solidFill>
+                <a:latin typeface="Open Sans"/>
+              </a:rPr>
+              <a:t> The epoch field reads </a:t>
+            </a:r>
+            <a:r>
+              <a:rPr sz="1700" b="1" i="0">
+                <a:solidFill>
+                  <a:srgbClr val="1F1F24"/>
+                </a:solidFill>
+                <a:latin typeface="Open Sans"/>
+              </a:rPr>
+              <a:t>125</a:t>
+            </a:r>
+            <a:r>
+              <a:rPr sz="1700" b="0" i="0">
+                <a:solidFill>
+                  <a:srgbClr val="1F1F24"/>
+                </a:solidFill>
+                <a:latin typeface="Open Sans"/>
+              </a:rPr>
+              <a:t>; the truth is </a:t>
+            </a:r>
+            <a:r>
+              <a:rPr sz="1700" b="1" i="0">
+                <a:solidFill>
+                  <a:srgbClr val="1F1F24"/>
+                </a:solidFill>
+                <a:latin typeface="Open Sans"/>
+              </a:rPr>
+              <a:t>16 passes</a:t>
+            </a:r>
+            <a:r>
+              <a:rPr sz="1700" b="0" i="0">
+                <a:solidFill>
+                  <a:srgbClr val="1F1F24"/>
+                </a:solidFill>
+                <a:latin typeface="Open Sans"/>
+              </a:rPr>
+              <a:t>.</a:t>
+            </a:r>
+          </a:p>
+        </p:txBody>
+      </p:sp>
+      <p:sp>
+        <p:nvSpPr>
+          <p:cNvPr id="29" name="Cell4_Heading"/>
           <p:cNvSpPr txBox="1"/>
           <p:nvPr/>
         </p:nvSpPr>
         <p:spPr>
           <a:xfrm>
-            <a:off x="1371600" y="15617952"/>
-            <a:ext cx="1783080" cy="201168"/>
+            <a:off x="8001000" y="13716000"/>
+            <a:ext cx="12435840" cy="896112"/>
           </a:xfrm>
           <a:prstGeom prst="rect">
             <a:avLst/>
@@ -9670,7 +9739,7 @@
           <a:noFill/>
         </p:spPr>
         <p:txBody>
-          <a:bodyPr wrap="square" lIns="27432" tIns="27432" rIns="27432" bIns="27432" anchor="t">
+          <a:bodyPr wrap="square" lIns="27432" tIns="27432" rIns="27432" bIns="27432" anchor="b">
             <a:noAutofit/>
           </a:bodyPr>
           <a:lstStyle/>
@@ -9684,160 +9753,34 @@
               </a:spcAft>
             </a:pPr>
             <a:r>
-              <a:rPr sz="1000" b="1" i="0">
-                <a:solidFill>
-                  <a:srgbClr val="5E5A66"/>
-                </a:solidFill>
-                <a:latin typeface="Uni Sans Book"/>
-              </a:rPr>
-              <a:t>WHAT CHANGED</a:t>
-            </a:r>
-          </a:p>
-        </p:txBody>
-      </p:sp>
-      <p:sp>
-        <p:nvSpPr>
-          <p:cNvPr id="31" name="Cell4_H01"/>
-          <p:cNvSpPr txBox="1"/>
-          <p:nvPr/>
-        </p:nvSpPr>
-        <p:spPr>
-          <a:xfrm>
-            <a:off x="3986783" y="15617952"/>
-            <a:ext cx="1783080" cy="201168"/>
-          </a:xfrm>
-          <a:prstGeom prst="rect">
-            <a:avLst/>
-          </a:prstGeom>
-          <a:noFill/>
-        </p:spPr>
-        <p:txBody>
-          <a:bodyPr wrap="square" lIns="27432" tIns="27432" rIns="27432" bIns="27432" anchor="t">
-            <a:noAutofit/>
-          </a:bodyPr>
-          <a:lstStyle/>
-          <a:p>
-            <a:pPr algn="l">
-              <a:lnSpc>
-                <a:spcPct val="105000"/>
-              </a:lnSpc>
-              <a:spcAft>
-                <a:spcPts val="0"/>
-              </a:spcAft>
-            </a:pPr>
-            <a:r>
-              <a:rPr sz="1000" b="1" i="0">
-                <a:solidFill>
-                  <a:srgbClr val="5E5A66"/>
-                </a:solidFill>
-                <a:latin typeface="Uni Sans Book"/>
-              </a:rPr>
-              <a:t>MEASURED</a:t>
-            </a:r>
-          </a:p>
-        </p:txBody>
-      </p:sp>
-      <p:sp>
-        <p:nvSpPr>
-          <p:cNvPr id="32" name="Cell4_H02"/>
-          <p:cNvSpPr txBox="1"/>
-          <p:nvPr/>
-        </p:nvSpPr>
-        <p:spPr>
-          <a:xfrm>
-            <a:off x="6245352" y="15617952"/>
-            <a:ext cx="1783080" cy="201168"/>
-          </a:xfrm>
-          <a:prstGeom prst="rect">
-            <a:avLst/>
-          </a:prstGeom>
-          <a:noFill/>
-        </p:spPr>
-        <p:txBody>
-          <a:bodyPr wrap="square" lIns="27432" tIns="27432" rIns="27432" bIns="27432" anchor="t">
-            <a:noAutofit/>
-          </a:bodyPr>
-          <a:lstStyle/>
-          <a:p>
-            <a:pPr algn="l">
-              <a:lnSpc>
-                <a:spcPct val="105000"/>
-              </a:lnSpc>
-              <a:spcAft>
-                <a:spcPts val="0"/>
-              </a:spcAft>
-            </a:pPr>
-            <a:r>
-              <a:rPr sz="1000" b="1" i="0">
-                <a:solidFill>
-                  <a:srgbClr val="5E5A66"/>
-                </a:solidFill>
-                <a:latin typeface="Uni Sans Book"/>
-              </a:rPr>
-              <a:t>KEPT?</a:t>
-            </a:r>
-          </a:p>
-        </p:txBody>
-      </p:sp>
-      <p:sp>
-        <p:nvSpPr>
-          <p:cNvPr id="33" name="Cell4_G00"/>
-          <p:cNvSpPr txBox="1"/>
-          <p:nvPr/>
-        </p:nvSpPr>
-        <p:spPr>
-          <a:xfrm>
-            <a:off x="1371600" y="15837408"/>
-            <a:ext cx="5943600" cy="196596"/>
-          </a:xfrm>
-          <a:prstGeom prst="rect">
-            <a:avLst/>
-          </a:prstGeom>
-          <a:noFill/>
-        </p:spPr>
-        <p:txBody>
-          <a:bodyPr wrap="square" lIns="27432" tIns="27432" rIns="27432" bIns="27432" anchor="ctr">
-            <a:noAutofit/>
-          </a:bodyPr>
-          <a:lstStyle/>
-          <a:p>
-            <a:pPr algn="l">
-              <a:lnSpc>
-                <a:spcPct val="105000"/>
-              </a:lnSpc>
-              <a:spcAft>
-                <a:spcPts val="0"/>
-              </a:spcAft>
-            </a:pPr>
-            <a:r>
-              <a:rPr sz="1000" b="1" i="0">
+              <a:rPr sz="2800" b="1" i="0">
                 <a:solidFill>
                   <a:srgbClr val="32006E"/>
                 </a:solidFill>
-                <a:latin typeface="Uni Sans Book"/>
-              </a:rPr>
-              <a:t>THE DATA PATH</a:t>
+                <a:latin typeface="Encode Sans Normal"/>
+              </a:rPr>
+              <a:t>What we made faster</a:t>
             </a:r>
           </a:p>
         </p:txBody>
       </p:sp>
       <p:cxnSp>
         <p:nvCxnSpPr>
-          <p:cNvPr id="34" name="Connector 33"/>
+          <p:cNvPr id="30" name="Connector 29"/>
           <p:cNvCxnSpPr/>
           <p:nvPr/>
         </p:nvCxnSpPr>
         <p:spPr>
           <a:xfrm>
-            <a:off x="1371600" y="16015716"/>
-            <a:ext cx="5943600" cy="0"/>
+            <a:off x="8001000" y="14648688"/>
+            <a:ext cx="12435840" cy="0"/>
           </a:xfrm>
           <a:prstGeom prst="line">
             <a:avLst/>
           </a:prstGeom>
-          <a:ln w="9525">
+          <a:ln w="15875">
             <a:solidFill>
-              <a:srgbClr val="D9D2E3"/>
+              <a:srgbClr val="E8D3A2"/>
             </a:solidFill>
           </a:ln>
         </p:spPr>
@@ -9858,14 +9801,14 @@
       </p:cxnSp>
       <p:sp>
         <p:nvSpPr>
-          <p:cNvPr id="35" name="Cell4_R01C0"/>
+          <p:cNvPr id="31" name="Cell4_Lead"/>
           <p:cNvSpPr txBox="1"/>
           <p:nvPr/>
         </p:nvSpPr>
         <p:spPr>
           <a:xfrm>
-            <a:off x="1371600" y="16052292"/>
-            <a:ext cx="2523744" cy="178307"/>
+            <a:off x="8001000" y="14776704"/>
+            <a:ext cx="12435840" cy="859536"/>
           </a:xfrm>
           <a:prstGeom prst="rect">
             <a:avLst/>
@@ -9887,78 +9830,90 @@
               </a:spcAft>
             </a:pPr>
             <a:r>
-              <a:rPr sz="1100" b="0" i="0">
-                <a:solidFill>
-                  <a:srgbClr val="1F1F24"/>
-                </a:solidFill>
-                <a:latin typeface="Open Sans"/>
-              </a:rPr>
-              <a:t>1 · dataset on the card, no loader</a:t>
-            </a:r>
-          </a:p>
-        </p:txBody>
-      </p:sp>
-      <p:sp>
-        <p:nvSpPr>
-          <p:cNvPr id="36" name="Cell4_R01C1"/>
+              <a:rPr sz="1700" b="1" i="0">
+                <a:solidFill>
+                  <a:srgbClr val="1F1F24"/>
+                </a:solidFill>
+                <a:latin typeface="Open Sans"/>
+              </a:rPr>
+              <a:t>2.07× on the four-cell benchmark</a:t>
+            </a:r>
+            <a:r>
+              <a:rPr sz="1700" b="0" i="0">
+                <a:solidFill>
+                  <a:srgbClr val="1F1F24"/>
+                </a:solidFill>
+                <a:latin typeface="Open Sans"/>
+              </a:rPr>
+              <a:t> — only </a:t>
+            </a:r>
+            <a:r>
+              <a:rPr sz="1700" b="1" i="0">
+                <a:solidFill>
+                  <a:srgbClr val="1F1F24"/>
+                </a:solidFill>
+                <a:latin typeface="Open Sans"/>
+              </a:rPr>
+              <a:t>1.32×</a:t>
+            </a:r>
+            <a:r>
+              <a:rPr sz="1700" b="0" i="0">
+                <a:solidFill>
+                  <a:srgbClr val="1F1F24"/>
+                </a:solidFill>
+                <a:latin typeface="Open Sans"/>
+              </a:rPr>
+              <a:t> of it efficiency; the rest is a second card nobody had used. </a:t>
+            </a:r>
+            <a:r>
+              <a:rPr sz="1700" b="1" i="0">
+                <a:solidFill>
+                  <a:srgbClr val="1F1F24"/>
+                </a:solidFill>
+                <a:latin typeface="Open Sans"/>
+              </a:rPr>
+              <a:t>A third of the twenty were rejected</a:t>
+            </a:r>
+            <a:r>
+              <a:rPr sz="1700" b="0" i="0">
+                <a:solidFill>
+                  <a:srgbClr val="1F1F24"/>
+                </a:solidFill>
+                <a:latin typeface="Open Sans"/>
+              </a:rPr>
+              <a:t>, and a list of only the wins would be marketing rather than a log. Every row had to make the </a:t>
+            </a:r>
+            <a:r>
+              <a:rPr sz="1700" b="0" i="1">
+                <a:solidFill>
+                  <a:srgbClr val="1F1F24"/>
+                </a:solidFill>
+                <a:latin typeface="Open Sans"/>
+              </a:rPr>
+              <a:t>same</a:t>
+            </a:r>
+            <a:r>
+              <a:rPr sz="1700" b="0" i="0">
+                <a:solidFill>
+                  <a:srgbClr val="1F1F24"/>
+                </a:solidFill>
+                <a:latin typeface="Open Sans"/>
+              </a:rPr>
+              <a:t> experiment faster.</a:t>
+            </a:r>
+          </a:p>
+        </p:txBody>
+      </p:sp>
+      <p:sp>
+        <p:nvSpPr>
+          <p:cNvPr id="32" name="Cell4_H00"/>
           <p:cNvSpPr txBox="1"/>
           <p:nvPr/>
         </p:nvSpPr>
         <p:spPr>
           <a:xfrm>
-            <a:off x="3986783" y="16052292"/>
-            <a:ext cx="2167127" cy="178307"/>
-          </a:xfrm>
-          <a:prstGeom prst="rect">
-            <a:avLst/>
-          </a:prstGeom>
-          <a:noFill/>
-        </p:spPr>
-        <p:txBody>
-          <a:bodyPr wrap="square" lIns="36576" tIns="36576" rIns="36576" bIns="36576" anchor="t">
-            <a:noAutofit/>
-          </a:bodyPr>
-          <a:lstStyle/>
-          <a:p>
-            <a:pPr algn="l">
-              <a:lnSpc>
-                <a:spcPct val="108000"/>
-              </a:lnSpc>
-              <a:spcAft>
-                <a:spcPts val="0"/>
-              </a:spcAft>
-            </a:pPr>
-            <a:r>
-              <a:rPr sz="1100" b="0" i="0">
-                <a:solidFill>
-                  <a:srgbClr val="1F1F24"/>
-                </a:solidFill>
-                <a:latin typeface="Open Sans"/>
-              </a:rPr>
-              <a:t>13.8k → </a:t>
-            </a:r>
-            <a:r>
-              <a:rPr sz="1100" b="1" i="0">
-                <a:solidFill>
-                  <a:srgbClr val="1F1F24"/>
-                </a:solidFill>
-                <a:latin typeface="Open Sans"/>
-              </a:rPr>
-              <a:t>18.5k img/s</a:t>
-            </a:r>
-          </a:p>
-        </p:txBody>
-      </p:sp>
-      <p:sp>
-        <p:nvSpPr>
-          <p:cNvPr id="37" name="Cell4_R01C2"/>
-          <p:cNvSpPr txBox="1"/>
-          <p:nvPr/>
-        </p:nvSpPr>
-        <p:spPr>
-          <a:xfrm>
-            <a:off x="6245352" y="16052292"/>
-            <a:ext cx="978408" cy="178307"/>
+            <a:off x="8001000" y="15672816"/>
+            <a:ext cx="1783080" cy="201168"/>
           </a:xfrm>
           <a:prstGeom prst="rect">
             <a:avLst/>
@@ -9980,26 +9935,152 @@
               </a:spcAft>
             </a:pPr>
             <a:r>
-              <a:rPr sz="1100" b="1" i="0">
-                <a:solidFill>
-                  <a:srgbClr val="1F7A4C"/>
-                </a:solidFill>
-                <a:latin typeface="Open Sans"/>
-              </a:rPr>
-              <a:t>yes</a:t>
+              <a:rPr sz="1000" b="1" i="0">
+                <a:solidFill>
+                  <a:srgbClr val="5E5A66"/>
+                </a:solidFill>
+                <a:latin typeface="Uni Sans Book"/>
+              </a:rPr>
+              <a:t>WHAT CHANGED</a:t>
+            </a:r>
+          </a:p>
+        </p:txBody>
+      </p:sp>
+      <p:sp>
+        <p:nvSpPr>
+          <p:cNvPr id="33" name="Cell4_H01"/>
+          <p:cNvSpPr txBox="1"/>
+          <p:nvPr/>
+        </p:nvSpPr>
+        <p:spPr>
+          <a:xfrm>
+            <a:off x="10616184" y="15672816"/>
+            <a:ext cx="1783080" cy="201168"/>
+          </a:xfrm>
+          <a:prstGeom prst="rect">
+            <a:avLst/>
+          </a:prstGeom>
+          <a:noFill/>
+        </p:spPr>
+        <p:txBody>
+          <a:bodyPr wrap="square" lIns="27432" tIns="27432" rIns="27432" bIns="27432" anchor="t">
+            <a:noAutofit/>
+          </a:bodyPr>
+          <a:lstStyle/>
+          <a:p>
+            <a:pPr algn="l">
+              <a:lnSpc>
+                <a:spcPct val="105000"/>
+              </a:lnSpc>
+              <a:spcAft>
+                <a:spcPts val="0"/>
+              </a:spcAft>
+            </a:pPr>
+            <a:r>
+              <a:rPr sz="1000" b="1" i="0">
+                <a:solidFill>
+                  <a:srgbClr val="5E5A66"/>
+                </a:solidFill>
+                <a:latin typeface="Uni Sans Book"/>
+              </a:rPr>
+              <a:t>MEASURED</a:t>
+            </a:r>
+          </a:p>
+        </p:txBody>
+      </p:sp>
+      <p:sp>
+        <p:nvSpPr>
+          <p:cNvPr id="34" name="Cell4_H02"/>
+          <p:cNvSpPr txBox="1"/>
+          <p:nvPr/>
+        </p:nvSpPr>
+        <p:spPr>
+          <a:xfrm>
+            <a:off x="12874752" y="15672816"/>
+            <a:ext cx="1783080" cy="201168"/>
+          </a:xfrm>
+          <a:prstGeom prst="rect">
+            <a:avLst/>
+          </a:prstGeom>
+          <a:noFill/>
+        </p:spPr>
+        <p:txBody>
+          <a:bodyPr wrap="square" lIns="27432" tIns="27432" rIns="27432" bIns="27432" anchor="t">
+            <a:noAutofit/>
+          </a:bodyPr>
+          <a:lstStyle/>
+          <a:p>
+            <a:pPr algn="l">
+              <a:lnSpc>
+                <a:spcPct val="105000"/>
+              </a:lnSpc>
+              <a:spcAft>
+                <a:spcPts val="0"/>
+              </a:spcAft>
+            </a:pPr>
+            <a:r>
+              <a:rPr sz="1000" b="1" i="0">
+                <a:solidFill>
+                  <a:srgbClr val="5E5A66"/>
+                </a:solidFill>
+                <a:latin typeface="Uni Sans Book"/>
+              </a:rPr>
+              <a:t>KEPT?</a:t>
+            </a:r>
+          </a:p>
+        </p:txBody>
+      </p:sp>
+      <p:sp>
+        <p:nvSpPr>
+          <p:cNvPr id="35" name="Cell4_G00"/>
+          <p:cNvSpPr txBox="1"/>
+          <p:nvPr/>
+        </p:nvSpPr>
+        <p:spPr>
+          <a:xfrm>
+            <a:off x="8001000" y="15892272"/>
+            <a:ext cx="5943600" cy="196596"/>
+          </a:xfrm>
+          <a:prstGeom prst="rect">
+            <a:avLst/>
+          </a:prstGeom>
+          <a:noFill/>
+        </p:spPr>
+        <p:txBody>
+          <a:bodyPr wrap="square" lIns="27432" tIns="27432" rIns="27432" bIns="27432" anchor="ctr">
+            <a:noAutofit/>
+          </a:bodyPr>
+          <a:lstStyle/>
+          <a:p>
+            <a:pPr algn="l">
+              <a:lnSpc>
+                <a:spcPct val="105000"/>
+              </a:lnSpc>
+              <a:spcAft>
+                <a:spcPts val="0"/>
+              </a:spcAft>
+            </a:pPr>
+            <a:r>
+              <a:rPr sz="1000" b="1" i="0">
+                <a:solidFill>
+                  <a:srgbClr val="32006E"/>
+                </a:solidFill>
+                <a:latin typeface="Uni Sans Book"/>
+              </a:rPr>
+              <a:t>THE DATA PATH</a:t>
             </a:r>
           </a:p>
         </p:txBody>
       </p:sp>
       <p:cxnSp>
         <p:nvCxnSpPr>
-          <p:cNvPr id="38" name="Connector 37"/>
+          <p:cNvPr id="36" name="Connector 35"/>
           <p:cNvCxnSpPr/>
           <p:nvPr/>
         </p:nvCxnSpPr>
         <p:spPr>
           <a:xfrm>
-            <a:off x="1371600" y="16230600"/>
+            <a:off x="8001000" y="16070580"/>
             <a:ext cx="5943600" cy="0"/>
           </a:xfrm>
           <a:prstGeom prst="line">
@@ -10028,13 +10109,13 @@
       </p:cxnSp>
       <p:sp>
         <p:nvSpPr>
-          <p:cNvPr id="39" name="Cell4_R02C0"/>
+          <p:cNvPr id="37" name="Cell4_R01C0"/>
           <p:cNvSpPr txBox="1"/>
           <p:nvPr/>
         </p:nvSpPr>
         <p:spPr>
           <a:xfrm>
-            <a:off x="1371600" y="16267176"/>
+            <a:off x="8001000" y="16107155"/>
             <a:ext cx="2523744" cy="178307"/>
           </a:xfrm>
           <a:prstGeom prst="rect">
@@ -10063,20 +10144,20 @@
                 </a:solidFill>
                 <a:latin typeface="Open Sans"/>
               </a:rPr>
-              <a:t>2 · images as uint8, cast per batch</a:t>
-            </a:r>
-          </a:p>
-        </p:txBody>
-      </p:sp>
-      <p:sp>
-        <p:nvSpPr>
-          <p:cNvPr id="40" name="Cell4_R02C1"/>
+              <a:t>1 · dataset on the card, no loader</a:t>
+            </a:r>
+          </a:p>
+        </p:txBody>
+      </p:sp>
+      <p:sp>
+        <p:nvSpPr>
+          <p:cNvPr id="38" name="Cell4_R01C1"/>
           <p:cNvSpPr txBox="1"/>
           <p:nvPr/>
         </p:nvSpPr>
         <p:spPr>
           <a:xfrm>
-            <a:off x="3986783" y="16267176"/>
+            <a:off x="10616184" y="16107155"/>
             <a:ext cx="2167127" cy="178307"/>
           </a:xfrm>
           <a:prstGeom prst="rect">
@@ -10105,20 +10186,29 @@
                 </a:solidFill>
                 <a:latin typeface="Open Sans"/>
               </a:rPr>
-              <a:t>4× less memory, free cast</a:t>
-            </a:r>
-          </a:p>
-        </p:txBody>
-      </p:sp>
-      <p:sp>
-        <p:nvSpPr>
-          <p:cNvPr id="41" name="Cell4_R02C2"/>
+              <a:t>13.8k → </a:t>
+            </a:r>
+            <a:r>
+              <a:rPr sz="1100" b="1" i="0">
+                <a:solidFill>
+                  <a:srgbClr val="1F1F24"/>
+                </a:solidFill>
+                <a:latin typeface="Open Sans"/>
+              </a:rPr>
+              <a:t>18.5k img/s</a:t>
+            </a:r>
+          </a:p>
+        </p:txBody>
+      </p:sp>
+      <p:sp>
+        <p:nvSpPr>
+          <p:cNvPr id="39" name="Cell4_R01C2"/>
           <p:cNvSpPr txBox="1"/>
           <p:nvPr/>
         </p:nvSpPr>
         <p:spPr>
           <a:xfrm>
-            <a:off x="6245352" y="16267176"/>
+            <a:off x="12874752" y="16107155"/>
             <a:ext cx="978408" cy="178307"/>
           </a:xfrm>
           <a:prstGeom prst="rect">
@@ -10154,13 +10244,13 @@
       </p:sp>
       <p:cxnSp>
         <p:nvCxnSpPr>
-          <p:cNvPr id="42" name="Connector 41"/>
+          <p:cNvPr id="40" name="Connector 39"/>
           <p:cNvCxnSpPr/>
           <p:nvPr/>
         </p:nvCxnSpPr>
         <p:spPr>
           <a:xfrm>
-            <a:off x="1371600" y="16445484"/>
+            <a:off x="8001000" y="16285463"/>
             <a:ext cx="5943600" cy="0"/>
           </a:xfrm>
           <a:prstGeom prst="line">
@@ -10189,13 +10279,13 @@
       </p:cxnSp>
       <p:sp>
         <p:nvSpPr>
-          <p:cNvPr id="43" name="Cell4_R03C0"/>
+          <p:cNvPr id="41" name="Cell4_R02C0"/>
           <p:cNvSpPr txBox="1"/>
           <p:nvPr/>
         </p:nvSpPr>
         <p:spPr>
           <a:xfrm>
-            <a:off x="1371600" y="16482059"/>
+            <a:off x="8001000" y="16322039"/>
             <a:ext cx="2523744" cy="178307"/>
           </a:xfrm>
           <a:prstGeom prst="rect">
@@ -10224,20 +10314,20 @@
                 </a:solidFill>
                 <a:latin typeface="Open Sans"/>
               </a:rPr>
-              <a:t>3 · augment on the GPU</a:t>
-            </a:r>
-          </a:p>
-        </p:txBody>
-      </p:sp>
-      <p:sp>
-        <p:nvSpPr>
-          <p:cNvPr id="44" name="Cell4_R03C1"/>
+              <a:t>2 · images as uint8, cast per batch</a:t>
+            </a:r>
+          </a:p>
+        </p:txBody>
+      </p:sp>
+      <p:sp>
+        <p:nvSpPr>
+          <p:cNvPr id="42" name="Cell4_R02C1"/>
           <p:cNvSpPr txBox="1"/>
           <p:nvPr/>
         </p:nvSpPr>
         <p:spPr>
           <a:xfrm>
-            <a:off x="3986783" y="16482059"/>
+            <a:off x="10616184" y="16322039"/>
             <a:ext cx="2167127" cy="178307"/>
           </a:xfrm>
           <a:prstGeom prst="rect">
@@ -10266,20 +10356,20 @@
                 </a:solidFill>
                 <a:latin typeface="Open Sans"/>
               </a:rPr>
-              <a:t>no PIL, no host copy</a:t>
-            </a:r>
-          </a:p>
-        </p:txBody>
-      </p:sp>
-      <p:sp>
-        <p:nvSpPr>
-          <p:cNvPr id="45" name="Cell4_R03C2"/>
+              <a:t>4× less memory, free cast</a:t>
+            </a:r>
+          </a:p>
+        </p:txBody>
+      </p:sp>
+      <p:sp>
+        <p:nvSpPr>
+          <p:cNvPr id="43" name="Cell4_R02C2"/>
           <p:cNvSpPr txBox="1"/>
           <p:nvPr/>
         </p:nvSpPr>
         <p:spPr>
           <a:xfrm>
-            <a:off x="6245352" y="16482059"/>
+            <a:off x="12874752" y="16322039"/>
             <a:ext cx="978408" cy="178307"/>
           </a:xfrm>
           <a:prstGeom prst="rect">
@@ -10315,13 +10405,13 @@
       </p:sp>
       <p:cxnSp>
         <p:nvCxnSpPr>
-          <p:cNvPr id="46" name="Connector 45"/>
+          <p:cNvPr id="44" name="Connector 43"/>
           <p:cNvCxnSpPr/>
           <p:nvPr/>
         </p:nvCxnSpPr>
         <p:spPr>
           <a:xfrm>
-            <a:off x="1371600" y="16660368"/>
+            <a:off x="8001000" y="16500347"/>
             <a:ext cx="5943600" cy="0"/>
           </a:xfrm>
           <a:prstGeom prst="line">
@@ -10350,13 +10440,13 @@
       </p:cxnSp>
       <p:sp>
         <p:nvSpPr>
-          <p:cNvPr id="47" name="Cell4_R04C0"/>
+          <p:cNvPr id="45" name="Cell4_R03C0"/>
           <p:cNvSpPr txBox="1"/>
           <p:nvPr/>
         </p:nvSpPr>
         <p:spPr>
           <a:xfrm>
-            <a:off x="1371600" y="16696944"/>
+            <a:off x="8001000" y="16536923"/>
             <a:ext cx="2523744" cy="178307"/>
           </a:xfrm>
           <a:prstGeom prst="rect">
@@ -10385,20 +10475,20 @@
                 </a:solidFill>
                 <a:latin typeface="Open Sans"/>
               </a:rPr>
-              <a:t>4 · tokenize once, up front</a:t>
-            </a:r>
-          </a:p>
-        </p:txBody>
-      </p:sp>
-      <p:sp>
-        <p:nvSpPr>
-          <p:cNvPr id="48" name="Cell4_R04C1"/>
+              <a:t>3 · augment on the GPU</a:t>
+            </a:r>
+          </a:p>
+        </p:txBody>
+      </p:sp>
+      <p:sp>
+        <p:nvSpPr>
+          <p:cNvPr id="46" name="Cell4_R03C1"/>
           <p:cNvSpPr txBox="1"/>
           <p:nvPr/>
         </p:nvSpPr>
         <p:spPr>
           <a:xfrm>
-            <a:off x="3986783" y="16696944"/>
+            <a:off x="10616184" y="16536923"/>
             <a:ext cx="2167127" cy="178307"/>
           </a:xfrm>
           <a:prstGeom prst="rect">
@@ -10427,29 +10517,20 @@
                 </a:solidFill>
                 <a:latin typeface="Open Sans"/>
               </a:rPr>
-              <a:t>53 s vs 85 min — </a:t>
-            </a:r>
-            <a:r>
-              <a:rPr sz="1100" b="1" i="0">
-                <a:solidFill>
-                  <a:srgbClr val="1F1F24"/>
-                </a:solidFill>
-                <a:latin typeface="Open Sans"/>
-              </a:rPr>
-              <a:t>96×</a:t>
-            </a:r>
-          </a:p>
-        </p:txBody>
-      </p:sp>
-      <p:sp>
-        <p:nvSpPr>
-          <p:cNvPr id="49" name="Cell4_R04C2"/>
+              <a:t>no PIL, no host copy</a:t>
+            </a:r>
+          </a:p>
+        </p:txBody>
+      </p:sp>
+      <p:sp>
+        <p:nvSpPr>
+          <p:cNvPr id="47" name="Cell4_R03C2"/>
           <p:cNvSpPr txBox="1"/>
           <p:nvPr/>
         </p:nvSpPr>
         <p:spPr>
           <a:xfrm>
-            <a:off x="6245352" y="16696944"/>
+            <a:off x="12874752" y="16536923"/>
             <a:ext cx="978408" cy="178307"/>
           </a:xfrm>
           <a:prstGeom prst="rect">
@@ -10485,13 +10566,13 @@
       </p:sp>
       <p:cxnSp>
         <p:nvCxnSpPr>
-          <p:cNvPr id="50" name="Connector 49"/>
+          <p:cNvPr id="48" name="Connector 47"/>
           <p:cNvCxnSpPr/>
           <p:nvPr/>
         </p:nvCxnSpPr>
         <p:spPr>
           <a:xfrm>
-            <a:off x="1371600" y="16875252"/>
+            <a:off x="8001000" y="16715232"/>
             <a:ext cx="5943600" cy="0"/>
           </a:xfrm>
           <a:prstGeom prst="line">
@@ -10520,13 +10601,13 @@
       </p:cxnSp>
       <p:sp>
         <p:nvSpPr>
-          <p:cNvPr id="51" name="Cell4_R05C0"/>
+          <p:cNvPr id="49" name="Cell4_R04C0"/>
           <p:cNvSpPr txBox="1"/>
           <p:nvPr/>
         </p:nvSpPr>
         <p:spPr>
           <a:xfrm>
-            <a:off x="1371600" y="16911828"/>
+            <a:off x="8001000" y="16751808"/>
             <a:ext cx="2523744" cy="178307"/>
           </a:xfrm>
           <a:prstGeom prst="rect">
@@ -10555,20 +10636,20 @@
                 </a:solidFill>
                 <a:latin typeface="Open Sans"/>
               </a:rPr>
-              <a:t>5 · token dtype from the vocabulary</a:t>
-            </a:r>
-          </a:p>
-        </p:txBody>
-      </p:sp>
-      <p:sp>
-        <p:nvSpPr>
-          <p:cNvPr id="52" name="Cell4_R05C1"/>
+              <a:t>4 · tokenize once, up front</a:t>
+            </a:r>
+          </a:p>
+        </p:txBody>
+      </p:sp>
+      <p:sp>
+        <p:nvSpPr>
+          <p:cNvPr id="50" name="Cell4_R04C1"/>
           <p:cNvSpPr txBox="1"/>
           <p:nvPr/>
         </p:nvSpPr>
         <p:spPr>
           <a:xfrm>
-            <a:off x="3986783" y="16911828"/>
+            <a:off x="10616184" y="16751808"/>
             <a:ext cx="2167127" cy="178307"/>
           </a:xfrm>
           <a:prstGeom prst="rect">
@@ -10597,7 +10678,7 @@
                 </a:solidFill>
                 <a:latin typeface="Open Sans"/>
               </a:rPr>
-              <a:t>16k → </a:t>
+              <a:t>53 s vs 85 min — </a:t>
             </a:r>
             <a:r>
               <a:rPr sz="1100" b="1" i="0">
@@ -10606,20 +10687,20 @@
                 </a:solidFill>
                 <a:latin typeface="Open Sans"/>
               </a:rPr>
-              <a:t>2 bytes a token</a:t>
-            </a:r>
-          </a:p>
-        </p:txBody>
-      </p:sp>
-      <p:sp>
-        <p:nvSpPr>
-          <p:cNvPr id="53" name="Cell4_R05C2"/>
+              <a:t>96×</a:t>
+            </a:r>
+          </a:p>
+        </p:txBody>
+      </p:sp>
+      <p:sp>
+        <p:nvSpPr>
+          <p:cNvPr id="51" name="Cell4_R04C2"/>
           <p:cNvSpPr txBox="1"/>
           <p:nvPr/>
         </p:nvSpPr>
         <p:spPr>
           <a:xfrm>
-            <a:off x="6245352" y="16911828"/>
+            <a:off x="12874752" y="16751808"/>
             <a:ext cx="978408" cy="178307"/>
           </a:xfrm>
           <a:prstGeom prst="rect">
@@ -10653,57 +10734,15 @@
           </a:p>
         </p:txBody>
       </p:sp>
-      <p:sp>
-        <p:nvSpPr>
-          <p:cNvPr id="54" name="Cell4_G06"/>
-          <p:cNvSpPr txBox="1"/>
-          <p:nvPr/>
-        </p:nvSpPr>
-        <p:spPr>
-          <a:xfrm>
-            <a:off x="1371600" y="17126712"/>
-            <a:ext cx="5943600" cy="196596"/>
-          </a:xfrm>
-          <a:prstGeom prst="rect">
-            <a:avLst/>
-          </a:prstGeom>
-          <a:noFill/>
-        </p:spPr>
-        <p:txBody>
-          <a:bodyPr wrap="square" lIns="27432" tIns="27432" rIns="27432" bIns="27432" anchor="ctr">
-            <a:noAutofit/>
-          </a:bodyPr>
-          <a:lstStyle/>
-          <a:p>
-            <a:pPr algn="l">
-              <a:lnSpc>
-                <a:spcPct val="105000"/>
-              </a:lnSpc>
-              <a:spcAft>
-                <a:spcPts val="0"/>
-              </a:spcAft>
-            </a:pPr>
-            <a:r>
-              <a:rPr sz="1000" b="1" i="0">
-                <a:solidFill>
-                  <a:srgbClr val="32006E"/>
-                </a:solidFill>
-                <a:latin typeface="Uni Sans Book"/>
-              </a:rPr>
-              <a:t>PRECISION AND KERNELS</a:t>
-            </a:r>
-          </a:p>
-        </p:txBody>
-      </p:sp>
       <p:cxnSp>
         <p:nvCxnSpPr>
-          <p:cNvPr id="55" name="Connector 54"/>
+          <p:cNvPr id="52" name="Connector 51"/>
           <p:cNvCxnSpPr/>
           <p:nvPr/>
         </p:nvCxnSpPr>
         <p:spPr>
           <a:xfrm>
-            <a:off x="1371600" y="17305020"/>
+            <a:off x="8001000" y="16930116"/>
             <a:ext cx="5943600" cy="0"/>
           </a:xfrm>
           <a:prstGeom prst="line">
@@ -10732,13 +10771,13 @@
       </p:cxnSp>
       <p:sp>
         <p:nvSpPr>
-          <p:cNvPr id="56" name="Cell4_R07C0"/>
+          <p:cNvPr id="53" name="Cell4_R05C0"/>
           <p:cNvSpPr txBox="1"/>
           <p:nvPr/>
         </p:nvSpPr>
         <p:spPr>
           <a:xfrm>
-            <a:off x="1371600" y="17341596"/>
+            <a:off x="8001000" y="16966692"/>
             <a:ext cx="2523744" cy="178307"/>
           </a:xfrm>
           <a:prstGeom prst="rect">
@@ -10767,20 +10806,20 @@
                 </a:solidFill>
                 <a:latin typeface="Open Sans"/>
               </a:rPr>
-              <a:t>6 · bf16 autocast, not fp16</a:t>
-            </a:r>
-          </a:p>
-        </p:txBody>
-      </p:sp>
-      <p:sp>
-        <p:nvSpPr>
-          <p:cNvPr id="57" name="Cell4_R07C1"/>
+              <a:t>5 · token dtype from the vocabulary</a:t>
+            </a:r>
+          </a:p>
+        </p:txBody>
+      </p:sp>
+      <p:sp>
+        <p:nvSpPr>
+          <p:cNvPr id="54" name="Cell4_R05C1"/>
           <p:cNvSpPr txBox="1"/>
           <p:nvPr/>
         </p:nvSpPr>
         <p:spPr>
           <a:xfrm>
-            <a:off x="3986783" y="17341596"/>
+            <a:off x="10616184" y="16966692"/>
             <a:ext cx="2167127" cy="178307"/>
           </a:xfrm>
           <a:prstGeom prst="rect">
@@ -10803,35 +10842,35 @@
               </a:spcAft>
             </a:pPr>
             <a:r>
+              <a:rPr sz="1100" b="0" i="0">
+                <a:solidFill>
+                  <a:srgbClr val="1F1F24"/>
+                </a:solidFill>
+                <a:latin typeface="Open Sans"/>
+              </a:rPr>
+              <a:t>16k → </a:t>
+            </a:r>
+            <a:r>
               <a:rPr sz="1100" b="1" i="0">
                 <a:solidFill>
                   <a:srgbClr val="1F1F24"/>
                 </a:solidFill>
                 <a:latin typeface="Open Sans"/>
               </a:rPr>
-              <a:t>1.34×</a:t>
-            </a:r>
-            <a:r>
-              <a:rPr sz="1100" b="0" i="0">
-                <a:solidFill>
-                  <a:srgbClr val="1F1F24"/>
-                </a:solidFill>
-                <a:latin typeface="Open Sans"/>
-              </a:rPr>
-              <a:t> on sm_89, no loss-scale</a:t>
-            </a:r>
-          </a:p>
-        </p:txBody>
-      </p:sp>
-      <p:sp>
-        <p:nvSpPr>
-          <p:cNvPr id="58" name="Cell4_R07C2"/>
+              <a:t>2 bytes a token</a:t>
+            </a:r>
+          </a:p>
+        </p:txBody>
+      </p:sp>
+      <p:sp>
+        <p:nvSpPr>
+          <p:cNvPr id="55" name="Cell4_R05C2"/>
           <p:cNvSpPr txBox="1"/>
           <p:nvPr/>
         </p:nvSpPr>
         <p:spPr>
           <a:xfrm>
-            <a:off x="6245352" y="17341596"/>
+            <a:off x="12874752" y="16966692"/>
             <a:ext cx="978408" cy="178307"/>
           </a:xfrm>
           <a:prstGeom prst="rect">
@@ -10865,15 +10904,57 @@
           </a:p>
         </p:txBody>
       </p:sp>
+      <p:sp>
+        <p:nvSpPr>
+          <p:cNvPr id="56" name="Cell4_G06"/>
+          <p:cNvSpPr txBox="1"/>
+          <p:nvPr/>
+        </p:nvSpPr>
+        <p:spPr>
+          <a:xfrm>
+            <a:off x="8001000" y="17181576"/>
+            <a:ext cx="5943600" cy="196596"/>
+          </a:xfrm>
+          <a:prstGeom prst="rect">
+            <a:avLst/>
+          </a:prstGeom>
+          <a:noFill/>
+        </p:spPr>
+        <p:txBody>
+          <a:bodyPr wrap="square" lIns="27432" tIns="27432" rIns="27432" bIns="27432" anchor="ctr">
+            <a:noAutofit/>
+          </a:bodyPr>
+          <a:lstStyle/>
+          <a:p>
+            <a:pPr algn="l">
+              <a:lnSpc>
+                <a:spcPct val="105000"/>
+              </a:lnSpc>
+              <a:spcAft>
+                <a:spcPts val="0"/>
+              </a:spcAft>
+            </a:pPr>
+            <a:r>
+              <a:rPr sz="1000" b="1" i="0">
+                <a:solidFill>
+                  <a:srgbClr val="32006E"/>
+                </a:solidFill>
+                <a:latin typeface="Uni Sans Book"/>
+              </a:rPr>
+              <a:t>PRECISION AND KERNELS</a:t>
+            </a:r>
+          </a:p>
+        </p:txBody>
+      </p:sp>
       <p:cxnSp>
         <p:nvCxnSpPr>
-          <p:cNvPr id="59" name="Connector 58"/>
+          <p:cNvPr id="57" name="Connector 56"/>
           <p:cNvCxnSpPr/>
           <p:nvPr/>
         </p:nvCxnSpPr>
         <p:spPr>
           <a:xfrm>
-            <a:off x="1371600" y="17519904"/>
+            <a:off x="8001000" y="17359884"/>
             <a:ext cx="5943600" cy="0"/>
           </a:xfrm>
           <a:prstGeom prst="line">
@@ -10902,13 +10983,13 @@
       </p:cxnSp>
       <p:sp>
         <p:nvSpPr>
-          <p:cNvPr id="60" name="Cell4_R08C0"/>
+          <p:cNvPr id="58" name="Cell4_R07C0"/>
           <p:cNvSpPr txBox="1"/>
           <p:nvPr/>
         </p:nvSpPr>
         <p:spPr>
           <a:xfrm>
-            <a:off x="1371600" y="17556480"/>
+            <a:off x="8001000" y="17396460"/>
             <a:ext cx="2523744" cy="178307"/>
           </a:xfrm>
           <a:prstGeom prst="rect">
@@ -10937,20 +11018,20 @@
                 </a:solidFill>
                 <a:latin typeface="Open Sans"/>
               </a:rPr>
-              <a:t>7 · channels_last for CNNs, bf16 only</a:t>
-            </a:r>
-          </a:p>
-        </p:txBody>
-      </p:sp>
-      <p:sp>
-        <p:nvSpPr>
-          <p:cNvPr id="61" name="Cell4_R08C1"/>
+              <a:t>6 · bf16 autocast, not fp16</a:t>
+            </a:r>
+          </a:p>
+        </p:txBody>
+      </p:sp>
+      <p:sp>
+        <p:nvSpPr>
+          <p:cNvPr id="59" name="Cell4_R07C1"/>
           <p:cNvSpPr txBox="1"/>
           <p:nvPr/>
         </p:nvSpPr>
         <p:spPr>
           <a:xfrm>
-            <a:off x="3986783" y="17556480"/>
+            <a:off x="10616184" y="17396460"/>
             <a:ext cx="2167127" cy="178307"/>
           </a:xfrm>
           <a:prstGeom prst="rect">
@@ -10973,35 +11054,35 @@
               </a:spcAft>
             </a:pPr>
             <a:r>
+              <a:rPr sz="1100" b="1" i="0">
+                <a:solidFill>
+                  <a:srgbClr val="1F1F24"/>
+                </a:solidFill>
+                <a:latin typeface="Open Sans"/>
+              </a:rPr>
+              <a:t>1.34×</a:t>
+            </a:r>
+            <a:r>
               <a:rPr sz="1100" b="0" i="0">
                 <a:solidFill>
                   <a:srgbClr val="1F1F24"/>
                 </a:solidFill>
                 <a:latin typeface="Open Sans"/>
               </a:rPr>
-              <a:t>fp16 + it is </a:t>
-            </a:r>
-            <a:r>
-              <a:rPr sz="1100" b="1" i="0">
-                <a:solidFill>
-                  <a:srgbClr val="1F1F24"/>
-                </a:solidFill>
-                <a:latin typeface="Open Sans"/>
-              </a:rPr>
-              <a:t>3.5× slower</a:t>
-            </a:r>
-          </a:p>
-        </p:txBody>
-      </p:sp>
-      <p:sp>
-        <p:nvSpPr>
-          <p:cNvPr id="62" name="Cell4_R08C2"/>
+              <a:t> on sm_89, no loss-scale</a:t>
+            </a:r>
+          </a:p>
+        </p:txBody>
+      </p:sp>
+      <p:sp>
+        <p:nvSpPr>
+          <p:cNvPr id="60" name="Cell4_R07C2"/>
           <p:cNvSpPr txBox="1"/>
           <p:nvPr/>
         </p:nvSpPr>
         <p:spPr>
           <a:xfrm>
-            <a:off x="6245352" y="17556480"/>
+            <a:off x="12874752" y="17396460"/>
             <a:ext cx="978408" cy="178307"/>
           </a:xfrm>
           <a:prstGeom prst="rect">
@@ -11030,20 +11111,20 @@
                 </a:solidFill>
                 <a:latin typeface="Open Sans"/>
               </a:rPr>
-              <a:t>guarded</a:t>
+              <a:t>yes</a:t>
             </a:r>
           </a:p>
         </p:txBody>
       </p:sp>
       <p:cxnSp>
         <p:nvCxnSpPr>
-          <p:cNvPr id="63" name="Connector 62"/>
+          <p:cNvPr id="61" name="Connector 60"/>
           <p:cNvCxnSpPr/>
           <p:nvPr/>
         </p:nvCxnSpPr>
         <p:spPr>
           <a:xfrm>
-            <a:off x="1371600" y="17734788"/>
+            <a:off x="8001000" y="17574768"/>
             <a:ext cx="5943600" cy="0"/>
           </a:xfrm>
           <a:prstGeom prst="line">
@@ -11072,13 +11153,13 @@
       </p:cxnSp>
       <p:sp>
         <p:nvSpPr>
-          <p:cNvPr id="64" name="Cell4_R09C0"/>
+          <p:cNvPr id="62" name="Cell4_R08C0"/>
           <p:cNvSpPr txBox="1"/>
           <p:nvPr/>
         </p:nvSpPr>
         <p:spPr>
           <a:xfrm>
-            <a:off x="1371600" y="17771364"/>
+            <a:off x="8001000" y="17611344"/>
             <a:ext cx="2523744" cy="178307"/>
           </a:xfrm>
           <a:prstGeom prst="rect">
@@ -11107,20 +11188,20 @@
                 </a:solidFill>
                 <a:latin typeface="Open Sans"/>
               </a:rPr>
-              <a:t>8 · channels_last for ViTs</a:t>
-            </a:r>
-          </a:p>
-        </p:txBody>
-      </p:sp>
-      <p:sp>
-        <p:nvSpPr>
-          <p:cNvPr id="65" name="Cell4_R09C1"/>
+              <a:t>7 · channels_last for CNNs, bf16 only</a:t>
+            </a:r>
+          </a:p>
+        </p:txBody>
+      </p:sp>
+      <p:sp>
+        <p:nvSpPr>
+          <p:cNvPr id="63" name="Cell4_R08C1"/>
           <p:cNvSpPr txBox="1"/>
           <p:nvPr/>
         </p:nvSpPr>
         <p:spPr>
           <a:xfrm>
-            <a:off x="3986783" y="17771364"/>
+            <a:off x="10616184" y="17611344"/>
             <a:ext cx="2167127" cy="178307"/>
           </a:xfrm>
           <a:prstGeom prst="rect">
@@ -11149,20 +11230,29 @@
                 </a:solidFill>
                 <a:latin typeface="Open Sans"/>
               </a:rPr>
-              <a:t>a no-op on a transformer</a:t>
-            </a:r>
-          </a:p>
-        </p:txBody>
-      </p:sp>
-      <p:sp>
-        <p:nvSpPr>
-          <p:cNvPr id="66" name="Cell4_R09C2"/>
+              <a:t>fp16 + it is </a:t>
+            </a:r>
+            <a:r>
+              <a:rPr sz="1100" b="1" i="0">
+                <a:solidFill>
+                  <a:srgbClr val="1F1F24"/>
+                </a:solidFill>
+                <a:latin typeface="Open Sans"/>
+              </a:rPr>
+              <a:t>3.5× slower</a:t>
+            </a:r>
+          </a:p>
+        </p:txBody>
+      </p:sp>
+      <p:sp>
+        <p:nvSpPr>
+          <p:cNvPr id="64" name="Cell4_R08C2"/>
           <p:cNvSpPr txBox="1"/>
           <p:nvPr/>
         </p:nvSpPr>
         <p:spPr>
           <a:xfrm>
-            <a:off x="6245352" y="17771364"/>
+            <a:off x="12874752" y="17611344"/>
             <a:ext cx="978408" cy="178307"/>
           </a:xfrm>
           <a:prstGeom prst="rect">
@@ -11187,24 +11277,24 @@
             <a:r>
               <a:rPr sz="1100" b="1" i="0">
                 <a:solidFill>
-                  <a:srgbClr val="B03A2E"/>
-                </a:solidFill>
-                <a:latin typeface="Open Sans"/>
-              </a:rPr>
-              <a:t>no</a:t>
+                  <a:srgbClr val="1F7A4C"/>
+                </a:solidFill>
+                <a:latin typeface="Open Sans"/>
+              </a:rPr>
+              <a:t>guarded</a:t>
             </a:r>
           </a:p>
         </p:txBody>
       </p:sp>
       <p:cxnSp>
         <p:nvCxnSpPr>
-          <p:cNvPr id="67" name="Connector 66"/>
+          <p:cNvPr id="65" name="Connector 64"/>
           <p:cNvCxnSpPr/>
           <p:nvPr/>
         </p:nvCxnSpPr>
         <p:spPr>
           <a:xfrm>
-            <a:off x="1371600" y="17949672"/>
+            <a:off x="8001000" y="17789652"/>
             <a:ext cx="5943600" cy="0"/>
           </a:xfrm>
           <a:prstGeom prst="line">
@@ -11233,13 +11323,13 @@
       </p:cxnSp>
       <p:sp>
         <p:nvSpPr>
-          <p:cNvPr id="68" name="Cell4_R010C0"/>
+          <p:cNvPr id="66" name="Cell4_R09C0"/>
           <p:cNvSpPr txBox="1"/>
           <p:nvPr/>
         </p:nvSpPr>
         <p:spPr>
           <a:xfrm>
-            <a:off x="1371600" y="17986248"/>
+            <a:off x="8001000" y="17826227"/>
             <a:ext cx="2523744" cy="178307"/>
           </a:xfrm>
           <a:prstGeom prst="rect">
@@ -11268,20 +11358,20 @@
                 </a:solidFill>
                 <a:latin typeface="Open Sans"/>
               </a:rPr>
-              <a:t>9 · TF32 for matmul and cuDNN</a:t>
-            </a:r>
-          </a:p>
-        </p:txBody>
-      </p:sp>
-      <p:sp>
-        <p:nvSpPr>
-          <p:cNvPr id="69" name="Cell4_R010C1"/>
+              <a:t>8 · channels_last for ViTs</a:t>
+            </a:r>
+          </a:p>
+        </p:txBody>
+      </p:sp>
+      <p:sp>
+        <p:nvSpPr>
+          <p:cNvPr id="67" name="Cell4_R09C1"/>
           <p:cNvSpPr txBox="1"/>
           <p:nvPr/>
         </p:nvSpPr>
         <p:spPr>
           <a:xfrm>
-            <a:off x="3986783" y="17986248"/>
+            <a:off x="10616184" y="17826227"/>
             <a:ext cx="2167127" cy="178307"/>
           </a:xfrm>
           <a:prstGeom prst="rect">
@@ -11310,20 +11400,20 @@
                 </a:solidFill>
                 <a:latin typeface="Open Sans"/>
               </a:rPr>
-              <a:t>free on Ampere and later</a:t>
-            </a:r>
-          </a:p>
-        </p:txBody>
-      </p:sp>
-      <p:sp>
-        <p:nvSpPr>
-          <p:cNvPr id="70" name="Cell4_R010C2"/>
+              <a:t>a no-op on a transformer</a:t>
+            </a:r>
+          </a:p>
+        </p:txBody>
+      </p:sp>
+      <p:sp>
+        <p:nvSpPr>
+          <p:cNvPr id="68" name="Cell4_R09C2"/>
           <p:cNvSpPr txBox="1"/>
           <p:nvPr/>
         </p:nvSpPr>
         <p:spPr>
           <a:xfrm>
-            <a:off x="6245352" y="17986248"/>
+            <a:off x="12874752" y="17826227"/>
             <a:ext cx="978408" cy="178307"/>
           </a:xfrm>
           <a:prstGeom prst="rect">
@@ -11348,24 +11438,24 @@
             <a:r>
               <a:rPr sz="1100" b="1" i="0">
                 <a:solidFill>
-                  <a:srgbClr val="1F7A4C"/>
-                </a:solidFill>
-                <a:latin typeface="Open Sans"/>
-              </a:rPr>
-              <a:t>yes</a:t>
+                  <a:srgbClr val="B03A2E"/>
+                </a:solidFill>
+                <a:latin typeface="Open Sans"/>
+              </a:rPr>
+              <a:t>no</a:t>
             </a:r>
           </a:p>
         </p:txBody>
       </p:sp>
       <p:cxnSp>
         <p:nvCxnSpPr>
-          <p:cNvPr id="71" name="Connector 70"/>
+          <p:cNvPr id="69" name="Connector 68"/>
           <p:cNvCxnSpPr/>
           <p:nvPr/>
         </p:nvCxnSpPr>
         <p:spPr>
           <a:xfrm>
-            <a:off x="1371600" y="18164556"/>
+            <a:off x="8001000" y="18004535"/>
             <a:ext cx="5943600" cy="0"/>
           </a:xfrm>
           <a:prstGeom prst="line">
@@ -11394,13 +11484,13 @@
       </p:cxnSp>
       <p:sp>
         <p:nvSpPr>
-          <p:cNvPr id="72" name="Cell4_R011C0"/>
+          <p:cNvPr id="70" name="Cell4_R010C0"/>
           <p:cNvSpPr txBox="1"/>
           <p:nvPr/>
         </p:nvSpPr>
         <p:spPr>
           <a:xfrm>
-            <a:off x="1371600" y="18201132"/>
+            <a:off x="8001000" y="18041111"/>
             <a:ext cx="2523744" cy="178307"/>
           </a:xfrm>
           <a:prstGeom prst="rect">
@@ -11429,20 +11519,20 @@
                 </a:solidFill>
                 <a:latin typeface="Open Sans"/>
               </a:rPr>
-              <a:t>10 · cudnn.benchmark = True</a:t>
-            </a:r>
-          </a:p>
-        </p:txBody>
-      </p:sp>
-      <p:sp>
-        <p:nvSpPr>
-          <p:cNvPr id="73" name="Cell4_R011C1"/>
+              <a:t>9 · TF32 for matmul and cuDNN</a:t>
+            </a:r>
+          </a:p>
+        </p:txBody>
+      </p:sp>
+      <p:sp>
+        <p:nvSpPr>
+          <p:cNvPr id="71" name="Cell4_R010C1"/>
           <p:cNvSpPr txBox="1"/>
           <p:nvPr/>
         </p:nvSpPr>
         <p:spPr>
           <a:xfrm>
-            <a:off x="3986783" y="18201132"/>
+            <a:off x="10616184" y="18041111"/>
             <a:ext cx="2167127" cy="178307"/>
           </a:xfrm>
           <a:prstGeom prst="rect">
@@ -11471,20 +11561,20 @@
                 </a:solidFill>
                 <a:latin typeface="Open Sans"/>
               </a:rPr>
-              <a:t>worth it when shapes are fixed</a:t>
-            </a:r>
-          </a:p>
-        </p:txBody>
-      </p:sp>
-      <p:sp>
-        <p:nvSpPr>
-          <p:cNvPr id="74" name="Cell4_R011C2"/>
+              <a:t>free on Ampere and later</a:t>
+            </a:r>
+          </a:p>
+        </p:txBody>
+      </p:sp>
+      <p:sp>
+        <p:nvSpPr>
+          <p:cNvPr id="72" name="Cell4_R010C2"/>
           <p:cNvSpPr txBox="1"/>
           <p:nvPr/>
         </p:nvSpPr>
         <p:spPr>
           <a:xfrm>
-            <a:off x="6245352" y="18201132"/>
+            <a:off x="12874752" y="18041111"/>
             <a:ext cx="978408" cy="178307"/>
           </a:xfrm>
           <a:prstGeom prst="rect">
@@ -11518,141 +11608,15 @@
           </a:p>
         </p:txBody>
       </p:sp>
-      <p:sp>
-        <p:nvSpPr>
-          <p:cNvPr id="75" name="Cell4_H10"/>
-          <p:cNvSpPr txBox="1"/>
-          <p:nvPr/>
-        </p:nvSpPr>
-        <p:spPr>
-          <a:xfrm>
-            <a:off x="7863840" y="15617952"/>
-            <a:ext cx="1783080" cy="201168"/>
-          </a:xfrm>
-          <a:prstGeom prst="rect">
-            <a:avLst/>
-          </a:prstGeom>
-          <a:noFill/>
-        </p:spPr>
-        <p:txBody>
-          <a:bodyPr wrap="square" lIns="27432" tIns="27432" rIns="27432" bIns="27432" anchor="t">
-            <a:noAutofit/>
-          </a:bodyPr>
-          <a:lstStyle/>
-          <a:p>
-            <a:pPr algn="l">
-              <a:lnSpc>
-                <a:spcPct val="105000"/>
-              </a:lnSpc>
-              <a:spcAft>
-                <a:spcPts val="0"/>
-              </a:spcAft>
-            </a:pPr>
-            <a:r>
-              <a:rPr sz="1000" b="1" i="0">
-                <a:solidFill>
-                  <a:srgbClr val="5E5A66"/>
-                </a:solidFill>
-                <a:latin typeface="Uni Sans Book"/>
-              </a:rPr>
-              <a:t>WHAT CHANGED</a:t>
-            </a:r>
-          </a:p>
-        </p:txBody>
-      </p:sp>
-      <p:sp>
-        <p:nvSpPr>
-          <p:cNvPr id="76" name="Cell4_H11"/>
-          <p:cNvSpPr txBox="1"/>
-          <p:nvPr/>
-        </p:nvSpPr>
-        <p:spPr>
-          <a:xfrm>
-            <a:off x="10479024" y="15617952"/>
-            <a:ext cx="1783080" cy="201168"/>
-          </a:xfrm>
-          <a:prstGeom prst="rect">
-            <a:avLst/>
-          </a:prstGeom>
-          <a:noFill/>
-        </p:spPr>
-        <p:txBody>
-          <a:bodyPr wrap="square" lIns="27432" tIns="27432" rIns="27432" bIns="27432" anchor="t">
-            <a:noAutofit/>
-          </a:bodyPr>
-          <a:lstStyle/>
-          <a:p>
-            <a:pPr algn="l">
-              <a:lnSpc>
-                <a:spcPct val="105000"/>
-              </a:lnSpc>
-              <a:spcAft>
-                <a:spcPts val="0"/>
-              </a:spcAft>
-            </a:pPr>
-            <a:r>
-              <a:rPr sz="1000" b="1" i="0">
-                <a:solidFill>
-                  <a:srgbClr val="5E5A66"/>
-                </a:solidFill>
-                <a:latin typeface="Uni Sans Book"/>
-              </a:rPr>
-              <a:t>MEASURED</a:t>
-            </a:r>
-          </a:p>
-        </p:txBody>
-      </p:sp>
-      <p:sp>
-        <p:nvSpPr>
-          <p:cNvPr id="77" name="Cell4_H12"/>
-          <p:cNvSpPr txBox="1"/>
-          <p:nvPr/>
-        </p:nvSpPr>
-        <p:spPr>
-          <a:xfrm>
-            <a:off x="12737592" y="15617952"/>
-            <a:ext cx="1783080" cy="201168"/>
-          </a:xfrm>
-          <a:prstGeom prst="rect">
-            <a:avLst/>
-          </a:prstGeom>
-          <a:noFill/>
-        </p:spPr>
-        <p:txBody>
-          <a:bodyPr wrap="square" lIns="27432" tIns="27432" rIns="27432" bIns="27432" anchor="t">
-            <a:noAutofit/>
-          </a:bodyPr>
-          <a:lstStyle/>
-          <a:p>
-            <a:pPr algn="l">
-              <a:lnSpc>
-                <a:spcPct val="105000"/>
-              </a:lnSpc>
-              <a:spcAft>
-                <a:spcPts val="0"/>
-              </a:spcAft>
-            </a:pPr>
-            <a:r>
-              <a:rPr sz="1000" b="1" i="0">
-                <a:solidFill>
-                  <a:srgbClr val="5E5A66"/>
-                </a:solidFill>
-                <a:latin typeface="Uni Sans Book"/>
-              </a:rPr>
-              <a:t>KEPT?</a:t>
-            </a:r>
-          </a:p>
-        </p:txBody>
-      </p:sp>
       <p:cxnSp>
         <p:nvCxnSpPr>
-          <p:cNvPr id="78" name="Connector 77"/>
+          <p:cNvPr id="73" name="Connector 72"/>
           <p:cNvCxnSpPr/>
           <p:nvPr/>
         </p:nvCxnSpPr>
         <p:spPr>
           <a:xfrm>
-            <a:off x="7863840" y="15800832"/>
+            <a:off x="8001000" y="18219420"/>
             <a:ext cx="5943600" cy="0"/>
           </a:xfrm>
           <a:prstGeom prst="line">
@@ -11681,13 +11645,13 @@
       </p:cxnSp>
       <p:sp>
         <p:nvSpPr>
-          <p:cNvPr id="79" name="Cell4_R10C0"/>
+          <p:cNvPr id="74" name="Cell4_R011C0"/>
           <p:cNvSpPr txBox="1"/>
           <p:nvPr/>
         </p:nvSpPr>
         <p:spPr>
           <a:xfrm>
-            <a:off x="7863840" y="15837408"/>
+            <a:off x="8001000" y="18255996"/>
             <a:ext cx="2523744" cy="178307"/>
           </a:xfrm>
           <a:prstGeom prst="rect">
@@ -11716,20 +11680,20 @@
                 </a:solidFill>
                 <a:latin typeface="Open Sans"/>
               </a:rPr>
-              <a:t>11 · fused SGD and AdamW</a:t>
-            </a:r>
-          </a:p>
-        </p:txBody>
-      </p:sp>
-      <p:sp>
-        <p:nvSpPr>
-          <p:cNvPr id="80" name="Cell4_R10C1"/>
+              <a:t>10 · cudnn.benchmark = True</a:t>
+            </a:r>
+          </a:p>
+        </p:txBody>
+      </p:sp>
+      <p:sp>
+        <p:nvSpPr>
+          <p:cNvPr id="75" name="Cell4_R011C1"/>
           <p:cNvSpPr txBox="1"/>
           <p:nvPr/>
         </p:nvSpPr>
         <p:spPr>
           <a:xfrm>
-            <a:off x="10479024" y="15837408"/>
+            <a:off x="10616184" y="18255996"/>
             <a:ext cx="2167127" cy="178307"/>
           </a:xfrm>
           <a:prstGeom prst="rect">
@@ -11758,20 +11722,20 @@
                 </a:solidFill>
                 <a:latin typeface="Open Sans"/>
               </a:rPr>
-              <a:t>one kernel, not a chain</a:t>
-            </a:r>
-          </a:p>
-        </p:txBody>
-      </p:sp>
-      <p:sp>
-        <p:nvSpPr>
-          <p:cNvPr id="81" name="Cell4_R10C2"/>
+              <a:t>worth it when shapes are fixed</a:t>
+            </a:r>
+          </a:p>
+        </p:txBody>
+      </p:sp>
+      <p:sp>
+        <p:nvSpPr>
+          <p:cNvPr id="76" name="Cell4_R011C2"/>
           <p:cNvSpPr txBox="1"/>
           <p:nvPr/>
         </p:nvSpPr>
         <p:spPr>
           <a:xfrm>
-            <a:off x="12737592" y="15837408"/>
+            <a:off x="12874752" y="18255996"/>
             <a:ext cx="978408" cy="178307"/>
           </a:xfrm>
           <a:prstGeom prst="rect">
@@ -11805,15 +11769,141 @@
           </a:p>
         </p:txBody>
       </p:sp>
+      <p:sp>
+        <p:nvSpPr>
+          <p:cNvPr id="77" name="Cell4_H10"/>
+          <p:cNvSpPr txBox="1"/>
+          <p:nvPr/>
+        </p:nvSpPr>
+        <p:spPr>
+          <a:xfrm>
+            <a:off x="14493240" y="15672816"/>
+            <a:ext cx="1783080" cy="201168"/>
+          </a:xfrm>
+          <a:prstGeom prst="rect">
+            <a:avLst/>
+          </a:prstGeom>
+          <a:noFill/>
+        </p:spPr>
+        <p:txBody>
+          <a:bodyPr wrap="square" lIns="27432" tIns="27432" rIns="27432" bIns="27432" anchor="t">
+            <a:noAutofit/>
+          </a:bodyPr>
+          <a:lstStyle/>
+          <a:p>
+            <a:pPr algn="l">
+              <a:lnSpc>
+                <a:spcPct val="105000"/>
+              </a:lnSpc>
+              <a:spcAft>
+                <a:spcPts val="0"/>
+              </a:spcAft>
+            </a:pPr>
+            <a:r>
+              <a:rPr sz="1000" b="1" i="0">
+                <a:solidFill>
+                  <a:srgbClr val="5E5A66"/>
+                </a:solidFill>
+                <a:latin typeface="Uni Sans Book"/>
+              </a:rPr>
+              <a:t>WHAT CHANGED</a:t>
+            </a:r>
+          </a:p>
+        </p:txBody>
+      </p:sp>
+      <p:sp>
+        <p:nvSpPr>
+          <p:cNvPr id="78" name="Cell4_H11"/>
+          <p:cNvSpPr txBox="1"/>
+          <p:nvPr/>
+        </p:nvSpPr>
+        <p:spPr>
+          <a:xfrm>
+            <a:off x="17108424" y="15672816"/>
+            <a:ext cx="1783080" cy="201168"/>
+          </a:xfrm>
+          <a:prstGeom prst="rect">
+            <a:avLst/>
+          </a:prstGeom>
+          <a:noFill/>
+        </p:spPr>
+        <p:txBody>
+          <a:bodyPr wrap="square" lIns="27432" tIns="27432" rIns="27432" bIns="27432" anchor="t">
+            <a:noAutofit/>
+          </a:bodyPr>
+          <a:lstStyle/>
+          <a:p>
+            <a:pPr algn="l">
+              <a:lnSpc>
+                <a:spcPct val="105000"/>
+              </a:lnSpc>
+              <a:spcAft>
+                <a:spcPts val="0"/>
+              </a:spcAft>
+            </a:pPr>
+            <a:r>
+              <a:rPr sz="1000" b="1" i="0">
+                <a:solidFill>
+                  <a:srgbClr val="5E5A66"/>
+                </a:solidFill>
+                <a:latin typeface="Uni Sans Book"/>
+              </a:rPr>
+              <a:t>MEASURED</a:t>
+            </a:r>
+          </a:p>
+        </p:txBody>
+      </p:sp>
+      <p:sp>
+        <p:nvSpPr>
+          <p:cNvPr id="79" name="Cell4_H12"/>
+          <p:cNvSpPr txBox="1"/>
+          <p:nvPr/>
+        </p:nvSpPr>
+        <p:spPr>
+          <a:xfrm>
+            <a:off x="19366992" y="15672816"/>
+            <a:ext cx="1783080" cy="201168"/>
+          </a:xfrm>
+          <a:prstGeom prst="rect">
+            <a:avLst/>
+          </a:prstGeom>
+          <a:noFill/>
+        </p:spPr>
+        <p:txBody>
+          <a:bodyPr wrap="square" lIns="27432" tIns="27432" rIns="27432" bIns="27432" anchor="t">
+            <a:noAutofit/>
+          </a:bodyPr>
+          <a:lstStyle/>
+          <a:p>
+            <a:pPr algn="l">
+              <a:lnSpc>
+                <a:spcPct val="105000"/>
+              </a:lnSpc>
+              <a:spcAft>
+                <a:spcPts val="0"/>
+              </a:spcAft>
+            </a:pPr>
+            <a:r>
+              <a:rPr sz="1000" b="1" i="0">
+                <a:solidFill>
+                  <a:srgbClr val="5E5A66"/>
+                </a:solidFill>
+                <a:latin typeface="Uni Sans Book"/>
+              </a:rPr>
+              <a:t>KEPT?</a:t>
+            </a:r>
+          </a:p>
+        </p:txBody>
+      </p:sp>
       <p:cxnSp>
         <p:nvCxnSpPr>
-          <p:cNvPr id="82" name="Connector 81"/>
+          <p:cNvPr id="80" name="Connector 79"/>
           <p:cNvCxnSpPr/>
           <p:nvPr/>
         </p:nvCxnSpPr>
         <p:spPr>
           <a:xfrm>
-            <a:off x="7863840" y="16015716"/>
+            <a:off x="14493240" y="15855696"/>
             <a:ext cx="5943600" cy="0"/>
           </a:xfrm>
           <a:prstGeom prst="line">
@@ -11842,13 +11932,13 @@
       </p:cxnSp>
       <p:sp>
         <p:nvSpPr>
-          <p:cNvPr id="83" name="Cell4_R11C0"/>
+          <p:cNvPr id="81" name="Cell4_R10C0"/>
           <p:cNvSpPr txBox="1"/>
           <p:nvPr/>
         </p:nvSpPr>
         <p:spPr>
           <a:xfrm>
-            <a:off x="7863840" y="16052292"/>
+            <a:off x="14493240" y="15892272"/>
             <a:ext cx="2523744" cy="178307"/>
           </a:xfrm>
           <a:prstGeom prst="rect">
@@ -11877,20 +11967,20 @@
                 </a:solidFill>
                 <a:latin typeface="Open Sans"/>
               </a:rPr>
-              <a:t>12 · torch.compile</a:t>
-            </a:r>
-          </a:p>
-        </p:txBody>
-      </p:sp>
-      <p:sp>
-        <p:nvSpPr>
-          <p:cNvPr id="84" name="Cell4_R11C1"/>
+              <a:t>11 · fused SGD and AdamW</a:t>
+            </a:r>
+          </a:p>
+        </p:txBody>
+      </p:sp>
+      <p:sp>
+        <p:nvSpPr>
+          <p:cNvPr id="82" name="Cell4_R10C1"/>
           <p:cNvSpPr txBox="1"/>
           <p:nvPr/>
         </p:nvSpPr>
         <p:spPr>
           <a:xfrm>
-            <a:off x="10479024" y="16052292"/>
+            <a:off x="17108424" y="15892272"/>
             <a:ext cx="2167127" cy="178307"/>
           </a:xfrm>
           <a:prstGeom prst="rect">
@@ -11919,20 +12009,20 @@
                 </a:solidFill>
                 <a:latin typeface="Open Sans"/>
               </a:rPr>
-              <a:t>no Triton on Windows</a:t>
-            </a:r>
-          </a:p>
-        </p:txBody>
-      </p:sp>
-      <p:sp>
-        <p:nvSpPr>
-          <p:cNvPr id="85" name="Cell4_R11C2"/>
+              <a:t>one kernel, not a chain</a:t>
+            </a:r>
+          </a:p>
+        </p:txBody>
+      </p:sp>
+      <p:sp>
+        <p:nvSpPr>
+          <p:cNvPr id="83" name="Cell4_R10C2"/>
           <p:cNvSpPr txBox="1"/>
           <p:nvPr/>
         </p:nvSpPr>
         <p:spPr>
           <a:xfrm>
-            <a:off x="12737592" y="16052292"/>
+            <a:off x="19366992" y="15892272"/>
             <a:ext cx="978408" cy="178307"/>
           </a:xfrm>
           <a:prstGeom prst="rect">
@@ -11957,24 +12047,24 @@
             <a:r>
               <a:rPr sz="1100" b="1" i="0">
                 <a:solidFill>
-                  <a:srgbClr val="2A5DB0"/>
-                </a:solidFill>
-                <a:latin typeface="Open Sans"/>
-              </a:rPr>
-              <a:t>can't</a:t>
+                  <a:srgbClr val="1F7A4C"/>
+                </a:solidFill>
+                <a:latin typeface="Open Sans"/>
+              </a:rPr>
+              <a:t>yes</a:t>
             </a:r>
           </a:p>
         </p:txBody>
       </p:sp>
       <p:cxnSp>
         <p:nvCxnSpPr>
-          <p:cNvPr id="86" name="Connector 85"/>
+          <p:cNvPr id="84" name="Connector 83"/>
           <p:cNvCxnSpPr/>
           <p:nvPr/>
         </p:nvCxnSpPr>
         <p:spPr>
           <a:xfrm>
-            <a:off x="7863840" y="16230600"/>
+            <a:off x="14493240" y="16070580"/>
             <a:ext cx="5943600" cy="0"/>
           </a:xfrm>
           <a:prstGeom prst="line">
@@ -12003,13 +12093,13 @@
       </p:cxnSp>
       <p:sp>
         <p:nvSpPr>
-          <p:cNvPr id="87" name="Cell4_R12C0"/>
+          <p:cNvPr id="85" name="Cell4_R11C0"/>
           <p:cNvSpPr txBox="1"/>
           <p:nvPr/>
         </p:nvSpPr>
         <p:spPr>
           <a:xfrm>
-            <a:off x="7863840" y="16267176"/>
+            <a:off x="14493240" y="16107155"/>
             <a:ext cx="2523744" cy="178307"/>
           </a:xfrm>
           <a:prstGeom prst="rect">
@@ -12038,20 +12128,20 @@
                 </a:solidFill>
                 <a:latin typeface="Open Sans"/>
               </a:rPr>
-              <a:t>13 · attention backend</a:t>
-            </a:r>
-          </a:p>
-        </p:txBody>
-      </p:sp>
-      <p:sp>
-        <p:nvSpPr>
-          <p:cNvPr id="88" name="Cell4_R12C1"/>
+              <a:t>12 · torch.compile</a:t>
+            </a:r>
+          </a:p>
+        </p:txBody>
+      </p:sp>
+      <p:sp>
+        <p:nvSpPr>
+          <p:cNvPr id="86" name="Cell4_R11C1"/>
           <p:cNvSpPr txBox="1"/>
           <p:nvPr/>
         </p:nvSpPr>
         <p:spPr>
           <a:xfrm>
-            <a:off x="10479024" y="16267176"/>
+            <a:off x="17108424" y="16107155"/>
             <a:ext cx="2167127" cy="178307"/>
           </a:xfrm>
           <a:prstGeom prst="rect">
@@ -12080,20 +12170,20 @@
                 </a:solidFill>
                 <a:latin typeface="Open Sans"/>
               </a:rPr>
-              <a:t>already sdpa</a:t>
-            </a:r>
-          </a:p>
-        </p:txBody>
-      </p:sp>
-      <p:sp>
-        <p:nvSpPr>
-          <p:cNvPr id="89" name="Cell4_R12C2"/>
+              <a:t>no Triton on Windows</a:t>
+            </a:r>
+          </a:p>
+        </p:txBody>
+      </p:sp>
+      <p:sp>
+        <p:nvSpPr>
+          <p:cNvPr id="87" name="Cell4_R11C2"/>
           <p:cNvSpPr txBox="1"/>
           <p:nvPr/>
         </p:nvSpPr>
         <p:spPr>
           <a:xfrm>
-            <a:off x="12737592" y="16267176"/>
+            <a:off x="19366992" y="16107155"/>
             <a:ext cx="978408" cy="178307"/>
           </a:xfrm>
           <a:prstGeom prst="rect">
@@ -12118,66 +12208,24 @@
             <a:r>
               <a:rPr sz="1100" b="1" i="0">
                 <a:solidFill>
-                  <a:srgbClr val="5E5A66"/>
-                </a:solidFill>
-                <a:latin typeface="Open Sans"/>
-              </a:rPr>
-              <a:t>no change</a:t>
-            </a:r>
-          </a:p>
-        </p:txBody>
-      </p:sp>
-      <p:sp>
-        <p:nvSpPr>
-          <p:cNvPr id="90" name="Cell4_G13"/>
-          <p:cNvSpPr txBox="1"/>
-          <p:nvPr/>
-        </p:nvSpPr>
-        <p:spPr>
-          <a:xfrm>
-            <a:off x="7863840" y="16482059"/>
-            <a:ext cx="5943600" cy="196596"/>
-          </a:xfrm>
-          <a:prstGeom prst="rect">
-            <a:avLst/>
-          </a:prstGeom>
-          <a:noFill/>
-        </p:spPr>
-        <p:txBody>
-          <a:bodyPr wrap="square" lIns="27432" tIns="27432" rIns="27432" bIns="27432" anchor="ctr">
-            <a:noAutofit/>
-          </a:bodyPr>
-          <a:lstStyle/>
-          <a:p>
-            <a:pPr algn="l">
-              <a:lnSpc>
-                <a:spcPct val="105000"/>
-              </a:lnSpc>
-              <a:spcAft>
-                <a:spcPts val="0"/>
-              </a:spcAft>
-            </a:pPr>
-            <a:r>
-              <a:rPr sz="1000" b="1" i="0">
-                <a:solidFill>
-                  <a:srgbClr val="32006E"/>
-                </a:solidFill>
-                <a:latin typeface="Uni Sans Book"/>
-              </a:rPr>
-              <a:t>HOST-SYNC DISCIPLINE</a:t>
+                  <a:srgbClr val="2A5DB0"/>
+                </a:solidFill>
+                <a:latin typeface="Open Sans"/>
+              </a:rPr>
+              <a:t>can't</a:t>
             </a:r>
           </a:p>
         </p:txBody>
       </p:sp>
       <p:cxnSp>
         <p:nvCxnSpPr>
-          <p:cNvPr id="91" name="Connector 90"/>
+          <p:cNvPr id="88" name="Connector 87"/>
           <p:cNvCxnSpPr/>
           <p:nvPr/>
         </p:nvCxnSpPr>
         <p:spPr>
           <a:xfrm>
-            <a:off x="7863840" y="16660368"/>
+            <a:off x="14493240" y="16285463"/>
             <a:ext cx="5943600" cy="0"/>
           </a:xfrm>
           <a:prstGeom prst="line">
@@ -12206,13 +12254,13 @@
       </p:cxnSp>
       <p:sp>
         <p:nvSpPr>
-          <p:cNvPr id="92" name="Cell4_R14C0"/>
+          <p:cNvPr id="89" name="Cell4_R12C0"/>
           <p:cNvSpPr txBox="1"/>
           <p:nvPr/>
         </p:nvSpPr>
         <p:spPr>
           <a:xfrm>
-            <a:off x="7863840" y="16696944"/>
+            <a:off x="14493240" y="16322039"/>
             <a:ext cx="2523744" cy="178307"/>
           </a:xfrm>
           <a:prstGeom prst="rect">
@@ -12241,20 +12289,20 @@
                 </a:solidFill>
                 <a:latin typeface="Open Sans"/>
               </a:rPr>
-              <a:t>14 · drop the per-step .item(), CIFAR</a:t>
-            </a:r>
-          </a:p>
-        </p:txBody>
-      </p:sp>
-      <p:sp>
-        <p:nvSpPr>
-          <p:cNvPr id="93" name="Cell4_R14C1"/>
+              <a:t>13 · attention backend</a:t>
+            </a:r>
+          </a:p>
+        </p:txBody>
+      </p:sp>
+      <p:sp>
+        <p:nvSpPr>
+          <p:cNvPr id="90" name="Cell4_R12C1"/>
           <p:cNvSpPr txBox="1"/>
           <p:nvPr/>
         </p:nvSpPr>
         <p:spPr>
           <a:xfrm>
-            <a:off x="10479024" y="16696944"/>
+            <a:off x="17108424" y="16322039"/>
             <a:ext cx="2167127" cy="178307"/>
           </a:xfrm>
           <a:prstGeom prst="rect">
@@ -12277,26 +12325,26 @@
               </a:spcAft>
             </a:pPr>
             <a:r>
-              <a:rPr sz="1100" b="1" i="0">
-                <a:solidFill>
-                  <a:srgbClr val="1F1F24"/>
-                </a:solidFill>
-                <a:latin typeface="Open Sans"/>
-              </a:rPr>
-              <a:t>~7%</a:t>
-            </a:r>
-          </a:p>
-        </p:txBody>
-      </p:sp>
-      <p:sp>
-        <p:nvSpPr>
-          <p:cNvPr id="94" name="Cell4_R14C2"/>
+              <a:rPr sz="1100" b="0" i="0">
+                <a:solidFill>
+                  <a:srgbClr val="1F1F24"/>
+                </a:solidFill>
+                <a:latin typeface="Open Sans"/>
+              </a:rPr>
+              <a:t>already sdpa</a:t>
+            </a:r>
+          </a:p>
+        </p:txBody>
+      </p:sp>
+      <p:sp>
+        <p:nvSpPr>
+          <p:cNvPr id="91" name="Cell4_R12C2"/>
           <p:cNvSpPr txBox="1"/>
           <p:nvPr/>
         </p:nvSpPr>
         <p:spPr>
           <a:xfrm>
-            <a:off x="12737592" y="16696944"/>
+            <a:off x="19366992" y="16322039"/>
             <a:ext cx="978408" cy="178307"/>
           </a:xfrm>
           <a:prstGeom prst="rect">
@@ -12321,24 +12369,66 @@
             <a:r>
               <a:rPr sz="1100" b="1" i="0">
                 <a:solidFill>
-                  <a:srgbClr val="1F7A4C"/>
-                </a:solidFill>
-                <a:latin typeface="Open Sans"/>
-              </a:rPr>
-              <a:t>yes</a:t>
+                  <a:srgbClr val="5E5A66"/>
+                </a:solidFill>
+                <a:latin typeface="Open Sans"/>
+              </a:rPr>
+              <a:t>no change</a:t>
+            </a:r>
+          </a:p>
+        </p:txBody>
+      </p:sp>
+      <p:sp>
+        <p:nvSpPr>
+          <p:cNvPr id="92" name="Cell4_G13"/>
+          <p:cNvSpPr txBox="1"/>
+          <p:nvPr/>
+        </p:nvSpPr>
+        <p:spPr>
+          <a:xfrm>
+            <a:off x="14493240" y="16536923"/>
+            <a:ext cx="5943600" cy="196596"/>
+          </a:xfrm>
+          <a:prstGeom prst="rect">
+            <a:avLst/>
+          </a:prstGeom>
+          <a:noFill/>
+        </p:spPr>
+        <p:txBody>
+          <a:bodyPr wrap="square" lIns="27432" tIns="27432" rIns="27432" bIns="27432" anchor="ctr">
+            <a:noAutofit/>
+          </a:bodyPr>
+          <a:lstStyle/>
+          <a:p>
+            <a:pPr algn="l">
+              <a:lnSpc>
+                <a:spcPct val="105000"/>
+              </a:lnSpc>
+              <a:spcAft>
+                <a:spcPts val="0"/>
+              </a:spcAft>
+            </a:pPr>
+            <a:r>
+              <a:rPr sz="1000" b="1" i="0">
+                <a:solidFill>
+                  <a:srgbClr val="32006E"/>
+                </a:solidFill>
+                <a:latin typeface="Uni Sans Book"/>
+              </a:rPr>
+              <a:t>HOST-SYNC DISCIPLINE</a:t>
             </a:r>
           </a:p>
         </p:txBody>
       </p:sp>
       <p:cxnSp>
         <p:nvCxnSpPr>
-          <p:cNvPr id="95" name="Connector 94"/>
+          <p:cNvPr id="93" name="Connector 92"/>
           <p:cNvCxnSpPr/>
           <p:nvPr/>
         </p:nvCxnSpPr>
         <p:spPr>
           <a:xfrm>
-            <a:off x="7863840" y="16875252"/>
+            <a:off x="14493240" y="16715232"/>
             <a:ext cx="5943600" cy="0"/>
           </a:xfrm>
           <a:prstGeom prst="line">
@@ -12367,13 +12457,13 @@
       </p:cxnSp>
       <p:sp>
         <p:nvSpPr>
-          <p:cNvPr id="96" name="Cell4_R15C0"/>
+          <p:cNvPr id="94" name="Cell4_R14C0"/>
           <p:cNvSpPr txBox="1"/>
           <p:nvPr/>
         </p:nvSpPr>
         <p:spPr>
           <a:xfrm>
-            <a:off x="7863840" y="16911828"/>
+            <a:off x="14493240" y="16751808"/>
             <a:ext cx="2523744" cy="178307"/>
           </a:xfrm>
           <a:prstGeom prst="rect">
@@ -12402,20 +12492,20 @@
                 </a:solidFill>
                 <a:latin typeface="Open Sans"/>
               </a:rPr>
-              <a:t>15 · the same at MLM scale</a:t>
-            </a:r>
-          </a:p>
-        </p:txBody>
-      </p:sp>
-      <p:sp>
-        <p:nvSpPr>
-          <p:cNvPr id="97" name="Cell4_R15C1"/>
+              <a:t>14 · drop the per-step .item(), CIFAR</a:t>
+            </a:r>
+          </a:p>
+        </p:txBody>
+      </p:sp>
+      <p:sp>
+        <p:nvSpPr>
+          <p:cNvPr id="95" name="Cell4_R14C1"/>
           <p:cNvSpPr txBox="1"/>
           <p:nvPr/>
         </p:nvSpPr>
         <p:spPr>
           <a:xfrm>
-            <a:off x="10479024" y="16911828"/>
+            <a:off x="17108424" y="16751808"/>
             <a:ext cx="2167127" cy="178307"/>
           </a:xfrm>
           <a:prstGeom prst="rect">
@@ -12444,29 +12534,20 @@
                 </a:solidFill>
                 <a:latin typeface="Open Sans"/>
               </a:rPr>
-              <a:t>2%</a:t>
-            </a:r>
-            <a:r>
-              <a:rPr sz="1100" b="0" i="0">
-                <a:solidFill>
-                  <a:srgbClr val="1F1F24"/>
-                </a:solidFill>
-                <a:latin typeface="Open Sans"/>
-              </a:rPr>
-              <a:t> — a live loss is worth it</a:t>
-            </a:r>
-          </a:p>
-        </p:txBody>
-      </p:sp>
-      <p:sp>
-        <p:nvSpPr>
-          <p:cNvPr id="98" name="Cell4_R15C2"/>
+              <a:t>~7%</a:t>
+            </a:r>
+          </a:p>
+        </p:txBody>
+      </p:sp>
+      <p:sp>
+        <p:nvSpPr>
+          <p:cNvPr id="96" name="Cell4_R14C2"/>
           <p:cNvSpPr txBox="1"/>
           <p:nvPr/>
         </p:nvSpPr>
         <p:spPr>
           <a:xfrm>
-            <a:off x="12737592" y="16911828"/>
+            <a:off x="19366992" y="16751808"/>
             <a:ext cx="978408" cy="178307"/>
           </a:xfrm>
           <a:prstGeom prst="rect">
@@ -12491,24 +12572,24 @@
             <a:r>
               <a:rPr sz="1100" b="1" i="0">
                 <a:solidFill>
-                  <a:srgbClr val="B03A2E"/>
-                </a:solidFill>
-                <a:latin typeface="Open Sans"/>
-              </a:rPr>
-              <a:t>no</a:t>
+                  <a:srgbClr val="1F7A4C"/>
+                </a:solidFill>
+                <a:latin typeface="Open Sans"/>
+              </a:rPr>
+              <a:t>yes</a:t>
             </a:r>
           </a:p>
         </p:txBody>
       </p:sp>
       <p:cxnSp>
         <p:nvCxnSpPr>
-          <p:cNvPr id="99" name="Connector 98"/>
+          <p:cNvPr id="97" name="Connector 96"/>
           <p:cNvCxnSpPr/>
           <p:nvPr/>
         </p:nvCxnSpPr>
         <p:spPr>
           <a:xfrm>
-            <a:off x="7863840" y="17090136"/>
+            <a:off x="14493240" y="16930116"/>
             <a:ext cx="5943600" cy="0"/>
           </a:xfrm>
           <a:prstGeom prst="line">
@@ -12537,13 +12618,13 @@
       </p:cxnSp>
       <p:sp>
         <p:nvSpPr>
-          <p:cNvPr id="100" name="Cell4_R16C0"/>
+          <p:cNvPr id="98" name="Cell4_R15C0"/>
           <p:cNvSpPr txBox="1"/>
           <p:nvPr/>
         </p:nvSpPr>
         <p:spPr>
           <a:xfrm>
-            <a:off x="7863840" y="17126712"/>
+            <a:off x="14493240" y="16966692"/>
             <a:ext cx="2523744" cy="178307"/>
           </a:xfrm>
           <a:prstGeom prst="rect">
@@ -12572,20 +12653,20 @@
                 </a:solidFill>
                 <a:latin typeface="Open Sans"/>
               </a:rPr>
-              <a:t>16 · zero_grad(set_to_none=True)</a:t>
-            </a:r>
-          </a:p>
-        </p:txBody>
-      </p:sp>
-      <p:sp>
-        <p:nvSpPr>
-          <p:cNvPr id="101" name="Cell4_R16C1"/>
+              <a:t>15 · the same at MLM scale</a:t>
+            </a:r>
+          </a:p>
+        </p:txBody>
+      </p:sp>
+      <p:sp>
+        <p:nvSpPr>
+          <p:cNvPr id="99" name="Cell4_R15C1"/>
           <p:cNvSpPr txBox="1"/>
           <p:nvPr/>
         </p:nvSpPr>
         <p:spPr>
           <a:xfrm>
-            <a:off x="10479024" y="17126712"/>
+            <a:off x="17108424" y="16966692"/>
             <a:ext cx="2167127" cy="178307"/>
           </a:xfrm>
           <a:prstGeom prst="rect">
@@ -12608,26 +12689,35 @@
               </a:spcAft>
             </a:pPr>
             <a:r>
+              <a:rPr sz="1100" b="1" i="0">
+                <a:solidFill>
+                  <a:srgbClr val="1F1F24"/>
+                </a:solidFill>
+                <a:latin typeface="Open Sans"/>
+              </a:rPr>
+              <a:t>2%</a:t>
+            </a:r>
+            <a:r>
               <a:rPr sz="1100" b="0" i="0">
                 <a:solidFill>
                   <a:srgbClr val="1F1F24"/>
                 </a:solidFill>
                 <a:latin typeface="Open Sans"/>
               </a:rPr>
-              <a:t>skips a full zero-fill</a:t>
-            </a:r>
-          </a:p>
-        </p:txBody>
-      </p:sp>
-      <p:sp>
-        <p:nvSpPr>
-          <p:cNvPr id="102" name="Cell4_R16C2"/>
+              <a:t> — a live loss is worth it</a:t>
+            </a:r>
+          </a:p>
+        </p:txBody>
+      </p:sp>
+      <p:sp>
+        <p:nvSpPr>
+          <p:cNvPr id="100" name="Cell4_R15C2"/>
           <p:cNvSpPr txBox="1"/>
           <p:nvPr/>
         </p:nvSpPr>
         <p:spPr>
           <a:xfrm>
-            <a:off x="12737592" y="17126712"/>
+            <a:off x="19366992" y="16966692"/>
             <a:ext cx="978408" cy="178307"/>
           </a:xfrm>
           <a:prstGeom prst="rect">
@@ -12652,66 +12742,24 @@
             <a:r>
               <a:rPr sz="1100" b="1" i="0">
                 <a:solidFill>
-                  <a:srgbClr val="1F7A4C"/>
-                </a:solidFill>
-                <a:latin typeface="Open Sans"/>
-              </a:rPr>
-              <a:t>yes</a:t>
-            </a:r>
-          </a:p>
-        </p:txBody>
-      </p:sp>
-      <p:sp>
-        <p:nvSpPr>
-          <p:cNvPr id="103" name="Cell4_G17"/>
-          <p:cNvSpPr txBox="1"/>
-          <p:nvPr/>
-        </p:nvSpPr>
-        <p:spPr>
-          <a:xfrm>
-            <a:off x="7863840" y="17341596"/>
-            <a:ext cx="5943600" cy="196596"/>
-          </a:xfrm>
-          <a:prstGeom prst="rect">
-            <a:avLst/>
-          </a:prstGeom>
-          <a:noFill/>
-        </p:spPr>
-        <p:txBody>
-          <a:bodyPr wrap="square" lIns="27432" tIns="27432" rIns="27432" bIns="27432" anchor="ctr">
-            <a:noAutofit/>
-          </a:bodyPr>
-          <a:lstStyle/>
-          <a:p>
-            <a:pPr algn="l">
-              <a:lnSpc>
-                <a:spcPct val="105000"/>
-              </a:lnSpc>
-              <a:spcAft>
-                <a:spcPts val="0"/>
-              </a:spcAft>
-            </a:pPr>
-            <a:r>
-              <a:rPr sz="1000" b="1" i="0">
-                <a:solidFill>
-                  <a:srgbClr val="32006E"/>
-                </a:solidFill>
-                <a:latin typeface="Uni Sans Book"/>
-              </a:rPr>
-              <a:t>BATCHING AND SCHEDULING</a:t>
+                  <a:srgbClr val="B03A2E"/>
+                </a:solidFill>
+                <a:latin typeface="Open Sans"/>
+              </a:rPr>
+              <a:t>no</a:t>
             </a:r>
           </a:p>
         </p:txBody>
       </p:sp>
       <p:cxnSp>
         <p:nvCxnSpPr>
-          <p:cNvPr id="104" name="Connector 103"/>
+          <p:cNvPr id="101" name="Connector 100"/>
           <p:cNvCxnSpPr/>
           <p:nvPr/>
         </p:nvCxnSpPr>
         <p:spPr>
           <a:xfrm>
-            <a:off x="7863840" y="17519904"/>
+            <a:off x="14493240" y="17145000"/>
             <a:ext cx="5943600" cy="0"/>
           </a:xfrm>
           <a:prstGeom prst="line">
@@ -12740,13 +12788,13 @@
       </p:cxnSp>
       <p:sp>
         <p:nvSpPr>
-          <p:cNvPr id="105" name="Cell4_R18C0"/>
+          <p:cNvPr id="102" name="Cell4_R16C0"/>
           <p:cNvSpPr txBox="1"/>
           <p:nvPr/>
         </p:nvSpPr>
         <p:spPr>
           <a:xfrm>
-            <a:off x="7863840" y="17556480"/>
+            <a:off x="14493240" y="17181576"/>
             <a:ext cx="2523744" cy="178307"/>
           </a:xfrm>
           <a:prstGeom prst="rect">
@@ -12775,20 +12823,20 @@
                 </a:solidFill>
                 <a:latin typeface="Open Sans"/>
               </a:rPr>
-              <a:t>17 · batch 64 → 128</a:t>
-            </a:r>
-          </a:p>
-        </p:txBody>
-      </p:sp>
-      <p:sp>
-        <p:nvSpPr>
-          <p:cNvPr id="106" name="Cell4_R18C1"/>
+              <a:t>16 · zero_grad(set_to_none=True)</a:t>
+            </a:r>
+          </a:p>
+        </p:txBody>
+      </p:sp>
+      <p:sp>
+        <p:nvSpPr>
+          <p:cNvPr id="103" name="Cell4_R16C1"/>
           <p:cNvSpPr txBox="1"/>
           <p:nvPr/>
         </p:nvSpPr>
         <p:spPr>
           <a:xfrm>
-            <a:off x="10479024" y="17556480"/>
+            <a:off x="17108424" y="17181576"/>
             <a:ext cx="2167127" cy="178307"/>
           </a:xfrm>
           <a:prstGeom prst="rect">
@@ -12811,44 +12859,26 @@
               </a:spcAft>
             </a:pPr>
             <a:r>
-              <a:rPr sz="1100" b="1" i="0">
-                <a:solidFill>
-                  <a:srgbClr val="1F1F24"/>
-                </a:solidFill>
-                <a:latin typeface="Open Sans"/>
-              </a:rPr>
-              <a:t>1.31×</a:t>
-            </a:r>
-            <a:r>
               <a:rPr sz="1100" b="0" i="0">
                 <a:solidFill>
                   <a:srgbClr val="1F1F24"/>
                 </a:solidFill>
                 <a:latin typeface="Open Sans"/>
               </a:rPr>
-              <a:t> — 2048 is </a:t>
-            </a:r>
-            <a:r>
-              <a:rPr sz="1100" b="0" i="1">
-                <a:solidFill>
-                  <a:srgbClr val="1F1F24"/>
-                </a:solidFill>
-                <a:latin typeface="Open Sans"/>
-              </a:rPr>
-              <a:t>slower</a:t>
-            </a:r>
-          </a:p>
-        </p:txBody>
-      </p:sp>
-      <p:sp>
-        <p:nvSpPr>
-          <p:cNvPr id="107" name="Cell4_R18C2"/>
+              <a:t>skips a full zero-fill</a:t>
+            </a:r>
+          </a:p>
+        </p:txBody>
+      </p:sp>
+      <p:sp>
+        <p:nvSpPr>
+          <p:cNvPr id="104" name="Cell4_R16C2"/>
           <p:cNvSpPr txBox="1"/>
           <p:nvPr/>
         </p:nvSpPr>
         <p:spPr>
           <a:xfrm>
-            <a:off x="12737592" y="17556480"/>
+            <a:off x="19366992" y="17181576"/>
             <a:ext cx="978408" cy="178307"/>
           </a:xfrm>
           <a:prstGeom prst="rect">
@@ -12882,15 +12912,57 @@
           </a:p>
         </p:txBody>
       </p:sp>
+      <p:sp>
+        <p:nvSpPr>
+          <p:cNvPr id="105" name="Cell4_G17"/>
+          <p:cNvSpPr txBox="1"/>
+          <p:nvPr/>
+        </p:nvSpPr>
+        <p:spPr>
+          <a:xfrm>
+            <a:off x="14493240" y="17396460"/>
+            <a:ext cx="5943600" cy="196596"/>
+          </a:xfrm>
+          <a:prstGeom prst="rect">
+            <a:avLst/>
+          </a:prstGeom>
+          <a:noFill/>
+        </p:spPr>
+        <p:txBody>
+          <a:bodyPr wrap="square" lIns="27432" tIns="27432" rIns="27432" bIns="27432" anchor="ctr">
+            <a:noAutofit/>
+          </a:bodyPr>
+          <a:lstStyle/>
+          <a:p>
+            <a:pPr algn="l">
+              <a:lnSpc>
+                <a:spcPct val="105000"/>
+              </a:lnSpc>
+              <a:spcAft>
+                <a:spcPts val="0"/>
+              </a:spcAft>
+            </a:pPr>
+            <a:r>
+              <a:rPr sz="1000" b="1" i="0">
+                <a:solidFill>
+                  <a:srgbClr val="32006E"/>
+                </a:solidFill>
+                <a:latin typeface="Uni Sans Book"/>
+              </a:rPr>
+              <a:t>BATCHING AND SCHEDULING</a:t>
+            </a:r>
+          </a:p>
+        </p:txBody>
+      </p:sp>
       <p:cxnSp>
         <p:nvCxnSpPr>
-          <p:cNvPr id="108" name="Connector 107"/>
+          <p:cNvPr id="106" name="Connector 105"/>
           <p:cNvCxnSpPr/>
           <p:nvPr/>
         </p:nvCxnSpPr>
         <p:spPr>
           <a:xfrm>
-            <a:off x="7863840" y="17734788"/>
+            <a:off x="14493240" y="17574768"/>
             <a:ext cx="5943600" cy="0"/>
           </a:xfrm>
           <a:prstGeom prst="line">
@@ -12919,13 +12991,13 @@
       </p:cxnSp>
       <p:sp>
         <p:nvSpPr>
-          <p:cNvPr id="109" name="Cell4_R19C0"/>
+          <p:cNvPr id="107" name="Cell4_R18C0"/>
           <p:cNvSpPr txBox="1"/>
           <p:nvPr/>
         </p:nvSpPr>
         <p:spPr>
           <a:xfrm>
-            <a:off x="7863840" y="17771364"/>
+            <a:off x="14493240" y="17611344"/>
             <a:ext cx="2523744" cy="178307"/>
           </a:xfrm>
           <a:prstGeom prst="rect">
@@ -12954,20 +13026,20 @@
                 </a:solidFill>
                 <a:latin typeface="Open Sans"/>
               </a:rPr>
-              <a:t>18 · checkpointing for speed</a:t>
-            </a:r>
-          </a:p>
-        </p:txBody>
-      </p:sp>
-      <p:sp>
-        <p:nvSpPr>
-          <p:cNvPr id="110" name="Cell4_R19C1"/>
+              <a:t>17 · batch 64 → 128</a:t>
+            </a:r>
+          </a:p>
+        </p:txBody>
+      </p:sp>
+      <p:sp>
+        <p:nvSpPr>
+          <p:cNvPr id="108" name="Cell4_R18C1"/>
           <p:cNvSpPr txBox="1"/>
           <p:nvPr/>
         </p:nvSpPr>
         <p:spPr>
           <a:xfrm>
-            <a:off x="10479024" y="17771364"/>
+            <a:off x="17108424" y="17611344"/>
             <a:ext cx="2167127" cy="178307"/>
           </a:xfrm>
           <a:prstGeom prst="rect">
@@ -12990,35 +13062,44 @@
               </a:spcAft>
             </a:pPr>
             <a:r>
+              <a:rPr sz="1100" b="1" i="0">
+                <a:solidFill>
+                  <a:srgbClr val="1F1F24"/>
+                </a:solidFill>
+                <a:latin typeface="Open Sans"/>
+              </a:rPr>
+              <a:t>1.31×</a:t>
+            </a:r>
+            <a:r>
               <a:rPr sz="1100" b="0" i="0">
                 <a:solidFill>
                   <a:srgbClr val="1F1F24"/>
                 </a:solidFill>
                 <a:latin typeface="Open Sans"/>
               </a:rPr>
-              <a:t>peak is </a:t>
-            </a:r>
-            <a:r>
-              <a:rPr sz="1100" b="1" i="0">
-                <a:solidFill>
-                  <a:srgbClr val="1F1F24"/>
-                </a:solidFill>
-                <a:latin typeface="Open Sans"/>
-              </a:rPr>
-              <a:t>3.3 GB of 96</a:t>
-            </a:r>
-          </a:p>
-        </p:txBody>
-      </p:sp>
-      <p:sp>
-        <p:nvSpPr>
-          <p:cNvPr id="111" name="Cell4_R19C2"/>
+              <a:t> — 2048 is </a:t>
+            </a:r>
+            <a:r>
+              <a:rPr sz="1100" b="0" i="1">
+                <a:solidFill>
+                  <a:srgbClr val="1F1F24"/>
+                </a:solidFill>
+                <a:latin typeface="Open Sans"/>
+              </a:rPr>
+              <a:t>slower</a:t>
+            </a:r>
+          </a:p>
+        </p:txBody>
+      </p:sp>
+      <p:sp>
+        <p:nvSpPr>
+          <p:cNvPr id="109" name="Cell4_R18C2"/>
           <p:cNvSpPr txBox="1"/>
           <p:nvPr/>
         </p:nvSpPr>
         <p:spPr>
           <a:xfrm>
-            <a:off x="12737592" y="17771364"/>
+            <a:off x="19366992" y="17611344"/>
             <a:ext cx="978408" cy="178307"/>
           </a:xfrm>
           <a:prstGeom prst="rect">
@@ -13043,24 +13124,24 @@
             <a:r>
               <a:rPr sz="1100" b="1" i="0">
                 <a:solidFill>
-                  <a:srgbClr val="B03A2E"/>
-                </a:solidFill>
-                <a:latin typeface="Open Sans"/>
-              </a:rPr>
-              <a:t>no</a:t>
+                  <a:srgbClr val="1F7A4C"/>
+                </a:solidFill>
+                <a:latin typeface="Open Sans"/>
+              </a:rPr>
+              <a:t>yes</a:t>
             </a:r>
           </a:p>
         </p:txBody>
       </p:sp>
       <p:cxnSp>
         <p:nvCxnSpPr>
-          <p:cNvPr id="112" name="Connector 111"/>
+          <p:cNvPr id="110" name="Connector 109"/>
           <p:cNvCxnSpPr/>
           <p:nvPr/>
         </p:nvCxnSpPr>
         <p:spPr>
           <a:xfrm>
-            <a:off x="7863840" y="17949672"/>
+            <a:off x="14493240" y="17789652"/>
             <a:ext cx="5943600" cy="0"/>
           </a:xfrm>
           <a:prstGeom prst="line">
@@ -13089,13 +13170,13 @@
       </p:cxnSp>
       <p:sp>
         <p:nvSpPr>
-          <p:cNvPr id="113" name="Cell4_R110C0"/>
+          <p:cNvPr id="111" name="Cell4_R19C0"/>
           <p:cNvSpPr txBox="1"/>
           <p:nvPr/>
         </p:nvSpPr>
         <p:spPr>
           <a:xfrm>
-            <a:off x="7863840" y="17986248"/>
+            <a:off x="14493240" y="17826227"/>
             <a:ext cx="2523744" cy="178307"/>
           </a:xfrm>
           <a:prstGeom prst="rect">
@@ -13124,20 +13205,20 @@
                 </a:solidFill>
                 <a:latin typeface="Open Sans"/>
               </a:rPr>
-              <a:t>19 · use the second card</a:t>
-            </a:r>
-          </a:p>
-        </p:txBody>
-      </p:sp>
-      <p:sp>
-        <p:nvSpPr>
-          <p:cNvPr id="114" name="Cell4_R110C1"/>
+              <a:t>18 · checkpointing for speed</a:t>
+            </a:r>
+          </a:p>
+        </p:txBody>
+      </p:sp>
+      <p:sp>
+        <p:nvSpPr>
+          <p:cNvPr id="112" name="Cell4_R19C1"/>
           <p:cNvSpPr txBox="1"/>
           <p:nvPr/>
         </p:nvSpPr>
         <p:spPr>
           <a:xfrm>
-            <a:off x="10479024" y="17986248"/>
+            <a:off x="17108424" y="17826227"/>
             <a:ext cx="2167127" cy="178307"/>
           </a:xfrm>
           <a:prstGeom prst="rect">
@@ -13160,35 +13241,35 @@
               </a:spcAft>
             </a:pPr>
             <a:r>
+              <a:rPr sz="1100" b="0" i="0">
+                <a:solidFill>
+                  <a:srgbClr val="1F1F24"/>
+                </a:solidFill>
+                <a:latin typeface="Open Sans"/>
+              </a:rPr>
+              <a:t>peak is </a:t>
+            </a:r>
+            <a:r>
               <a:rPr sz="1100" b="1" i="0">
                 <a:solidFill>
                   <a:srgbClr val="1F1F24"/>
                 </a:solidFill>
                 <a:latin typeface="Open Sans"/>
               </a:rPr>
-              <a:t>91% / 93%</a:t>
-            </a:r>
-            <a:r>
-              <a:rPr sz="1100" b="0" i="0">
-                <a:solidFill>
-                  <a:srgbClr val="1F1F24"/>
-                </a:solidFill>
-                <a:latin typeface="Open Sans"/>
-              </a:rPr>
-              <a:t> busy at 300 W</a:t>
-            </a:r>
-          </a:p>
-        </p:txBody>
-      </p:sp>
-      <p:sp>
-        <p:nvSpPr>
-          <p:cNvPr id="115" name="Cell4_R110C2"/>
+              <a:t>3.3 GB of 96</a:t>
+            </a:r>
+          </a:p>
+        </p:txBody>
+      </p:sp>
+      <p:sp>
+        <p:nvSpPr>
+          <p:cNvPr id="113" name="Cell4_R19C2"/>
           <p:cNvSpPr txBox="1"/>
           <p:nvPr/>
         </p:nvSpPr>
         <p:spPr>
           <a:xfrm>
-            <a:off x="12737592" y="17986248"/>
+            <a:off x="19366992" y="17826227"/>
             <a:ext cx="978408" cy="178307"/>
           </a:xfrm>
           <a:prstGeom prst="rect">
@@ -13213,24 +13294,24 @@
             <a:r>
               <a:rPr sz="1100" b="1" i="0">
                 <a:solidFill>
-                  <a:srgbClr val="1F7A4C"/>
-                </a:solidFill>
-                <a:latin typeface="Open Sans"/>
-              </a:rPr>
-              <a:t>yes</a:t>
+                  <a:srgbClr val="B03A2E"/>
+                </a:solidFill>
+                <a:latin typeface="Open Sans"/>
+              </a:rPr>
+              <a:t>no</a:t>
             </a:r>
           </a:p>
         </p:txBody>
       </p:sp>
       <p:cxnSp>
         <p:nvCxnSpPr>
-          <p:cNvPr id="116" name="Connector 115"/>
+          <p:cNvPr id="114" name="Connector 113"/>
           <p:cNvCxnSpPr/>
           <p:nvPr/>
         </p:nvCxnSpPr>
         <p:spPr>
           <a:xfrm>
-            <a:off x="7863840" y="18164556"/>
+            <a:off x="14493240" y="18004535"/>
             <a:ext cx="5943600" cy="0"/>
           </a:xfrm>
           <a:prstGeom prst="line">
@@ -13259,13 +13340,13 @@
       </p:cxnSp>
       <p:sp>
         <p:nvSpPr>
-          <p:cNvPr id="117" name="Cell4_R111C0"/>
+          <p:cNvPr id="115" name="Cell4_R110C0"/>
           <p:cNvSpPr txBox="1"/>
           <p:nvPr/>
         </p:nvSpPr>
         <p:spPr>
           <a:xfrm>
-            <a:off x="7863840" y="18201132"/>
+            <a:off x="14493240" y="18041111"/>
             <a:ext cx="2523744" cy="178307"/>
           </a:xfrm>
           <a:prstGeom prst="rect">
@@ -13294,20 +13375,20 @@
                 </a:solidFill>
                 <a:latin typeface="Open Sans"/>
               </a:rPr>
-              <a:t>20 · longest-budget-first queue</a:t>
-            </a:r>
-          </a:p>
-        </p:txBody>
-      </p:sp>
-      <p:sp>
-        <p:nvSpPr>
-          <p:cNvPr id="118" name="Cell4_R111C1"/>
+              <a:t>19 · use the second card</a:t>
+            </a:r>
+          </a:p>
+        </p:txBody>
+      </p:sp>
+      <p:sp>
+        <p:nvSpPr>
+          <p:cNvPr id="116" name="Cell4_R110C1"/>
           <p:cNvSpPr txBox="1"/>
           <p:nvPr/>
         </p:nvSpPr>
         <p:spPr>
           <a:xfrm>
-            <a:off x="10479024" y="18201132"/>
+            <a:off x="17108424" y="18041111"/>
             <a:ext cx="2167127" cy="178307"/>
           </a:xfrm>
           <a:prstGeom prst="rect">
@@ -13336,7 +13417,7 @@
                 </a:solidFill>
                 <a:latin typeface="Open Sans"/>
               </a:rPr>
-              <a:t>2.55×</a:t>
+              <a:t>91% / 93%</a:t>
             </a:r>
             <a:r>
               <a:rPr sz="1100" b="0" i="0">
@@ -13345,20 +13426,20 @@
                 </a:solidFill>
                 <a:latin typeface="Open Sans"/>
               </a:rPr>
-              <a:t> projected, 2.07 seen</a:t>
-            </a:r>
-          </a:p>
-        </p:txBody>
-      </p:sp>
-      <p:sp>
-        <p:nvSpPr>
-          <p:cNvPr id="119" name="Cell4_R111C2"/>
+              <a:t> busy at 300 W</a:t>
+            </a:r>
+          </a:p>
+        </p:txBody>
+      </p:sp>
+      <p:sp>
+        <p:nvSpPr>
+          <p:cNvPr id="117" name="Cell4_R110C2"/>
           <p:cNvSpPr txBox="1"/>
           <p:nvPr/>
         </p:nvSpPr>
         <p:spPr>
           <a:xfrm>
-            <a:off x="12737592" y="18201132"/>
+            <a:off x="19366992" y="18041111"/>
             <a:ext cx="978408" cy="178307"/>
           </a:xfrm>
           <a:prstGeom prst="rect">
@@ -13392,65 +13473,23 @@
           </a:p>
         </p:txBody>
       </p:sp>
-      <p:sp>
-        <p:nvSpPr>
-          <p:cNvPr id="120" name="Cell2_Heading"/>
-          <p:cNvSpPr txBox="1"/>
-          <p:nvPr/>
-        </p:nvSpPr>
-        <p:spPr>
-          <a:xfrm>
-            <a:off x="14749272" y="13533120"/>
-            <a:ext cx="5806440" cy="1024128"/>
-          </a:xfrm>
-          <a:prstGeom prst="rect">
-            <a:avLst/>
-          </a:prstGeom>
-          <a:noFill/>
-        </p:spPr>
-        <p:txBody>
-          <a:bodyPr wrap="square" lIns="27432" tIns="27432" rIns="27432" bIns="27432" anchor="b">
-            <a:noAutofit/>
-          </a:bodyPr>
-          <a:lstStyle/>
-          <a:p>
-            <a:pPr algn="l">
-              <a:lnSpc>
-                <a:spcPct val="105000"/>
-              </a:lnSpc>
-              <a:spcAft>
-                <a:spcPts val="0"/>
-              </a:spcAft>
-            </a:pPr>
-            <a:r>
-              <a:rPr sz="3200" b="1" i="0">
-                <a:solidFill>
-                  <a:srgbClr val="32006E"/>
-                </a:solidFill>
-                <a:latin typeface="Encode Sans Normal"/>
-              </a:rPr>
-              <a:t>Budget in tokens, not epochs</a:t>
-            </a:r>
-          </a:p>
-        </p:txBody>
-      </p:sp>
       <p:cxnSp>
         <p:nvCxnSpPr>
-          <p:cNvPr id="121" name="Connector 120"/>
+          <p:cNvPr id="118" name="Connector 117"/>
           <p:cNvCxnSpPr/>
           <p:nvPr/>
         </p:nvCxnSpPr>
         <p:spPr>
           <a:xfrm>
-            <a:off x="14749272" y="14593824"/>
-            <a:ext cx="5806439" cy="0"/>
+            <a:off x="14493240" y="18219420"/>
+            <a:ext cx="5943600" cy="0"/>
           </a:xfrm>
           <a:prstGeom prst="line">
             <a:avLst/>
           </a:prstGeom>
-          <a:ln w="15875">
+          <a:ln w="9525">
             <a:solidFill>
-              <a:srgbClr val="E8D3A2"/>
+              <a:srgbClr val="D9D2E3"/>
             </a:solidFill>
           </a:ln>
         </p:spPr>
@@ -13471,14 +13510,14 @@
       </p:cxnSp>
       <p:sp>
         <p:nvSpPr>
-          <p:cNvPr id="122" name="Cell2_List"/>
+          <p:cNvPr id="119" name="Cell4_R111C0"/>
           <p:cNvSpPr txBox="1"/>
           <p:nvPr/>
         </p:nvSpPr>
         <p:spPr>
           <a:xfrm>
-            <a:off x="14749272" y="14794992"/>
-            <a:ext cx="5806440" cy="3803904"/>
+            <a:off x="14493240" y="18255996"/>
+            <a:ext cx="2523744" cy="178307"/>
           </a:xfrm>
           <a:prstGeom prst="rect">
             <a:avLst/>
@@ -13496,324 +13535,82 @@
                 <a:spcPct val="108000"/>
               </a:lnSpc>
               <a:spcAft>
-                <a:spcPts val="500"/>
+                <a:spcPts val="0"/>
               </a:spcAft>
             </a:pPr>
             <a:r>
-              <a:rPr sz="1300" b="1" i="0">
-                <a:solidFill>
-                  <a:srgbClr val="1F1F24"/>
-                </a:solidFill>
-                <a:latin typeface="Open Sans"/>
-              </a:rPr>
-              <a:t>In 502–504 epochs were correct — the dataset was fixed. Here it is the experiment.</a:t>
-            </a:r>
-            <a:r>
-              <a:rPr sz="1300" b="0" i="0">
-                <a:solidFill>
-                  <a:srgbClr val="1F1F24"/>
-                </a:solidFill>
-                <a:latin typeface="Open Sans"/>
-              </a:rPr>
-              <a:t> Our ladder spans 4M to 1,024M tokens: "40 epochs each" hands the big arm </a:t>
-            </a:r>
-            <a:r>
-              <a:rPr sz="1300" b="1" i="0">
-                <a:solidFill>
-                  <a:srgbClr val="1F1F24"/>
-                </a:solidFill>
-                <a:latin typeface="Open Sans"/>
-              </a:rPr>
-              <a:t>256× the compute</a:t>
-            </a:r>
-            <a:r>
-              <a:rPr sz="1300" b="0" i="0">
-                <a:solidFill>
-                  <a:srgbClr val="1F1F24"/>
-                </a:solidFill>
-                <a:latin typeface="Open Sans"/>
-              </a:rPr>
-              <a:t>.</a:t>
-            </a:r>
-          </a:p>
+              <a:rPr sz="1100" b="0" i="0">
+                <a:solidFill>
+                  <a:srgbClr val="1F1F24"/>
+                </a:solidFill>
+                <a:latin typeface="Open Sans"/>
+              </a:rPr>
+              <a:t>20 · longest-budget-first queue</a:t>
+            </a:r>
+          </a:p>
+        </p:txBody>
+      </p:sp>
+      <p:sp>
+        <p:nvSpPr>
+          <p:cNvPr id="120" name="Cell4_R111C1"/>
+          <p:cNvSpPr txBox="1"/>
+          <p:nvPr/>
+        </p:nvSpPr>
+        <p:spPr>
+          <a:xfrm>
+            <a:off x="17108424" y="18255996"/>
+            <a:ext cx="2167127" cy="178307"/>
+          </a:xfrm>
+          <a:prstGeom prst="rect">
+            <a:avLst/>
+          </a:prstGeom>
+          <a:noFill/>
+        </p:spPr>
+        <p:txBody>
+          <a:bodyPr wrap="square" lIns="36576" tIns="36576" rIns="36576" bIns="36576" anchor="t">
+            <a:noAutofit/>
+          </a:bodyPr>
+          <a:lstStyle/>
           <a:p>
             <a:pPr algn="l">
               <a:lnSpc>
                 <a:spcPct val="108000"/>
               </a:lnSpc>
               <a:spcAft>
-                <a:spcPts val="500"/>
+                <a:spcPts val="0"/>
               </a:spcAft>
             </a:pPr>
             <a:r>
-              <a:rPr sz="1300" b="1" i="0">
-                <a:solidFill>
-                  <a:srgbClr val="1F1F24"/>
-                </a:solidFill>
-                <a:latin typeface="Open Sans"/>
-              </a:rPr>
-              <a:t>So fix tokens, and let epochs fall out.</a:t>
-            </a:r>
-            <a:r>
-              <a:rPr sz="1300" b="0" i="0">
-                <a:solidFill>
-                  <a:srgbClr val="1F1F24"/>
-                </a:solidFill>
-                <a:latin typeface="Open Sans"/>
-              </a:rPr>
-              <a:t> Every run is </a:t>
-            </a:r>
-            <a:r>
-              <a:rPr sz="1300" b="1" i="0">
-                <a:solidFill>
-                  <a:srgbClr val="1F1F24"/>
-                </a:solidFill>
-                <a:latin typeface="Open Sans"/>
-              </a:rPr>
-              <a:t>1.024B tokens of updates</a:t>
-            </a:r>
-            <a:r>
-              <a:rPr sz="1300" b="0" i="0">
-                <a:solidFill>
-                  <a:srgbClr val="1F1F24"/>
-                </a:solidFill>
-                <a:latin typeface="Open Sans"/>
-              </a:rPr>
-              <a:t> — 62,500 steps was never chosen, it is 1.024B ÷ a 16,384-token batch.</a:t>
-            </a:r>
-          </a:p>
-          <a:p>
-            <a:pPr algn="l">
-              <a:lnSpc>
-                <a:spcPct val="108000"/>
-              </a:lnSpc>
-              <a:spcAft>
-                <a:spcPts val="500"/>
-              </a:spcAft>
-            </a:pPr>
-            <a:r>
-              <a:rPr sz="1300" b="1" i="0">
-                <a:solidFill>
-                  <a:srgbClr val="1F1F24"/>
-                </a:solidFill>
-                <a:latin typeface="Open Sans"/>
-              </a:rPr>
-              <a:t>Tokens ÷ tok/s = the wall clock.</a:t>
-            </a:r>
-            <a:r>
-              <a:rPr sz="1300" b="0" i="0">
-                <a:solidFill>
-                  <a:srgbClr val="1F1F24"/>
-                </a:solidFill>
-                <a:latin typeface="Open Sans"/>
-              </a:rPr>
-              <a:t> 1.024B ÷ 443k tok/s ≈ </a:t>
-            </a:r>
-            <a:r>
-              <a:rPr sz="1300" b="1" i="0">
-                <a:solidFill>
-                  <a:srgbClr val="1F1F24"/>
-                </a:solidFill>
-                <a:latin typeface="Open Sans"/>
-              </a:rPr>
-              <a:t>38 min</a:t>
-            </a:r>
-            <a:r>
-              <a:rPr sz="1300" b="0" i="0">
-                <a:solidFill>
-                  <a:srgbClr val="1F1F24"/>
-                </a:solidFill>
-                <a:latin typeface="Open Sans"/>
-              </a:rPr>
-              <a:t> — the hardware chart's top bar, and how a promise gets measured.</a:t>
-            </a:r>
-          </a:p>
-          <a:p>
-            <a:pPr algn="l">
-              <a:lnSpc>
-                <a:spcPct val="108000"/>
-              </a:lnSpc>
-              <a:spcAft>
-                <a:spcPts val="500"/>
-              </a:spcAft>
-            </a:pPr>
-            <a:r>
-              <a:rPr sz="1300" b="1" i="0">
-                <a:solidFill>
-                  <a:srgbClr val="1F1F24"/>
-                </a:solidFill>
-                <a:latin typeface="Open Sans"/>
-              </a:rPr>
-              <a:t>Fixed compute makes the ladder readable.</a:t>
-            </a:r>
-            <a:r>
-              <a:rPr sz="1300" b="0" i="0">
-                <a:solidFill>
-                  <a:srgbClr val="1F1F24"/>
-                </a:solidFill>
-                <a:latin typeface="Open Sans"/>
-              </a:rPr>
-              <a:t> The 4M corpus is seen </a:t>
-            </a:r>
-            <a:r>
-              <a:rPr sz="1300" b="1" i="0">
-                <a:solidFill>
-                  <a:srgbClr val="1F1F24"/>
-                </a:solidFill>
-                <a:latin typeface="Open Sans"/>
-              </a:rPr>
-              <a:t>256 times</a:t>
-            </a:r>
-            <a:r>
-              <a:rPr sz="1300" b="0" i="0">
-                <a:solidFill>
-                  <a:srgbClr val="1F1F24"/>
-                </a:solidFill>
-                <a:latin typeface="Open Sans"/>
-              </a:rPr>
-              <a:t>; the 1,024M corpus, </a:t>
-            </a:r>
-            <a:r>
-              <a:rPr sz="1300" b="1" i="0">
-                <a:solidFill>
-                  <a:srgbClr val="1F1F24"/>
-                </a:solidFill>
-                <a:latin typeface="Open Sans"/>
-              </a:rPr>
-              <a:t>exactly once</a:t>
-            </a:r>
-            <a:r>
-              <a:rPr sz="1300" b="0" i="0">
-                <a:solidFill>
-                  <a:srgbClr val="1F1F24"/>
-                </a:solidFill>
-                <a:latin typeface="Open Sans"/>
-              </a:rPr>
-              <a:t>. Identical compute — only the data moves.</a:t>
-            </a:r>
-          </a:p>
-          <a:p>
-            <a:pPr algn="l">
-              <a:lnSpc>
-                <a:spcPct val="108000"/>
-              </a:lnSpc>
-              <a:spcAft>
-                <a:spcPts val="500"/>
-              </a:spcAft>
-            </a:pPr>
-            <a:r>
-              <a:rPr sz="1300" b="1" i="0">
-                <a:solidFill>
-                  <a:srgbClr val="1F1F24"/>
-                </a:solidFill>
-                <a:latin typeface="Open Sans"/>
-              </a:rPr>
-              <a:t>And a truncated run is not a cheaper run.</a:t>
-            </a:r>
-            <a:r>
-              <a:rPr sz="1300" b="0" i="0">
-                <a:solidFill>
-                  <a:srgbClr val="1F1F24"/>
-                </a:solidFill>
-                <a:latin typeface="Open Sans"/>
-              </a:rPr>
-              <a:t> The schedule anneals to zero at the </a:t>
-            </a:r>
-            <a:r>
-              <a:rPr sz="1300" b="0" i="1">
-                <a:solidFill>
-                  <a:srgbClr val="1F1F24"/>
-                </a:solidFill>
-                <a:latin typeface="Open Sans"/>
-              </a:rPr>
-              <a:t>planned</a:t>
-            </a:r>
-            <a:r>
-              <a:rPr sz="1300" b="0" i="0">
-                <a:solidFill>
-                  <a:srgbClr val="1F1F24"/>
-                </a:solidFill>
-                <a:latin typeface="Open Sans"/>
-              </a:rPr>
-              <a:t> end — a run stopped halfway is mid-schedule, a different experiment.</a:t>
-            </a:r>
-          </a:p>
-          <a:p>
-            <a:pPr algn="l">
-              <a:lnSpc>
-                <a:spcPct val="108000"/>
-              </a:lnSpc>
-              <a:spcAft>
-                <a:spcPts val="500"/>
-              </a:spcAft>
-            </a:pPr>
-            <a:r>
-              <a:rPr sz="1300" b="1" i="0">
-                <a:solidFill>
-                  <a:srgbClr val="1F1F24"/>
-                </a:solidFill>
-                <a:latin typeface="Open Sans"/>
-              </a:rPr>
-              <a:t>Our own records carried the bug.</a:t>
-            </a:r>
-            <a:r>
-              <a:rPr sz="1300" b="0" i="0">
-                <a:solidFill>
-                  <a:srgbClr val="1F1F24"/>
-                </a:solidFill>
-                <a:latin typeface="Open Sans"/>
-              </a:rPr>
-              <a:t> A field named epoch reads </a:t>
-            </a:r>
-            <a:r>
-              <a:rPr sz="1300" b="1" i="0">
-                <a:solidFill>
-                  <a:srgbClr val="1F1F24"/>
-                </a:solidFill>
-                <a:latin typeface="Open Sans"/>
-              </a:rPr>
-              <a:t>125</a:t>
-            </a:r>
-            <a:r>
-              <a:rPr sz="1300" b="0" i="0">
-                <a:solidFill>
-                  <a:srgbClr val="1F1F24"/>
-                </a:solidFill>
-                <a:latin typeface="Open Sans"/>
-              </a:rPr>
-              <a:t> where the truth is </a:t>
-            </a:r>
-            <a:r>
-              <a:rPr sz="1300" b="1" i="0">
-                <a:solidFill>
-                  <a:srgbClr val="1F1F24"/>
-                </a:solidFill>
-                <a:latin typeface="Open Sans"/>
-              </a:rPr>
-              <a:t>16 passes</a:t>
-            </a:r>
-            <a:r>
-              <a:rPr sz="1300" b="0" i="0">
-                <a:solidFill>
-                  <a:srgbClr val="1F1F24"/>
-                </a:solidFill>
-                <a:latin typeface="Open Sans"/>
-              </a:rPr>
-              <a:t> — it kept the name and lost the meaning.</a:t>
-            </a:r>
-          </a:p>
-        </p:txBody>
-      </p:sp>
-      <p:sp>
-        <p:nvSpPr>
-          <p:cNvPr id="123" name="Cell5_Heading"/>
+              <a:rPr sz="1100" b="1" i="0">
+                <a:solidFill>
+                  <a:srgbClr val="1F1F24"/>
+                </a:solidFill>
+                <a:latin typeface="Open Sans"/>
+              </a:rPr>
+              <a:t>2.55×</a:t>
+            </a:r>
+            <a:r>
+              <a:rPr sz="1100" b="0" i="0">
+                <a:solidFill>
+                  <a:srgbClr val="1F1F24"/>
+                </a:solidFill>
+                <a:latin typeface="Open Sans"/>
+              </a:rPr>
+              <a:t> projected, 2.07 seen</a:t>
+            </a:r>
+          </a:p>
+        </p:txBody>
+      </p:sp>
+      <p:sp>
+        <p:nvSpPr>
+          <p:cNvPr id="121" name="Cell4_R111C2"/>
           <p:cNvSpPr txBox="1"/>
           <p:nvPr/>
         </p:nvSpPr>
         <p:spPr>
           <a:xfrm>
-            <a:off x="1371600" y="18836640"/>
-            <a:ext cx="5806440" cy="1024128"/>
+            <a:off x="19366992" y="18255996"/>
+            <a:ext cx="978408" cy="178307"/>
           </a:xfrm>
           <a:prstGeom prst="rect">
             <a:avLst/>
@@ -13821,7 +13618,7 @@
           <a:noFill/>
         </p:spPr>
         <p:txBody>
-          <a:bodyPr wrap="square" lIns="27432" tIns="27432" rIns="27432" bIns="27432" anchor="b">
+          <a:bodyPr wrap="square" lIns="27432" tIns="27432" rIns="27432" bIns="27432" anchor="t">
             <a:noAutofit/>
           </a:bodyPr>
           <a:lstStyle/>
@@ -13835,7 +13632,49 @@
               </a:spcAft>
             </a:pPr>
             <a:r>
-              <a:rPr sz="3200" b="1" i="0">
+              <a:rPr sz="1100" b="1" i="0">
+                <a:solidFill>
+                  <a:srgbClr val="1F7A4C"/>
+                </a:solidFill>
+                <a:latin typeface="Open Sans"/>
+              </a:rPr>
+              <a:t>yes</a:t>
+            </a:r>
+          </a:p>
+        </p:txBody>
+      </p:sp>
+      <p:sp>
+        <p:nvSpPr>
+          <p:cNvPr id="122" name="Cell5_Heading"/>
+          <p:cNvSpPr txBox="1"/>
+          <p:nvPr/>
+        </p:nvSpPr>
+        <p:spPr>
+          <a:xfrm>
+            <a:off x="1371600" y="18973800"/>
+            <a:ext cx="5806440" cy="896112"/>
+          </a:xfrm>
+          <a:prstGeom prst="rect">
+            <a:avLst/>
+          </a:prstGeom>
+          <a:noFill/>
+        </p:spPr>
+        <p:txBody>
+          <a:bodyPr wrap="square" lIns="27432" tIns="27432" rIns="27432" bIns="27432" anchor="b">
+            <a:noAutofit/>
+          </a:bodyPr>
+          <a:lstStyle/>
+          <a:p>
+            <a:pPr algn="l">
+              <a:lnSpc>
+                <a:spcPct val="105000"/>
+              </a:lnSpc>
+              <a:spcAft>
+                <a:spcPts val="0"/>
+              </a:spcAft>
+            </a:pPr>
+            <a:r>
+              <a:rPr sz="2800" b="1" i="0">
                 <a:solidFill>
                   <a:srgbClr val="32006E"/>
                 </a:solidFill>
@@ -13848,13 +13687,13 @@
       </p:sp>
       <p:cxnSp>
         <p:nvCxnSpPr>
-          <p:cNvPr id="124" name="Connector 123"/>
+          <p:cNvPr id="123" name="Connector 122"/>
           <p:cNvCxnSpPr/>
           <p:nvPr/>
         </p:nvCxnSpPr>
         <p:spPr>
           <a:xfrm>
-            <a:off x="1371600" y="19897344"/>
+            <a:off x="1371600" y="19906488"/>
             <a:ext cx="5806440" cy="0"/>
           </a:xfrm>
           <a:prstGeom prst="line">
@@ -13883,14 +13722,14 @@
       </p:cxnSp>
       <p:sp>
         <p:nvSpPr>
-          <p:cNvPr id="125" name="Cell5_Caption"/>
+          <p:cNvPr id="124" name="Cell5_Caption"/>
           <p:cNvSpPr txBox="1"/>
           <p:nvPr/>
         </p:nvSpPr>
         <p:spPr>
           <a:xfrm>
-            <a:off x="1371600" y="22594824"/>
-            <a:ext cx="5806440" cy="1417320"/>
+            <a:off x="1371600" y="22539960"/>
+            <a:ext cx="5806440" cy="1463040"/>
           </a:xfrm>
           <a:prstGeom prst="rect">
             <a:avLst/>
@@ -13908,7 +13747,7 @@
                 <a:spcPct val="108000"/>
               </a:lnSpc>
               <a:spcAft>
-                <a:spcPts val="0"/>
+                <a:spcPts val="600"/>
               </a:spcAft>
             </a:pPr>
             <a:r>
@@ -13972,7 +13811,26 @@
                 </a:solidFill>
                 <a:latin typeface="Open Sans"/>
               </a:rPr>
-              <a:t>. So "still flat at step k" is evidence of nothing. </a:t>
+              <a:t>.</a:t>
+            </a:r>
+          </a:p>
+          <a:p>
+            <a:pPr algn="l">
+              <a:lnSpc>
+                <a:spcPct val="108000"/>
+              </a:lnSpc>
+              <a:spcAft>
+                <a:spcPts val="600"/>
+              </a:spcAft>
+            </a:pPr>
+            <a:r>
+              <a:rPr sz="1700" b="0" i="0">
+                <a:solidFill>
+                  <a:srgbClr val="1F1F24"/>
+                </a:solidFill>
+                <a:latin typeface="Open Sans"/>
+              </a:rPr>
+              <a:t>So "still flat at step k" is evidence of nothing. </a:t>
             </a:r>
             <a:r>
               <a:rPr sz="1700" b="1" i="0">
@@ -13988,14 +13846,14 @@
       </p:sp>
       <p:sp>
         <p:nvSpPr>
-          <p:cNvPr id="126" name="Cell6_Heading"/>
+          <p:cNvPr id="125" name="Cell6_Heading"/>
           <p:cNvSpPr txBox="1"/>
           <p:nvPr/>
         </p:nvSpPr>
         <p:spPr>
           <a:xfrm>
-            <a:off x="8001000" y="18836640"/>
-            <a:ext cx="5806440" cy="1024128"/>
+            <a:off x="8001000" y="18973800"/>
+            <a:ext cx="5806440" cy="896112"/>
           </a:xfrm>
           <a:prstGeom prst="rect">
             <a:avLst/>
@@ -14017,7 +13875,7 @@
               </a:spcAft>
             </a:pPr>
             <a:r>
-              <a:rPr sz="3200" b="1" i="0">
+              <a:rPr sz="2800" b="1" i="0">
                 <a:solidFill>
                   <a:srgbClr val="32006E"/>
                 </a:solidFill>
@@ -14030,13 +13888,13 @@
       </p:sp>
       <p:cxnSp>
         <p:nvCxnSpPr>
-          <p:cNvPr id="127" name="Connector 126"/>
+          <p:cNvPr id="126" name="Connector 125"/>
           <p:cNvCxnSpPr/>
           <p:nvPr/>
         </p:nvCxnSpPr>
         <p:spPr>
           <a:xfrm>
-            <a:off x="8001000" y="19897344"/>
+            <a:off x="8001000" y="19906488"/>
             <a:ext cx="5806440" cy="0"/>
           </a:xfrm>
           <a:prstGeom prst="line">
@@ -14065,14 +13923,14 @@
       </p:cxnSp>
       <p:sp>
         <p:nvSpPr>
-          <p:cNvPr id="128" name="Cell6_Caption"/>
+          <p:cNvPr id="127" name="Cell6_Caption"/>
           <p:cNvSpPr txBox="1"/>
           <p:nvPr/>
         </p:nvSpPr>
         <p:spPr>
           <a:xfrm>
-            <a:off x="8001000" y="22594824"/>
-            <a:ext cx="5806440" cy="1417320"/>
+            <a:off x="8001000" y="22539960"/>
+            <a:ext cx="5806440" cy="1463040"/>
           </a:xfrm>
           <a:prstGeom prst="rect">
             <a:avLst/>
@@ -14090,7 +13948,7 @@
                 <a:spcPct val="108000"/>
               </a:lnSpc>
               <a:spcAft>
-                <a:spcPts val="0"/>
+                <a:spcPts val="600"/>
               </a:spcAft>
             </a:pPr>
             <a:r>
@@ -14143,14 +14001,14 @@
       </p:sp>
       <p:sp>
         <p:nvSpPr>
-          <p:cNvPr id="129" name="Cell7_Heading"/>
+          <p:cNvPr id="128" name="Cell7_Heading"/>
           <p:cNvSpPr txBox="1"/>
           <p:nvPr/>
         </p:nvSpPr>
         <p:spPr>
           <a:xfrm>
-            <a:off x="14749272" y="18836640"/>
-            <a:ext cx="5806440" cy="1024128"/>
+            <a:off x="14749272" y="18973800"/>
+            <a:ext cx="5806440" cy="896112"/>
           </a:xfrm>
           <a:prstGeom prst="rect">
             <a:avLst/>
@@ -14172,7 +14030,7 @@
               </a:spcAft>
             </a:pPr>
             <a:r>
-              <a:rPr sz="3200" b="1" i="0">
+              <a:rPr sz="2800" b="1" i="0">
                 <a:solidFill>
                   <a:srgbClr val="32006E"/>
                 </a:solidFill>
@@ -14185,13 +14043,13 @@
       </p:sp>
       <p:cxnSp>
         <p:nvCxnSpPr>
-          <p:cNvPr id="130" name="Connector 129"/>
+          <p:cNvPr id="129" name="Connector 128"/>
           <p:cNvCxnSpPr/>
           <p:nvPr/>
         </p:nvCxnSpPr>
         <p:spPr>
           <a:xfrm>
-            <a:off x="14749272" y="19897344"/>
+            <a:off x="14749272" y="19906488"/>
             <a:ext cx="5806439" cy="0"/>
           </a:xfrm>
           <a:prstGeom prst="line">
@@ -14220,14 +14078,14 @@
       </p:cxnSp>
       <p:sp>
         <p:nvSpPr>
-          <p:cNvPr id="131" name="Cell7_Caption"/>
+          <p:cNvPr id="130" name="Cell7_Caption"/>
           <p:cNvSpPr txBox="1"/>
           <p:nvPr/>
         </p:nvSpPr>
         <p:spPr>
           <a:xfrm>
-            <a:off x="14749272" y="22594824"/>
-            <a:ext cx="5806440" cy="1417320"/>
+            <a:off x="14749272" y="22539960"/>
+            <a:ext cx="5806440" cy="1463040"/>
           </a:xfrm>
           <a:prstGeom prst="rect">
             <a:avLst/>
@@ -14245,7 +14103,7 @@
                 <a:spcPct val="108000"/>
               </a:lnSpc>
               <a:spcAft>
-                <a:spcPts val="0"/>
+                <a:spcPts val="600"/>
               </a:spcAft>
             </a:pPr>
             <a:r>
@@ -14316,14 +14174,14 @@
       </p:sp>
       <p:sp>
         <p:nvSpPr>
-          <p:cNvPr id="132" name="Cell9_Heading"/>
+          <p:cNvPr id="131" name="Cell9_Heading"/>
           <p:cNvSpPr txBox="1"/>
           <p:nvPr/>
         </p:nvSpPr>
         <p:spPr>
           <a:xfrm>
-            <a:off x="1371600" y="24323040"/>
-            <a:ext cx="5806440" cy="1024128"/>
+            <a:off x="1371600" y="24268176"/>
+            <a:ext cx="5806440" cy="896112"/>
           </a:xfrm>
           <a:prstGeom prst="rect">
             <a:avLst/>
@@ -14345,26 +14203,26 @@
               </a:spcAft>
             </a:pPr>
             <a:r>
-              <a:rPr sz="3200" b="1" i="0">
+              <a:rPr sz="2800" b="1" i="0">
                 <a:solidFill>
                   <a:srgbClr val="32006E"/>
                 </a:solidFill>
                 <a:latin typeface="Encode Sans Normal"/>
               </a:rPr>
-              <a:t>An identity is everything that changes the answer</a:t>
+              <a:t>A hundred runs is a filing problem first</a:t>
             </a:r>
           </a:p>
         </p:txBody>
       </p:sp>
       <p:cxnSp>
         <p:nvCxnSpPr>
-          <p:cNvPr id="133" name="Connector 132"/>
+          <p:cNvPr id="132" name="Connector 131"/>
           <p:cNvCxnSpPr/>
           <p:nvPr/>
         </p:nvCxnSpPr>
         <p:spPr>
           <a:xfrm>
-            <a:off x="1371600" y="25383744"/>
+            <a:off x="1371600" y="25200864"/>
             <a:ext cx="5806440" cy="0"/>
           </a:xfrm>
           <a:prstGeom prst="line">
@@ -14393,14 +14251,14 @@
       </p:cxnSp>
       <p:sp>
         <p:nvSpPr>
-          <p:cNvPr id="134" name="Cell9_Body"/>
+          <p:cNvPr id="133" name="Cell9_Body"/>
           <p:cNvSpPr txBox="1"/>
           <p:nvPr/>
         </p:nvSpPr>
         <p:spPr>
           <a:xfrm>
-            <a:off x="1371600" y="25511760"/>
-            <a:ext cx="5806440" cy="2002536"/>
+            <a:off x="1371600" y="25328880"/>
+            <a:ext cx="5806440" cy="2377440"/>
           </a:xfrm>
           <a:prstGeom prst="rect">
             <a:avLst/>
@@ -14418,7 +14276,7 @@
                 <a:spcPct val="108000"/>
               </a:lnSpc>
               <a:spcAft>
-                <a:spcPts val="0"/>
+                <a:spcPts val="600"/>
               </a:spcAft>
             </a:pPr>
             <a:r>
@@ -14428,7 +14286,7 @@
                 </a:solidFill>
                 <a:latin typeface="Open Sans"/>
               </a:rPr>
-              <a:t>Two runs silently overwrote each other — same filename, different vocabularies, and neither record said so. A filename is an identity, so the vocabulary carries a </a:t>
+              <a:t>A study is declared as a </a:t>
             </a:r>
             <a:r>
               <a:rPr sz="1700" b="1" i="0">
@@ -14437,7 +14295,7 @@
                 </a:solidFill>
                 <a:latin typeface="Open Sans"/>
               </a:rPr>
-              <a:t>hash</a:t>
+              <a:t>grid</a:t>
             </a:r>
             <a:r>
               <a:rPr sz="1700" b="0" i="0">
@@ -14446,7 +14304,7 @@
                 </a:solidFill>
                 <a:latin typeface="Open Sans"/>
               </a:rPr>
-              <a:t> rather than a label: 15abd33de5af. The hash also caught two people who prepared </a:t>
+              <a:t>, languages × rates × seeds, never typed run by run; the queue orders it </a:t>
             </a:r>
             <a:r>
               <a:rPr sz="1700" b="1" i="0">
@@ -14455,7 +14313,7 @@
                 </a:solidFill>
                 <a:latin typeface="Open Sans"/>
               </a:rPr>
-              <a:t>"the same" corpus</a:t>
+              <a:t>longest-budget-first</a:t>
             </a:r>
             <a:r>
               <a:rPr sz="1700" b="0" i="0">
@@ -14464,7 +14322,26 @@
                 </a:solidFill>
                 <a:latin typeface="Open Sans"/>
               </a:rPr>
-              <a:t> and built different vocabularies. </a:t>
+              <a:t>.</a:t>
+            </a:r>
+          </a:p>
+          <a:p>
+            <a:pPr algn="l">
+              <a:lnSpc>
+                <a:spcPct val="108000"/>
+              </a:lnSpc>
+              <a:spcAft>
+                <a:spcPts val="600"/>
+              </a:spcAft>
+            </a:pPr>
+            <a:r>
+              <a:rPr sz="1700" b="0" i="0">
+                <a:solidFill>
+                  <a:srgbClr val="1F1F24"/>
+                </a:solidFill>
+                <a:latin typeface="Open Sans"/>
+              </a:rPr>
+              <a:t>Every run writes a record naming </a:t>
             </a:r>
             <a:r>
               <a:rPr sz="1700" b="1" i="0">
@@ -14473,21 +14350,76 @@
                 </a:solidFill>
                 <a:latin typeface="Open Sans"/>
               </a:rPr>
-              <a:t>197 pretraining and 892 fine-tuning runs later, no collision.</a:t>
-            </a:r>
-          </a:p>
-        </p:txBody>
-      </p:sp>
-      <p:sp>
-        <p:nvSpPr>
-          <p:cNvPr id="135" name="Cell10_Heading"/>
+              <a:t>everything that changes the answer</a:t>
+            </a:r>
+            <a:r>
+              <a:rPr sz="1700" b="0" i="0">
+                <a:solidFill>
+                  <a:srgbClr val="1F1F24"/>
+                </a:solidFill>
+                <a:latin typeface="Open Sans"/>
+              </a:rPr>
+              <a:t>: data fingerprint, vocabulary, settings.</a:t>
+            </a:r>
+          </a:p>
+          <a:p>
+            <a:pPr algn="l">
+              <a:lnSpc>
+                <a:spcPct val="108000"/>
+              </a:lnSpc>
+              <a:spcAft>
+                <a:spcPts val="600"/>
+              </a:spcAft>
+            </a:pPr>
+            <a:r>
+              <a:rPr sz="1700" b="0" i="0">
+                <a:solidFill>
+                  <a:srgbClr val="1F1F24"/>
+                </a:solidFill>
+                <a:latin typeface="Open Sans"/>
+              </a:rPr>
+              <a:t>"What have we tried?" is a </a:t>
+            </a:r>
+            <a:r>
+              <a:rPr sz="1700" b="1" i="0">
+                <a:solidFill>
+                  <a:srgbClr val="1F1F24"/>
+                </a:solidFill>
+                <a:latin typeface="Open Sans"/>
+              </a:rPr>
+              <a:t>query</a:t>
+            </a:r>
+            <a:r>
+              <a:rPr sz="1700" b="0" i="0">
+                <a:solidFill>
+                  <a:srgbClr val="1F1F24"/>
+                </a:solidFill>
+                <a:latin typeface="Open Sans"/>
+              </a:rPr>
+              <a:t>: </a:t>
+            </a:r>
+            <a:r>
+              <a:rPr sz="1700" b="1" i="0">
+                <a:solidFill>
+                  <a:srgbClr val="1F1F24"/>
+                </a:solidFill>
+                <a:latin typeface="Open Sans"/>
+              </a:rPr>
+              <a:t>1,089 runs later, no collisions, no archaeology.</a:t>
+            </a:r>
+          </a:p>
+        </p:txBody>
+      </p:sp>
+      <p:sp>
+        <p:nvSpPr>
+          <p:cNvPr id="134" name="Cell10_Heading"/>
           <p:cNvSpPr txBox="1"/>
           <p:nvPr/>
         </p:nvSpPr>
         <p:spPr>
           <a:xfrm>
-            <a:off x="8001000" y="24323040"/>
-            <a:ext cx="5806440" cy="1024128"/>
+            <a:off x="8001000" y="24268176"/>
+            <a:ext cx="5806440" cy="896112"/>
           </a:xfrm>
           <a:prstGeom prst="rect">
             <a:avLst/>
@@ -14509,7 +14441,7 @@
               </a:spcAft>
             </a:pPr>
             <a:r>
-              <a:rPr sz="3200" b="1" i="0">
+              <a:rPr sz="2800" b="1" i="0">
                 <a:solidFill>
                   <a:srgbClr val="32006E"/>
                 </a:solidFill>
@@ -14522,13 +14454,13 @@
       </p:sp>
       <p:cxnSp>
         <p:nvCxnSpPr>
-          <p:cNvPr id="136" name="Connector 135"/>
+          <p:cNvPr id="135" name="Connector 134"/>
           <p:cNvCxnSpPr/>
           <p:nvPr/>
         </p:nvCxnSpPr>
         <p:spPr>
           <a:xfrm>
-            <a:off x="8001000" y="25383744"/>
+            <a:off x="8001000" y="25200864"/>
             <a:ext cx="5806440" cy="0"/>
           </a:xfrm>
           <a:prstGeom prst="line">
@@ -14557,14 +14489,14 @@
       </p:cxnSp>
       <p:sp>
         <p:nvSpPr>
-          <p:cNvPr id="137" name="Cell10_Body"/>
+          <p:cNvPr id="136" name="Cell10_Body"/>
           <p:cNvSpPr txBox="1"/>
           <p:nvPr/>
         </p:nvSpPr>
         <p:spPr>
           <a:xfrm>
-            <a:off x="8001000" y="25511760"/>
-            <a:ext cx="5806440" cy="2002536"/>
+            <a:off x="8001000" y="25328880"/>
+            <a:ext cx="5806440" cy="2377440"/>
           </a:xfrm>
           <a:prstGeom prst="rect">
             <a:avLst/>
@@ -14582,7 +14514,7 @@
                 <a:spcPct val="108000"/>
               </a:lnSpc>
               <a:spcAft>
-                <a:spcPts val="0"/>
+                <a:spcPts val="600"/>
               </a:spcAft>
             </a:pPr>
             <a:r>
@@ -14592,7 +14524,26 @@
                 </a:solidFill>
                 <a:latin typeface="Open Sans"/>
               </a:rPr>
-              <a:t>Run the same recipe twice and it lands in two different places. That is the seed, not the change you made. So we measured </a:t>
+              <a:t>Run the same recipe twice and it lands in two different places. That is the seed, not the change you made.</a:t>
+            </a:r>
+          </a:p>
+          <a:p>
+            <a:pPr algn="l">
+              <a:lnSpc>
+                <a:spcPct val="108000"/>
+              </a:lnSpc>
+              <a:spcAft>
+                <a:spcPts val="600"/>
+              </a:spcAft>
+            </a:pPr>
+            <a:r>
+              <a:rPr sz="1700" b="0" i="0">
+                <a:solidFill>
+                  <a:srgbClr val="1F1F24"/>
+                </a:solidFill>
+                <a:latin typeface="Open Sans"/>
+              </a:rPr>
+              <a:t>So we measured </a:t>
             </a:r>
             <a:r>
               <a:rPr sz="1700" b="1" i="0">
@@ -14628,7 +14579,26 @@
                 </a:solidFill>
                 <a:latin typeface="Open Sans"/>
               </a:rPr>
-              <a:t> — at three runs a side, no test can call anything significant. The spread is a property of </a:t>
+              <a:t>. At three runs a side, no test can call anything significant.</a:t>
+            </a:r>
+          </a:p>
+          <a:p>
+            <a:pPr algn="l">
+              <a:lnSpc>
+                <a:spcPct val="108000"/>
+              </a:lnSpc>
+              <a:spcAft>
+                <a:spcPts val="600"/>
+              </a:spcAft>
+            </a:pPr>
+            <a:r>
+              <a:rPr sz="1700" b="0" i="0">
+                <a:solidFill>
+                  <a:srgbClr val="1F1F24"/>
+                </a:solidFill>
+                <a:latin typeface="Open Sans"/>
+              </a:rPr>
+              <a:t>The spread is a property of </a:t>
             </a:r>
             <a:r>
               <a:rPr sz="1700" b="1" i="0">
@@ -14646,7 +14616,7 @@
                 </a:solidFill>
                 <a:latin typeface="Open Sans"/>
               </a:rPr>
-              <a:t> — re-measured, never a constant we reused. </a:t>
+              <a:t>, never a constant we reused. </a:t>
             </a:r>
             <a:r>
               <a:rPr sz="1700" b="1" i="0">
@@ -14662,14 +14632,14 @@
       </p:sp>
       <p:sp>
         <p:nvSpPr>
-          <p:cNvPr id="138" name="Cellstrip1_Heading"/>
+          <p:cNvPr id="137" name="Cellstrip1_Heading"/>
           <p:cNvSpPr txBox="1"/>
           <p:nvPr/>
         </p:nvSpPr>
         <p:spPr>
           <a:xfrm>
-            <a:off x="14749272" y="24323040"/>
-            <a:ext cx="5806440" cy="1024128"/>
+            <a:off x="14749272" y="24268176"/>
+            <a:ext cx="5806440" cy="896112"/>
           </a:xfrm>
           <a:prstGeom prst="rect">
             <a:avLst/>
@@ -14691,26 +14661,26 @@
               </a:spcAft>
             </a:pPr>
             <a:r>
-              <a:rPr sz="3200" b="1" i="0">
+              <a:rPr sz="2800" b="1" i="0">
                 <a:solidFill>
                   <a:srgbClr val="32006E"/>
                 </a:solidFill>
                 <a:latin typeface="Encode Sans Normal"/>
               </a:rPr>
-              <a:t>What we do not claim, and what we would do next</a:t>
+              <a:t>Ethics: what we do not claim, and what is next</a:t>
             </a:r>
           </a:p>
         </p:txBody>
       </p:sp>
       <p:cxnSp>
         <p:nvCxnSpPr>
-          <p:cNvPr id="139" name="Connector 138"/>
+          <p:cNvPr id="138" name="Connector 137"/>
           <p:cNvCxnSpPr/>
           <p:nvPr/>
         </p:nvCxnSpPr>
         <p:spPr>
           <a:xfrm>
-            <a:off x="14749272" y="25383744"/>
+            <a:off x="14749272" y="25200864"/>
             <a:ext cx="5806439" cy="0"/>
           </a:xfrm>
           <a:prstGeom prst="line">
@@ -14739,14 +14709,14 @@
       </p:cxnSp>
       <p:sp>
         <p:nvSpPr>
-          <p:cNvPr id="140" name="Cellstrip1_Body"/>
+          <p:cNvPr id="139" name="Cellstrip1_Body"/>
           <p:cNvSpPr txBox="1"/>
           <p:nvPr/>
         </p:nvSpPr>
         <p:spPr>
           <a:xfrm>
-            <a:off x="14749272" y="25511760"/>
-            <a:ext cx="5806440" cy="2002536"/>
+            <a:off x="14749272" y="25328880"/>
+            <a:ext cx="5806440" cy="2377440"/>
           </a:xfrm>
           <a:prstGeom prst="rect">
             <a:avLst/>
@@ -14764,7 +14734,7 @@
                 <a:spcPct val="108000"/>
               </a:lnSpc>
               <a:spcAft>
-                <a:spcPts val="0"/>
+                <a:spcPts val="600"/>
               </a:spcAft>
             </a:pPr>
             <a:r>
@@ -14783,7 +14753,26 @@
                 </a:solidFill>
                 <a:latin typeface="Open Sans"/>
               </a:rPr>
-              <a:t> — every judgement here is a benchmark number. The corpus is scraped web text nobody consented to. The audit gate prints </a:t>
+              <a:t> — every judgement here is a benchmark number. And the corpus is scraped web text nobody consented to.</a:t>
+            </a:r>
+          </a:p>
+          <a:p>
+            <a:pPr algn="l">
+              <a:lnSpc>
+                <a:spcPct val="108000"/>
+              </a:lnSpc>
+              <a:spcAft>
+                <a:spcPts val="600"/>
+              </a:spcAft>
+            </a:pPr>
+            <a:r>
+              <a:rPr sz="1700" b="0" i="0">
+                <a:solidFill>
+                  <a:srgbClr val="1F1F24"/>
+                </a:solidFill>
+                <a:latin typeface="Open Sans"/>
+              </a:rPr>
+              <a:t>The factory is itself an ethics tool: </a:t>
             </a:r>
             <a:r>
               <a:rPr sz="1700" b="1" i="0">
@@ -14792,6 +14781,43 @@
                 </a:solidFill>
                 <a:latin typeface="Open Sans"/>
               </a:rPr>
+              <a:t>sweeping seeds avoids one lucky draw</a:t>
+            </a:r>
+            <a:r>
+              <a:rPr sz="1700" b="0" i="0">
+                <a:solidFill>
+                  <a:srgbClr val="1F1F24"/>
+                </a:solidFill>
+                <a:latin typeface="Open Sans"/>
+              </a:rPr>
+              <a:t>, each language at its own best.</a:t>
+            </a:r>
+          </a:p>
+          <a:p>
+            <a:pPr algn="l">
+              <a:lnSpc>
+                <a:spcPct val="108000"/>
+              </a:lnSpc>
+              <a:spcAft>
+                <a:spcPts val="600"/>
+              </a:spcAft>
+            </a:pPr>
+            <a:r>
+              <a:rPr sz="1700" b="0" i="0">
+                <a:solidFill>
+                  <a:srgbClr val="1F1F24"/>
+                </a:solidFill>
+                <a:latin typeface="Open Sans"/>
+              </a:rPr>
+              <a:t>Our gate prints </a:t>
+            </a:r>
+            <a:r>
+              <a:rPr sz="1700" b="1" i="0">
+                <a:solidFill>
+                  <a:srgbClr val="1F1F24"/>
+                </a:solidFill>
+                <a:latin typeface="Open Sans"/>
+              </a:rPr>
               <a:t>9 claims: 6 supported, 2 not, 1 underpowered</a:t>
             </a:r>
             <a:r>
@@ -14801,21 +14827,21 @@
                 </a:solidFill>
                 <a:latin typeface="Open Sans"/>
               </a:rPr>
-              <a:t>. Next: a wall meter, a corpus audit, the evaluation we could not do.</a:t>
-            </a:r>
-          </a:p>
-        </p:txBody>
-      </p:sp>
-      <p:sp>
-        <p:nvSpPr>
-          <p:cNvPr id="141" name="Cell11_Heading"/>
+              <a:t>. Next: a corpus audit, the evaluation we could not do.</a:t>
+            </a:r>
+          </a:p>
+        </p:txBody>
+      </p:sp>
+      <p:sp>
+        <p:nvSpPr>
+          <p:cNvPr id="140" name="Cell11_Heading"/>
           <p:cNvSpPr txBox="1"/>
           <p:nvPr/>
         </p:nvSpPr>
         <p:spPr>
           <a:xfrm>
-            <a:off x="1371600" y="27706320"/>
-            <a:ext cx="12435840" cy="1024128"/>
+            <a:off x="1371600" y="27898344"/>
+            <a:ext cx="12435840" cy="896112"/>
           </a:xfrm>
           <a:prstGeom prst="rect">
             <a:avLst/>
@@ -14837,7 +14863,7 @@
               </a:spcAft>
             </a:pPr>
             <a:r>
-              <a:rPr sz="3200" b="1" i="0">
+              <a:rPr sz="2800" b="1" i="0">
                 <a:solidFill>
                   <a:srgbClr val="32006E"/>
                 </a:solidFill>
@@ -14850,13 +14876,13 @@
       </p:sp>
       <p:cxnSp>
         <p:nvCxnSpPr>
-          <p:cNvPr id="142" name="Connector 141"/>
+          <p:cNvPr id="141" name="Connector 140"/>
           <p:cNvCxnSpPr/>
           <p:nvPr/>
         </p:nvCxnSpPr>
         <p:spPr>
           <a:xfrm>
-            <a:off x="1371600" y="28767024"/>
+            <a:off x="1371600" y="28831032"/>
             <a:ext cx="12435840" cy="0"/>
           </a:xfrm>
           <a:prstGeom prst="line">
@@ -14885,14 +14911,14 @@
       </p:cxnSp>
       <p:sp>
         <p:nvSpPr>
-          <p:cNvPr id="143" name="Cell11_List"/>
+          <p:cNvPr id="142" name="Cell11_List"/>
           <p:cNvSpPr txBox="1"/>
           <p:nvPr/>
         </p:nvSpPr>
         <p:spPr>
           <a:xfrm>
-            <a:off x="1371600" y="28968192"/>
-            <a:ext cx="12435840" cy="2386583"/>
+            <a:off x="1371600" y="29032200"/>
+            <a:ext cx="12435840" cy="2743200"/>
           </a:xfrm>
           <a:prstGeom prst="rect">
             <a:avLst/>
@@ -14907,14 +14933,14 @@
           <a:p>
             <a:pPr algn="l">
               <a:lnSpc>
-                <a:spcPct val="108000"/>
+                <a:spcPct val="110000"/>
               </a:lnSpc>
               <a:spcAft>
-                <a:spcPts val="500"/>
+                <a:spcPts val="800"/>
               </a:spcAft>
             </a:pPr>
             <a:r>
-              <a:rPr sz="1300" b="1" i="0">
+              <a:rPr sz="1700" b="1" i="0">
                 <a:solidFill>
                   <a:srgbClr val="1F1F24"/>
                 </a:solidFill>
@@ -14923,7 +14949,7 @@
               <a:t>English is the ruler.</a:t>
             </a:r>
             <a:r>
-              <a:rPr sz="1300" b="0" i="0">
+              <a:rPr sz="1700" b="0" i="0">
                 <a:solidFill>
                   <a:srgbClr val="1F1F24"/>
                 </a:solidFill>
@@ -14932,7 +14958,7 @@
               <a:t> </a:t>
             </a:r>
             <a:r>
-              <a:rPr sz="1300" b="0" i="1">
+              <a:rPr sz="1700" b="0" i="1">
                 <a:solidFill>
                   <a:srgbClr val="1F1F24"/>
                 </a:solidFill>
@@ -14941,7 +14967,7 @@
               <a:t>Why:</a:t>
             </a:r>
             <a:r>
-              <a:rPr sz="1300" b="0" i="0">
+              <a:rPr sz="1700" b="0" i="0">
                 <a:solidFill>
                   <a:srgbClr val="1F1F24"/>
                 </a:solidFill>
@@ -14950,7 +14976,7 @@
               <a:t> the one language where data was never the constraint. </a:t>
             </a:r>
             <a:r>
-              <a:rPr sz="1300" b="0" i="1">
+              <a:rPr sz="1700" b="0" i="1">
                 <a:solidFill>
                   <a:srgbClr val="1F1F24"/>
                 </a:solidFill>
@@ -14959,7 +14985,7 @@
               <a:t>Learned:</a:t>
             </a:r>
             <a:r>
-              <a:rPr sz="1300" b="0" i="0">
+              <a:rPr sz="1700" b="0" i="0">
                 <a:solidFill>
                   <a:srgbClr val="1F1F24"/>
                 </a:solidFill>
@@ -14968,7 +14994,7 @@
               <a:t> </a:t>
             </a:r>
             <a:r>
-              <a:rPr sz="1300" b="1" i="0">
+              <a:rPr sz="1700" b="1" i="0">
                 <a:solidFill>
                   <a:srgbClr val="1F1F24"/>
                 </a:solidFill>
@@ -14977,26 +15003,26 @@
               <a:t>more data stops helping past 64M tokens</a:t>
             </a:r>
             <a:r>
-              <a:rPr sz="1300" b="0" i="0">
-                <a:solidFill>
-                  <a:srgbClr val="1F1F24"/>
-                </a:solidFill>
-                <a:latin typeface="Open Sans"/>
-              </a:rPr>
-              <a:t> — a fact Yoruba could never establish, having no more.</a:t>
+              <a:rPr sz="1700" b="0" i="0">
+                <a:solidFill>
+                  <a:srgbClr val="1F1F24"/>
+                </a:solidFill>
+                <a:latin typeface="Open Sans"/>
+              </a:rPr>
+              <a:t> — so Yoruba's 69M-token corpus is not the bottleneck it looks like.</a:t>
             </a:r>
           </a:p>
           <a:p>
             <a:pPr algn="l">
               <a:lnSpc>
-                <a:spcPct val="108000"/>
+                <a:spcPct val="110000"/>
               </a:lnSpc>
               <a:spcAft>
-                <a:spcPts val="500"/>
+                <a:spcPts val="800"/>
               </a:spcAft>
             </a:pPr>
             <a:r>
-              <a:rPr sz="1300" b="1" i="0">
+              <a:rPr sz="1700" b="1" i="0">
                 <a:solidFill>
                   <a:srgbClr val="1F1F24"/>
                 </a:solidFill>
@@ -15005,7 +15031,7 @@
               <a:t>French, Indonesian, Mandarin are the control.</a:t>
             </a:r>
             <a:r>
-              <a:rPr sz="1300" b="0" i="0">
+              <a:rPr sz="1700" b="0" i="0">
                 <a:solidFill>
                   <a:srgbClr val="1F1F24"/>
                 </a:solidFill>
@@ -15014,7 +15040,7 @@
               <a:t> </a:t>
             </a:r>
             <a:r>
-              <a:rPr sz="1300" b="0" i="1">
+              <a:rPr sz="1700" b="0" i="1">
                 <a:solidFill>
                   <a:srgbClr val="1F1F24"/>
                 </a:solidFill>
@@ -15023,16 +15049,16 @@
               <a:t>Why:</a:t>
             </a:r>
             <a:r>
-              <a:rPr sz="1300" b="0" i="0">
-                <a:solidFill>
-                  <a:srgbClr val="1F1F24"/>
-                </a:solidFill>
-                <a:latin typeface="Open Sans"/>
-              </a:rPr>
-              <a:t> XLM-R knows these three well, killing the objection that it is just "unfamiliar languages". </a:t>
-            </a:r>
-            <a:r>
-              <a:rPr sz="1300" b="0" i="1">
+              <a:rPr sz="1700" b="0" i="0">
+                <a:solidFill>
+                  <a:srgbClr val="1F1F24"/>
+                </a:solidFill>
+                <a:latin typeface="Open Sans"/>
+              </a:rPr>
+              <a:t> the borrowed vocabulary knows these three, so they test mere unfamiliarity. </a:t>
+            </a:r>
+            <a:r>
+              <a:rPr sz="1700" b="0" i="1">
                 <a:solidFill>
                   <a:srgbClr val="1F1F24"/>
                 </a:solidFill>
@@ -15041,16 +15067,16 @@
               <a:t>Learned:</a:t>
             </a:r>
             <a:r>
-              <a:rPr sz="1300" b="0" i="0">
-                <a:solidFill>
-                  <a:srgbClr val="1F1F24"/>
-                </a:solidFill>
-                <a:latin typeface="Open Sans"/>
-              </a:rPr>
-              <a:t> they cost </a:t>
-            </a:r>
-            <a:r>
-              <a:rPr sz="1300" b="1" i="0">
+              <a:rPr sz="1700" b="0" i="0">
+                <a:solidFill>
+                  <a:srgbClr val="1F1F24"/>
+                </a:solidFill>
+                <a:latin typeface="Open Sans"/>
+              </a:rPr>
+              <a:t> they pay </a:t>
+            </a:r>
+            <a:r>
+              <a:rPr sz="1700" b="1" i="0">
                 <a:solidFill>
                   <a:srgbClr val="1F1F24"/>
                 </a:solidFill>
@@ -15059,44 +15085,44 @@
               <a:t>1.04, 1.01, 0.95</a:t>
             </a:r>
             <a:r>
-              <a:rPr sz="1300" b="0" i="0">
-                <a:solidFill>
-                  <a:srgbClr val="1F1F24"/>
-                </a:solidFill>
-                <a:latin typeface="Open Sans"/>
-              </a:rPr>
-              <a:t> — the penalty tracks </a:t>
-            </a:r>
-            <a:r>
-              <a:rPr sz="1300" b="0" i="1">
-                <a:solidFill>
-                  <a:srgbClr val="1F1F24"/>
-                </a:solidFill>
-                <a:latin typeface="Open Sans"/>
-              </a:rPr>
-              <a:t>coverage</a:t>
-            </a:r>
-            <a:r>
-              <a:rPr sz="1300" b="0" i="0">
-                <a:solidFill>
-                  <a:srgbClr val="1F1F24"/>
-                </a:solidFill>
-                <a:latin typeface="Open Sans"/>
-              </a:rPr>
-              <a:t>, not "African".</a:t>
+              <a:rPr sz="1700" b="0" i="0">
+                <a:solidFill>
+                  <a:srgbClr val="1F1F24"/>
+                </a:solidFill>
+                <a:latin typeface="Open Sans"/>
+              </a:rPr>
+              <a:t> tokens where a language's own vocabulary pays one. </a:t>
+            </a:r>
+            <a:r>
+              <a:rPr sz="1700" b="1" i="0">
+                <a:solidFill>
+                  <a:srgbClr val="1F1F24"/>
+                </a:solidFill>
+                <a:latin typeface="Open Sans"/>
+              </a:rPr>
+              <a:t>Yoruba pays 1.76</a:t>
+            </a:r>
+            <a:r>
+              <a:rPr sz="1700" b="0" i="0">
+                <a:solidFill>
+                  <a:srgbClr val="1F1F24"/>
+                </a:solidFill>
+                <a:latin typeface="Open Sans"/>
+              </a:rPr>
+              <a:t> — second-highest of seventeen.</a:t>
             </a:r>
           </a:p>
           <a:p>
             <a:pPr algn="l">
               <a:lnSpc>
-                <a:spcPct val="108000"/>
+                <a:spcPct val="110000"/>
               </a:lnSpc>
               <a:spcAft>
-                <a:spcPts val="500"/>
+                <a:spcPts val="800"/>
               </a:spcAft>
             </a:pPr>
             <a:r>
-              <a:rPr sz="1300" b="1" i="0">
+              <a:rPr sz="1700" b="1" i="0">
                 <a:solidFill>
                   <a:srgbClr val="1F1F24"/>
                 </a:solidFill>
@@ -15105,7 +15131,7 @@
               <a:t>Twelve African languages are the gradient.</a:t>
             </a:r>
             <a:r>
-              <a:rPr sz="1300" b="0" i="0">
+              <a:rPr sz="1700" b="0" i="0">
                 <a:solidFill>
                   <a:srgbClr val="1F1F24"/>
                 </a:solidFill>
@@ -15114,7 +15140,7 @@
               <a:t> </a:t>
             </a:r>
             <a:r>
-              <a:rPr sz="1300" b="0" i="1">
+              <a:rPr sz="1700" b="0" i="1">
                 <a:solidFill>
                   <a:srgbClr val="1F1F24"/>
                 </a:solidFill>
@@ -15123,7 +15149,7 @@
               <a:t>Why:</a:t>
             </a:r>
             <a:r>
-              <a:rPr sz="1300" b="0" i="0">
+              <a:rPr sz="1700" b="0" i="0">
                 <a:solidFill>
                   <a:srgbClr val="1F1F24"/>
                 </a:solidFill>
@@ -15132,7 +15158,7 @@
               <a:t> one language is an anecdote; seventeen make a slope. </a:t>
             </a:r>
             <a:r>
-              <a:rPr sz="1300" b="0" i="1">
+              <a:rPr sz="1700" b="0" i="1">
                 <a:solidFill>
                   <a:srgbClr val="1F1F24"/>
                 </a:solidFill>
@@ -15141,16 +15167,34 @@
               <a:t>Learned:</a:t>
             </a:r>
             <a:r>
-              <a:rPr sz="1300" b="0" i="0">
-                <a:solidFill>
-                  <a:srgbClr val="1F1F24"/>
-                </a:solidFill>
-                <a:latin typeface="Open Sans"/>
-              </a:rPr>
-              <a:t> the split falls exactly along coverage — </a:t>
-            </a:r>
-            <a:r>
-              <a:rPr sz="1300" b="1" i="0">
+              <a:rPr sz="1700" b="0" i="0">
+                <a:solidFill>
+                  <a:srgbClr val="1F1F24"/>
+                </a:solidFill>
+                <a:latin typeface="Open Sans"/>
+              </a:rPr>
+              <a:t> the cost tracks </a:t>
+            </a:r>
+            <a:r>
+              <a:rPr sz="1700" b="1" i="0">
+                <a:solidFill>
+                  <a:srgbClr val="1F1F24"/>
+                </a:solidFill>
+                <a:latin typeface="Open Sans"/>
+              </a:rPr>
+              <a:t>vocabulary coverage</a:t>
+            </a:r>
+            <a:r>
+              <a:rPr sz="1700" b="0" i="0">
+                <a:solidFill>
+                  <a:srgbClr val="1F1F24"/>
+                </a:solidFill>
+                <a:latin typeface="Open Sans"/>
+              </a:rPr>
+              <a:t>, not geography — </a:t>
+            </a:r>
+            <a:r>
+              <a:rPr sz="1700" b="1" i="0">
                 <a:solidFill>
                   <a:srgbClr val="1F1F24"/>
                 </a:solidFill>
@@ -15159,135 +15203,44 @@
               <a:t>Wolof, uncovered yet cheap at 1.31</a:t>
             </a:r>
             <a:r>
-              <a:rPr sz="1300" b="0" i="0">
-                <a:solidFill>
-                  <a:srgbClr val="1F1F24"/>
-                </a:solidFill>
-                <a:latin typeface="Open Sans"/>
-              </a:rPr>
-              <a:t>, is the exception an anecdote hides.</a:t>
+              <a:rPr sz="1700" b="0" i="0">
+                <a:solidFill>
+                  <a:srgbClr val="1F1F24"/>
+                </a:solidFill>
+                <a:latin typeface="Open Sans"/>
+              </a:rPr>
+              <a:t>, proves it.</a:t>
             </a:r>
           </a:p>
           <a:p>
             <a:pPr algn="l">
               <a:lnSpc>
-                <a:spcPct val="108000"/>
+                <a:spcPct val="110000"/>
               </a:lnSpc>
               <a:spcAft>
-                <a:spcPts val="500"/>
+                <a:spcPts val="800"/>
               </a:spcAft>
             </a:pPr>
             <a:r>
-              <a:rPr sz="1300" b="1" i="0">
-                <a:solidFill>
-                  <a:srgbClr val="1F1F24"/>
-                </a:solidFill>
-                <a:latin typeface="Open Sans"/>
-              </a:rPr>
-              <a:t>Five languages got the whole sweep.</a:t>
-            </a:r>
-            <a:r>
-              <a:rPr sz="1300" b="0" i="0">
-                <a:solidFill>
-                  <a:srgbClr val="1F1F24"/>
-                </a:solidFill>
-                <a:latin typeface="Open Sans"/>
-              </a:rPr>
-              <a:t> </a:t>
-            </a:r>
-            <a:r>
-              <a:rPr sz="1300" b="0" i="1">
-                <a:solidFill>
-                  <a:srgbClr val="1F1F24"/>
-                </a:solidFill>
-                <a:latin typeface="Open Sans"/>
-              </a:rPr>
-              <a:t>Why:</a:t>
-            </a:r>
-            <a:r>
-              <a:rPr sz="1300" b="0" i="0">
-                <a:solidFill>
-                  <a:srgbClr val="1F1F24"/>
-                </a:solidFill>
-                <a:latin typeface="Open Sans"/>
-              </a:rPr>
-              <a:t> "adding a language is one function call" is only true if the settings transfer too. </a:t>
-            </a:r>
-            <a:r>
-              <a:rPr sz="1300" b="0" i="1">
-                <a:solidFill>
-                  <a:srgbClr val="1F1F24"/>
-                </a:solidFill>
-                <a:latin typeface="Open Sans"/>
-              </a:rPr>
-              <a:t>Learned:</a:t>
-            </a:r>
-            <a:r>
-              <a:rPr sz="1300" b="0" i="0">
-                <a:solidFill>
-                  <a:srgbClr val="1F1F24"/>
-                </a:solidFill>
-                <a:latin typeface="Open Sans"/>
-              </a:rPr>
-              <a:t> they do not — </a:t>
-            </a:r>
-            <a:r>
-              <a:rPr sz="1300" b="1" i="0">
-                <a:solidFill>
-                  <a:srgbClr val="1F1F24"/>
-                </a:solidFill>
-                <a:latin typeface="Open Sans"/>
-              </a:rPr>
-              <a:t>the rate four languages want destroys Igbo.</a:t>
-            </a:r>
-          </a:p>
-          <a:p>
-            <a:pPr algn="l">
-              <a:lnSpc>
-                <a:spcPct val="108000"/>
-              </a:lnSpc>
-              <a:spcAft>
-                <a:spcPts val="500"/>
-              </a:spcAft>
-            </a:pPr>
-            <a:r>
-              <a:rPr sz="1300" b="1" i="0">
-                <a:solidFill>
-                  <a:srgbClr val="1F1F24"/>
-                </a:solidFill>
-                <a:latin typeface="Open Sans"/>
-              </a:rPr>
-              <a:t>None of us speaks any of them.</a:t>
-            </a:r>
-            <a:r>
-              <a:rPr sz="1300" b="0" i="0">
-                <a:solidFill>
-                  <a:srgbClr val="1F1F24"/>
-                </a:solidFill>
-                <a:latin typeface="Open Sans"/>
-              </a:rPr>
-              <a:t> So the spread is the evidence, not any one score. The factory made the spread affordable: </a:t>
-            </a:r>
-            <a:r>
-              <a:rPr sz="1300" b="1" i="0">
-                <a:solidFill>
-                  <a:srgbClr val="1F1F24"/>
-                </a:solidFill>
-                <a:latin typeface="Open Sans"/>
-              </a:rPr>
-              <a:t>nine functions</a:t>
-            </a:r>
-            <a:r>
-              <a:rPr sz="1300" b="0" i="0">
-                <a:solidFill>
-                  <a:srgbClr val="1F1F24"/>
-                </a:solidFill>
-                <a:latin typeface="Open Sans"/>
-              </a:rPr>
-              <a:t> are its whole interface, so adding a language is one call — </a:t>
-            </a:r>
-            <a:r>
-              <a:rPr sz="1300" b="1" i="0">
+              <a:rPr sz="1700" b="1" i="0">
+                <a:solidFill>
+                  <a:srgbClr val="1F1F24"/>
+                </a:solidFill>
+                <a:latin typeface="Open Sans"/>
+              </a:rPr>
+              <a:t>Nine functions</a:t>
+            </a:r>
+            <a:r>
+              <a:rPr sz="1700" b="0" i="0">
+                <a:solidFill>
+                  <a:srgbClr val="1F1F24"/>
+                </a:solidFill>
+                <a:latin typeface="Open Sans"/>
+              </a:rPr>
+              <a:t>, one call per language — </a:t>
+            </a:r>
+            <a:r>
+              <a:rPr sz="1700" b="1" i="0">
                 <a:solidFill>
                   <a:srgbClr val="1F1F24"/>
                 </a:solidFill>
@@ -15296,7 +15249,7 @@
               <a:t>twelve pretrained in 48 minutes</a:t>
             </a:r>
             <a:r>
-              <a:rPr sz="1300" b="0" i="0">
+              <a:rPr sz="1700" b="0" i="0">
                 <a:solidFill>
                   <a:srgbClr val="1F1F24"/>
                 </a:solidFill>
@@ -15309,14 +15262,14 @@
       </p:sp>
       <p:sp>
         <p:nvSpPr>
-          <p:cNvPr id="144" name="Cellstrip2_Heading"/>
+          <p:cNvPr id="143" name="Cellstrip2_Heading"/>
           <p:cNvSpPr txBox="1"/>
           <p:nvPr/>
         </p:nvSpPr>
         <p:spPr>
           <a:xfrm>
-            <a:off x="14749272" y="27706320"/>
-            <a:ext cx="5806440" cy="566928"/>
+            <a:off x="14749272" y="27898344"/>
+            <a:ext cx="5806440" cy="896112"/>
           </a:xfrm>
           <a:prstGeom prst="rect">
             <a:avLst/>
@@ -15351,13 +15304,13 @@
       </p:sp>
       <p:cxnSp>
         <p:nvCxnSpPr>
-          <p:cNvPr id="145" name="Connector 144"/>
+          <p:cNvPr id="144" name="Connector 143"/>
           <p:cNvCxnSpPr/>
           <p:nvPr/>
         </p:nvCxnSpPr>
         <p:spPr>
           <a:xfrm>
-            <a:off x="14749272" y="28309824"/>
+            <a:off x="14749272" y="28831032"/>
             <a:ext cx="5806439" cy="0"/>
           </a:xfrm>
           <a:prstGeom prst="line">
@@ -15386,56 +15339,14 @@
       </p:cxnSp>
       <p:sp>
         <p:nvSpPr>
-          <p:cNvPr id="146" name="Cellstrip2_Grp"/>
+          <p:cNvPr id="145" name="Cellstrip2_Refs"/>
           <p:cNvSpPr txBox="1"/>
           <p:nvPr/>
         </p:nvSpPr>
         <p:spPr>
           <a:xfrm>
-            <a:off x="14749272" y="28465272"/>
-            <a:ext cx="5806440" cy="182880"/>
-          </a:xfrm>
-          <a:prstGeom prst="rect">
-            <a:avLst/>
-          </a:prstGeom>
-          <a:noFill/>
-        </p:spPr>
-        <p:txBody>
-          <a:bodyPr wrap="square" lIns="27432" tIns="27432" rIns="27432" bIns="27432" anchor="t">
-            <a:noAutofit/>
-          </a:bodyPr>
-          <a:lstStyle/>
-          <a:p>
-            <a:pPr algn="l">
-              <a:lnSpc>
-                <a:spcPct val="105000"/>
-              </a:lnSpc>
-              <a:spcAft>
-                <a:spcPts val="0"/>
-              </a:spcAft>
-            </a:pPr>
-            <a:r>
-              <a:rPr sz="900" b="1" i="0">
-                <a:solidFill>
-                  <a:srgbClr val="32006E"/>
-                </a:solidFill>
-                <a:latin typeface="Uni Sans Book"/>
-              </a:rPr>
-              <a:t>MODELS</a:t>
-            </a:r>
-          </a:p>
-        </p:txBody>
-      </p:sp>
-      <p:sp>
-        <p:nvSpPr>
-          <p:cNvPr id="147" name="Cellstrip2_Ref"/>
-          <p:cNvSpPr txBox="1"/>
-          <p:nvPr/>
-        </p:nvSpPr>
-        <p:spPr>
-          <a:xfrm>
-            <a:off x="14749272" y="28657296"/>
-            <a:ext cx="5806440" cy="310896"/>
+            <a:off x="14749272" y="28959048"/>
+            <a:ext cx="5806440" cy="2816351"/>
           </a:xfrm>
           <a:prstGeom prst="rect">
             <a:avLst/>
@@ -15448,497 +15359,130 @@
           </a:bodyPr>
           <a:lstStyle/>
           <a:p>
-            <a:pPr algn="l">
+            <a:pPr marL="182880" indent="-182880" algn="l">
               <a:lnSpc>
                 <a:spcPct val="108000"/>
               </a:lnSpc>
               <a:spcAft>
-                <a:spcPts val="0"/>
+                <a:spcPts val="600"/>
               </a:spcAft>
             </a:pPr>
             <a:r>
-              <a:rPr sz="1000" b="0" i="0">
-                <a:solidFill>
-                  <a:srgbClr val="1F1F24"/>
-                </a:solidFill>
-                <a:latin typeface="Open Sans"/>
-              </a:rPr>
-              <a:t>A. Conneau et al., "Unsupervised cross-lingual representation learning at scale" (XLM-R), ACL 2020</a:t>
-            </a:r>
-          </a:p>
-        </p:txBody>
-      </p:sp>
-      <p:sp>
-        <p:nvSpPr>
-          <p:cNvPr id="148" name="Cellstrip2_Ref"/>
-          <p:cNvSpPr txBox="1"/>
-          <p:nvPr/>
-        </p:nvSpPr>
-        <p:spPr>
-          <a:xfrm>
-            <a:off x="14749272" y="28995624"/>
-            <a:ext cx="5806440" cy="173736"/>
-          </a:xfrm>
-          <a:prstGeom prst="rect">
-            <a:avLst/>
-          </a:prstGeom>
-          <a:noFill/>
-        </p:spPr>
-        <p:txBody>
-          <a:bodyPr wrap="square" lIns="36576" tIns="36576" rIns="36576" bIns="36576" anchor="t">
-            <a:noAutofit/>
-          </a:bodyPr>
-          <a:lstStyle/>
-          <a:p>
-            <a:pPr algn="l">
+              <a:rPr sz="1300" b="0" i="0">
+                <a:solidFill>
+                  <a:srgbClr val="1F1F24"/>
+                </a:solidFill>
+                <a:latin typeface="Open Sans"/>
+              </a:rPr>
+              <a:t>A. Conneau et al., "Unsupervised cross-lingual representation learning at scale," ACL, 2020.</a:t>
+            </a:r>
+          </a:p>
+          <a:p>
+            <a:pPr marL="182880" indent="-182880" algn="l">
               <a:lnSpc>
                 <a:spcPct val="108000"/>
               </a:lnSpc>
               <a:spcAft>
-                <a:spcPts val="0"/>
+                <a:spcPts val="600"/>
               </a:spcAft>
             </a:pPr>
             <a:r>
-              <a:rPr sz="1000" b="0" i="0">
-                <a:solidFill>
-                  <a:srgbClr val="1F1F24"/>
-                </a:solidFill>
-                <a:latin typeface="Open Sans"/>
-              </a:rPr>
-              <a:t>M. Marone et al., "mmBERT," arXiv:2509.06888</a:t>
-            </a:r>
-          </a:p>
-        </p:txBody>
-      </p:sp>
-      <p:sp>
-        <p:nvSpPr>
-          <p:cNvPr id="149" name="Cellstrip2_Ref"/>
-          <p:cNvSpPr txBox="1"/>
-          <p:nvPr/>
-        </p:nvSpPr>
-        <p:spPr>
-          <a:xfrm>
-            <a:off x="14749272" y="29196792"/>
-            <a:ext cx="5806440" cy="173736"/>
-          </a:xfrm>
-          <a:prstGeom prst="rect">
-            <a:avLst/>
-          </a:prstGeom>
-          <a:noFill/>
-        </p:spPr>
-        <p:txBody>
-          <a:bodyPr wrap="square" lIns="36576" tIns="36576" rIns="36576" bIns="36576" anchor="t">
-            <a:noAutofit/>
-          </a:bodyPr>
-          <a:lstStyle/>
-          <a:p>
-            <a:pPr algn="l">
+              <a:rPr sz="1300" b="0" i="0">
+                <a:solidFill>
+                  <a:srgbClr val="1F1F24"/>
+                </a:solidFill>
+                <a:latin typeface="Open Sans"/>
+              </a:rPr>
+              <a:t>M. Marone et al., "mmBERT: A modern multilingual encoder," arXiv:2509.06888, 2025.</a:t>
+            </a:r>
+          </a:p>
+          <a:p>
+            <a:pPr marL="182880" indent="-182880" algn="l">
               <a:lnSpc>
                 <a:spcPct val="108000"/>
               </a:lnSpc>
               <a:spcAft>
-                <a:spcPts val="0"/>
+                <a:spcPts val="600"/>
               </a:spcAft>
             </a:pPr>
             <a:r>
-              <a:rPr sz="1000" b="0" i="0">
-                <a:solidFill>
-                  <a:srgbClr val="1F1F24"/>
-                </a:solidFill>
-                <a:latin typeface="Open Sans"/>
-              </a:rPr>
-              <a:t>Y. Liu et al., "RoBERTa," arXiv:1907.11692</a:t>
-            </a:r>
-          </a:p>
-        </p:txBody>
-      </p:sp>
-      <p:sp>
-        <p:nvSpPr>
-          <p:cNvPr id="150" name="Cellstrip2_Ref"/>
-          <p:cNvSpPr txBox="1"/>
-          <p:nvPr/>
-        </p:nvSpPr>
-        <p:spPr>
-          <a:xfrm>
-            <a:off x="14749272" y="29397960"/>
-            <a:ext cx="5806440" cy="173736"/>
-          </a:xfrm>
-          <a:prstGeom prst="rect">
-            <a:avLst/>
-          </a:prstGeom>
-          <a:noFill/>
-        </p:spPr>
-        <p:txBody>
-          <a:bodyPr wrap="square" lIns="36576" tIns="36576" rIns="36576" bIns="36576" anchor="t">
-            <a:noAutofit/>
-          </a:bodyPr>
-          <a:lstStyle/>
-          <a:p>
-            <a:pPr algn="l">
+              <a:rPr sz="1300" b="0" i="0">
+                <a:solidFill>
+                  <a:srgbClr val="1F1F24"/>
+                </a:solidFill>
+                <a:latin typeface="Open Sans"/>
+              </a:rPr>
+              <a:t>Y. Liu et al., "RoBERTa: A robustly optimized BERT pretraining approach," arXiv:1907.11692, 2019.</a:t>
+            </a:r>
+          </a:p>
+          <a:p>
+            <a:pPr marL="182880" indent="-182880" algn="l">
               <a:lnSpc>
                 <a:spcPct val="108000"/>
               </a:lnSpc>
               <a:spcAft>
-                <a:spcPts val="0"/>
+                <a:spcPts val="600"/>
               </a:spcAft>
             </a:pPr>
             <a:r>
-              <a:rPr sz="1000" b="0" i="0">
-                <a:solidFill>
-                  <a:srgbClr val="1F1F24"/>
-                </a:solidFill>
-                <a:latin typeface="Open Sans"/>
-              </a:rPr>
-              <a:t>J. Devlin et al., "BERT" — its 80/10/10 masking, NAACL 2019</a:t>
-            </a:r>
-          </a:p>
-        </p:txBody>
-      </p:sp>
-      <p:sp>
-        <p:nvSpPr>
-          <p:cNvPr id="151" name="Cellstrip2_Ref"/>
-          <p:cNvSpPr txBox="1"/>
-          <p:nvPr/>
-        </p:nvSpPr>
-        <p:spPr>
-          <a:xfrm>
-            <a:off x="14749272" y="29599127"/>
-            <a:ext cx="5806440" cy="310896"/>
-          </a:xfrm>
-          <a:prstGeom prst="rect">
-            <a:avLst/>
-          </a:prstGeom>
-          <a:noFill/>
-        </p:spPr>
-        <p:txBody>
-          <a:bodyPr wrap="square" lIns="36576" tIns="36576" rIns="36576" bIns="36576" anchor="t">
-            <a:noAutofit/>
-          </a:bodyPr>
-          <a:lstStyle/>
-          <a:p>
-            <a:pPr algn="l">
+              <a:rPr sz="1300" b="0" i="0">
+                <a:solidFill>
+                  <a:srgbClr val="1F1F24"/>
+                </a:solidFill>
+                <a:latin typeface="Open Sans"/>
+              </a:rPr>
+              <a:t>D. I. Adelani et al., "SIB-200," EACL, 2024.</a:t>
+            </a:r>
+          </a:p>
+          <a:p>
+            <a:pPr marL="182880" indent="-182880" algn="l">
               <a:lnSpc>
                 <a:spcPct val="108000"/>
               </a:lnSpc>
               <a:spcAft>
-                <a:spcPts val="0"/>
+                <a:spcPts val="600"/>
               </a:spcAft>
             </a:pPr>
             <a:r>
-              <a:rPr sz="1000" b="0" i="0">
-                <a:solidFill>
-                  <a:srgbClr val="1F1F24"/>
-                </a:solidFill>
-                <a:latin typeface="Open Sans"/>
-              </a:rPr>
-              <a:t>K. Ogueji et al., "Small data? No problem!" (AfriBERTa), EMNLP MRL 2021</a:t>
-            </a:r>
-          </a:p>
-        </p:txBody>
-      </p:sp>
-      <p:sp>
-        <p:nvSpPr>
-          <p:cNvPr id="152" name="Cellstrip2_Grp"/>
-          <p:cNvSpPr txBox="1"/>
-          <p:nvPr/>
-        </p:nvSpPr>
-        <p:spPr>
-          <a:xfrm>
-            <a:off x="14749272" y="29964887"/>
-            <a:ext cx="5806440" cy="182880"/>
-          </a:xfrm>
-          <a:prstGeom prst="rect">
-            <a:avLst/>
-          </a:prstGeom>
-          <a:noFill/>
-        </p:spPr>
-        <p:txBody>
-          <a:bodyPr wrap="square" lIns="27432" tIns="27432" rIns="27432" bIns="27432" anchor="t">
-            <a:noAutofit/>
-          </a:bodyPr>
-          <a:lstStyle/>
-          <a:p>
-            <a:pPr algn="l">
-              <a:lnSpc>
-                <a:spcPct val="105000"/>
-              </a:lnSpc>
-              <a:spcAft>
-                <a:spcPts val="0"/>
-              </a:spcAft>
-            </a:pPr>
-            <a:r>
-              <a:rPr sz="900" b="1" i="0">
-                <a:solidFill>
-                  <a:srgbClr val="32006E"/>
-                </a:solidFill>
-                <a:latin typeface="Uni Sans Book"/>
-              </a:rPr>
-              <a:t>DATA</a:t>
-            </a:r>
-          </a:p>
-        </p:txBody>
-      </p:sp>
-      <p:sp>
-        <p:nvSpPr>
-          <p:cNvPr id="153" name="Cellstrip2_Ref"/>
-          <p:cNvSpPr txBox="1"/>
-          <p:nvPr/>
-        </p:nvSpPr>
-        <p:spPr>
-          <a:xfrm>
-            <a:off x="14749272" y="30156911"/>
-            <a:ext cx="5806440" cy="173736"/>
-          </a:xfrm>
-          <a:prstGeom prst="rect">
-            <a:avLst/>
-          </a:prstGeom>
-          <a:noFill/>
-        </p:spPr>
-        <p:txBody>
-          <a:bodyPr wrap="square" lIns="36576" tIns="36576" rIns="36576" bIns="36576" anchor="t">
-            <a:noAutofit/>
-          </a:bodyPr>
-          <a:lstStyle/>
-          <a:p>
-            <a:pPr algn="l">
+              <a:rPr sz="1300" b="0" i="0">
+                <a:solidFill>
+                  <a:srgbClr val="1F1F24"/>
+                </a:solidFill>
+                <a:latin typeface="Open Sans"/>
+              </a:rPr>
+              <a:t>D. I. Adelani et al., "MasakhaNER 2.0," EMNLP, 2022.</a:t>
+            </a:r>
+          </a:p>
+          <a:p>
+            <a:pPr marL="182880" indent="-182880" algn="l">
               <a:lnSpc>
                 <a:spcPct val="108000"/>
               </a:lnSpc>
               <a:spcAft>
-                <a:spcPts val="0"/>
+                <a:spcPts val="600"/>
               </a:spcAft>
             </a:pPr>
             <a:r>
-              <a:rPr sz="1000" b="0" i="0">
-                <a:solidFill>
-                  <a:srgbClr val="1F1F24"/>
-                </a:solidFill>
-                <a:latin typeface="Open Sans"/>
-              </a:rPr>
-              <a:t>D. I. Adelani et al., "SIB-200," EACL 2024</a:t>
-            </a:r>
-          </a:p>
-        </p:txBody>
-      </p:sp>
-      <p:sp>
-        <p:nvSpPr>
-          <p:cNvPr id="154" name="Cellstrip2_Ref"/>
-          <p:cNvSpPr txBox="1"/>
-          <p:nvPr/>
-        </p:nvSpPr>
-        <p:spPr>
-          <a:xfrm>
-            <a:off x="14749272" y="30358079"/>
-            <a:ext cx="5806440" cy="173736"/>
-          </a:xfrm>
-          <a:prstGeom prst="rect">
-            <a:avLst/>
-          </a:prstGeom>
-          <a:noFill/>
-        </p:spPr>
-        <p:txBody>
-          <a:bodyPr wrap="square" lIns="36576" tIns="36576" rIns="36576" bIns="36576" anchor="t">
-            <a:noAutofit/>
-          </a:bodyPr>
-          <a:lstStyle/>
-          <a:p>
-            <a:pPr algn="l">
-              <a:lnSpc>
-                <a:spcPct val="108000"/>
-              </a:lnSpc>
-              <a:spcAft>
-                <a:spcPts val="0"/>
-              </a:spcAft>
-            </a:pPr>
-            <a:r>
-              <a:rPr sz="1000" b="0" i="0">
-                <a:solidFill>
-                  <a:srgbClr val="1F1F24"/>
-                </a:solidFill>
-                <a:latin typeface="Open Sans"/>
-              </a:rPr>
-              <a:t>D. I. Adelani et al., "MasakhaNER 2.0," EMNLP 2022</a:t>
-            </a:r>
-          </a:p>
-        </p:txBody>
-      </p:sp>
-      <p:sp>
-        <p:nvSpPr>
-          <p:cNvPr id="155" name="Cellstrip2_Ref"/>
-          <p:cNvSpPr txBox="1"/>
-          <p:nvPr/>
-        </p:nvSpPr>
-        <p:spPr>
-          <a:xfrm>
-            <a:off x="14749272" y="30559247"/>
-            <a:ext cx="5806440" cy="173736"/>
-          </a:xfrm>
-          <a:prstGeom prst="rect">
-            <a:avLst/>
-          </a:prstGeom>
-          <a:noFill/>
-        </p:spPr>
-        <p:txBody>
-          <a:bodyPr wrap="square" lIns="36576" tIns="36576" rIns="36576" bIns="36576" anchor="t">
-            <a:noAutofit/>
-          </a:bodyPr>
-          <a:lstStyle/>
-          <a:p>
-            <a:pPr algn="l">
-              <a:lnSpc>
-                <a:spcPct val="108000"/>
-              </a:lnSpc>
-              <a:spcAft>
-                <a:spcPts val="0"/>
-              </a:spcAft>
-            </a:pPr>
-            <a:r>
-              <a:rPr sz="1000" b="0" i="0">
-                <a:solidFill>
-                  <a:srgbClr val="1F1F24"/>
-                </a:solidFill>
-                <a:latin typeface="Open Sans"/>
-              </a:rPr>
-              <a:t>G. Penedo et al., "FineWeb2," arXiv:2506.20920</a:t>
-            </a:r>
-          </a:p>
-        </p:txBody>
-      </p:sp>
-      <p:sp>
-        <p:nvSpPr>
-          <p:cNvPr id="156" name="Cellstrip2_Grp"/>
-          <p:cNvSpPr txBox="1"/>
-          <p:nvPr/>
-        </p:nvSpPr>
-        <p:spPr>
-          <a:xfrm>
-            <a:off x="14749272" y="30787847"/>
-            <a:ext cx="5806440" cy="182880"/>
-          </a:xfrm>
-          <a:prstGeom prst="rect">
-            <a:avLst/>
-          </a:prstGeom>
-          <a:noFill/>
-        </p:spPr>
-        <p:txBody>
-          <a:bodyPr wrap="square" lIns="27432" tIns="27432" rIns="27432" bIns="27432" anchor="t">
-            <a:noAutofit/>
-          </a:bodyPr>
-          <a:lstStyle/>
-          <a:p>
-            <a:pPr algn="l">
-              <a:lnSpc>
-                <a:spcPct val="105000"/>
-              </a:lnSpc>
-              <a:spcAft>
-                <a:spcPts val="0"/>
-              </a:spcAft>
-            </a:pPr>
-            <a:r>
-              <a:rPr sz="900" b="1" i="0">
-                <a:solidFill>
-                  <a:srgbClr val="32006E"/>
-                </a:solidFill>
-                <a:latin typeface="Uni Sans Book"/>
-              </a:rPr>
-              <a:t>METHOD</a:t>
-            </a:r>
-          </a:p>
-        </p:txBody>
-      </p:sp>
-      <p:sp>
-        <p:nvSpPr>
-          <p:cNvPr id="157" name="Cellstrip2_Ref"/>
-          <p:cNvSpPr txBox="1"/>
-          <p:nvPr/>
-        </p:nvSpPr>
-        <p:spPr>
-          <a:xfrm>
-            <a:off x="14749272" y="30979871"/>
-            <a:ext cx="5806440" cy="173736"/>
-          </a:xfrm>
-          <a:prstGeom prst="rect">
-            <a:avLst/>
-          </a:prstGeom>
-          <a:noFill/>
-        </p:spPr>
-        <p:txBody>
-          <a:bodyPr wrap="square" lIns="36576" tIns="36576" rIns="36576" bIns="36576" anchor="t">
-            <a:noAutofit/>
-          </a:bodyPr>
-          <a:lstStyle/>
-          <a:p>
-            <a:pPr algn="l">
-              <a:lnSpc>
-                <a:spcPct val="108000"/>
-              </a:lnSpc>
-              <a:spcAft>
-                <a:spcPts val="0"/>
-              </a:spcAft>
-            </a:pPr>
-            <a:r>
-              <a:rPr sz="1000" b="0" i="0">
-                <a:solidFill>
-                  <a:srgbClr val="1F1F24"/>
-                </a:solidFill>
-                <a:latin typeface="Open Sans"/>
-              </a:rPr>
-              <a:t>L. N. Smith, one-cycle schedules, arXiv:1803.09820</a:t>
-            </a:r>
-          </a:p>
-        </p:txBody>
-      </p:sp>
-      <p:sp>
-        <p:nvSpPr>
-          <p:cNvPr id="158" name="Cellstrip2_Ref"/>
-          <p:cNvSpPr txBox="1"/>
-          <p:nvPr/>
-        </p:nvSpPr>
-        <p:spPr>
-          <a:xfrm>
-            <a:off x="14749272" y="31181039"/>
-            <a:ext cx="5806440" cy="310896"/>
-          </a:xfrm>
-          <a:prstGeom prst="rect">
-            <a:avLst/>
-          </a:prstGeom>
-          <a:noFill/>
-        </p:spPr>
-        <p:txBody>
-          <a:bodyPr wrap="square" lIns="36576" tIns="36576" rIns="36576" bIns="36576" anchor="t">
-            <a:noAutofit/>
-          </a:bodyPr>
-          <a:lstStyle/>
-          <a:p>
-            <a:pPr algn="l">
-              <a:lnSpc>
-                <a:spcPct val="108000"/>
-              </a:lnSpc>
-              <a:spcAft>
-                <a:spcPts val="0"/>
-              </a:spcAft>
-            </a:pPr>
-            <a:r>
-              <a:rPr sz="1000" b="0" i="0">
-                <a:solidFill>
-                  <a:srgbClr val="1F1F24"/>
-                </a:solidFill>
-                <a:latin typeface="Open Sans"/>
-              </a:rPr>
-              <a:t>J. Dodge et al., "Show your work," EMNLP 2019 — no result without the search budget that produced it</a:t>
+              <a:rPr sz="1300" b="0" i="0">
+                <a:solidFill>
+                  <a:srgbClr val="1F1F24"/>
+                </a:solidFill>
+                <a:latin typeface="Open Sans"/>
+              </a:rPr>
+              <a:t>G. Penedo et al., "FineWeb2: One pipeline to scale them all," arXiv:2506.20920, 2025.</a:t>
             </a:r>
           </a:p>
         </p:txBody>
       </p:sp>
       <p:cxnSp>
         <p:nvCxnSpPr>
-          <p:cNvPr id="159" name="Connector 158"/>
+          <p:cNvPr id="146" name="Connector 145"/>
           <p:cNvCxnSpPr/>
           <p:nvPr/>
         </p:nvCxnSpPr>
         <p:spPr>
           <a:xfrm>
-            <a:off x="1371600" y="31546800"/>
+            <a:off x="1371600" y="31857696"/>
             <a:ext cx="19202400" cy="0"/>
           </a:xfrm>
           <a:prstGeom prst="line">
@@ -15967,13 +15511,13 @@
       </p:cxnSp>
       <p:sp>
         <p:nvSpPr>
-          <p:cNvPr id="160" name="Footer_Sources"/>
+          <p:cNvPr id="147" name="Footer_Sources"/>
           <p:cNvSpPr txBox="1"/>
           <p:nvPr/>
         </p:nvSpPr>
         <p:spPr>
           <a:xfrm>
-            <a:off x="1371600" y="31656527"/>
+            <a:off x="1371600" y="31967424"/>
             <a:ext cx="16733520" cy="1188720"/>
           </a:xfrm>
           <a:prstGeom prst="rect">
@@ -16009,13 +15553,13 @@
       </p:sp>
       <p:sp>
         <p:nvSpPr>
-          <p:cNvPr id="161" name="Footer_Tag"/>
+          <p:cNvPr id="148" name="Footer_Tag"/>
           <p:cNvSpPr txBox="1"/>
           <p:nvPr/>
         </p:nvSpPr>
         <p:spPr>
           <a:xfrm>
-            <a:off x="18288000" y="31674816"/>
+            <a:off x="18288000" y="31985712"/>
             <a:ext cx="2286000" cy="274320"/>
           </a:xfrm>
           <a:prstGeom prst="rect">
@@ -16051,10 +15595,10 @@
       </p:sp>
       <p:pic>
         <p:nvPicPr>
-          <p:cNvPr id="163" name="Embedded_01_Cell1" descr="reports\figures\26-poster-hardware.svg">
+          <p:cNvPr id="150" name="Embedded_01_Cell1" descr="reports\figures\26-poster-hardware.svg">
             <a:extLst>
               <a:ext uri="{FF2B5EF4-FFF2-40B4-BE49-F238E27FC236}">
-                <a16:creationId xmlns:a16="http://schemas.microsoft.com/office/drawing/2014/main" id="{04CFA631-A4A7-7821-7841-E41274EC897C}"/>
+                <a16:creationId xmlns:a16="http://schemas.microsoft.com/office/drawing/2014/main" id="{247D4356-0F01-2702-EC92-45D6F374C105}"/>
               </a:ext>
             </a:extLst>
           </p:cNvPr>
@@ -16077,8 +15621,8 @@
         </p:blipFill>
         <p:spPr>
           <a:xfrm>
-            <a:off x="1567137" y="9235440"/>
-            <a:ext cx="5415366" cy="2423160"/>
+            <a:off x="919783" y="9015984"/>
+            <a:ext cx="6710074" cy="2825496"/>
           </a:xfrm>
           <a:prstGeom prst="rect">
             <a:avLst/>
@@ -16087,10 +15631,10 @@
       </p:pic>
       <p:pic>
         <p:nvPicPr>
-          <p:cNvPr id="165" name="Embedded_02_Cell5" descr="reports\figures\27-poster-cliffs.svg">
+          <p:cNvPr id="152" name="Embedded_02_Cell5" descr="reports\figures\27-poster-cliffs.svg">
             <a:extLst>
               <a:ext uri="{FF2B5EF4-FFF2-40B4-BE49-F238E27FC236}">
-                <a16:creationId xmlns:a16="http://schemas.microsoft.com/office/drawing/2014/main" id="{ED8576A6-39BE-04AA-C320-197DABCBCEEA}"/>
+                <a16:creationId xmlns:a16="http://schemas.microsoft.com/office/drawing/2014/main" id="{3875AB90-4DA9-B713-046B-A58A7BF163EB}"/>
               </a:ext>
             </a:extLst>
           </p:cNvPr>
@@ -16113,8 +15657,8 @@
         </p:blipFill>
         <p:spPr>
           <a:xfrm>
-            <a:off x="1371600" y="20025475"/>
-            <a:ext cx="5806440" cy="2422930"/>
+            <a:off x="1448020" y="20034504"/>
+            <a:ext cx="5653599" cy="2359152"/>
           </a:xfrm>
           <a:prstGeom prst="rect">
             <a:avLst/>
@@ -16123,10 +15667,10 @@
       </p:pic>
       <p:pic>
         <p:nvPicPr>
-          <p:cNvPr id="167" name="Embedded_03_Cell6" descr="reports\figures\25-poster-transfer.svg">
+          <p:cNvPr id="154" name="Embedded_03_Cell6" descr="reports\figures\25-poster-transfer.svg">
             <a:extLst>
               <a:ext uri="{FF2B5EF4-FFF2-40B4-BE49-F238E27FC236}">
-                <a16:creationId xmlns:a16="http://schemas.microsoft.com/office/drawing/2014/main" id="{7C8B600C-9ED7-79ED-E3BF-C05C5C823987}"/>
+                <a16:creationId xmlns:a16="http://schemas.microsoft.com/office/drawing/2014/main" id="{82163DF5-1B34-A871-6E86-2BDE299C6671}"/>
               </a:ext>
             </a:extLst>
           </p:cNvPr>
@@ -16149,8 +15693,8 @@
         </p:blipFill>
         <p:spPr>
           <a:xfrm>
-            <a:off x="8009527" y="20025361"/>
-            <a:ext cx="5789387" cy="2423160"/>
+            <a:off x="8085990" y="20034504"/>
+            <a:ext cx="5636460" cy="2359152"/>
           </a:xfrm>
           <a:prstGeom prst="rect">
             <a:avLst/>
@@ -16159,10 +15703,10 @@
       </p:pic>
       <p:pic>
         <p:nvPicPr>
-          <p:cNvPr id="169" name="Embedded_04_Cell7" descr="reports\figures\28-poster-dashboard.svg">
+          <p:cNvPr id="156" name="Embedded_04_Cell7" descr="reports\figures\28-poster-dashboard.svg">
             <a:extLst>
               <a:ext uri="{FF2B5EF4-FFF2-40B4-BE49-F238E27FC236}">
-                <a16:creationId xmlns:a16="http://schemas.microsoft.com/office/drawing/2014/main" id="{E1A261B2-ECD9-FAD5-6B6A-8190BCF8254B}"/>
+                <a16:creationId xmlns:a16="http://schemas.microsoft.com/office/drawing/2014/main" id="{22EC8672-5420-11BD-BFAF-A7CFD4FAF258}"/>
               </a:ext>
             </a:extLst>
           </p:cNvPr>
@@ -16185,8 +15729,8 @@
         </p:blipFill>
         <p:spPr>
           <a:xfrm>
-            <a:off x="14751238" y="20025361"/>
-            <a:ext cx="5802509" cy="2423160"/>
+            <a:off x="14827875" y="20034504"/>
+            <a:ext cx="5649235" cy="2359152"/>
           </a:xfrm>
           <a:prstGeom prst="rect">
             <a:avLst/>
